--- a/docs/presentation/SDACS_Public_Project_Overview_2026.pptx
+++ b/docs/presentation/SDACS_Public_Project_Overview_2026.pptx
@@ -2,22 +2,22 @@
 <file path=ppt/presentation.xml><?xml version="1.0" encoding="utf-8"?>
 <p:presentation xmlns:p="http://schemas.openxmlformats.org/presentationml/2006/main">
   <p:sldMasterIdLst>
-    <p:sldMasterId xmlns:r="http://schemas.openxmlformats.org/officeDocument/2006/relationships" id="2147483648" r:id="R4504b88c6dc142e6"/>
+    <p:sldMasterId xmlns:r="http://schemas.openxmlformats.org/officeDocument/2006/relationships" id="2147483648" r:id="R6691a061ee494174"/>
   </p:sldMasterIdLst>
   <p:notesMasterIdLst>
-    <p:notesMasterId xmlns:r="http://schemas.openxmlformats.org/officeDocument/2006/relationships" r:id="Rbba13aeaabda48f2"/>
+    <p:notesMasterId xmlns:r="http://schemas.openxmlformats.org/officeDocument/2006/relationships" r:id="R8a639a62b0a34d8e"/>
   </p:notesMasterIdLst>
   <p:sldIdLst>
-    <p:sldId xmlns:r="http://schemas.openxmlformats.org/officeDocument/2006/relationships" id="256" r:id="R7b65faf6064741cf"/>
-    <p:sldId xmlns:r="http://schemas.openxmlformats.org/officeDocument/2006/relationships" id="257" r:id="R1c7476f104eb4527"/>
-    <p:sldId xmlns:r="http://schemas.openxmlformats.org/officeDocument/2006/relationships" id="258" r:id="R76b3c86b0e864277"/>
-    <p:sldId xmlns:r="http://schemas.openxmlformats.org/officeDocument/2006/relationships" id="259" r:id="Re2c4b8a13de2412a"/>
-    <p:sldId xmlns:r="http://schemas.openxmlformats.org/officeDocument/2006/relationships" id="260" r:id="R589d2d19af3445f6"/>
-    <p:sldId xmlns:r="http://schemas.openxmlformats.org/officeDocument/2006/relationships" id="261" r:id="Raf01c6c731504865"/>
-    <p:sldId xmlns:r="http://schemas.openxmlformats.org/officeDocument/2006/relationships" id="262" r:id="Rc465cc5691444389"/>
-    <p:sldId xmlns:r="http://schemas.openxmlformats.org/officeDocument/2006/relationships" id="263" r:id="R16c871731c3b499d"/>
-    <p:sldId xmlns:r="http://schemas.openxmlformats.org/officeDocument/2006/relationships" id="264" r:id="R6e9082cdf8374e6e"/>
-    <p:sldId xmlns:r="http://schemas.openxmlformats.org/officeDocument/2006/relationships" id="265" r:id="R73dcebf7ec284c41"/>
+    <p:sldId xmlns:r="http://schemas.openxmlformats.org/officeDocument/2006/relationships" id="256" r:id="R01c3194b6f664f89"/>
+    <p:sldId xmlns:r="http://schemas.openxmlformats.org/officeDocument/2006/relationships" id="257" r:id="R002475d0155b48f8"/>
+    <p:sldId xmlns:r="http://schemas.openxmlformats.org/officeDocument/2006/relationships" id="258" r:id="Rfbb14faa1da94d88"/>
+    <p:sldId xmlns:r="http://schemas.openxmlformats.org/officeDocument/2006/relationships" id="259" r:id="Raecd4350a8144799"/>
+    <p:sldId xmlns:r="http://schemas.openxmlformats.org/officeDocument/2006/relationships" id="260" r:id="R201f76dcdc9b47f1"/>
+    <p:sldId xmlns:r="http://schemas.openxmlformats.org/officeDocument/2006/relationships" id="261" r:id="R75604628779b428c"/>
+    <p:sldId xmlns:r="http://schemas.openxmlformats.org/officeDocument/2006/relationships" id="262" r:id="R6c332b7cd2ec4246"/>
+    <p:sldId xmlns:r="http://schemas.openxmlformats.org/officeDocument/2006/relationships" id="263" r:id="Ra647244d3b5b4361"/>
+    <p:sldId xmlns:r="http://schemas.openxmlformats.org/officeDocument/2006/relationships" id="264" r:id="R04e8a450c9174865"/>
+    <p:sldId xmlns:r="http://schemas.openxmlformats.org/officeDocument/2006/relationships" id="265" r:id="Rc0f63d3eae484cec"/>
   </p:sldIdLst>
   <p:sldSz cx="12192000" cy="6858000"/>
   <p:notesSz cx="6858000" cy="9144000"/>
@@ -1158,7 +1158,7 @@
   </p:cSld>
   <p:clrMap bg1="lt1" tx1="dk1" bg2="lt2" tx2="dk2" accent1="accent1" accent2="accent2" accent3="accent3" accent4="accent4" accent5="accent5" accent6="accent6" hlink="hlink" folHlink="folHlink"/>
   <p:sldLayoutIdLst>
-    <p:sldLayoutId xmlns:r="http://schemas.openxmlformats.org/officeDocument/2006/relationships" id="2147483649" r:id="R48485b75145b42f2"/>
+    <p:sldLayoutId xmlns:r="http://schemas.openxmlformats.org/officeDocument/2006/relationships" id="2147483649" r:id="Rfdcc1b195ac84bd6"/>
   </p:sldLayoutIdLst>
   <p:txStyles>
     <p:titleStyle>
@@ -1656,7 +1656,7 @@
           <p:cNvPr id="1" name="">
             <a:extLst xmlns:a="http://schemas.openxmlformats.org/drawingml/2006/main">
               <a:ext uri="{FF2B5EF4-FFF2-40B4-BE49-F238E27FC236}">
-                <a16:creationId xmlns:a16="http://schemas.microsoft.com/office/drawing/2014/main" id="{FDB50ED4-4A9A-422A-A197-EA7F0EF586A2}"/>
+                <a16:creationId xmlns:a16="http://schemas.microsoft.com/office/drawing/2014/main" id="{CCCBE840-DC90-4187-8D56-17AED17E97E1}"/>
               </a:ext>
             </a:extLst>
           </p:cNvPr>
@@ -1689,19 +1689,19 @@
           <p:cNvPr id="2" name="">
             <a:extLst xmlns:a="http://schemas.openxmlformats.org/drawingml/2006/main">
               <a:ext uri="{FF2B5EF4-FFF2-40B4-BE49-F238E27FC236}">
-                <a16:creationId xmlns:a16="http://schemas.microsoft.com/office/drawing/2014/main" id="{13272F0F-CC30-4BD3-AAFE-2CD421CB05FC}"/>
-              </a:ext>
-            </a:extLst>
-          </p:cNvPr>
-          <p:cNvSpPr>
-            <a:spLocks xmlns:a="http://schemas.openxmlformats.org/drawingml/2006/main" noGrp="1"/>
-          </p:cNvSpPr>
-          <p:nvPr/>
-        </p:nvSpPr>
-        <p:spPr>
-          <a:xfrm xmlns:a="http://schemas.openxmlformats.org/drawingml/2006/main">
-            <a:off x="7810500" y="-571500"/>
-            <a:ext cx="4953000" cy="4953000"/>
+                <a16:creationId xmlns:a16="http://schemas.microsoft.com/office/drawing/2014/main" id="{4C856909-8F78-4ED8-B593-8010FB7349BA}"/>
+              </a:ext>
+            </a:extLst>
+          </p:cNvPr>
+          <p:cNvSpPr>
+            <a:spLocks xmlns:a="http://schemas.openxmlformats.org/drawingml/2006/main" noGrp="1"/>
+          </p:cNvSpPr>
+          <p:nvPr/>
+        </p:nvSpPr>
+        <p:spPr>
+          <a:xfrm xmlns:a="http://schemas.openxmlformats.org/drawingml/2006/main">
+            <a:off x="7810500" y="0"/>
+            <a:ext cx="4000500" cy="4000500"/>
           </a:xfrm>
           <a:prstGeom xmlns:a="http://schemas.openxmlformats.org/drawingml/2006/main" prst="rect">
             <a:avLst/>
@@ -1724,19 +1724,19 @@
           <p:cNvPr id="3" name="">
             <a:extLst xmlns:a="http://schemas.openxmlformats.org/drawingml/2006/main">
               <a:ext uri="{FF2B5EF4-FFF2-40B4-BE49-F238E27FC236}">
-                <a16:creationId xmlns:a16="http://schemas.microsoft.com/office/drawing/2014/main" id="{C7C0593D-E67F-4303-A9B8-EF4E5E3C7DDB}"/>
-              </a:ext>
-            </a:extLst>
-          </p:cNvPr>
-          <p:cNvSpPr>
-            <a:spLocks xmlns:a="http://schemas.openxmlformats.org/drawingml/2006/main" noGrp="1"/>
-          </p:cNvSpPr>
-          <p:nvPr/>
-        </p:nvSpPr>
-        <p:spPr>
-          <a:xfrm xmlns:a="http://schemas.openxmlformats.org/drawingml/2006/main">
-            <a:off x="8477250" y="-285750"/>
-            <a:ext cx="4191000" cy="4191000"/>
+                <a16:creationId xmlns:a16="http://schemas.microsoft.com/office/drawing/2014/main" id="{861C017B-0609-4F87-B43D-B763FBB8AC97}"/>
+              </a:ext>
+            </a:extLst>
+          </p:cNvPr>
+          <p:cNvSpPr>
+            <a:spLocks xmlns:a="http://schemas.openxmlformats.org/drawingml/2006/main" noGrp="1"/>
+          </p:cNvSpPr>
+          <p:nvPr/>
+        </p:nvSpPr>
+        <p:spPr>
+          <a:xfrm xmlns:a="http://schemas.openxmlformats.org/drawingml/2006/main">
+            <a:off x="8572500" y="285750"/>
+            <a:ext cx="3333750" cy="3333750"/>
           </a:xfrm>
           <a:prstGeom xmlns:a="http://schemas.openxmlformats.org/drawingml/2006/main" prst="rect">
             <a:avLst/>
@@ -1759,19 +1759,19 @@
           <p:cNvPr id="4" name="">
             <a:extLst xmlns:a="http://schemas.openxmlformats.org/drawingml/2006/main">
               <a:ext uri="{FF2B5EF4-FFF2-40B4-BE49-F238E27FC236}">
-                <a16:creationId xmlns:a16="http://schemas.microsoft.com/office/drawing/2014/main" id="{67BAA47C-1D12-4178-9679-999376B283A7}"/>
-              </a:ext>
-            </a:extLst>
-          </p:cNvPr>
-          <p:cNvSpPr>
-            <a:spLocks xmlns:a="http://schemas.openxmlformats.org/drawingml/2006/main" noGrp="1"/>
-          </p:cNvSpPr>
-          <p:nvPr/>
-        </p:nvSpPr>
-        <p:spPr>
-          <a:xfrm xmlns:a="http://schemas.openxmlformats.org/drawingml/2006/main">
-            <a:off x="9144000" y="0"/>
-            <a:ext cx="3429000" cy="3429000"/>
+                <a16:creationId xmlns:a16="http://schemas.microsoft.com/office/drawing/2014/main" id="{DFA39BD3-7707-43BA-A772-442D11FC38DA}"/>
+              </a:ext>
+            </a:extLst>
+          </p:cNvPr>
+          <p:cNvSpPr>
+            <a:spLocks xmlns:a="http://schemas.openxmlformats.org/drawingml/2006/main" noGrp="1"/>
+          </p:cNvSpPr>
+          <p:nvPr/>
+        </p:nvSpPr>
+        <p:spPr>
+          <a:xfrm xmlns:a="http://schemas.openxmlformats.org/drawingml/2006/main">
+            <a:off x="9334500" y="571500"/>
+            <a:ext cx="2667000" cy="2667000"/>
           </a:xfrm>
           <a:prstGeom xmlns:a="http://schemas.openxmlformats.org/drawingml/2006/main" prst="rect">
             <a:avLst/>
@@ -1794,19 +1794,19 @@
           <p:cNvPr id="5" name="">
             <a:extLst xmlns:a="http://schemas.openxmlformats.org/drawingml/2006/main">
               <a:ext uri="{FF2B5EF4-FFF2-40B4-BE49-F238E27FC236}">
-                <a16:creationId xmlns:a16="http://schemas.microsoft.com/office/drawing/2014/main" id="{5D5364FE-D6D6-4115-B488-58E6FD3C9408}"/>
-              </a:ext>
-            </a:extLst>
-          </p:cNvPr>
-          <p:cNvSpPr>
-            <a:spLocks xmlns:a="http://schemas.openxmlformats.org/drawingml/2006/main" noGrp="1"/>
-          </p:cNvSpPr>
-          <p:nvPr/>
-        </p:nvSpPr>
-        <p:spPr>
-          <a:xfrm xmlns:a="http://schemas.openxmlformats.org/drawingml/2006/main">
-            <a:off x="9810750" y="285750"/>
-            <a:ext cx="2667000" cy="2667000"/>
+                <a16:creationId xmlns:a16="http://schemas.microsoft.com/office/drawing/2014/main" id="{6B80D940-35CA-45F8-A978-31E6D6594F38}"/>
+              </a:ext>
+            </a:extLst>
+          </p:cNvPr>
+          <p:cNvSpPr>
+            <a:spLocks xmlns:a="http://schemas.openxmlformats.org/drawingml/2006/main" noGrp="1"/>
+          </p:cNvSpPr>
+          <p:nvPr/>
+        </p:nvSpPr>
+        <p:spPr>
+          <a:xfrm xmlns:a="http://schemas.openxmlformats.org/drawingml/2006/main">
+            <a:off x="10096500" y="857250"/>
+            <a:ext cx="2000250" cy="2000250"/>
           </a:xfrm>
           <a:prstGeom xmlns:a="http://schemas.openxmlformats.org/drawingml/2006/main" prst="rect">
             <a:avLst/>
@@ -1829,7 +1829,7 @@
           <p:cNvPr id="6" name="">
             <a:extLst xmlns:a="http://schemas.openxmlformats.org/drawingml/2006/main">
               <a:ext uri="{FF2B5EF4-FFF2-40B4-BE49-F238E27FC236}">
-                <a16:creationId xmlns:a16="http://schemas.microsoft.com/office/drawing/2014/main" id="{6CA7107B-C88E-4F5B-8A87-6999170E156F}"/>
+                <a16:creationId xmlns:a16="http://schemas.microsoft.com/office/drawing/2014/main" id="{B8323950-B7F1-4FAF-9D96-18A48BD43AD1}"/>
               </a:ext>
             </a:extLst>
           </p:cNvPr>
@@ -1862,7 +1862,7 @@
           <p:cNvPr id="7" name="">
             <a:extLst xmlns:a="http://schemas.openxmlformats.org/drawingml/2006/main">
               <a:ext uri="{FF2B5EF4-FFF2-40B4-BE49-F238E27FC236}">
-                <a16:creationId xmlns:a16="http://schemas.microsoft.com/office/drawing/2014/main" id="{5C7ED4DC-4FD5-4833-87AC-3E50F01057C2}"/>
+                <a16:creationId xmlns:a16="http://schemas.microsoft.com/office/drawing/2014/main" id="{1813289A-763A-4D80-9854-FE9B52873071}"/>
               </a:ext>
             </a:extLst>
           </p:cNvPr>
@@ -1926,7 +1926,7 @@
           <p:cNvPr id="8" name="">
             <a:extLst xmlns:a="http://schemas.openxmlformats.org/drawingml/2006/main">
               <a:ext uri="{FF2B5EF4-FFF2-40B4-BE49-F238E27FC236}">
-                <a16:creationId xmlns:a16="http://schemas.microsoft.com/office/drawing/2014/main" id="{0620CF27-993C-4348-8226-35A837A44802}"/>
+                <a16:creationId xmlns:a16="http://schemas.microsoft.com/office/drawing/2014/main" id="{AAFC553B-FF3F-4604-B530-BBC733C783A4}"/>
               </a:ext>
             </a:extLst>
           </p:cNvPr>
@@ -1938,7 +1938,7 @@
         <p:spPr>
           <a:xfrm xmlns:a="http://schemas.openxmlformats.org/drawingml/2006/main">
             <a:off x="857250" y="1543050"/>
-            <a:ext cx="6096000" cy="323850"/>
+            <a:ext cx="5524500" cy="323850"/>
           </a:xfrm>
           <a:prstGeom xmlns:a="http://schemas.openxmlformats.org/drawingml/2006/main" prst="rect">
             <a:avLst/>
@@ -1990,7 +1990,7 @@
           <p:cNvPr id="9" name="">
             <a:extLst xmlns:a="http://schemas.openxmlformats.org/drawingml/2006/main">
               <a:ext uri="{FF2B5EF4-FFF2-40B4-BE49-F238E27FC236}">
-                <a16:creationId xmlns:a16="http://schemas.microsoft.com/office/drawing/2014/main" id="{15D3DCDB-07AE-4BFF-8455-33674A74627A}"/>
+                <a16:creationId xmlns:a16="http://schemas.microsoft.com/office/drawing/2014/main" id="{3CDEB8E8-3AE0-4401-91D4-AAB8B998E8C2}"/>
               </a:ext>
             </a:extLst>
           </p:cNvPr>
@@ -2054,7 +2054,7 @@
           <p:cNvPr id="10" name="">
             <a:extLst xmlns:a="http://schemas.openxmlformats.org/drawingml/2006/main">
               <a:ext uri="{FF2B5EF4-FFF2-40B4-BE49-F238E27FC236}">
-                <a16:creationId xmlns:a16="http://schemas.microsoft.com/office/drawing/2014/main" id="{1EE2CE66-5CB8-4E6C-AE8C-5C98D52D4D58}"/>
+                <a16:creationId xmlns:a16="http://schemas.microsoft.com/office/drawing/2014/main" id="{115E1539-7B87-4EAE-ACE4-3DF4339F9EB6}"/>
               </a:ext>
             </a:extLst>
           </p:cNvPr>
@@ -2118,7 +2118,7 @@
           <p:cNvPr id="11" name="">
             <a:extLst xmlns:a="http://schemas.openxmlformats.org/drawingml/2006/main">
               <a:ext uri="{FF2B5EF4-FFF2-40B4-BE49-F238E27FC236}">
-                <a16:creationId xmlns:a16="http://schemas.microsoft.com/office/drawing/2014/main" id="{8602C433-4198-4351-91F1-CC5CF101C0FF}"/>
+                <a16:creationId xmlns:a16="http://schemas.microsoft.com/office/drawing/2014/main" id="{74C174CA-E218-405F-9F84-45792848EDA0}"/>
               </a:ext>
             </a:extLst>
           </p:cNvPr>
@@ -2151,7 +2151,7 @@
           <p:cNvPr id="12" name="">
             <a:extLst xmlns:a="http://schemas.openxmlformats.org/drawingml/2006/main">
               <a:ext uri="{FF2B5EF4-FFF2-40B4-BE49-F238E27FC236}">
-                <a16:creationId xmlns:a16="http://schemas.microsoft.com/office/drawing/2014/main" id="{1DC09F45-6F17-4714-8E1F-82A22E586942}"/>
+                <a16:creationId xmlns:a16="http://schemas.microsoft.com/office/drawing/2014/main" id="{E4AAE611-E215-4A97-BEC5-E8E251B39286}"/>
               </a:ext>
             </a:extLst>
           </p:cNvPr>
@@ -2184,7 +2184,7 @@
           <p:cNvPr id="13" name="">
             <a:extLst xmlns:a="http://schemas.openxmlformats.org/drawingml/2006/main">
               <a:ext uri="{FF2B5EF4-FFF2-40B4-BE49-F238E27FC236}">
-                <a16:creationId xmlns:a16="http://schemas.microsoft.com/office/drawing/2014/main" id="{5208A0E9-43C7-4530-BDF4-88E74D6C8EC1}"/>
+                <a16:creationId xmlns:a16="http://schemas.microsoft.com/office/drawing/2014/main" id="{672ABE80-4AFB-4C34-BA80-57C381833E10}"/>
               </a:ext>
             </a:extLst>
           </p:cNvPr>
@@ -2248,7 +2248,7 @@
           <p:cNvPr id="14" name="">
             <a:extLst xmlns:a="http://schemas.openxmlformats.org/drawingml/2006/main">
               <a:ext uri="{FF2B5EF4-FFF2-40B4-BE49-F238E27FC236}">
-                <a16:creationId xmlns:a16="http://schemas.microsoft.com/office/drawing/2014/main" id="{F87B0308-1CC5-4C9E-9A98-96B10DD5B213}"/>
+                <a16:creationId xmlns:a16="http://schemas.microsoft.com/office/drawing/2014/main" id="{4D65B091-A8D3-44CC-A41A-E9F42AC22558}"/>
               </a:ext>
             </a:extLst>
           </p:cNvPr>
@@ -2281,7 +2281,7 @@
           <p:cNvPr id="15" name="">
             <a:extLst xmlns:a="http://schemas.openxmlformats.org/drawingml/2006/main">
               <a:ext uri="{FF2B5EF4-FFF2-40B4-BE49-F238E27FC236}">
-                <a16:creationId xmlns:a16="http://schemas.microsoft.com/office/drawing/2014/main" id="{F891DFA6-2D5A-4E49-B2E3-9EE37EFBED3B}"/>
+                <a16:creationId xmlns:a16="http://schemas.microsoft.com/office/drawing/2014/main" id="{014396C0-4682-475C-B5CD-1257F0636F8C}"/>
               </a:ext>
             </a:extLst>
           </p:cNvPr>
@@ -2335,7 +2335,7 @@
                 <a:ea typeface="Malgun Gothic"/>
                 <a:cs typeface="Malgun Gothic"/>
               </a:rPr>
-              <a:t>Updated 2026-06-13</a:t>
+              <a:t>Updated 2026-06-18</a:t>
             </a:r>
           </a:p>
         </p:txBody>
@@ -2345,7 +2345,7 @@
           <p:cNvPr id="16" name="">
             <a:extLst xmlns:a="http://schemas.openxmlformats.org/drawingml/2006/main">
               <a:ext uri="{FF2B5EF4-FFF2-40B4-BE49-F238E27FC236}">
-                <a16:creationId xmlns:a16="http://schemas.microsoft.com/office/drawing/2014/main" id="{26926C22-172F-46A9-916F-10203DC4BE82}"/>
+                <a16:creationId xmlns:a16="http://schemas.microsoft.com/office/drawing/2014/main" id="{D9641BA3-1484-4178-9BFD-3919A43CA890}"/>
               </a:ext>
             </a:extLst>
           </p:cNvPr>
@@ -2378,7 +2378,7 @@
           <p:cNvPr id="17" name="">
             <a:extLst xmlns:a="http://schemas.openxmlformats.org/drawingml/2006/main">
               <a:ext uri="{FF2B5EF4-FFF2-40B4-BE49-F238E27FC236}">
-                <a16:creationId xmlns:a16="http://schemas.microsoft.com/office/drawing/2014/main" id="{8E1E7C48-80B0-4BA9-868C-34971B0B6FE5}"/>
+                <a16:creationId xmlns:a16="http://schemas.microsoft.com/office/drawing/2014/main" id="{D8FEB55B-2B58-444D-A2D4-37F4B014CA1B}"/>
               </a:ext>
             </a:extLst>
           </p:cNvPr>
@@ -2442,19 +2442,19 @@
           <p:cNvPr id="18" name="">
             <a:extLst xmlns:a="http://schemas.openxmlformats.org/drawingml/2006/main">
               <a:ext uri="{FF2B5EF4-FFF2-40B4-BE49-F238E27FC236}">
-                <a16:creationId xmlns:a16="http://schemas.microsoft.com/office/drawing/2014/main" id="{AFE5482A-9EF2-4D61-BE57-F5D859D9628A}"/>
-              </a:ext>
-            </a:extLst>
-          </p:cNvPr>
-          <p:cNvSpPr>
-            <a:spLocks xmlns:a="http://schemas.openxmlformats.org/drawingml/2006/main" noGrp="1"/>
-          </p:cNvSpPr>
-          <p:nvPr/>
-        </p:nvSpPr>
-        <p:spPr>
-          <a:xfrm xmlns:a="http://schemas.openxmlformats.org/drawingml/2006/main">
-            <a:off x="6705600" y="914400"/>
-            <a:ext cx="2095500" cy="990600"/>
+                <a16:creationId xmlns:a16="http://schemas.microsoft.com/office/drawing/2014/main" id="{E1D34AA5-013D-4E0B-BB88-C0DB5D4635A5}"/>
+              </a:ext>
+            </a:extLst>
+          </p:cNvPr>
+          <p:cNvSpPr>
+            <a:spLocks xmlns:a="http://schemas.openxmlformats.org/drawingml/2006/main" noGrp="1"/>
+          </p:cNvSpPr>
+          <p:nvPr/>
+        </p:nvSpPr>
+        <p:spPr>
+          <a:xfrm xmlns:a="http://schemas.openxmlformats.org/drawingml/2006/main">
+            <a:off x="7086600" y="914400"/>
+            <a:ext cx="2000250" cy="990600"/>
           </a:xfrm>
           <a:prstGeom xmlns:a="http://schemas.openxmlformats.org/drawingml/2006/main" prst="rect">
             <a:avLst/>
@@ -2475,29 +2475,29 @@
           <p:cNvPr id="19" name="">
             <a:extLst xmlns:a="http://schemas.openxmlformats.org/drawingml/2006/main">
               <a:ext uri="{FF2B5EF4-FFF2-40B4-BE49-F238E27FC236}">
-                <a16:creationId xmlns:a16="http://schemas.microsoft.com/office/drawing/2014/main" id="{BE0BA512-EE5A-42DC-8EE2-386C4824B784}"/>
-              </a:ext>
-            </a:extLst>
-          </p:cNvPr>
-          <p:cNvSpPr>
-            <a:spLocks xmlns:a="http://schemas.openxmlformats.org/drawingml/2006/main" noGrp="1"/>
-          </p:cNvSpPr>
-          <p:nvPr/>
-        </p:nvSpPr>
-        <p:spPr>
-          <a:xfrm xmlns:a="http://schemas.openxmlformats.org/drawingml/2006/main">
-            <a:off x="6705600" y="914400"/>
+                <a16:creationId xmlns:a16="http://schemas.microsoft.com/office/drawing/2014/main" id="{52A014B2-5556-4708-8AA3-BC9630BC9370}"/>
+              </a:ext>
+            </a:extLst>
+          </p:cNvPr>
+          <p:cNvSpPr>
+            <a:spLocks xmlns:a="http://schemas.openxmlformats.org/drawingml/2006/main" noGrp="1"/>
+          </p:cNvSpPr>
+          <p:nvPr/>
+        </p:nvSpPr>
+        <p:spPr>
+          <a:xfrm xmlns:a="http://schemas.openxmlformats.org/drawingml/2006/main">
+            <a:off x="7086600" y="914400"/>
             <a:ext cx="57150" cy="990600"/>
           </a:xfrm>
           <a:prstGeom xmlns:a="http://schemas.openxmlformats.org/drawingml/2006/main" prst="rect">
             <a:avLst/>
           </a:prstGeom>
           <a:solidFill xmlns:a="http://schemas.openxmlformats.org/drawingml/2006/main">
-            <a:srgbClr val="29D398"/>
-          </a:solidFill>
-          <a:ln xmlns:a="http://schemas.openxmlformats.org/drawingml/2006/main" w="0">
-            <a:solidFill>
-              <a:srgbClr val="29D398"/>
+            <a:srgbClr val="EF6461"/>
+          </a:solidFill>
+          <a:ln xmlns:a="http://schemas.openxmlformats.org/drawingml/2006/main" w="0">
+            <a:solidFill>
+              <a:srgbClr val="EF6461"/>
             </a:solidFill>
             <a:prstDash val="solid"/>
           </a:ln>
@@ -2508,19 +2508,19 @@
           <p:cNvPr id="20" name="">
             <a:extLst xmlns:a="http://schemas.openxmlformats.org/drawingml/2006/main">
               <a:ext uri="{FF2B5EF4-FFF2-40B4-BE49-F238E27FC236}">
-                <a16:creationId xmlns:a16="http://schemas.microsoft.com/office/drawing/2014/main" id="{1039073E-0E59-4FC9-AF3B-5F2FED677C3D}"/>
-              </a:ext>
-            </a:extLst>
-          </p:cNvPr>
-          <p:cNvSpPr>
-            <a:spLocks xmlns:a="http://schemas.openxmlformats.org/drawingml/2006/main" noGrp="1"/>
-          </p:cNvSpPr>
-          <p:nvPr/>
-        </p:nvSpPr>
-        <p:spPr>
-          <a:xfrm xmlns:a="http://schemas.openxmlformats.org/drawingml/2006/main">
-            <a:off x="6896100" y="1066800"/>
-            <a:ext cx="1752600" cy="342900"/>
+                <a16:creationId xmlns:a16="http://schemas.microsoft.com/office/drawing/2014/main" id="{38E019B4-8AC9-455C-BBFD-AB8BF9B4C783}"/>
+              </a:ext>
+            </a:extLst>
+          </p:cNvPr>
+          <p:cNvSpPr>
+            <a:spLocks xmlns:a="http://schemas.openxmlformats.org/drawingml/2006/main" noGrp="1"/>
+          </p:cNvSpPr>
+          <p:nvPr/>
+        </p:nvSpPr>
+        <p:spPr>
+          <a:xfrm xmlns:a="http://schemas.openxmlformats.org/drawingml/2006/main">
+            <a:off x="7277100" y="1066800"/>
+            <a:ext cx="1657350" cy="342900"/>
           </a:xfrm>
           <a:prstGeom xmlns:a="http://schemas.openxmlformats.org/drawingml/2006/main" prst="rect">
             <a:avLst/>
@@ -2546,7 +2546,7 @@
             <a:pPr algn="l">
               <a:defRPr sz="2100" b="1">
                 <a:solidFill>
-                  <a:srgbClr val="29D398"/>
+                  <a:srgbClr val="EF6461"/>
                 </a:solidFill>
                 <a:latin typeface="Malgun Gothic"/>
                 <a:ea typeface="Malgun Gothic"/>
@@ -2556,13 +2556,13 @@
             <a:r>
               <a:rPr sz="2100" b="1">
                 <a:solidFill>
-                  <a:srgbClr val="29D398"/>
+                  <a:srgbClr val="EF6461"/>
                 </a:solidFill>
                 <a:latin typeface="Malgun Gothic"/>
                 <a:ea typeface="Malgun Gothic"/>
                 <a:cs typeface="Malgun Gothic"/>
               </a:rPr>
-              <a:t>0 collisions</a:t>
+              <a:t>45 collisions</a:t>
             </a:r>
           </a:p>
         </p:txBody>
@@ -2572,19 +2572,19 @@
           <p:cNvPr id="21" name="">
             <a:extLst xmlns:a="http://schemas.openxmlformats.org/drawingml/2006/main">
               <a:ext uri="{FF2B5EF4-FFF2-40B4-BE49-F238E27FC236}">
-                <a16:creationId xmlns:a16="http://schemas.microsoft.com/office/drawing/2014/main" id="{95067314-8F2A-4FFC-8269-9DE6C0C43F6A}"/>
-              </a:ext>
-            </a:extLst>
-          </p:cNvPr>
-          <p:cNvSpPr>
-            <a:spLocks xmlns:a="http://schemas.openxmlformats.org/drawingml/2006/main" noGrp="1"/>
-          </p:cNvSpPr>
-          <p:nvPr/>
-        </p:nvSpPr>
-        <p:spPr>
-          <a:xfrm xmlns:a="http://schemas.openxmlformats.org/drawingml/2006/main">
-            <a:off x="6896100" y="1428750"/>
-            <a:ext cx="1752600" cy="209550"/>
+                <a16:creationId xmlns:a16="http://schemas.microsoft.com/office/drawing/2014/main" id="{D3ACC8B5-93F8-4CF8-B276-6EB42D701CDB}"/>
+              </a:ext>
+            </a:extLst>
+          </p:cNvPr>
+          <p:cNvSpPr>
+            <a:spLocks xmlns:a="http://schemas.openxmlformats.org/drawingml/2006/main" noGrp="1"/>
+          </p:cNvSpPr>
+          <p:nvPr/>
+        </p:nvSpPr>
+        <p:spPr>
+          <a:xfrm xmlns:a="http://schemas.openxmlformats.org/drawingml/2006/main">
+            <a:off x="7277100" y="1428750"/>
+            <a:ext cx="1657350" cy="152400"/>
           </a:xfrm>
           <a:prstGeom xmlns:a="http://schemas.openxmlformats.org/drawingml/2006/main" prst="rect">
             <a:avLst/>
@@ -2636,19 +2636,19 @@
           <p:cNvPr id="22" name="">
             <a:extLst xmlns:a="http://schemas.openxmlformats.org/drawingml/2006/main">
               <a:ext uri="{FF2B5EF4-FFF2-40B4-BE49-F238E27FC236}">
-                <a16:creationId xmlns:a16="http://schemas.microsoft.com/office/drawing/2014/main" id="{39007983-DAFD-4AE3-9F37-BD1EE843354A}"/>
-              </a:ext>
-            </a:extLst>
-          </p:cNvPr>
-          <p:cNvSpPr>
-            <a:spLocks xmlns:a="http://schemas.openxmlformats.org/drawingml/2006/main" noGrp="1"/>
-          </p:cNvSpPr>
-          <p:nvPr/>
-        </p:nvSpPr>
-        <p:spPr>
-          <a:xfrm xmlns:a="http://schemas.openxmlformats.org/drawingml/2006/main">
-            <a:off x="6896100" y="1657350"/>
-            <a:ext cx="1752600" cy="171450"/>
+                <a16:creationId xmlns:a16="http://schemas.microsoft.com/office/drawing/2014/main" id="{494F1337-E2D5-438B-BBBB-3F4D3788BF0C}"/>
+              </a:ext>
+            </a:extLst>
+          </p:cNvPr>
+          <p:cNvSpPr>
+            <a:spLocks xmlns:a="http://schemas.openxmlformats.org/drawingml/2006/main" noGrp="1"/>
+          </p:cNvSpPr>
+          <p:nvPr/>
+        </p:nvSpPr>
+        <p:spPr>
+          <a:xfrm xmlns:a="http://schemas.openxmlformats.org/drawingml/2006/main">
+            <a:off x="7277100" y="1657350"/>
+            <a:ext cx="1657350" cy="133350"/>
           </a:xfrm>
           <a:prstGeom xmlns:a="http://schemas.openxmlformats.org/drawingml/2006/main" prst="rect">
             <a:avLst/>
@@ -2700,19 +2700,19 @@
           <p:cNvPr id="23" name="">
             <a:extLst xmlns:a="http://schemas.openxmlformats.org/drawingml/2006/main">
               <a:ext uri="{FF2B5EF4-FFF2-40B4-BE49-F238E27FC236}">
-                <a16:creationId xmlns:a16="http://schemas.microsoft.com/office/drawing/2014/main" id="{91ABCEDF-6EA9-4089-9267-65B7AE36262D}"/>
-              </a:ext>
-            </a:extLst>
-          </p:cNvPr>
-          <p:cNvSpPr>
-            <a:spLocks xmlns:a="http://schemas.openxmlformats.org/drawingml/2006/main" noGrp="1"/>
-          </p:cNvSpPr>
-          <p:nvPr/>
-        </p:nvSpPr>
-        <p:spPr>
-          <a:xfrm xmlns:a="http://schemas.openxmlformats.org/drawingml/2006/main">
-            <a:off x="9067800" y="914400"/>
-            <a:ext cx="2095500" cy="990600"/>
+                <a16:creationId xmlns:a16="http://schemas.microsoft.com/office/drawing/2014/main" id="{5476FA44-31EC-4998-A1F4-1CA1A6947522}"/>
+              </a:ext>
+            </a:extLst>
+          </p:cNvPr>
+          <p:cNvSpPr>
+            <a:spLocks xmlns:a="http://schemas.openxmlformats.org/drawingml/2006/main" noGrp="1"/>
+          </p:cNvSpPr>
+          <p:nvPr/>
+        </p:nvSpPr>
+        <p:spPr>
+          <a:xfrm xmlns:a="http://schemas.openxmlformats.org/drawingml/2006/main">
+            <a:off x="9315450" y="914400"/>
+            <a:ext cx="2000250" cy="990600"/>
           </a:xfrm>
           <a:prstGeom xmlns:a="http://schemas.openxmlformats.org/drawingml/2006/main" prst="rect">
             <a:avLst/>
@@ -2733,18 +2733,18 @@
           <p:cNvPr id="24" name="">
             <a:extLst xmlns:a="http://schemas.openxmlformats.org/drawingml/2006/main">
               <a:ext uri="{FF2B5EF4-FFF2-40B4-BE49-F238E27FC236}">
-                <a16:creationId xmlns:a16="http://schemas.microsoft.com/office/drawing/2014/main" id="{C3F09F19-B4C9-469A-9C4F-DFF82C5A5EFA}"/>
-              </a:ext>
-            </a:extLst>
-          </p:cNvPr>
-          <p:cNvSpPr>
-            <a:spLocks xmlns:a="http://schemas.openxmlformats.org/drawingml/2006/main" noGrp="1"/>
-          </p:cNvSpPr>
-          <p:nvPr/>
-        </p:nvSpPr>
-        <p:spPr>
-          <a:xfrm xmlns:a="http://schemas.openxmlformats.org/drawingml/2006/main">
-            <a:off x="9067800" y="914400"/>
+                <a16:creationId xmlns:a16="http://schemas.microsoft.com/office/drawing/2014/main" id="{3334D3F5-F241-4F7E-8C29-94B68154D144}"/>
+              </a:ext>
+            </a:extLst>
+          </p:cNvPr>
+          <p:cNvSpPr>
+            <a:spLocks xmlns:a="http://schemas.openxmlformats.org/drawingml/2006/main" noGrp="1"/>
+          </p:cNvSpPr>
+          <p:nvPr/>
+        </p:nvSpPr>
+        <p:spPr>
+          <a:xfrm xmlns:a="http://schemas.openxmlformats.org/drawingml/2006/main">
+            <a:off x="9315450" y="914400"/>
             <a:ext cx="57150" cy="990600"/>
           </a:xfrm>
           <a:prstGeom xmlns:a="http://schemas.openxmlformats.org/drawingml/2006/main" prst="rect">
@@ -2766,19 +2766,19 @@
           <p:cNvPr id="25" name="">
             <a:extLst xmlns:a="http://schemas.openxmlformats.org/drawingml/2006/main">
               <a:ext uri="{FF2B5EF4-FFF2-40B4-BE49-F238E27FC236}">
-                <a16:creationId xmlns:a16="http://schemas.microsoft.com/office/drawing/2014/main" id="{CF3A7E57-FF94-47F4-AAFB-F04045BBAF2C}"/>
-              </a:ext>
-            </a:extLst>
-          </p:cNvPr>
-          <p:cNvSpPr>
-            <a:spLocks xmlns:a="http://schemas.openxmlformats.org/drawingml/2006/main" noGrp="1"/>
-          </p:cNvSpPr>
-          <p:nvPr/>
-        </p:nvSpPr>
-        <p:spPr>
-          <a:xfrm xmlns:a="http://schemas.openxmlformats.org/drawingml/2006/main">
-            <a:off x="9258300" y="1066800"/>
-            <a:ext cx="1752600" cy="342900"/>
+                <a16:creationId xmlns:a16="http://schemas.microsoft.com/office/drawing/2014/main" id="{65EE1770-A9FE-4E77-9104-41FA9F7F6DB0}"/>
+              </a:ext>
+            </a:extLst>
+          </p:cNvPr>
+          <p:cNvSpPr>
+            <a:spLocks xmlns:a="http://schemas.openxmlformats.org/drawingml/2006/main" noGrp="1"/>
+          </p:cNvSpPr>
+          <p:nvPr/>
+        </p:nvSpPr>
+        <p:spPr>
+          <a:xfrm xmlns:a="http://schemas.openxmlformats.org/drawingml/2006/main">
+            <a:off x="9505950" y="1066800"/>
+            <a:ext cx="1657350" cy="342900"/>
           </a:xfrm>
           <a:prstGeom xmlns:a="http://schemas.openxmlformats.org/drawingml/2006/main" prst="rect">
             <a:avLst/>
@@ -2820,7 +2820,7 @@
                 <a:ea typeface="Malgun Gothic"/>
                 <a:cs typeface="Malgun Gothic"/>
               </a:rPr>
-              <a:t>4,291 pass</a:t>
+              <a:t>5,444 pass</a:t>
             </a:r>
           </a:p>
         </p:txBody>
@@ -2830,19 +2830,19 @@
           <p:cNvPr id="26" name="">
             <a:extLst xmlns:a="http://schemas.openxmlformats.org/drawingml/2006/main">
               <a:ext uri="{FF2B5EF4-FFF2-40B4-BE49-F238E27FC236}">
-                <a16:creationId xmlns:a16="http://schemas.microsoft.com/office/drawing/2014/main" id="{9156FE4B-9E91-4C43-8393-061F11EA1504}"/>
-              </a:ext>
-            </a:extLst>
-          </p:cNvPr>
-          <p:cNvSpPr>
-            <a:spLocks xmlns:a="http://schemas.openxmlformats.org/drawingml/2006/main" noGrp="1"/>
-          </p:cNvSpPr>
-          <p:nvPr/>
-        </p:nvSpPr>
-        <p:spPr>
-          <a:xfrm xmlns:a="http://schemas.openxmlformats.org/drawingml/2006/main">
-            <a:off x="9258300" y="1428750"/>
-            <a:ext cx="1752600" cy="209550"/>
+                <a16:creationId xmlns:a16="http://schemas.microsoft.com/office/drawing/2014/main" id="{71ABB160-7A3E-4801-B82C-4839AF0DE9A3}"/>
+              </a:ext>
+            </a:extLst>
+          </p:cNvPr>
+          <p:cNvSpPr>
+            <a:spLocks xmlns:a="http://schemas.openxmlformats.org/drawingml/2006/main" noGrp="1"/>
+          </p:cNvSpPr>
+          <p:nvPr/>
+        </p:nvSpPr>
+        <p:spPr>
+          <a:xfrm xmlns:a="http://schemas.openxmlformats.org/drawingml/2006/main">
+            <a:off x="9505950" y="1428750"/>
+            <a:ext cx="1657350" cy="152400"/>
           </a:xfrm>
           <a:prstGeom xmlns:a="http://schemas.openxmlformats.org/drawingml/2006/main" prst="rect">
             <a:avLst/>
@@ -2884,7 +2884,7 @@
                 <a:ea typeface="Malgun Gothic"/>
                 <a:cs typeface="Malgun Gothic"/>
               </a:rPr>
-              <a:t>automated tests</a:t>
+              <a:t>Python tests</a:t>
             </a:r>
           </a:p>
         </p:txBody>
@@ -2894,19 +2894,19 @@
           <p:cNvPr id="27" name="">
             <a:extLst xmlns:a="http://schemas.openxmlformats.org/drawingml/2006/main">
               <a:ext uri="{FF2B5EF4-FFF2-40B4-BE49-F238E27FC236}">
-                <a16:creationId xmlns:a16="http://schemas.microsoft.com/office/drawing/2014/main" id="{68B9208F-3567-40F5-9BD7-BBADC1CCD8A7}"/>
-              </a:ext>
-            </a:extLst>
-          </p:cNvPr>
-          <p:cNvSpPr>
-            <a:spLocks xmlns:a="http://schemas.openxmlformats.org/drawingml/2006/main" noGrp="1"/>
-          </p:cNvSpPr>
-          <p:nvPr/>
-        </p:nvSpPr>
-        <p:spPr>
-          <a:xfrm xmlns:a="http://schemas.openxmlformats.org/drawingml/2006/main">
-            <a:off x="9258300" y="1657350"/>
-            <a:ext cx="1752600" cy="171450"/>
+                <a16:creationId xmlns:a16="http://schemas.microsoft.com/office/drawing/2014/main" id="{5CFF0C3B-FACC-40F2-B6DB-94D9A2EF8D91}"/>
+              </a:ext>
+            </a:extLst>
+          </p:cNvPr>
+          <p:cNvSpPr>
+            <a:spLocks xmlns:a="http://schemas.openxmlformats.org/drawingml/2006/main" noGrp="1"/>
+          </p:cNvSpPr>
+          <p:nvPr/>
+        </p:nvSpPr>
+        <p:spPr>
+          <a:xfrm xmlns:a="http://schemas.openxmlformats.org/drawingml/2006/main">
+            <a:off x="9505950" y="1657350"/>
+            <a:ext cx="1657350" cy="133350"/>
           </a:xfrm>
           <a:prstGeom xmlns:a="http://schemas.openxmlformats.org/drawingml/2006/main" prst="rect">
             <a:avLst/>
@@ -2958,19 +2958,19 @@
           <p:cNvPr id="28" name="">
             <a:extLst xmlns:a="http://schemas.openxmlformats.org/drawingml/2006/main">
               <a:ext uri="{FF2B5EF4-FFF2-40B4-BE49-F238E27FC236}">
-                <a16:creationId xmlns:a16="http://schemas.microsoft.com/office/drawing/2014/main" id="{A8B2CDF1-A4A8-4A05-AF8A-FC30B7B2F740}"/>
-              </a:ext>
-            </a:extLst>
-          </p:cNvPr>
-          <p:cNvSpPr>
-            <a:spLocks xmlns:a="http://schemas.openxmlformats.org/drawingml/2006/main" noGrp="1"/>
-          </p:cNvSpPr>
-          <p:nvPr/>
-        </p:nvSpPr>
-        <p:spPr>
-          <a:xfrm xmlns:a="http://schemas.openxmlformats.org/drawingml/2006/main">
-            <a:off x="6705600" y="2209800"/>
-            <a:ext cx="2095500" cy="990600"/>
+                <a16:creationId xmlns:a16="http://schemas.microsoft.com/office/drawing/2014/main" id="{63B4F4FC-E8B2-49D5-833D-B263FB0CBCCA}"/>
+              </a:ext>
+            </a:extLst>
+          </p:cNvPr>
+          <p:cNvSpPr>
+            <a:spLocks xmlns:a="http://schemas.openxmlformats.org/drawingml/2006/main" noGrp="1"/>
+          </p:cNvSpPr>
+          <p:nvPr/>
+        </p:nvSpPr>
+        <p:spPr>
+          <a:xfrm xmlns:a="http://schemas.openxmlformats.org/drawingml/2006/main">
+            <a:off x="7086600" y="2209800"/>
+            <a:ext cx="2000250" cy="990600"/>
           </a:xfrm>
           <a:prstGeom xmlns:a="http://schemas.openxmlformats.org/drawingml/2006/main" prst="rect">
             <a:avLst/>
@@ -2991,18 +2991,18 @@
           <p:cNvPr id="29" name="">
             <a:extLst xmlns:a="http://schemas.openxmlformats.org/drawingml/2006/main">
               <a:ext uri="{FF2B5EF4-FFF2-40B4-BE49-F238E27FC236}">
-                <a16:creationId xmlns:a16="http://schemas.microsoft.com/office/drawing/2014/main" id="{D49CB1D1-465B-4A69-9054-DBD43F6074DF}"/>
-              </a:ext>
-            </a:extLst>
-          </p:cNvPr>
-          <p:cNvSpPr>
-            <a:spLocks xmlns:a="http://schemas.openxmlformats.org/drawingml/2006/main" noGrp="1"/>
-          </p:cNvSpPr>
-          <p:nvPr/>
-        </p:nvSpPr>
-        <p:spPr>
-          <a:xfrm xmlns:a="http://schemas.openxmlformats.org/drawingml/2006/main">
-            <a:off x="6705600" y="2209800"/>
+                <a16:creationId xmlns:a16="http://schemas.microsoft.com/office/drawing/2014/main" id="{97241BB0-CDDF-4D8B-A4C3-0698C2260271}"/>
+              </a:ext>
+            </a:extLst>
+          </p:cNvPr>
+          <p:cNvSpPr>
+            <a:spLocks xmlns:a="http://schemas.openxmlformats.org/drawingml/2006/main" noGrp="1"/>
+          </p:cNvSpPr>
+          <p:nvPr/>
+        </p:nvSpPr>
+        <p:spPr>
+          <a:xfrm xmlns:a="http://schemas.openxmlformats.org/drawingml/2006/main">
+            <a:off x="7086600" y="2209800"/>
             <a:ext cx="57150" cy="990600"/>
           </a:xfrm>
           <a:prstGeom xmlns:a="http://schemas.openxmlformats.org/drawingml/2006/main" prst="rect">
@@ -3024,19 +3024,19 @@
           <p:cNvPr id="30" name="">
             <a:extLst xmlns:a="http://schemas.openxmlformats.org/drawingml/2006/main">
               <a:ext uri="{FF2B5EF4-FFF2-40B4-BE49-F238E27FC236}">
-                <a16:creationId xmlns:a16="http://schemas.microsoft.com/office/drawing/2014/main" id="{7852DA8F-D392-41F9-B46E-5C5A41223F96}"/>
-              </a:ext>
-            </a:extLst>
-          </p:cNvPr>
-          <p:cNvSpPr>
-            <a:spLocks xmlns:a="http://schemas.openxmlformats.org/drawingml/2006/main" noGrp="1"/>
-          </p:cNvSpPr>
-          <p:nvPr/>
-        </p:nvSpPr>
-        <p:spPr>
-          <a:xfrm xmlns:a="http://schemas.openxmlformats.org/drawingml/2006/main">
-            <a:off x="6896100" y="2362200"/>
-            <a:ext cx="1752600" cy="342900"/>
+                <a16:creationId xmlns:a16="http://schemas.microsoft.com/office/drawing/2014/main" id="{A9DF5269-3D20-4C78-B12C-23A3E9B138CB}"/>
+              </a:ext>
+            </a:extLst>
+          </p:cNvPr>
+          <p:cNvSpPr>
+            <a:spLocks xmlns:a="http://schemas.openxmlformats.org/drawingml/2006/main" noGrp="1"/>
+          </p:cNvSpPr>
+          <p:nvPr/>
+        </p:nvSpPr>
+        <p:spPr>
+          <a:xfrm xmlns:a="http://schemas.openxmlformats.org/drawingml/2006/main">
+            <a:off x="7277100" y="2362200"/>
+            <a:ext cx="1657350" cy="342900"/>
           </a:xfrm>
           <a:prstGeom xmlns:a="http://schemas.openxmlformats.org/drawingml/2006/main" prst="rect">
             <a:avLst/>
@@ -3078,7 +3078,7 @@
                 <a:ea typeface="Malgun Gothic"/>
                 <a:cs typeface="Malgun Gothic"/>
               </a:rPr>
-              <a:t>100%</a:t>
+              <a:t>95.9%</a:t>
             </a:r>
           </a:p>
         </p:txBody>
@@ -3088,19 +3088,19 @@
           <p:cNvPr id="31" name="">
             <a:extLst xmlns:a="http://schemas.openxmlformats.org/drawingml/2006/main">
               <a:ext uri="{FF2B5EF4-FFF2-40B4-BE49-F238E27FC236}">
-                <a16:creationId xmlns:a16="http://schemas.microsoft.com/office/drawing/2014/main" id="{74AD6083-82F9-4336-B036-1FB7104C3B89}"/>
-              </a:ext>
-            </a:extLst>
-          </p:cNvPr>
-          <p:cNvSpPr>
-            <a:spLocks xmlns:a="http://schemas.openxmlformats.org/drawingml/2006/main" noGrp="1"/>
-          </p:cNvSpPr>
-          <p:nvPr/>
-        </p:nvSpPr>
-        <p:spPr>
-          <a:xfrm xmlns:a="http://schemas.openxmlformats.org/drawingml/2006/main">
-            <a:off x="6896100" y="2724150"/>
-            <a:ext cx="1752600" cy="209550"/>
+                <a16:creationId xmlns:a16="http://schemas.microsoft.com/office/drawing/2014/main" id="{6109EA1C-47CF-4FC5-8BDC-CDFA67DB9B27}"/>
+              </a:ext>
+            </a:extLst>
+          </p:cNvPr>
+          <p:cNvSpPr>
+            <a:spLocks xmlns:a="http://schemas.openxmlformats.org/drawingml/2006/main" noGrp="1"/>
+          </p:cNvSpPr>
+          <p:nvPr/>
+        </p:nvSpPr>
+        <p:spPr>
+          <a:xfrm xmlns:a="http://schemas.openxmlformats.org/drawingml/2006/main">
+            <a:off x="7277100" y="2724150"/>
+            <a:ext cx="1657350" cy="152400"/>
           </a:xfrm>
           <a:prstGeom xmlns:a="http://schemas.openxmlformats.org/drawingml/2006/main" prst="rect">
             <a:avLst/>
@@ -3152,19 +3152,19 @@
           <p:cNvPr id="32" name="">
             <a:extLst xmlns:a="http://schemas.openxmlformats.org/drawingml/2006/main">
               <a:ext uri="{FF2B5EF4-FFF2-40B4-BE49-F238E27FC236}">
-                <a16:creationId xmlns:a16="http://schemas.microsoft.com/office/drawing/2014/main" id="{6E59ACA2-9228-4EBA-A609-B849374F1E33}"/>
-              </a:ext>
-            </a:extLst>
-          </p:cNvPr>
-          <p:cNvSpPr>
-            <a:spLocks xmlns:a="http://schemas.openxmlformats.org/drawingml/2006/main" noGrp="1"/>
-          </p:cNvSpPr>
-          <p:nvPr/>
-        </p:nvSpPr>
-        <p:spPr>
-          <a:xfrm xmlns:a="http://schemas.openxmlformats.org/drawingml/2006/main">
-            <a:off x="6896100" y="2952750"/>
-            <a:ext cx="1752600" cy="171450"/>
+                <a16:creationId xmlns:a16="http://schemas.microsoft.com/office/drawing/2014/main" id="{F1158EEF-E103-4038-B1DD-2FF1CA3F5925}"/>
+              </a:ext>
+            </a:extLst>
+          </p:cNvPr>
+          <p:cNvSpPr>
+            <a:spLocks xmlns:a="http://schemas.openxmlformats.org/drawingml/2006/main" noGrp="1"/>
+          </p:cNvSpPr>
+          <p:nvPr/>
+        </p:nvSpPr>
+        <p:spPr>
+          <a:xfrm xmlns:a="http://schemas.openxmlformats.org/drawingml/2006/main">
+            <a:off x="7277100" y="2952750"/>
+            <a:ext cx="1657350" cy="133350"/>
           </a:xfrm>
           <a:prstGeom xmlns:a="http://schemas.openxmlformats.org/drawingml/2006/main" prst="rect">
             <a:avLst/>
@@ -3206,7 +3206,7 @@
                 <a:ea typeface="Malgun Gothic"/>
                 <a:cs typeface="Malgun Gothic"/>
               </a:rPr>
-              <a:t>95 conflicts resolved</a:t>
+              <a:t>1,053 conflicts</a:t>
             </a:r>
           </a:p>
         </p:txBody>
@@ -3216,19 +3216,19 @@
           <p:cNvPr id="33" name="">
             <a:extLst xmlns:a="http://schemas.openxmlformats.org/drawingml/2006/main">
               <a:ext uri="{FF2B5EF4-FFF2-40B4-BE49-F238E27FC236}">
-                <a16:creationId xmlns:a16="http://schemas.microsoft.com/office/drawing/2014/main" id="{61365C2A-ECC5-4DDF-BC41-FD287937EB07}"/>
-              </a:ext>
-            </a:extLst>
-          </p:cNvPr>
-          <p:cNvSpPr>
-            <a:spLocks xmlns:a="http://schemas.openxmlformats.org/drawingml/2006/main" noGrp="1"/>
-          </p:cNvSpPr>
-          <p:nvPr/>
-        </p:nvSpPr>
-        <p:spPr>
-          <a:xfrm xmlns:a="http://schemas.openxmlformats.org/drawingml/2006/main">
-            <a:off x="9067800" y="2209800"/>
-            <a:ext cx="2095500" cy="990600"/>
+                <a16:creationId xmlns:a16="http://schemas.microsoft.com/office/drawing/2014/main" id="{46F67BD0-4024-488C-B7F3-432181451C82}"/>
+              </a:ext>
+            </a:extLst>
+          </p:cNvPr>
+          <p:cNvSpPr>
+            <a:spLocks xmlns:a="http://schemas.openxmlformats.org/drawingml/2006/main" noGrp="1"/>
+          </p:cNvSpPr>
+          <p:nvPr/>
+        </p:nvSpPr>
+        <p:spPr>
+          <a:xfrm xmlns:a="http://schemas.openxmlformats.org/drawingml/2006/main">
+            <a:off x="9315450" y="2209800"/>
+            <a:ext cx="2000250" cy="990600"/>
           </a:xfrm>
           <a:prstGeom xmlns:a="http://schemas.openxmlformats.org/drawingml/2006/main" prst="rect">
             <a:avLst/>
@@ -3249,18 +3249,18 @@
           <p:cNvPr id="34" name="">
             <a:extLst xmlns:a="http://schemas.openxmlformats.org/drawingml/2006/main">
               <a:ext uri="{FF2B5EF4-FFF2-40B4-BE49-F238E27FC236}">
-                <a16:creationId xmlns:a16="http://schemas.microsoft.com/office/drawing/2014/main" id="{6BAECE3D-9A28-43EB-85B6-ECC1A13E1DA7}"/>
-              </a:ext>
-            </a:extLst>
-          </p:cNvPr>
-          <p:cNvSpPr>
-            <a:spLocks xmlns:a="http://schemas.openxmlformats.org/drawingml/2006/main" noGrp="1"/>
-          </p:cNvSpPr>
-          <p:nvPr/>
-        </p:nvSpPr>
-        <p:spPr>
-          <a:xfrm xmlns:a="http://schemas.openxmlformats.org/drawingml/2006/main">
-            <a:off x="9067800" y="2209800"/>
+                <a16:creationId xmlns:a16="http://schemas.microsoft.com/office/drawing/2014/main" id="{2C76871A-9B87-4762-B560-43193044C81F}"/>
+              </a:ext>
+            </a:extLst>
+          </p:cNvPr>
+          <p:cNvSpPr>
+            <a:spLocks xmlns:a="http://schemas.openxmlformats.org/drawingml/2006/main" noGrp="1"/>
+          </p:cNvSpPr>
+          <p:nvPr/>
+        </p:nvSpPr>
+        <p:spPr>
+          <a:xfrm xmlns:a="http://schemas.openxmlformats.org/drawingml/2006/main">
+            <a:off x="9315450" y="2209800"/>
             <a:ext cx="57150" cy="990600"/>
           </a:xfrm>
           <a:prstGeom xmlns:a="http://schemas.openxmlformats.org/drawingml/2006/main" prst="rect">
@@ -3282,19 +3282,19 @@
           <p:cNvPr id="35" name="">
             <a:extLst xmlns:a="http://schemas.openxmlformats.org/drawingml/2006/main">
               <a:ext uri="{FF2B5EF4-FFF2-40B4-BE49-F238E27FC236}">
-                <a16:creationId xmlns:a16="http://schemas.microsoft.com/office/drawing/2014/main" id="{7B3F6B2F-A08B-4FC2-921F-F4EBA03D585A}"/>
-              </a:ext>
-            </a:extLst>
-          </p:cNvPr>
-          <p:cNvSpPr>
-            <a:spLocks xmlns:a="http://schemas.openxmlformats.org/drawingml/2006/main" noGrp="1"/>
-          </p:cNvSpPr>
-          <p:nvPr/>
-        </p:nvSpPr>
-        <p:spPr>
-          <a:xfrm xmlns:a="http://schemas.openxmlformats.org/drawingml/2006/main">
-            <a:off x="9258300" y="2362200"/>
-            <a:ext cx="1752600" cy="342900"/>
+                <a16:creationId xmlns:a16="http://schemas.microsoft.com/office/drawing/2014/main" id="{F16D70B7-ECAA-4539-8B98-8CA2022E02EB}"/>
+              </a:ext>
+            </a:extLst>
+          </p:cNvPr>
+          <p:cNvSpPr>
+            <a:spLocks xmlns:a="http://schemas.openxmlformats.org/drawingml/2006/main" noGrp="1"/>
+          </p:cNvSpPr>
+          <p:nvPr/>
+        </p:nvSpPr>
+        <p:spPr>
+          <a:xfrm xmlns:a="http://schemas.openxmlformats.org/drawingml/2006/main">
+            <a:off x="9505950" y="2362200"/>
+            <a:ext cx="1657350" cy="342900"/>
           </a:xfrm>
           <a:prstGeom xmlns:a="http://schemas.openxmlformats.org/drawingml/2006/main" prst="rect">
             <a:avLst/>
@@ -3346,19 +3346,19 @@
           <p:cNvPr id="36" name="">
             <a:extLst xmlns:a="http://schemas.openxmlformats.org/drawingml/2006/main">
               <a:ext uri="{FF2B5EF4-FFF2-40B4-BE49-F238E27FC236}">
-                <a16:creationId xmlns:a16="http://schemas.microsoft.com/office/drawing/2014/main" id="{BCA5B792-E645-4029-BE2E-3F8E03217BA4}"/>
-              </a:ext>
-            </a:extLst>
-          </p:cNvPr>
-          <p:cNvSpPr>
-            <a:spLocks xmlns:a="http://schemas.openxmlformats.org/drawingml/2006/main" noGrp="1"/>
-          </p:cNvSpPr>
-          <p:nvPr/>
-        </p:nvSpPr>
-        <p:spPr>
-          <a:xfrm xmlns:a="http://schemas.openxmlformats.org/drawingml/2006/main">
-            <a:off x="9258300" y="2724150"/>
-            <a:ext cx="1752600" cy="209550"/>
+                <a16:creationId xmlns:a16="http://schemas.microsoft.com/office/drawing/2014/main" id="{C5352592-9B35-4503-9B58-2816DDD33047}"/>
+              </a:ext>
+            </a:extLst>
+          </p:cNvPr>
+          <p:cNvSpPr>
+            <a:spLocks xmlns:a="http://schemas.openxmlformats.org/drawingml/2006/main" noGrp="1"/>
+          </p:cNvSpPr>
+          <p:nvPr/>
+        </p:nvSpPr>
+        <p:spPr>
+          <a:xfrm xmlns:a="http://schemas.openxmlformats.org/drawingml/2006/main">
+            <a:off x="9505950" y="2724150"/>
+            <a:ext cx="1657350" cy="152400"/>
           </a:xfrm>
           <a:prstGeom xmlns:a="http://schemas.openxmlformats.org/drawingml/2006/main" prst="rect">
             <a:avLst/>
@@ -3410,19 +3410,19 @@
           <p:cNvPr id="37" name="">
             <a:extLst xmlns:a="http://schemas.openxmlformats.org/drawingml/2006/main">
               <a:ext uri="{FF2B5EF4-FFF2-40B4-BE49-F238E27FC236}">
-                <a16:creationId xmlns:a16="http://schemas.microsoft.com/office/drawing/2014/main" id="{2E1888D4-343A-4177-9E87-9D5FC8D22631}"/>
-              </a:ext>
-            </a:extLst>
-          </p:cNvPr>
-          <p:cNvSpPr>
-            <a:spLocks xmlns:a="http://schemas.openxmlformats.org/drawingml/2006/main" noGrp="1"/>
-          </p:cNvSpPr>
-          <p:nvPr/>
-        </p:nvSpPr>
-        <p:spPr>
-          <a:xfrm xmlns:a="http://schemas.openxmlformats.org/drawingml/2006/main">
-            <a:off x="9258300" y="2952750"/>
-            <a:ext cx="1752600" cy="171450"/>
+                <a16:creationId xmlns:a16="http://schemas.microsoft.com/office/drawing/2014/main" id="{1111E884-C006-4ACC-90DD-9823A0211E88}"/>
+              </a:ext>
+            </a:extLst>
+          </p:cNvPr>
+          <p:cNvSpPr>
+            <a:spLocks xmlns:a="http://schemas.openxmlformats.org/drawingml/2006/main" noGrp="1"/>
+          </p:cNvSpPr>
+          <p:nvPr/>
+        </p:nvSpPr>
+        <p:spPr>
+          <a:xfrm xmlns:a="http://schemas.openxmlformats.org/drawingml/2006/main">
+            <a:off x="9505950" y="2952750"/>
+            <a:ext cx="1657350" cy="133350"/>
           </a:xfrm>
           <a:prstGeom xmlns:a="http://schemas.openxmlformats.org/drawingml/2006/main" prst="rect">
             <a:avLst/>
@@ -3464,7 +3464,7 @@
                 <a:ea typeface="Malgun Gothic"/>
                 <a:cs typeface="Malgun Gothic"/>
               </a:rPr>
-              <a:t>12,245 delivered</a:t>
+              <a:t>12,278 delivered</a:t>
             </a:r>
           </a:p>
         </p:txBody>
@@ -3474,19 +3474,19 @@
           <p:cNvPr id="38" name="">
             <a:extLst xmlns:a="http://schemas.openxmlformats.org/drawingml/2006/main">
               <a:ext uri="{FF2B5EF4-FFF2-40B4-BE49-F238E27FC236}">
-                <a16:creationId xmlns:a16="http://schemas.microsoft.com/office/drawing/2014/main" id="{ED13A12C-A3DF-47B7-B57E-92CFD592030C}"/>
-              </a:ext>
-            </a:extLst>
-          </p:cNvPr>
-          <p:cNvSpPr>
-            <a:spLocks xmlns:a="http://schemas.openxmlformats.org/drawingml/2006/main" noGrp="1"/>
-          </p:cNvSpPr>
-          <p:nvPr/>
-        </p:nvSpPr>
-        <p:spPr>
-          <a:xfrm xmlns:a="http://schemas.openxmlformats.org/drawingml/2006/main">
-            <a:off x="6743700" y="3905250"/>
-            <a:ext cx="4476750" cy="800100"/>
+                <a16:creationId xmlns:a16="http://schemas.microsoft.com/office/drawing/2014/main" id="{44109920-91B0-4F09-B8C9-E38344C29545}"/>
+              </a:ext>
+            </a:extLst>
+          </p:cNvPr>
+          <p:cNvSpPr>
+            <a:spLocks xmlns:a="http://schemas.openxmlformats.org/drawingml/2006/main" noGrp="1"/>
+          </p:cNvSpPr>
+          <p:nvPr/>
+        </p:nvSpPr>
+        <p:spPr>
+          <a:xfrm xmlns:a="http://schemas.openxmlformats.org/drawingml/2006/main">
+            <a:off x="7124700" y="3905250"/>
+            <a:ext cx="4191000" cy="800100"/>
           </a:xfrm>
           <a:prstGeom xmlns:a="http://schemas.openxmlformats.org/drawingml/2006/main" prst="rect">
             <a:avLst/>
@@ -3528,7 +3528,7 @@
                 <a:ea typeface="Malgun Gothic"/>
                 <a:cs typeface="Malgun Gothic"/>
               </a:rPr>
-              <a:t>A public explanation of how SDACS predicts drone conflicts, issues ATC-style advisories, and verifies safety behavior before real-world flight trials.</a:t>
+              <a:t>A research simulator for measuring conflict prediction, ATC-style advisories, and the safety gaps that remain before real-world flight trials.</a:t>
             </a:r>
           </a:p>
         </p:txBody>
@@ -3538,7 +3538,7 @@
           <p:cNvPr id="39" name="">
             <a:extLst xmlns:a="http://schemas.openxmlformats.org/drawingml/2006/main">
               <a:ext uri="{FF2B5EF4-FFF2-40B4-BE49-F238E27FC236}">
-                <a16:creationId xmlns:a16="http://schemas.microsoft.com/office/drawing/2014/main" id="{0E8DDC35-C7E0-4B87-8432-3415156BEB2A}"/>
+                <a16:creationId xmlns:a16="http://schemas.microsoft.com/office/drawing/2014/main" id="{66FE38A5-F174-4738-9C8F-CE6EB2FC5FAD}"/>
               </a:ext>
             </a:extLst>
           </p:cNvPr>
@@ -3600,7 +3600,7 @@
     </p:spTree>
     <p:extLst>
       <p:ext uri="{BB962C8B-B14F-4D97-AF65-F5344CB8AC3E}">
-        <p14:creationId xmlns:p14="http://schemas.microsoft.com/office/powerpoint/2010/main" val="1373574653"/>
+        <p14:creationId xmlns:p14="http://schemas.microsoft.com/office/powerpoint/2010/main" val="1036615622"/>
       </p:ext>
     </p:extLst>
   </p:cSld>
@@ -3624,7 +3624,7 @@
           <p:cNvPr id="1" name="">
             <a:extLst xmlns:a="http://schemas.openxmlformats.org/drawingml/2006/main">
               <a:ext uri="{FF2B5EF4-FFF2-40B4-BE49-F238E27FC236}">
-                <a16:creationId xmlns:a16="http://schemas.microsoft.com/office/drawing/2014/main" id="{CAB2AB3F-738F-4F59-8C2A-CA75DC9EFB53}"/>
+                <a16:creationId xmlns:a16="http://schemas.microsoft.com/office/drawing/2014/main" id="{A392C22E-9D84-4C7A-AA9A-9321BFD315E8}"/>
               </a:ext>
             </a:extLst>
           </p:cNvPr>
@@ -3657,19 +3657,19 @@
           <p:cNvPr id="2" name="">
             <a:extLst xmlns:a="http://schemas.openxmlformats.org/drawingml/2006/main">
               <a:ext uri="{FF2B5EF4-FFF2-40B4-BE49-F238E27FC236}">
-                <a16:creationId xmlns:a16="http://schemas.microsoft.com/office/drawing/2014/main" id="{436CAAA1-C311-4EE6-803B-CB41878660B3}"/>
-              </a:ext>
-            </a:extLst>
-          </p:cNvPr>
-          <p:cNvSpPr>
-            <a:spLocks xmlns:a="http://schemas.openxmlformats.org/drawingml/2006/main" noGrp="1"/>
-          </p:cNvSpPr>
-          <p:nvPr/>
-        </p:nvSpPr>
-        <p:spPr>
-          <a:xfrm xmlns:a="http://schemas.openxmlformats.org/drawingml/2006/main">
-            <a:off x="7810500" y="-571500"/>
-            <a:ext cx="4953000" cy="4953000"/>
+                <a16:creationId xmlns:a16="http://schemas.microsoft.com/office/drawing/2014/main" id="{14AC1B91-1449-43A3-8BB6-3EF032B035B4}"/>
+              </a:ext>
+            </a:extLst>
+          </p:cNvPr>
+          <p:cNvSpPr>
+            <a:spLocks xmlns:a="http://schemas.openxmlformats.org/drawingml/2006/main" noGrp="1"/>
+          </p:cNvSpPr>
+          <p:nvPr/>
+        </p:nvSpPr>
+        <p:spPr>
+          <a:xfrm xmlns:a="http://schemas.openxmlformats.org/drawingml/2006/main">
+            <a:off x="7810500" y="0"/>
+            <a:ext cx="4000500" cy="4000500"/>
           </a:xfrm>
           <a:prstGeom xmlns:a="http://schemas.openxmlformats.org/drawingml/2006/main" prst="rect">
             <a:avLst/>
@@ -3692,19 +3692,19 @@
           <p:cNvPr id="3" name="">
             <a:extLst xmlns:a="http://schemas.openxmlformats.org/drawingml/2006/main">
               <a:ext uri="{FF2B5EF4-FFF2-40B4-BE49-F238E27FC236}">
-                <a16:creationId xmlns:a16="http://schemas.microsoft.com/office/drawing/2014/main" id="{C5F9D1C0-9EBC-4D9A-AF5D-3A68FE7E7E85}"/>
-              </a:ext>
-            </a:extLst>
-          </p:cNvPr>
-          <p:cNvSpPr>
-            <a:spLocks xmlns:a="http://schemas.openxmlformats.org/drawingml/2006/main" noGrp="1"/>
-          </p:cNvSpPr>
-          <p:nvPr/>
-        </p:nvSpPr>
-        <p:spPr>
-          <a:xfrm xmlns:a="http://schemas.openxmlformats.org/drawingml/2006/main">
-            <a:off x="8477250" y="-285750"/>
-            <a:ext cx="4191000" cy="4191000"/>
+                <a16:creationId xmlns:a16="http://schemas.microsoft.com/office/drawing/2014/main" id="{12822EB5-1DB3-422C-95E7-6E39CA15C828}"/>
+              </a:ext>
+            </a:extLst>
+          </p:cNvPr>
+          <p:cNvSpPr>
+            <a:spLocks xmlns:a="http://schemas.openxmlformats.org/drawingml/2006/main" noGrp="1"/>
+          </p:cNvSpPr>
+          <p:nvPr/>
+        </p:nvSpPr>
+        <p:spPr>
+          <a:xfrm xmlns:a="http://schemas.openxmlformats.org/drawingml/2006/main">
+            <a:off x="8572500" y="285750"/>
+            <a:ext cx="3333750" cy="3333750"/>
           </a:xfrm>
           <a:prstGeom xmlns:a="http://schemas.openxmlformats.org/drawingml/2006/main" prst="rect">
             <a:avLst/>
@@ -3727,19 +3727,19 @@
           <p:cNvPr id="4" name="">
             <a:extLst xmlns:a="http://schemas.openxmlformats.org/drawingml/2006/main">
               <a:ext uri="{FF2B5EF4-FFF2-40B4-BE49-F238E27FC236}">
-                <a16:creationId xmlns:a16="http://schemas.microsoft.com/office/drawing/2014/main" id="{03F88EF1-DDDB-44F4-BDB6-7DE18EF227A6}"/>
-              </a:ext>
-            </a:extLst>
-          </p:cNvPr>
-          <p:cNvSpPr>
-            <a:spLocks xmlns:a="http://schemas.openxmlformats.org/drawingml/2006/main" noGrp="1"/>
-          </p:cNvSpPr>
-          <p:nvPr/>
-        </p:nvSpPr>
-        <p:spPr>
-          <a:xfrm xmlns:a="http://schemas.openxmlformats.org/drawingml/2006/main">
-            <a:off x="9144000" y="0"/>
-            <a:ext cx="3429000" cy="3429000"/>
+                <a16:creationId xmlns:a16="http://schemas.microsoft.com/office/drawing/2014/main" id="{EE78F961-5EC2-4415-9EFE-ECE485182D75}"/>
+              </a:ext>
+            </a:extLst>
+          </p:cNvPr>
+          <p:cNvSpPr>
+            <a:spLocks xmlns:a="http://schemas.openxmlformats.org/drawingml/2006/main" noGrp="1"/>
+          </p:cNvSpPr>
+          <p:nvPr/>
+        </p:nvSpPr>
+        <p:spPr>
+          <a:xfrm xmlns:a="http://schemas.openxmlformats.org/drawingml/2006/main">
+            <a:off x="9334500" y="571500"/>
+            <a:ext cx="2667000" cy="2667000"/>
           </a:xfrm>
           <a:prstGeom xmlns:a="http://schemas.openxmlformats.org/drawingml/2006/main" prst="rect">
             <a:avLst/>
@@ -3762,19 +3762,19 @@
           <p:cNvPr id="5" name="">
             <a:extLst xmlns:a="http://schemas.openxmlformats.org/drawingml/2006/main">
               <a:ext uri="{FF2B5EF4-FFF2-40B4-BE49-F238E27FC236}">
-                <a16:creationId xmlns:a16="http://schemas.microsoft.com/office/drawing/2014/main" id="{1022949A-1A7D-4B43-82E2-26FB0079001F}"/>
-              </a:ext>
-            </a:extLst>
-          </p:cNvPr>
-          <p:cNvSpPr>
-            <a:spLocks xmlns:a="http://schemas.openxmlformats.org/drawingml/2006/main" noGrp="1"/>
-          </p:cNvSpPr>
-          <p:nvPr/>
-        </p:nvSpPr>
-        <p:spPr>
-          <a:xfrm xmlns:a="http://schemas.openxmlformats.org/drawingml/2006/main">
-            <a:off x="9810750" y="285750"/>
-            <a:ext cx="2667000" cy="2667000"/>
+                <a16:creationId xmlns:a16="http://schemas.microsoft.com/office/drawing/2014/main" id="{B86049DE-A755-4162-AC3A-B4A4F2C81FEF}"/>
+              </a:ext>
+            </a:extLst>
+          </p:cNvPr>
+          <p:cNvSpPr>
+            <a:spLocks xmlns:a="http://schemas.openxmlformats.org/drawingml/2006/main" noGrp="1"/>
+          </p:cNvSpPr>
+          <p:nvPr/>
+        </p:nvSpPr>
+        <p:spPr>
+          <a:xfrm xmlns:a="http://schemas.openxmlformats.org/drawingml/2006/main">
+            <a:off x="10096500" y="857250"/>
+            <a:ext cx="2000250" cy="2000250"/>
           </a:xfrm>
           <a:prstGeom xmlns:a="http://schemas.openxmlformats.org/drawingml/2006/main" prst="rect">
             <a:avLst/>
@@ -3797,7 +3797,7 @@
           <p:cNvPr id="6" name="">
             <a:extLst xmlns:a="http://schemas.openxmlformats.org/drawingml/2006/main">
               <a:ext uri="{FF2B5EF4-FFF2-40B4-BE49-F238E27FC236}">
-                <a16:creationId xmlns:a16="http://schemas.microsoft.com/office/drawing/2014/main" id="{6135B2CD-393B-4B74-9E0E-EA4DBDF924EB}"/>
+                <a16:creationId xmlns:a16="http://schemas.microsoft.com/office/drawing/2014/main" id="{E46156F6-2055-4154-ABE6-1F8EE67B0F16}"/>
               </a:ext>
             </a:extLst>
           </p:cNvPr>
@@ -3861,7 +3861,7 @@
           <p:cNvPr id="7" name="">
             <a:extLst xmlns:a="http://schemas.openxmlformats.org/drawingml/2006/main">
               <a:ext uri="{FF2B5EF4-FFF2-40B4-BE49-F238E27FC236}">
-                <a16:creationId xmlns:a16="http://schemas.microsoft.com/office/drawing/2014/main" id="{6A113F7B-86A4-4E9F-B664-A40A371DE18C}"/>
+                <a16:creationId xmlns:a16="http://schemas.microsoft.com/office/drawing/2014/main" id="{2AEF934C-384C-4E2C-9868-426D1AB1568E}"/>
               </a:ext>
             </a:extLst>
           </p:cNvPr>
@@ -3925,7 +3925,7 @@
           <p:cNvPr id="8" name="">
             <a:extLst xmlns:a="http://schemas.openxmlformats.org/drawingml/2006/main">
               <a:ext uri="{FF2B5EF4-FFF2-40B4-BE49-F238E27FC236}">
-                <a16:creationId xmlns:a16="http://schemas.microsoft.com/office/drawing/2014/main" id="{B80F9B25-88BC-44E7-894D-17C3416BDD13}"/>
+                <a16:creationId xmlns:a16="http://schemas.microsoft.com/office/drawing/2014/main" id="{4A530653-4159-4D18-B7EC-D4847F38DD83}"/>
               </a:ext>
             </a:extLst>
           </p:cNvPr>
@@ -3958,7 +3958,7 @@
           <p:cNvPr id="9" name="">
             <a:extLst xmlns:a="http://schemas.openxmlformats.org/drawingml/2006/main">
               <a:ext uri="{FF2B5EF4-FFF2-40B4-BE49-F238E27FC236}">
-                <a16:creationId xmlns:a16="http://schemas.microsoft.com/office/drawing/2014/main" id="{D4EA9BA1-7386-429D-BD90-6AD837F52362}"/>
+                <a16:creationId xmlns:a16="http://schemas.microsoft.com/office/drawing/2014/main" id="{90E3C0D7-3D29-48B4-81E1-2D442E133A7A}"/>
               </a:ext>
             </a:extLst>
           </p:cNvPr>
@@ -3991,7 +3991,7 @@
           <p:cNvPr id="10" name="">
             <a:extLst xmlns:a="http://schemas.openxmlformats.org/drawingml/2006/main">
               <a:ext uri="{FF2B5EF4-FFF2-40B4-BE49-F238E27FC236}">
-                <a16:creationId xmlns:a16="http://schemas.microsoft.com/office/drawing/2014/main" id="{D8E9E5CC-FF9A-4B74-8206-888989471D00}"/>
+                <a16:creationId xmlns:a16="http://schemas.microsoft.com/office/drawing/2014/main" id="{5FBD9CD6-2D28-46A7-B3BA-8189A9942335}"/>
               </a:ext>
             </a:extLst>
           </p:cNvPr>
@@ -4055,7 +4055,7 @@
           <p:cNvPr id="11" name="">
             <a:extLst xmlns:a="http://schemas.openxmlformats.org/drawingml/2006/main">
               <a:ext uri="{FF2B5EF4-FFF2-40B4-BE49-F238E27FC236}">
-                <a16:creationId xmlns:a16="http://schemas.microsoft.com/office/drawing/2014/main" id="{AD515586-7256-469F-9CE6-FA05087FDE77}"/>
+                <a16:creationId xmlns:a16="http://schemas.microsoft.com/office/drawing/2014/main" id="{AFDB5311-4C3A-46CC-9F58-06B6BF8AA984}"/>
               </a:ext>
             </a:extLst>
           </p:cNvPr>
@@ -4119,7 +4119,7 @@
           <p:cNvPr id="12" name="">
             <a:extLst xmlns:a="http://schemas.openxmlformats.org/drawingml/2006/main">
               <a:ext uri="{FF2B5EF4-FFF2-40B4-BE49-F238E27FC236}">
-                <a16:creationId xmlns:a16="http://schemas.microsoft.com/office/drawing/2014/main" id="{446B9B7D-0C16-4C99-BE7F-C1179A259B81}"/>
+                <a16:creationId xmlns:a16="http://schemas.microsoft.com/office/drawing/2014/main" id="{08BFEA64-509E-496F-AA80-162E397C2572}"/>
               </a:ext>
             </a:extLst>
           </p:cNvPr>
@@ -4183,7 +4183,7 @@
           <p:cNvPr id="13" name="">
             <a:extLst xmlns:a="http://schemas.openxmlformats.org/drawingml/2006/main">
               <a:ext uri="{FF2B5EF4-FFF2-40B4-BE49-F238E27FC236}">
-                <a16:creationId xmlns:a16="http://schemas.microsoft.com/office/drawing/2014/main" id="{C3E0AD50-3E9C-4A74-80F5-46EDC0AEBDCE}"/>
+                <a16:creationId xmlns:a16="http://schemas.microsoft.com/office/drawing/2014/main" id="{82F517F6-04D0-4572-98CB-1FDC03750635}"/>
               </a:ext>
             </a:extLst>
           </p:cNvPr>
@@ -4216,7 +4216,7 @@
           <p:cNvPr id="14" name="">
             <a:extLst xmlns:a="http://schemas.openxmlformats.org/drawingml/2006/main">
               <a:ext uri="{FF2B5EF4-FFF2-40B4-BE49-F238E27FC236}">
-                <a16:creationId xmlns:a16="http://schemas.microsoft.com/office/drawing/2014/main" id="{D77A1539-95BF-4B2C-AAA3-5EB7E1261E32}"/>
+                <a16:creationId xmlns:a16="http://schemas.microsoft.com/office/drawing/2014/main" id="{EDC6D66F-8FC3-45D9-932D-DD3290DDF767}"/>
               </a:ext>
             </a:extLst>
           </p:cNvPr>
@@ -4249,7 +4249,7 @@
           <p:cNvPr id="15" name="">
             <a:extLst xmlns:a="http://schemas.openxmlformats.org/drawingml/2006/main">
               <a:ext uri="{FF2B5EF4-FFF2-40B4-BE49-F238E27FC236}">
-                <a16:creationId xmlns:a16="http://schemas.microsoft.com/office/drawing/2014/main" id="{07BDF252-4496-4DFF-B54F-3171F39D6405}"/>
+                <a16:creationId xmlns:a16="http://schemas.microsoft.com/office/drawing/2014/main" id="{1593B09C-E8C0-4031-8C36-C96E67023F48}"/>
               </a:ext>
             </a:extLst>
           </p:cNvPr>
@@ -4313,7 +4313,7 @@
           <p:cNvPr id="16" name="">
             <a:extLst xmlns:a="http://schemas.openxmlformats.org/drawingml/2006/main">
               <a:ext uri="{FF2B5EF4-FFF2-40B4-BE49-F238E27FC236}">
-                <a16:creationId xmlns:a16="http://schemas.microsoft.com/office/drawing/2014/main" id="{3B5C36D1-BB2D-4918-9BF4-8C4232140580}"/>
+                <a16:creationId xmlns:a16="http://schemas.microsoft.com/office/drawing/2014/main" id="{F82E0700-CEBF-401A-9A48-310C8AFA0401}"/>
               </a:ext>
             </a:extLst>
           </p:cNvPr>
@@ -4377,7 +4377,7 @@
           <p:cNvPr id="17" name="">
             <a:extLst xmlns:a="http://schemas.openxmlformats.org/drawingml/2006/main">
               <a:ext uri="{FF2B5EF4-FFF2-40B4-BE49-F238E27FC236}">
-                <a16:creationId xmlns:a16="http://schemas.microsoft.com/office/drawing/2014/main" id="{E4C127AA-3ADA-4EA3-B39C-18BAA55FDD6F}"/>
+                <a16:creationId xmlns:a16="http://schemas.microsoft.com/office/drawing/2014/main" id="{5EA9B315-1A8D-40B7-B00F-E63D5A383D4A}"/>
               </a:ext>
             </a:extLst>
           </p:cNvPr>
@@ -4441,7 +4441,7 @@
           <p:cNvPr id="18" name="">
             <a:extLst xmlns:a="http://schemas.openxmlformats.org/drawingml/2006/main">
               <a:ext uri="{FF2B5EF4-FFF2-40B4-BE49-F238E27FC236}">
-                <a16:creationId xmlns:a16="http://schemas.microsoft.com/office/drawing/2014/main" id="{64B2FCF1-7379-4F37-AC4B-C14A6060F750}"/>
+                <a16:creationId xmlns:a16="http://schemas.microsoft.com/office/drawing/2014/main" id="{6353C223-58A8-47B3-8939-1FB0307FD233}"/>
               </a:ext>
             </a:extLst>
           </p:cNvPr>
@@ -4474,7 +4474,7 @@
           <p:cNvPr id="19" name="">
             <a:extLst xmlns:a="http://schemas.openxmlformats.org/drawingml/2006/main">
               <a:ext uri="{FF2B5EF4-FFF2-40B4-BE49-F238E27FC236}">
-                <a16:creationId xmlns:a16="http://schemas.microsoft.com/office/drawing/2014/main" id="{6D1234EB-CB1C-45F2-AC1D-F1954D2ADBD8}"/>
+                <a16:creationId xmlns:a16="http://schemas.microsoft.com/office/drawing/2014/main" id="{5E1FCFCD-C781-42DB-951B-CC077410BF2D}"/>
               </a:ext>
             </a:extLst>
           </p:cNvPr>
@@ -4507,7 +4507,7 @@
           <p:cNvPr id="20" name="">
             <a:extLst xmlns:a="http://schemas.openxmlformats.org/drawingml/2006/main">
               <a:ext uri="{FF2B5EF4-FFF2-40B4-BE49-F238E27FC236}">
-                <a16:creationId xmlns:a16="http://schemas.microsoft.com/office/drawing/2014/main" id="{1A67D3B5-7B58-4822-B7F9-5440E631E6C2}"/>
+                <a16:creationId xmlns:a16="http://schemas.microsoft.com/office/drawing/2014/main" id="{3BCC6F5E-9F34-49A7-8FE8-9535D5E1C694}"/>
               </a:ext>
             </a:extLst>
           </p:cNvPr>
@@ -4571,7 +4571,7 @@
           <p:cNvPr id="21" name="">
             <a:extLst xmlns:a="http://schemas.openxmlformats.org/drawingml/2006/main">
               <a:ext uri="{FF2B5EF4-FFF2-40B4-BE49-F238E27FC236}">
-                <a16:creationId xmlns:a16="http://schemas.microsoft.com/office/drawing/2014/main" id="{13D1D6A8-29B8-454A-9C08-947836F2DD3D}"/>
+                <a16:creationId xmlns:a16="http://schemas.microsoft.com/office/drawing/2014/main" id="{CD9C505F-59D6-4EDF-B617-C2CCDFDD61E7}"/>
               </a:ext>
             </a:extLst>
           </p:cNvPr>
@@ -4635,7 +4635,7 @@
           <p:cNvPr id="22" name="">
             <a:extLst xmlns:a="http://schemas.openxmlformats.org/drawingml/2006/main">
               <a:ext uri="{FF2B5EF4-FFF2-40B4-BE49-F238E27FC236}">
-                <a16:creationId xmlns:a16="http://schemas.microsoft.com/office/drawing/2014/main" id="{BEEBD034-2A0F-4DDB-A199-6D55DD661D64}"/>
+                <a16:creationId xmlns:a16="http://schemas.microsoft.com/office/drawing/2014/main" id="{D11B5E9B-AD40-42A7-BC66-E39C5E903EF7}"/>
               </a:ext>
             </a:extLst>
           </p:cNvPr>
@@ -4699,7 +4699,7 @@
           <p:cNvPr id="23" name="">
             <a:extLst xmlns:a="http://schemas.openxmlformats.org/drawingml/2006/main">
               <a:ext uri="{FF2B5EF4-FFF2-40B4-BE49-F238E27FC236}">
-                <a16:creationId xmlns:a16="http://schemas.microsoft.com/office/drawing/2014/main" id="{D9502BA1-2309-4285-BCBC-14B2C27021E3}"/>
+                <a16:creationId xmlns:a16="http://schemas.microsoft.com/office/drawing/2014/main" id="{AA433050-D333-494C-9D39-9B7312632D35}"/>
               </a:ext>
             </a:extLst>
           </p:cNvPr>
@@ -4732,7 +4732,7 @@
           <p:cNvPr id="24" name="">
             <a:extLst xmlns:a="http://schemas.openxmlformats.org/drawingml/2006/main">
               <a:ext uri="{FF2B5EF4-FFF2-40B4-BE49-F238E27FC236}">
-                <a16:creationId xmlns:a16="http://schemas.microsoft.com/office/drawing/2014/main" id="{39B01BCF-E029-4071-B598-B2A024906A42}"/>
+                <a16:creationId xmlns:a16="http://schemas.microsoft.com/office/drawing/2014/main" id="{E44A38D6-7B7A-4AEC-9CD2-FA20BFD3D33D}"/>
               </a:ext>
             </a:extLst>
           </p:cNvPr>
@@ -4765,7 +4765,7 @@
           <p:cNvPr id="25" name="">
             <a:extLst xmlns:a="http://schemas.openxmlformats.org/drawingml/2006/main">
               <a:ext uri="{FF2B5EF4-FFF2-40B4-BE49-F238E27FC236}">
-                <a16:creationId xmlns:a16="http://schemas.microsoft.com/office/drawing/2014/main" id="{84FE74D3-A45A-4BFB-8360-D652537021E4}"/>
+                <a16:creationId xmlns:a16="http://schemas.microsoft.com/office/drawing/2014/main" id="{53850199-BDFA-4B33-9E6D-E1517468A8A2}"/>
               </a:ext>
             </a:extLst>
           </p:cNvPr>
@@ -4829,7 +4829,7 @@
           <p:cNvPr id="26" name="">
             <a:extLst xmlns:a="http://schemas.openxmlformats.org/drawingml/2006/main">
               <a:ext uri="{FF2B5EF4-FFF2-40B4-BE49-F238E27FC236}">
-                <a16:creationId xmlns:a16="http://schemas.microsoft.com/office/drawing/2014/main" id="{8EDB248B-F507-4ED7-A915-9E7801505656}"/>
+                <a16:creationId xmlns:a16="http://schemas.microsoft.com/office/drawing/2014/main" id="{75FB02E3-141E-4BF3-8E7E-6932010A7230}"/>
               </a:ext>
             </a:extLst>
           </p:cNvPr>
@@ -4893,7 +4893,7 @@
           <p:cNvPr id="27" name="">
             <a:extLst xmlns:a="http://schemas.openxmlformats.org/drawingml/2006/main">
               <a:ext uri="{FF2B5EF4-FFF2-40B4-BE49-F238E27FC236}">
-                <a16:creationId xmlns:a16="http://schemas.microsoft.com/office/drawing/2014/main" id="{DD4963E4-795E-4306-9866-635D07586543}"/>
+                <a16:creationId xmlns:a16="http://schemas.microsoft.com/office/drawing/2014/main" id="{56AEEFD7-8C52-42FF-B2C2-7DA99F75ECD0}"/>
               </a:ext>
             </a:extLst>
           </p:cNvPr>
@@ -4957,7 +4957,7 @@
           <p:cNvPr id="28" name="">
             <a:extLst xmlns:a="http://schemas.openxmlformats.org/drawingml/2006/main">
               <a:ext uri="{FF2B5EF4-FFF2-40B4-BE49-F238E27FC236}">
-                <a16:creationId xmlns:a16="http://schemas.microsoft.com/office/drawing/2014/main" id="{1B42D62B-9E02-43A0-A568-FB18662FD95B}"/>
+                <a16:creationId xmlns:a16="http://schemas.microsoft.com/office/drawing/2014/main" id="{7A944DBF-1D61-4901-A46D-942A4C203610}"/>
               </a:ext>
             </a:extLst>
           </p:cNvPr>
@@ -5011,7 +5011,7 @@
                 <a:ea typeface="Malgun Gothic"/>
                 <a:cs typeface="Malgun Gothic"/>
               </a:rPr>
-              <a:t>Public deliverables updated on 2026-06-13</a:t>
+              <a:t>Public deliverables updated on 2026-06-18</a:t>
             </a:r>
           </a:p>
         </p:txBody>
@@ -5021,7 +5021,7 @@
           <p:cNvPr id="29" name="">
             <a:extLst xmlns:a="http://schemas.openxmlformats.org/drawingml/2006/main">
               <a:ext uri="{FF2B5EF4-FFF2-40B4-BE49-F238E27FC236}">
-                <a16:creationId xmlns:a16="http://schemas.microsoft.com/office/drawing/2014/main" id="{39AE8CAC-81F9-45D6-9134-75D1E5382271}"/>
+                <a16:creationId xmlns:a16="http://schemas.microsoft.com/office/drawing/2014/main" id="{FC754113-169F-44ED-8989-263C8174B939}"/>
               </a:ext>
             </a:extLst>
           </p:cNvPr>
@@ -5083,7 +5083,7 @@
     </p:spTree>
     <p:extLst>
       <p:ext uri="{BB962C8B-B14F-4D97-AF65-F5344CB8AC3E}">
-        <p14:creationId xmlns:p14="http://schemas.microsoft.com/office/powerpoint/2010/main" val="936719310"/>
+        <p14:creationId xmlns:p14="http://schemas.microsoft.com/office/powerpoint/2010/main" val="771697499"/>
       </p:ext>
     </p:extLst>
   </p:cSld>
@@ -5107,7 +5107,7 @@
           <p:cNvPr id="1" name="">
             <a:extLst xmlns:a="http://schemas.openxmlformats.org/drawingml/2006/main">
               <a:ext uri="{FF2B5EF4-FFF2-40B4-BE49-F238E27FC236}">
-                <a16:creationId xmlns:a16="http://schemas.microsoft.com/office/drawing/2014/main" id="{C0A11AEA-15DD-4326-B331-7847CE6C16E6}"/>
+                <a16:creationId xmlns:a16="http://schemas.microsoft.com/office/drawing/2014/main" id="{9346E750-1799-48B0-BB50-1498069C124F}"/>
               </a:ext>
             </a:extLst>
           </p:cNvPr>
@@ -5140,19 +5140,19 @@
           <p:cNvPr id="2" name="">
             <a:extLst xmlns:a="http://schemas.openxmlformats.org/drawingml/2006/main">
               <a:ext uri="{FF2B5EF4-FFF2-40B4-BE49-F238E27FC236}">
-                <a16:creationId xmlns:a16="http://schemas.microsoft.com/office/drawing/2014/main" id="{040EC4D5-6D53-447C-B9D3-359F4890297A}"/>
-              </a:ext>
-            </a:extLst>
-          </p:cNvPr>
-          <p:cNvSpPr>
-            <a:spLocks xmlns:a="http://schemas.openxmlformats.org/drawingml/2006/main" noGrp="1"/>
-          </p:cNvSpPr>
-          <p:nvPr/>
-        </p:nvSpPr>
-        <p:spPr>
-          <a:xfrm xmlns:a="http://schemas.openxmlformats.org/drawingml/2006/main">
-            <a:off x="7810500" y="-571500"/>
-            <a:ext cx="4953000" cy="4953000"/>
+                <a16:creationId xmlns:a16="http://schemas.microsoft.com/office/drawing/2014/main" id="{95B56DDA-956F-4CD3-8967-5CBF0699C224}"/>
+              </a:ext>
+            </a:extLst>
+          </p:cNvPr>
+          <p:cNvSpPr>
+            <a:spLocks xmlns:a="http://schemas.openxmlformats.org/drawingml/2006/main" noGrp="1"/>
+          </p:cNvSpPr>
+          <p:nvPr/>
+        </p:nvSpPr>
+        <p:spPr>
+          <a:xfrm xmlns:a="http://schemas.openxmlformats.org/drawingml/2006/main">
+            <a:off x="7810500" y="0"/>
+            <a:ext cx="4000500" cy="4000500"/>
           </a:xfrm>
           <a:prstGeom xmlns:a="http://schemas.openxmlformats.org/drawingml/2006/main" prst="rect">
             <a:avLst/>
@@ -5175,19 +5175,19 @@
           <p:cNvPr id="3" name="">
             <a:extLst xmlns:a="http://schemas.openxmlformats.org/drawingml/2006/main">
               <a:ext uri="{FF2B5EF4-FFF2-40B4-BE49-F238E27FC236}">
-                <a16:creationId xmlns:a16="http://schemas.microsoft.com/office/drawing/2014/main" id="{194B4718-4715-4E99-9AB7-BA50B0E009C1}"/>
-              </a:ext>
-            </a:extLst>
-          </p:cNvPr>
-          <p:cNvSpPr>
-            <a:spLocks xmlns:a="http://schemas.openxmlformats.org/drawingml/2006/main" noGrp="1"/>
-          </p:cNvSpPr>
-          <p:nvPr/>
-        </p:nvSpPr>
-        <p:spPr>
-          <a:xfrm xmlns:a="http://schemas.openxmlformats.org/drawingml/2006/main">
-            <a:off x="8477250" y="-285750"/>
-            <a:ext cx="4191000" cy="4191000"/>
+                <a16:creationId xmlns:a16="http://schemas.microsoft.com/office/drawing/2014/main" id="{D742E76F-F993-4E7E-B898-825423D828BB}"/>
+              </a:ext>
+            </a:extLst>
+          </p:cNvPr>
+          <p:cNvSpPr>
+            <a:spLocks xmlns:a="http://schemas.openxmlformats.org/drawingml/2006/main" noGrp="1"/>
+          </p:cNvSpPr>
+          <p:nvPr/>
+        </p:nvSpPr>
+        <p:spPr>
+          <a:xfrm xmlns:a="http://schemas.openxmlformats.org/drawingml/2006/main">
+            <a:off x="8572500" y="285750"/>
+            <a:ext cx="3333750" cy="3333750"/>
           </a:xfrm>
           <a:prstGeom xmlns:a="http://schemas.openxmlformats.org/drawingml/2006/main" prst="rect">
             <a:avLst/>
@@ -5210,19 +5210,19 @@
           <p:cNvPr id="4" name="">
             <a:extLst xmlns:a="http://schemas.openxmlformats.org/drawingml/2006/main">
               <a:ext uri="{FF2B5EF4-FFF2-40B4-BE49-F238E27FC236}">
-                <a16:creationId xmlns:a16="http://schemas.microsoft.com/office/drawing/2014/main" id="{A04C5067-0373-438E-B9F9-6435BEC35882}"/>
-              </a:ext>
-            </a:extLst>
-          </p:cNvPr>
-          <p:cNvSpPr>
-            <a:spLocks xmlns:a="http://schemas.openxmlformats.org/drawingml/2006/main" noGrp="1"/>
-          </p:cNvSpPr>
-          <p:nvPr/>
-        </p:nvSpPr>
-        <p:spPr>
-          <a:xfrm xmlns:a="http://schemas.openxmlformats.org/drawingml/2006/main">
-            <a:off x="9144000" y="0"/>
-            <a:ext cx="3429000" cy="3429000"/>
+                <a16:creationId xmlns:a16="http://schemas.microsoft.com/office/drawing/2014/main" id="{187B541F-38AB-4E9F-8E79-7D48AF7AE990}"/>
+              </a:ext>
+            </a:extLst>
+          </p:cNvPr>
+          <p:cNvSpPr>
+            <a:spLocks xmlns:a="http://schemas.openxmlformats.org/drawingml/2006/main" noGrp="1"/>
+          </p:cNvSpPr>
+          <p:nvPr/>
+        </p:nvSpPr>
+        <p:spPr>
+          <a:xfrm xmlns:a="http://schemas.openxmlformats.org/drawingml/2006/main">
+            <a:off x="9334500" y="571500"/>
+            <a:ext cx="2667000" cy="2667000"/>
           </a:xfrm>
           <a:prstGeom xmlns:a="http://schemas.openxmlformats.org/drawingml/2006/main" prst="rect">
             <a:avLst/>
@@ -5245,19 +5245,19 @@
           <p:cNvPr id="5" name="">
             <a:extLst xmlns:a="http://schemas.openxmlformats.org/drawingml/2006/main">
               <a:ext uri="{FF2B5EF4-FFF2-40B4-BE49-F238E27FC236}">
-                <a16:creationId xmlns:a16="http://schemas.microsoft.com/office/drawing/2014/main" id="{29A737F5-7490-46BC-975C-1533F4EBDCD6}"/>
-              </a:ext>
-            </a:extLst>
-          </p:cNvPr>
-          <p:cNvSpPr>
-            <a:spLocks xmlns:a="http://schemas.openxmlformats.org/drawingml/2006/main" noGrp="1"/>
-          </p:cNvSpPr>
-          <p:nvPr/>
-        </p:nvSpPr>
-        <p:spPr>
-          <a:xfrm xmlns:a="http://schemas.openxmlformats.org/drawingml/2006/main">
-            <a:off x="9810750" y="285750"/>
-            <a:ext cx="2667000" cy="2667000"/>
+                <a16:creationId xmlns:a16="http://schemas.microsoft.com/office/drawing/2014/main" id="{EAD7103D-3D6C-490A-9058-2B199D2A83B3}"/>
+              </a:ext>
+            </a:extLst>
+          </p:cNvPr>
+          <p:cNvSpPr>
+            <a:spLocks xmlns:a="http://schemas.openxmlformats.org/drawingml/2006/main" noGrp="1"/>
+          </p:cNvSpPr>
+          <p:nvPr/>
+        </p:nvSpPr>
+        <p:spPr>
+          <a:xfrm xmlns:a="http://schemas.openxmlformats.org/drawingml/2006/main">
+            <a:off x="10096500" y="857250"/>
+            <a:ext cx="2000250" cy="2000250"/>
           </a:xfrm>
           <a:prstGeom xmlns:a="http://schemas.openxmlformats.org/drawingml/2006/main" prst="rect">
             <a:avLst/>
@@ -5280,7 +5280,7 @@
           <p:cNvPr id="6" name="">
             <a:extLst xmlns:a="http://schemas.openxmlformats.org/drawingml/2006/main">
               <a:ext uri="{FF2B5EF4-FFF2-40B4-BE49-F238E27FC236}">
-                <a16:creationId xmlns:a16="http://schemas.microsoft.com/office/drawing/2014/main" id="{78B94870-A874-41B3-9423-69EB1B643668}"/>
+                <a16:creationId xmlns:a16="http://schemas.microsoft.com/office/drawing/2014/main" id="{6BCAEE8C-BBBD-4832-8209-9F86F98F096F}"/>
               </a:ext>
             </a:extLst>
           </p:cNvPr>
@@ -5344,7 +5344,7 @@
           <p:cNvPr id="7" name="">
             <a:extLst xmlns:a="http://schemas.openxmlformats.org/drawingml/2006/main">
               <a:ext uri="{FF2B5EF4-FFF2-40B4-BE49-F238E27FC236}">
-                <a16:creationId xmlns:a16="http://schemas.microsoft.com/office/drawing/2014/main" id="{C80E4163-CB9D-481C-A46A-E0E225F472CA}"/>
+                <a16:creationId xmlns:a16="http://schemas.microsoft.com/office/drawing/2014/main" id="{24C5438E-4C46-4904-83C1-6ED19FA12B0B}"/>
               </a:ext>
             </a:extLst>
           </p:cNvPr>
@@ -5408,7 +5408,7 @@
           <p:cNvPr id="8" name="">
             <a:extLst xmlns:a="http://schemas.openxmlformats.org/drawingml/2006/main">
               <a:ext uri="{FF2B5EF4-FFF2-40B4-BE49-F238E27FC236}">
-                <a16:creationId xmlns:a16="http://schemas.microsoft.com/office/drawing/2014/main" id="{3E8E28D9-859C-4B66-AFE3-7BD683E308C0}"/>
+                <a16:creationId xmlns:a16="http://schemas.microsoft.com/office/drawing/2014/main" id="{55766889-6EA0-4C9E-850A-C7C849AA339E}"/>
               </a:ext>
             </a:extLst>
           </p:cNvPr>
@@ -5472,7 +5472,7 @@
           <p:cNvPr id="9" name="">
             <a:extLst xmlns:a="http://schemas.openxmlformats.org/drawingml/2006/main">
               <a:ext uri="{FF2B5EF4-FFF2-40B4-BE49-F238E27FC236}">
-                <a16:creationId xmlns:a16="http://schemas.microsoft.com/office/drawing/2014/main" id="{A4EB677B-FE6B-490F-B9A8-F902D5A2869F}"/>
+                <a16:creationId xmlns:a16="http://schemas.microsoft.com/office/drawing/2014/main" id="{890BF69C-9D61-445A-B52B-9C76E2348DBD}"/>
               </a:ext>
             </a:extLst>
           </p:cNvPr>
@@ -5505,7 +5505,7 @@
           <p:cNvPr id="10" name="">
             <a:extLst xmlns:a="http://schemas.openxmlformats.org/drawingml/2006/main">
               <a:ext uri="{FF2B5EF4-FFF2-40B4-BE49-F238E27FC236}">
-                <a16:creationId xmlns:a16="http://schemas.microsoft.com/office/drawing/2014/main" id="{B1A5B1FE-3460-4DF4-B591-D2366ACF5D87}"/>
+                <a16:creationId xmlns:a16="http://schemas.microsoft.com/office/drawing/2014/main" id="{D10C22A4-1EC1-4118-B016-E4A5DA241D3C}"/>
               </a:ext>
             </a:extLst>
           </p:cNvPr>
@@ -5538,7 +5538,7 @@
           <p:cNvPr id="11" name="">
             <a:extLst xmlns:a="http://schemas.openxmlformats.org/drawingml/2006/main">
               <a:ext uri="{FF2B5EF4-FFF2-40B4-BE49-F238E27FC236}">
-                <a16:creationId xmlns:a16="http://schemas.microsoft.com/office/drawing/2014/main" id="{8EEA3341-486A-4DED-B014-69B33965C3BA}"/>
+                <a16:creationId xmlns:a16="http://schemas.microsoft.com/office/drawing/2014/main" id="{0C7783AE-81E9-47D0-A8A9-3A90DF1D60C5}"/>
               </a:ext>
             </a:extLst>
           </p:cNvPr>
@@ -5602,7 +5602,7 @@
           <p:cNvPr id="12" name="">
             <a:extLst xmlns:a="http://schemas.openxmlformats.org/drawingml/2006/main">
               <a:ext uri="{FF2B5EF4-FFF2-40B4-BE49-F238E27FC236}">
-                <a16:creationId xmlns:a16="http://schemas.microsoft.com/office/drawing/2014/main" id="{5ED6E70A-362A-4AF3-B397-4FE7F73C2910}"/>
+                <a16:creationId xmlns:a16="http://schemas.microsoft.com/office/drawing/2014/main" id="{956FCF43-9C8C-4C4C-B014-E5BAD4F6A173}"/>
               </a:ext>
             </a:extLst>
           </p:cNvPr>
@@ -5666,7 +5666,7 @@
           <p:cNvPr id="13" name="">
             <a:extLst xmlns:a="http://schemas.openxmlformats.org/drawingml/2006/main">
               <a:ext uri="{FF2B5EF4-FFF2-40B4-BE49-F238E27FC236}">
-                <a16:creationId xmlns:a16="http://schemas.microsoft.com/office/drawing/2014/main" id="{8C4F96BA-2312-464E-9DC9-1BD095364774}"/>
+                <a16:creationId xmlns:a16="http://schemas.microsoft.com/office/drawing/2014/main" id="{7881C3F1-24DD-4A4A-AD58-B172AD1F32DC}"/>
               </a:ext>
             </a:extLst>
           </p:cNvPr>
@@ -5730,7 +5730,7 @@
           <p:cNvPr id="14" name="">
             <a:extLst xmlns:a="http://schemas.openxmlformats.org/drawingml/2006/main">
               <a:ext uri="{FF2B5EF4-FFF2-40B4-BE49-F238E27FC236}">
-                <a16:creationId xmlns:a16="http://schemas.microsoft.com/office/drawing/2014/main" id="{D5D65A7A-E311-4641-8646-B2C7EF544DED}"/>
+                <a16:creationId xmlns:a16="http://schemas.microsoft.com/office/drawing/2014/main" id="{80FA1541-7F12-4B29-B1F2-82064CEF6AC3}"/>
               </a:ext>
             </a:extLst>
           </p:cNvPr>
@@ -5763,7 +5763,7 @@
           <p:cNvPr id="15" name="">
             <a:extLst xmlns:a="http://schemas.openxmlformats.org/drawingml/2006/main">
               <a:ext uri="{FF2B5EF4-FFF2-40B4-BE49-F238E27FC236}">
-                <a16:creationId xmlns:a16="http://schemas.microsoft.com/office/drawing/2014/main" id="{D117EC69-D6A8-418B-B44D-813E18D79BB3}"/>
+                <a16:creationId xmlns:a16="http://schemas.microsoft.com/office/drawing/2014/main" id="{7094496D-C8E1-47B8-8197-63DBC876727D}"/>
               </a:ext>
             </a:extLst>
           </p:cNvPr>
@@ -5796,7 +5796,7 @@
           <p:cNvPr id="16" name="">
             <a:extLst xmlns:a="http://schemas.openxmlformats.org/drawingml/2006/main">
               <a:ext uri="{FF2B5EF4-FFF2-40B4-BE49-F238E27FC236}">
-                <a16:creationId xmlns:a16="http://schemas.microsoft.com/office/drawing/2014/main" id="{D691A8D9-8B5B-42E0-8FE1-77C7D248422C}"/>
+                <a16:creationId xmlns:a16="http://schemas.microsoft.com/office/drawing/2014/main" id="{672E6326-47FF-4F29-88E3-3372B345CD00}"/>
               </a:ext>
             </a:extLst>
           </p:cNvPr>
@@ -5860,7 +5860,7 @@
           <p:cNvPr id="17" name="">
             <a:extLst xmlns:a="http://schemas.openxmlformats.org/drawingml/2006/main">
               <a:ext uri="{FF2B5EF4-FFF2-40B4-BE49-F238E27FC236}">
-                <a16:creationId xmlns:a16="http://schemas.microsoft.com/office/drawing/2014/main" id="{79FF5D1D-C776-4049-B3E0-324233F48CF6}"/>
+                <a16:creationId xmlns:a16="http://schemas.microsoft.com/office/drawing/2014/main" id="{959A6106-9A48-47EF-B9EE-DB3369669692}"/>
               </a:ext>
             </a:extLst>
           </p:cNvPr>
@@ -5924,7 +5924,7 @@
           <p:cNvPr id="18" name="">
             <a:extLst xmlns:a="http://schemas.openxmlformats.org/drawingml/2006/main">
               <a:ext uri="{FF2B5EF4-FFF2-40B4-BE49-F238E27FC236}">
-                <a16:creationId xmlns:a16="http://schemas.microsoft.com/office/drawing/2014/main" id="{2240F9FA-A66D-4AE2-A693-7B4DFB62E0CC}"/>
+                <a16:creationId xmlns:a16="http://schemas.microsoft.com/office/drawing/2014/main" id="{6665DF31-0760-4DF6-AA68-FE534D855596}"/>
               </a:ext>
             </a:extLst>
           </p:cNvPr>
@@ -5988,7 +5988,7 @@
           <p:cNvPr id="19" name="">
             <a:extLst xmlns:a="http://schemas.openxmlformats.org/drawingml/2006/main">
               <a:ext uri="{FF2B5EF4-FFF2-40B4-BE49-F238E27FC236}">
-                <a16:creationId xmlns:a16="http://schemas.microsoft.com/office/drawing/2014/main" id="{717B87EE-A413-43D3-BEC1-F07A90AEDC54}"/>
+                <a16:creationId xmlns:a16="http://schemas.microsoft.com/office/drawing/2014/main" id="{09B2E6E8-2394-4E37-B48F-F20C4CCDB374}"/>
               </a:ext>
             </a:extLst>
           </p:cNvPr>
@@ -6021,7 +6021,7 @@
           <p:cNvPr id="20" name="">
             <a:extLst xmlns:a="http://schemas.openxmlformats.org/drawingml/2006/main">
               <a:ext uri="{FF2B5EF4-FFF2-40B4-BE49-F238E27FC236}">
-                <a16:creationId xmlns:a16="http://schemas.microsoft.com/office/drawing/2014/main" id="{7D773938-4D35-4BCC-A59C-DC7FB7755320}"/>
+                <a16:creationId xmlns:a16="http://schemas.microsoft.com/office/drawing/2014/main" id="{CD6742EB-E611-4E67-9C5A-2654A1B49272}"/>
               </a:ext>
             </a:extLst>
           </p:cNvPr>
@@ -6054,7 +6054,7 @@
           <p:cNvPr id="21" name="">
             <a:extLst xmlns:a="http://schemas.openxmlformats.org/drawingml/2006/main">
               <a:ext uri="{FF2B5EF4-FFF2-40B4-BE49-F238E27FC236}">
-                <a16:creationId xmlns:a16="http://schemas.microsoft.com/office/drawing/2014/main" id="{B6C16C64-8613-4DFA-8844-9C32BD8D4E0D}"/>
+                <a16:creationId xmlns:a16="http://schemas.microsoft.com/office/drawing/2014/main" id="{8622CCF5-2DAB-4A8E-8166-3935AA2EA914}"/>
               </a:ext>
             </a:extLst>
           </p:cNvPr>
@@ -6118,7 +6118,7 @@
           <p:cNvPr id="22" name="">
             <a:extLst xmlns:a="http://schemas.openxmlformats.org/drawingml/2006/main">
               <a:ext uri="{FF2B5EF4-FFF2-40B4-BE49-F238E27FC236}">
-                <a16:creationId xmlns:a16="http://schemas.microsoft.com/office/drawing/2014/main" id="{F3D87647-7BA1-47A0-9E91-4BB9D4DFC03E}"/>
+                <a16:creationId xmlns:a16="http://schemas.microsoft.com/office/drawing/2014/main" id="{051A38FF-78E2-43B7-84BC-15129C9886FA}"/>
               </a:ext>
             </a:extLst>
           </p:cNvPr>
@@ -6182,7 +6182,7 @@
           <p:cNvPr id="23" name="">
             <a:extLst xmlns:a="http://schemas.openxmlformats.org/drawingml/2006/main">
               <a:ext uri="{FF2B5EF4-FFF2-40B4-BE49-F238E27FC236}">
-                <a16:creationId xmlns:a16="http://schemas.microsoft.com/office/drawing/2014/main" id="{07DAC646-7032-4149-8E7D-7E2B350CF804}"/>
+                <a16:creationId xmlns:a16="http://schemas.microsoft.com/office/drawing/2014/main" id="{ED8CA05F-6A3D-44AA-B066-EEE96A110C3F}"/>
               </a:ext>
             </a:extLst>
           </p:cNvPr>
@@ -6246,7 +6246,7 @@
           <p:cNvPr id="24" name="">
             <a:extLst xmlns:a="http://schemas.openxmlformats.org/drawingml/2006/main">
               <a:ext uri="{FF2B5EF4-FFF2-40B4-BE49-F238E27FC236}">
-                <a16:creationId xmlns:a16="http://schemas.microsoft.com/office/drawing/2014/main" id="{AF2F5BC8-986D-4FD3-A6AD-A855755A913C}"/>
+                <a16:creationId xmlns:a16="http://schemas.microsoft.com/office/drawing/2014/main" id="{4E410AE2-A1EC-4BFA-89D7-8686F88256B9}"/>
               </a:ext>
             </a:extLst>
           </p:cNvPr>
@@ -6310,7 +6310,7 @@
           <p:cNvPr id="25" name="">
             <a:extLst xmlns:a="http://schemas.openxmlformats.org/drawingml/2006/main">
               <a:ext uri="{FF2B5EF4-FFF2-40B4-BE49-F238E27FC236}">
-                <a16:creationId xmlns:a16="http://schemas.microsoft.com/office/drawing/2014/main" id="{813483A9-D103-4F0C-8538-1CF990D62AA4}"/>
+                <a16:creationId xmlns:a16="http://schemas.microsoft.com/office/drawing/2014/main" id="{7D4A1990-F06B-4AF2-95CE-09C81C0787B9}"/>
               </a:ext>
             </a:extLst>
           </p:cNvPr>
@@ -6374,7 +6374,7 @@
           <p:cNvPr id="26" name="">
             <a:extLst xmlns:a="http://schemas.openxmlformats.org/drawingml/2006/main">
               <a:ext uri="{FF2B5EF4-FFF2-40B4-BE49-F238E27FC236}">
-                <a16:creationId xmlns:a16="http://schemas.microsoft.com/office/drawing/2014/main" id="{5FF3AF22-EBA8-4DA6-BEE0-22C4CD0552FA}"/>
+                <a16:creationId xmlns:a16="http://schemas.microsoft.com/office/drawing/2014/main" id="{DDC5AB55-DD8D-4BA6-810A-17EE5B6BD325}"/>
               </a:ext>
             </a:extLst>
           </p:cNvPr>
@@ -6438,7 +6438,7 @@
           <p:cNvPr id="27" name="">
             <a:extLst xmlns:a="http://schemas.openxmlformats.org/drawingml/2006/main">
               <a:ext uri="{FF2B5EF4-FFF2-40B4-BE49-F238E27FC236}">
-                <a16:creationId xmlns:a16="http://schemas.microsoft.com/office/drawing/2014/main" id="{7F6B713A-FF6A-4496-8A15-DDE13F0145D6}"/>
+                <a16:creationId xmlns:a16="http://schemas.microsoft.com/office/drawing/2014/main" id="{178BB07D-82B7-42D5-B72F-71F29CB27BFB}"/>
               </a:ext>
             </a:extLst>
           </p:cNvPr>
@@ -6502,7 +6502,7 @@
           <p:cNvPr id="28" name="">
             <a:extLst xmlns:a="http://schemas.openxmlformats.org/drawingml/2006/main">
               <a:ext uri="{FF2B5EF4-FFF2-40B4-BE49-F238E27FC236}">
-                <a16:creationId xmlns:a16="http://schemas.microsoft.com/office/drawing/2014/main" id="{687CD372-E7F8-4B9F-9296-82B2B122E53E}"/>
+                <a16:creationId xmlns:a16="http://schemas.microsoft.com/office/drawing/2014/main" id="{BFD38CDF-EA7D-47DF-A0D6-096D23A0CA67}"/>
               </a:ext>
             </a:extLst>
           </p:cNvPr>
@@ -6533,7 +6533,7 @@
     </p:spTree>
     <p:extLst>
       <p:ext uri="{BB962C8B-B14F-4D97-AF65-F5344CB8AC3E}">
-        <p14:creationId xmlns:p14="http://schemas.microsoft.com/office/powerpoint/2010/main" val="349318639"/>
+        <p14:creationId xmlns:p14="http://schemas.microsoft.com/office/powerpoint/2010/main" val="547564360"/>
       </p:ext>
     </p:extLst>
   </p:cSld>
@@ -6557,7 +6557,7 @@
           <p:cNvPr id="1" name="">
             <a:extLst xmlns:a="http://schemas.openxmlformats.org/drawingml/2006/main">
               <a:ext uri="{FF2B5EF4-FFF2-40B4-BE49-F238E27FC236}">
-                <a16:creationId xmlns:a16="http://schemas.microsoft.com/office/drawing/2014/main" id="{A72E10A9-0594-42AA-9624-2C6C52EC75A7}"/>
+                <a16:creationId xmlns:a16="http://schemas.microsoft.com/office/drawing/2014/main" id="{DA87EB6E-EE62-4F2E-99E7-9D6DBC67628C}"/>
               </a:ext>
             </a:extLst>
           </p:cNvPr>
@@ -6590,19 +6590,19 @@
           <p:cNvPr id="2" name="">
             <a:extLst xmlns:a="http://schemas.openxmlformats.org/drawingml/2006/main">
               <a:ext uri="{FF2B5EF4-FFF2-40B4-BE49-F238E27FC236}">
-                <a16:creationId xmlns:a16="http://schemas.microsoft.com/office/drawing/2014/main" id="{B11F6A99-53B2-45FB-A79C-C911604A9626}"/>
-              </a:ext>
-            </a:extLst>
-          </p:cNvPr>
-          <p:cNvSpPr>
-            <a:spLocks xmlns:a="http://schemas.openxmlformats.org/drawingml/2006/main" noGrp="1"/>
-          </p:cNvSpPr>
-          <p:nvPr/>
-        </p:nvSpPr>
-        <p:spPr>
-          <a:xfrm xmlns:a="http://schemas.openxmlformats.org/drawingml/2006/main">
-            <a:off x="7810500" y="-571500"/>
-            <a:ext cx="4953000" cy="4953000"/>
+                <a16:creationId xmlns:a16="http://schemas.microsoft.com/office/drawing/2014/main" id="{C0E9A9E2-DFD1-4F2D-82AE-11FCE3C0919B}"/>
+              </a:ext>
+            </a:extLst>
+          </p:cNvPr>
+          <p:cNvSpPr>
+            <a:spLocks xmlns:a="http://schemas.openxmlformats.org/drawingml/2006/main" noGrp="1"/>
+          </p:cNvSpPr>
+          <p:nvPr/>
+        </p:nvSpPr>
+        <p:spPr>
+          <a:xfrm xmlns:a="http://schemas.openxmlformats.org/drawingml/2006/main">
+            <a:off x="7810500" y="0"/>
+            <a:ext cx="4000500" cy="4000500"/>
           </a:xfrm>
           <a:prstGeom xmlns:a="http://schemas.openxmlformats.org/drawingml/2006/main" prst="rect">
             <a:avLst/>
@@ -6625,19 +6625,19 @@
           <p:cNvPr id="3" name="">
             <a:extLst xmlns:a="http://schemas.openxmlformats.org/drawingml/2006/main">
               <a:ext uri="{FF2B5EF4-FFF2-40B4-BE49-F238E27FC236}">
-                <a16:creationId xmlns:a16="http://schemas.microsoft.com/office/drawing/2014/main" id="{4A5F900D-F542-4654-90A7-38342C519A36}"/>
-              </a:ext>
-            </a:extLst>
-          </p:cNvPr>
-          <p:cNvSpPr>
-            <a:spLocks xmlns:a="http://schemas.openxmlformats.org/drawingml/2006/main" noGrp="1"/>
-          </p:cNvSpPr>
-          <p:nvPr/>
-        </p:nvSpPr>
-        <p:spPr>
-          <a:xfrm xmlns:a="http://schemas.openxmlformats.org/drawingml/2006/main">
-            <a:off x="8477250" y="-285750"/>
-            <a:ext cx="4191000" cy="4191000"/>
+                <a16:creationId xmlns:a16="http://schemas.microsoft.com/office/drawing/2014/main" id="{09F83EB3-6EA7-4E8C-A398-4C4426EEA018}"/>
+              </a:ext>
+            </a:extLst>
+          </p:cNvPr>
+          <p:cNvSpPr>
+            <a:spLocks xmlns:a="http://schemas.openxmlformats.org/drawingml/2006/main" noGrp="1"/>
+          </p:cNvSpPr>
+          <p:nvPr/>
+        </p:nvSpPr>
+        <p:spPr>
+          <a:xfrm xmlns:a="http://schemas.openxmlformats.org/drawingml/2006/main">
+            <a:off x="8572500" y="285750"/>
+            <a:ext cx="3333750" cy="3333750"/>
           </a:xfrm>
           <a:prstGeom xmlns:a="http://schemas.openxmlformats.org/drawingml/2006/main" prst="rect">
             <a:avLst/>
@@ -6660,19 +6660,19 @@
           <p:cNvPr id="4" name="">
             <a:extLst xmlns:a="http://schemas.openxmlformats.org/drawingml/2006/main">
               <a:ext uri="{FF2B5EF4-FFF2-40B4-BE49-F238E27FC236}">
-                <a16:creationId xmlns:a16="http://schemas.microsoft.com/office/drawing/2014/main" id="{0A561350-21D6-4F4C-B6E8-BA13F6191100}"/>
-              </a:ext>
-            </a:extLst>
-          </p:cNvPr>
-          <p:cNvSpPr>
-            <a:spLocks xmlns:a="http://schemas.openxmlformats.org/drawingml/2006/main" noGrp="1"/>
-          </p:cNvSpPr>
-          <p:nvPr/>
-        </p:nvSpPr>
-        <p:spPr>
-          <a:xfrm xmlns:a="http://schemas.openxmlformats.org/drawingml/2006/main">
-            <a:off x="9144000" y="0"/>
-            <a:ext cx="3429000" cy="3429000"/>
+                <a16:creationId xmlns:a16="http://schemas.microsoft.com/office/drawing/2014/main" id="{9D8B7509-14C3-45B6-ABF4-B3FEEAC6BF23}"/>
+              </a:ext>
+            </a:extLst>
+          </p:cNvPr>
+          <p:cNvSpPr>
+            <a:spLocks xmlns:a="http://schemas.openxmlformats.org/drawingml/2006/main" noGrp="1"/>
+          </p:cNvSpPr>
+          <p:nvPr/>
+        </p:nvSpPr>
+        <p:spPr>
+          <a:xfrm xmlns:a="http://schemas.openxmlformats.org/drawingml/2006/main">
+            <a:off x="9334500" y="571500"/>
+            <a:ext cx="2667000" cy="2667000"/>
           </a:xfrm>
           <a:prstGeom xmlns:a="http://schemas.openxmlformats.org/drawingml/2006/main" prst="rect">
             <a:avLst/>
@@ -6695,19 +6695,19 @@
           <p:cNvPr id="5" name="">
             <a:extLst xmlns:a="http://schemas.openxmlformats.org/drawingml/2006/main">
               <a:ext uri="{FF2B5EF4-FFF2-40B4-BE49-F238E27FC236}">
-                <a16:creationId xmlns:a16="http://schemas.microsoft.com/office/drawing/2014/main" id="{F8D9058E-8B52-44A7-8116-D495FB16776C}"/>
-              </a:ext>
-            </a:extLst>
-          </p:cNvPr>
-          <p:cNvSpPr>
-            <a:spLocks xmlns:a="http://schemas.openxmlformats.org/drawingml/2006/main" noGrp="1"/>
-          </p:cNvSpPr>
-          <p:nvPr/>
-        </p:nvSpPr>
-        <p:spPr>
-          <a:xfrm xmlns:a="http://schemas.openxmlformats.org/drawingml/2006/main">
-            <a:off x="9810750" y="285750"/>
-            <a:ext cx="2667000" cy="2667000"/>
+                <a16:creationId xmlns:a16="http://schemas.microsoft.com/office/drawing/2014/main" id="{21116102-DB89-48D8-9601-3920EF10872C}"/>
+              </a:ext>
+            </a:extLst>
+          </p:cNvPr>
+          <p:cNvSpPr>
+            <a:spLocks xmlns:a="http://schemas.openxmlformats.org/drawingml/2006/main" noGrp="1"/>
+          </p:cNvSpPr>
+          <p:nvPr/>
+        </p:nvSpPr>
+        <p:spPr>
+          <a:xfrm xmlns:a="http://schemas.openxmlformats.org/drawingml/2006/main">
+            <a:off x="10096500" y="857250"/>
+            <a:ext cx="2000250" cy="2000250"/>
           </a:xfrm>
           <a:prstGeom xmlns:a="http://schemas.openxmlformats.org/drawingml/2006/main" prst="rect">
             <a:avLst/>
@@ -6730,7 +6730,7 @@
           <p:cNvPr id="6" name="">
             <a:extLst xmlns:a="http://schemas.openxmlformats.org/drawingml/2006/main">
               <a:ext uri="{FF2B5EF4-FFF2-40B4-BE49-F238E27FC236}">
-                <a16:creationId xmlns:a16="http://schemas.microsoft.com/office/drawing/2014/main" id="{A44929F1-784D-4A6F-BC6C-112391E59CE9}"/>
+                <a16:creationId xmlns:a16="http://schemas.microsoft.com/office/drawing/2014/main" id="{EE602C5E-AEAE-408F-8F0D-E6A37F56E086}"/>
               </a:ext>
             </a:extLst>
           </p:cNvPr>
@@ -6794,7 +6794,7 @@
           <p:cNvPr id="7" name="">
             <a:extLst xmlns:a="http://schemas.openxmlformats.org/drawingml/2006/main">
               <a:ext uri="{FF2B5EF4-FFF2-40B4-BE49-F238E27FC236}">
-                <a16:creationId xmlns:a16="http://schemas.microsoft.com/office/drawing/2014/main" id="{A5418008-C3FF-4868-A359-D03BAB2B7B28}"/>
+                <a16:creationId xmlns:a16="http://schemas.microsoft.com/office/drawing/2014/main" id="{D2C32CED-A4FC-4677-9ECE-69D5C025D125}"/>
               </a:ext>
             </a:extLst>
           </p:cNvPr>
@@ -6858,7 +6858,7 @@
           <p:cNvPr id="8" name="">
             <a:extLst xmlns:a="http://schemas.openxmlformats.org/drawingml/2006/main">
               <a:ext uri="{FF2B5EF4-FFF2-40B4-BE49-F238E27FC236}">
-                <a16:creationId xmlns:a16="http://schemas.microsoft.com/office/drawing/2014/main" id="{366C9F2D-4FE2-47BE-BC5A-326B29FE77B2}"/>
+                <a16:creationId xmlns:a16="http://schemas.microsoft.com/office/drawing/2014/main" id="{44BD535F-C54E-4901-9411-07829B5E8F8B}"/>
               </a:ext>
             </a:extLst>
           </p:cNvPr>
@@ -6922,7 +6922,7 @@
           <p:cNvPr id="9" name="">
             <a:extLst xmlns:a="http://schemas.openxmlformats.org/drawingml/2006/main">
               <a:ext uri="{FF2B5EF4-FFF2-40B4-BE49-F238E27FC236}">
-                <a16:creationId xmlns:a16="http://schemas.microsoft.com/office/drawing/2014/main" id="{2A10B84A-F0CB-4B33-B044-ED3353112E0B}"/>
+                <a16:creationId xmlns:a16="http://schemas.microsoft.com/office/drawing/2014/main" id="{50A361AF-7D28-4BD2-8CDF-1AAC05504C96}"/>
               </a:ext>
             </a:extLst>
           </p:cNvPr>
@@ -6955,7 +6955,7 @@
           <p:cNvPr id="10" name="">
             <a:extLst xmlns:a="http://schemas.openxmlformats.org/drawingml/2006/main">
               <a:ext uri="{FF2B5EF4-FFF2-40B4-BE49-F238E27FC236}">
-                <a16:creationId xmlns:a16="http://schemas.microsoft.com/office/drawing/2014/main" id="{DA78B32A-C27F-4A2B-9929-DBBB519949CB}"/>
+                <a16:creationId xmlns:a16="http://schemas.microsoft.com/office/drawing/2014/main" id="{F858F40E-73E1-4087-B4A1-C905E711D604}"/>
               </a:ext>
             </a:extLst>
           </p:cNvPr>
@@ -6988,7 +6988,7 @@
           <p:cNvPr id="11" name="">
             <a:extLst xmlns:a="http://schemas.openxmlformats.org/drawingml/2006/main">
               <a:ext uri="{FF2B5EF4-FFF2-40B4-BE49-F238E27FC236}">
-                <a16:creationId xmlns:a16="http://schemas.microsoft.com/office/drawing/2014/main" id="{646CD075-E57B-4650-B7AE-20438330B629}"/>
+                <a16:creationId xmlns:a16="http://schemas.microsoft.com/office/drawing/2014/main" id="{D0D45520-E977-41F9-AC2F-2A4E49CF4660}"/>
               </a:ext>
             </a:extLst>
           </p:cNvPr>
@@ -7052,7 +7052,7 @@
           <p:cNvPr id="12" name="">
             <a:extLst xmlns:a="http://schemas.openxmlformats.org/drawingml/2006/main">
               <a:ext uri="{FF2B5EF4-FFF2-40B4-BE49-F238E27FC236}">
-                <a16:creationId xmlns:a16="http://schemas.microsoft.com/office/drawing/2014/main" id="{0E8D4130-3E28-4D73-92A2-1711B08F75A1}"/>
+                <a16:creationId xmlns:a16="http://schemas.microsoft.com/office/drawing/2014/main" id="{F7299692-680F-453A-85D3-B79D84D5449C}"/>
               </a:ext>
             </a:extLst>
           </p:cNvPr>
@@ -7116,7 +7116,7 @@
           <p:cNvPr id="13" name="">
             <a:extLst xmlns:a="http://schemas.openxmlformats.org/drawingml/2006/main">
               <a:ext uri="{FF2B5EF4-FFF2-40B4-BE49-F238E27FC236}">
-                <a16:creationId xmlns:a16="http://schemas.microsoft.com/office/drawing/2014/main" id="{82518B7A-8F40-457A-A7D5-878932308C98}"/>
+                <a16:creationId xmlns:a16="http://schemas.microsoft.com/office/drawing/2014/main" id="{1FFCA0A5-91AE-4772-8C16-8F3206578DFA}"/>
               </a:ext>
             </a:extLst>
           </p:cNvPr>
@@ -7149,7 +7149,7 @@
           <p:cNvPr id="14" name="">
             <a:extLst xmlns:a="http://schemas.openxmlformats.org/drawingml/2006/main">
               <a:ext uri="{FF2B5EF4-FFF2-40B4-BE49-F238E27FC236}">
-                <a16:creationId xmlns:a16="http://schemas.microsoft.com/office/drawing/2014/main" id="{22EADF6C-6206-4C0E-A8CD-648C3E6203A3}"/>
+                <a16:creationId xmlns:a16="http://schemas.microsoft.com/office/drawing/2014/main" id="{6926850E-3995-4DED-AF72-6C1B4704DA79}"/>
               </a:ext>
             </a:extLst>
           </p:cNvPr>
@@ -7182,7 +7182,7 @@
           <p:cNvPr id="15" name="">
             <a:extLst xmlns:a="http://schemas.openxmlformats.org/drawingml/2006/main">
               <a:ext uri="{FF2B5EF4-FFF2-40B4-BE49-F238E27FC236}">
-                <a16:creationId xmlns:a16="http://schemas.microsoft.com/office/drawing/2014/main" id="{09ADE647-4635-43BB-A08B-417606DE6B71}"/>
+                <a16:creationId xmlns:a16="http://schemas.microsoft.com/office/drawing/2014/main" id="{5300FD7B-B2F7-4C9E-95B1-654ADF0F33AE}"/>
               </a:ext>
             </a:extLst>
           </p:cNvPr>
@@ -7215,7 +7215,7 @@
           <p:cNvPr id="16" name="">
             <a:extLst xmlns:a="http://schemas.openxmlformats.org/drawingml/2006/main">
               <a:ext uri="{FF2B5EF4-FFF2-40B4-BE49-F238E27FC236}">
-                <a16:creationId xmlns:a16="http://schemas.microsoft.com/office/drawing/2014/main" id="{41EAF237-1F03-4BF5-9316-7E76C6F07DC7}"/>
+                <a16:creationId xmlns:a16="http://schemas.microsoft.com/office/drawing/2014/main" id="{F54A7FFC-D77F-4E9A-83FF-E50316428E08}"/>
               </a:ext>
             </a:extLst>
           </p:cNvPr>
@@ -7248,7 +7248,7 @@
           <p:cNvPr id="17" name="">
             <a:extLst xmlns:a="http://schemas.openxmlformats.org/drawingml/2006/main">
               <a:ext uri="{FF2B5EF4-FFF2-40B4-BE49-F238E27FC236}">
-                <a16:creationId xmlns:a16="http://schemas.microsoft.com/office/drawing/2014/main" id="{3EB06176-E376-43A2-B374-840807F7B2FB}"/>
+                <a16:creationId xmlns:a16="http://schemas.microsoft.com/office/drawing/2014/main" id="{9F0B19FB-A019-4ADE-A82F-A6AC4E053ABC}"/>
               </a:ext>
             </a:extLst>
           </p:cNvPr>
@@ -7312,7 +7312,7 @@
           <p:cNvPr id="18" name="">
             <a:extLst xmlns:a="http://schemas.openxmlformats.org/drawingml/2006/main">
               <a:ext uri="{FF2B5EF4-FFF2-40B4-BE49-F238E27FC236}">
-                <a16:creationId xmlns:a16="http://schemas.microsoft.com/office/drawing/2014/main" id="{70EF8A82-CFD0-4FAE-BE5D-996B979A143F}"/>
+                <a16:creationId xmlns:a16="http://schemas.microsoft.com/office/drawing/2014/main" id="{15619548-1344-4A63-8612-D67D703812B2}"/>
               </a:ext>
             </a:extLst>
           </p:cNvPr>
@@ -7376,7 +7376,7 @@
           <p:cNvPr id="19" name="">
             <a:extLst xmlns:a="http://schemas.openxmlformats.org/drawingml/2006/main">
               <a:ext uri="{FF2B5EF4-FFF2-40B4-BE49-F238E27FC236}">
-                <a16:creationId xmlns:a16="http://schemas.microsoft.com/office/drawing/2014/main" id="{4A67BA6F-DDBC-42EB-BBB6-DCEA902134F5}"/>
+                <a16:creationId xmlns:a16="http://schemas.microsoft.com/office/drawing/2014/main" id="{CA62B38B-C33E-4DAE-8D9E-A3B107A70C88}"/>
               </a:ext>
             </a:extLst>
           </p:cNvPr>
@@ -7409,7 +7409,7 @@
           <p:cNvPr id="20" name="">
             <a:extLst xmlns:a="http://schemas.openxmlformats.org/drawingml/2006/main">
               <a:ext uri="{FF2B5EF4-FFF2-40B4-BE49-F238E27FC236}">
-                <a16:creationId xmlns:a16="http://schemas.microsoft.com/office/drawing/2014/main" id="{43145ADE-ECA5-45FD-B1D4-0A942587E80E}"/>
+                <a16:creationId xmlns:a16="http://schemas.microsoft.com/office/drawing/2014/main" id="{5C8D6C33-73EF-4822-86E6-C48808A60D87}"/>
               </a:ext>
             </a:extLst>
           </p:cNvPr>
@@ -7442,7 +7442,7 @@
           <p:cNvPr id="21" name="">
             <a:extLst xmlns:a="http://schemas.openxmlformats.org/drawingml/2006/main">
               <a:ext uri="{FF2B5EF4-FFF2-40B4-BE49-F238E27FC236}">
-                <a16:creationId xmlns:a16="http://schemas.microsoft.com/office/drawing/2014/main" id="{039085B2-2AEC-4C38-AC0D-9A10D7B84334}"/>
+                <a16:creationId xmlns:a16="http://schemas.microsoft.com/office/drawing/2014/main" id="{6D55CF58-C7F7-4E23-A25E-AECE5838989F}"/>
               </a:ext>
             </a:extLst>
           </p:cNvPr>
@@ -7475,7 +7475,7 @@
           <p:cNvPr id="22" name="">
             <a:extLst xmlns:a="http://schemas.openxmlformats.org/drawingml/2006/main">
               <a:ext uri="{FF2B5EF4-FFF2-40B4-BE49-F238E27FC236}">
-                <a16:creationId xmlns:a16="http://schemas.microsoft.com/office/drawing/2014/main" id="{0216E6C0-6A23-493C-A21B-9852C03BD405}"/>
+                <a16:creationId xmlns:a16="http://schemas.microsoft.com/office/drawing/2014/main" id="{074CC719-D040-4F1E-ACAE-A48FE9DD48C0}"/>
               </a:ext>
             </a:extLst>
           </p:cNvPr>
@@ -7508,7 +7508,7 @@
           <p:cNvPr id="23" name="">
             <a:extLst xmlns:a="http://schemas.openxmlformats.org/drawingml/2006/main">
               <a:ext uri="{FF2B5EF4-FFF2-40B4-BE49-F238E27FC236}">
-                <a16:creationId xmlns:a16="http://schemas.microsoft.com/office/drawing/2014/main" id="{E60856EA-9480-49CB-B4AD-04951845122C}"/>
+                <a16:creationId xmlns:a16="http://schemas.microsoft.com/office/drawing/2014/main" id="{F3A8381B-AB93-415E-9CD9-B8FDFE088490}"/>
               </a:ext>
             </a:extLst>
           </p:cNvPr>
@@ -7572,7 +7572,7 @@
           <p:cNvPr id="24" name="">
             <a:extLst xmlns:a="http://schemas.openxmlformats.org/drawingml/2006/main">
               <a:ext uri="{FF2B5EF4-FFF2-40B4-BE49-F238E27FC236}">
-                <a16:creationId xmlns:a16="http://schemas.microsoft.com/office/drawing/2014/main" id="{F6654071-007B-4334-ACFD-0E5BA9938E93}"/>
+                <a16:creationId xmlns:a16="http://schemas.microsoft.com/office/drawing/2014/main" id="{1483A665-3FC0-4F6F-9B51-6FA75B01F7A8}"/>
               </a:ext>
             </a:extLst>
           </p:cNvPr>
@@ -7636,7 +7636,7 @@
           <p:cNvPr id="25" name="">
             <a:extLst xmlns:a="http://schemas.openxmlformats.org/drawingml/2006/main">
               <a:ext uri="{FF2B5EF4-FFF2-40B4-BE49-F238E27FC236}">
-                <a16:creationId xmlns:a16="http://schemas.microsoft.com/office/drawing/2014/main" id="{DB4405F0-3694-40C9-9A5E-C6470067A45E}"/>
+                <a16:creationId xmlns:a16="http://schemas.microsoft.com/office/drawing/2014/main" id="{17A5F909-3306-4CB7-A85A-59A932F580CA}"/>
               </a:ext>
             </a:extLst>
           </p:cNvPr>
@@ -7669,7 +7669,7 @@
           <p:cNvPr id="26" name="">
             <a:extLst xmlns:a="http://schemas.openxmlformats.org/drawingml/2006/main">
               <a:ext uri="{FF2B5EF4-FFF2-40B4-BE49-F238E27FC236}">
-                <a16:creationId xmlns:a16="http://schemas.microsoft.com/office/drawing/2014/main" id="{3BF6BA19-12E3-4FF8-9925-6322C71B3426}"/>
+                <a16:creationId xmlns:a16="http://schemas.microsoft.com/office/drawing/2014/main" id="{6FA018EC-F74E-4F9C-AFC1-62B131F234BB}"/>
               </a:ext>
             </a:extLst>
           </p:cNvPr>
@@ -7702,7 +7702,7 @@
           <p:cNvPr id="27" name="">
             <a:extLst xmlns:a="http://schemas.openxmlformats.org/drawingml/2006/main">
               <a:ext uri="{FF2B5EF4-FFF2-40B4-BE49-F238E27FC236}">
-                <a16:creationId xmlns:a16="http://schemas.microsoft.com/office/drawing/2014/main" id="{2158D41A-129D-4977-BA1C-AA3CF77462E9}"/>
+                <a16:creationId xmlns:a16="http://schemas.microsoft.com/office/drawing/2014/main" id="{EBD49BF4-DB5F-4727-9641-FB5CD604FED4}"/>
               </a:ext>
             </a:extLst>
           </p:cNvPr>
@@ -7735,7 +7735,7 @@
           <p:cNvPr id="28" name="">
             <a:extLst xmlns:a="http://schemas.openxmlformats.org/drawingml/2006/main">
               <a:ext uri="{FF2B5EF4-FFF2-40B4-BE49-F238E27FC236}">
-                <a16:creationId xmlns:a16="http://schemas.microsoft.com/office/drawing/2014/main" id="{5FA34E27-D6FB-4F54-95DF-0975504B640C}"/>
+                <a16:creationId xmlns:a16="http://schemas.microsoft.com/office/drawing/2014/main" id="{670D6A90-FABC-4E54-B215-EE1DC1F9AA8C}"/>
               </a:ext>
             </a:extLst>
           </p:cNvPr>
@@ -7768,7 +7768,7 @@
           <p:cNvPr id="29" name="">
             <a:extLst xmlns:a="http://schemas.openxmlformats.org/drawingml/2006/main">
               <a:ext uri="{FF2B5EF4-FFF2-40B4-BE49-F238E27FC236}">
-                <a16:creationId xmlns:a16="http://schemas.microsoft.com/office/drawing/2014/main" id="{98ED5BB9-247C-495C-B0C6-1136C266AAFE}"/>
+                <a16:creationId xmlns:a16="http://schemas.microsoft.com/office/drawing/2014/main" id="{6FD3CEB1-F6B0-4A74-9209-79DFB72D8FE3}"/>
               </a:ext>
             </a:extLst>
           </p:cNvPr>
@@ -7832,7 +7832,7 @@
           <p:cNvPr id="30" name="">
             <a:extLst xmlns:a="http://schemas.openxmlformats.org/drawingml/2006/main">
               <a:ext uri="{FF2B5EF4-FFF2-40B4-BE49-F238E27FC236}">
-                <a16:creationId xmlns:a16="http://schemas.microsoft.com/office/drawing/2014/main" id="{9D5AB43F-0BF6-4BC0-8C39-3D46A2325ECE}"/>
+                <a16:creationId xmlns:a16="http://schemas.microsoft.com/office/drawing/2014/main" id="{9E8EAC02-FFFC-43D3-8AE4-00F8CD5D1F10}"/>
               </a:ext>
             </a:extLst>
           </p:cNvPr>
@@ -7896,7 +7896,7 @@
           <p:cNvPr id="31" name="">
             <a:extLst xmlns:a="http://schemas.openxmlformats.org/drawingml/2006/main">
               <a:ext uri="{FF2B5EF4-FFF2-40B4-BE49-F238E27FC236}">
-                <a16:creationId xmlns:a16="http://schemas.microsoft.com/office/drawing/2014/main" id="{F2E936D5-3477-456F-99B1-733243BF69B3}"/>
+                <a16:creationId xmlns:a16="http://schemas.microsoft.com/office/drawing/2014/main" id="{F6BC3340-BD6B-4DF2-8315-450BF778D9E7}"/>
               </a:ext>
             </a:extLst>
           </p:cNvPr>
@@ -7929,7 +7929,7 @@
           <p:cNvPr id="32" name="">
             <a:extLst xmlns:a="http://schemas.openxmlformats.org/drawingml/2006/main">
               <a:ext uri="{FF2B5EF4-FFF2-40B4-BE49-F238E27FC236}">
-                <a16:creationId xmlns:a16="http://schemas.microsoft.com/office/drawing/2014/main" id="{71BEF21C-3C85-43C3-91DE-BD58D5BA7B92}"/>
+                <a16:creationId xmlns:a16="http://schemas.microsoft.com/office/drawing/2014/main" id="{B77D41FA-535F-4300-8A0D-30932E3D49DE}"/>
               </a:ext>
             </a:extLst>
           </p:cNvPr>
@@ -7962,7 +7962,7 @@
           <p:cNvPr id="33" name="">
             <a:extLst xmlns:a="http://schemas.openxmlformats.org/drawingml/2006/main">
               <a:ext uri="{FF2B5EF4-FFF2-40B4-BE49-F238E27FC236}">
-                <a16:creationId xmlns:a16="http://schemas.microsoft.com/office/drawing/2014/main" id="{210F599F-95B6-41CB-823A-59F6630A0F7E}"/>
+                <a16:creationId xmlns:a16="http://schemas.microsoft.com/office/drawing/2014/main" id="{1BB812CD-632C-453B-BD29-4A78E5DCB833}"/>
               </a:ext>
             </a:extLst>
           </p:cNvPr>
@@ -7995,7 +7995,7 @@
           <p:cNvPr id="34" name="">
             <a:extLst xmlns:a="http://schemas.openxmlformats.org/drawingml/2006/main">
               <a:ext uri="{FF2B5EF4-FFF2-40B4-BE49-F238E27FC236}">
-                <a16:creationId xmlns:a16="http://schemas.microsoft.com/office/drawing/2014/main" id="{827FD82A-7B22-4A98-8A4D-6BEE3ACB9749}"/>
+                <a16:creationId xmlns:a16="http://schemas.microsoft.com/office/drawing/2014/main" id="{F5809F7A-D2BD-4743-8A69-C70916C377B0}"/>
               </a:ext>
             </a:extLst>
           </p:cNvPr>
@@ -8028,7 +8028,7 @@
           <p:cNvPr id="35" name="">
             <a:extLst xmlns:a="http://schemas.openxmlformats.org/drawingml/2006/main">
               <a:ext uri="{FF2B5EF4-FFF2-40B4-BE49-F238E27FC236}">
-                <a16:creationId xmlns:a16="http://schemas.microsoft.com/office/drawing/2014/main" id="{4758DE09-4626-4699-8B5D-EB0759466386}"/>
+                <a16:creationId xmlns:a16="http://schemas.microsoft.com/office/drawing/2014/main" id="{B5D2F6E2-BC81-4756-8840-0EA0C519D159}"/>
               </a:ext>
             </a:extLst>
           </p:cNvPr>
@@ -8092,7 +8092,7 @@
           <p:cNvPr id="36" name="">
             <a:extLst xmlns:a="http://schemas.openxmlformats.org/drawingml/2006/main">
               <a:ext uri="{FF2B5EF4-FFF2-40B4-BE49-F238E27FC236}">
-                <a16:creationId xmlns:a16="http://schemas.microsoft.com/office/drawing/2014/main" id="{F7D85FF3-CEA5-4E4C-911C-30824A6C69C8}"/>
+                <a16:creationId xmlns:a16="http://schemas.microsoft.com/office/drawing/2014/main" id="{12DC498D-AFC6-46C9-8D77-500551BCEE06}"/>
               </a:ext>
             </a:extLst>
           </p:cNvPr>
@@ -8156,7 +8156,7 @@
           <p:cNvPr id="37" name="">
             <a:extLst xmlns:a="http://schemas.openxmlformats.org/drawingml/2006/main">
               <a:ext uri="{FF2B5EF4-FFF2-40B4-BE49-F238E27FC236}">
-                <a16:creationId xmlns:a16="http://schemas.microsoft.com/office/drawing/2014/main" id="{61D6913A-C47B-44E3-943C-E1DC79CAF353}"/>
+                <a16:creationId xmlns:a16="http://schemas.microsoft.com/office/drawing/2014/main" id="{CCCE5D19-D4CB-4C12-8B59-5CF83B7A7608}"/>
               </a:ext>
             </a:extLst>
           </p:cNvPr>
@@ -8220,7 +8220,7 @@
           <p:cNvPr id="38" name="">
             <a:extLst xmlns:a="http://schemas.openxmlformats.org/drawingml/2006/main">
               <a:ext uri="{FF2B5EF4-FFF2-40B4-BE49-F238E27FC236}">
-                <a16:creationId xmlns:a16="http://schemas.microsoft.com/office/drawing/2014/main" id="{49CE579F-AADA-492D-9059-6F2A758FAD80}"/>
+                <a16:creationId xmlns:a16="http://schemas.microsoft.com/office/drawing/2014/main" id="{27FE9468-84AC-4925-9C03-53A2BA64E8EC}"/>
               </a:ext>
             </a:extLst>
           </p:cNvPr>
@@ -8284,7 +8284,7 @@
           <p:cNvPr id="39" name="">
             <a:extLst xmlns:a="http://schemas.openxmlformats.org/drawingml/2006/main">
               <a:ext uri="{FF2B5EF4-FFF2-40B4-BE49-F238E27FC236}">
-                <a16:creationId xmlns:a16="http://schemas.microsoft.com/office/drawing/2014/main" id="{DD2647E3-EE40-4255-9D15-FADF3AA8B7FD}"/>
+                <a16:creationId xmlns:a16="http://schemas.microsoft.com/office/drawing/2014/main" id="{8FFEF779-F260-4B1F-A202-E4857D2BEB20}"/>
               </a:ext>
             </a:extLst>
           </p:cNvPr>
@@ -8348,7 +8348,7 @@
           <p:cNvPr id="40" name="">
             <a:extLst xmlns:a="http://schemas.openxmlformats.org/drawingml/2006/main">
               <a:ext uri="{FF2B5EF4-FFF2-40B4-BE49-F238E27FC236}">
-                <a16:creationId xmlns:a16="http://schemas.microsoft.com/office/drawing/2014/main" id="{C0718C95-CB15-417D-939D-2B41159D302E}"/>
+                <a16:creationId xmlns:a16="http://schemas.microsoft.com/office/drawing/2014/main" id="{7258FB0C-9C47-4468-93E9-6A5895293356}"/>
               </a:ext>
             </a:extLst>
           </p:cNvPr>
@@ -8379,7 +8379,7 @@
     </p:spTree>
     <p:extLst>
       <p:ext uri="{BB962C8B-B14F-4D97-AF65-F5344CB8AC3E}">
-        <p14:creationId xmlns:p14="http://schemas.microsoft.com/office/powerpoint/2010/main" val="1795841371"/>
+        <p14:creationId xmlns:p14="http://schemas.microsoft.com/office/powerpoint/2010/main" val="1671608060"/>
       </p:ext>
     </p:extLst>
   </p:cSld>
@@ -8403,7 +8403,7 @@
           <p:cNvPr id="1" name="">
             <a:extLst xmlns:a="http://schemas.openxmlformats.org/drawingml/2006/main">
               <a:ext uri="{FF2B5EF4-FFF2-40B4-BE49-F238E27FC236}">
-                <a16:creationId xmlns:a16="http://schemas.microsoft.com/office/drawing/2014/main" id="{24C4EACD-96CF-4E62-998F-63DB383370CC}"/>
+                <a16:creationId xmlns:a16="http://schemas.microsoft.com/office/drawing/2014/main" id="{6535CD2E-0720-410F-AB62-96B363E80B81}"/>
               </a:ext>
             </a:extLst>
           </p:cNvPr>
@@ -8436,19 +8436,19 @@
           <p:cNvPr id="2" name="">
             <a:extLst xmlns:a="http://schemas.openxmlformats.org/drawingml/2006/main">
               <a:ext uri="{FF2B5EF4-FFF2-40B4-BE49-F238E27FC236}">
-                <a16:creationId xmlns:a16="http://schemas.microsoft.com/office/drawing/2014/main" id="{F0EBA00C-1013-4DA2-98E6-4DFA8D5D9711}"/>
-              </a:ext>
-            </a:extLst>
-          </p:cNvPr>
-          <p:cNvSpPr>
-            <a:spLocks xmlns:a="http://schemas.openxmlformats.org/drawingml/2006/main" noGrp="1"/>
-          </p:cNvSpPr>
-          <p:nvPr/>
-        </p:nvSpPr>
-        <p:spPr>
-          <a:xfrm xmlns:a="http://schemas.openxmlformats.org/drawingml/2006/main">
-            <a:off x="7810500" y="-571500"/>
-            <a:ext cx="4953000" cy="4953000"/>
+                <a16:creationId xmlns:a16="http://schemas.microsoft.com/office/drawing/2014/main" id="{D2992115-AFF7-4CE2-839F-E6B76DF1A829}"/>
+              </a:ext>
+            </a:extLst>
+          </p:cNvPr>
+          <p:cNvSpPr>
+            <a:spLocks xmlns:a="http://schemas.openxmlformats.org/drawingml/2006/main" noGrp="1"/>
+          </p:cNvSpPr>
+          <p:nvPr/>
+        </p:nvSpPr>
+        <p:spPr>
+          <a:xfrm xmlns:a="http://schemas.openxmlformats.org/drawingml/2006/main">
+            <a:off x="7810500" y="0"/>
+            <a:ext cx="4000500" cy="4000500"/>
           </a:xfrm>
           <a:prstGeom xmlns:a="http://schemas.openxmlformats.org/drawingml/2006/main" prst="rect">
             <a:avLst/>
@@ -8471,19 +8471,19 @@
           <p:cNvPr id="3" name="">
             <a:extLst xmlns:a="http://schemas.openxmlformats.org/drawingml/2006/main">
               <a:ext uri="{FF2B5EF4-FFF2-40B4-BE49-F238E27FC236}">
-                <a16:creationId xmlns:a16="http://schemas.microsoft.com/office/drawing/2014/main" id="{D5A344DA-A3F5-44D4-A127-FB1A2A37D552}"/>
-              </a:ext>
-            </a:extLst>
-          </p:cNvPr>
-          <p:cNvSpPr>
-            <a:spLocks xmlns:a="http://schemas.openxmlformats.org/drawingml/2006/main" noGrp="1"/>
-          </p:cNvSpPr>
-          <p:nvPr/>
-        </p:nvSpPr>
-        <p:spPr>
-          <a:xfrm xmlns:a="http://schemas.openxmlformats.org/drawingml/2006/main">
-            <a:off x="8477250" y="-285750"/>
-            <a:ext cx="4191000" cy="4191000"/>
+                <a16:creationId xmlns:a16="http://schemas.microsoft.com/office/drawing/2014/main" id="{FE38EB3E-7BA5-4D98-B8AB-3D361D12F6B2}"/>
+              </a:ext>
+            </a:extLst>
+          </p:cNvPr>
+          <p:cNvSpPr>
+            <a:spLocks xmlns:a="http://schemas.openxmlformats.org/drawingml/2006/main" noGrp="1"/>
+          </p:cNvSpPr>
+          <p:nvPr/>
+        </p:nvSpPr>
+        <p:spPr>
+          <a:xfrm xmlns:a="http://schemas.openxmlformats.org/drawingml/2006/main">
+            <a:off x="8572500" y="285750"/>
+            <a:ext cx="3333750" cy="3333750"/>
           </a:xfrm>
           <a:prstGeom xmlns:a="http://schemas.openxmlformats.org/drawingml/2006/main" prst="rect">
             <a:avLst/>
@@ -8506,19 +8506,19 @@
           <p:cNvPr id="4" name="">
             <a:extLst xmlns:a="http://schemas.openxmlformats.org/drawingml/2006/main">
               <a:ext uri="{FF2B5EF4-FFF2-40B4-BE49-F238E27FC236}">
-                <a16:creationId xmlns:a16="http://schemas.microsoft.com/office/drawing/2014/main" id="{C5AE260F-3F80-4810-970D-0B762D5A8E03}"/>
-              </a:ext>
-            </a:extLst>
-          </p:cNvPr>
-          <p:cNvSpPr>
-            <a:spLocks xmlns:a="http://schemas.openxmlformats.org/drawingml/2006/main" noGrp="1"/>
-          </p:cNvSpPr>
-          <p:nvPr/>
-        </p:nvSpPr>
-        <p:spPr>
-          <a:xfrm xmlns:a="http://schemas.openxmlformats.org/drawingml/2006/main">
-            <a:off x="9144000" y="0"/>
-            <a:ext cx="3429000" cy="3429000"/>
+                <a16:creationId xmlns:a16="http://schemas.microsoft.com/office/drawing/2014/main" id="{1957ED17-2A76-4D4D-BF75-0F00716FD2DF}"/>
+              </a:ext>
+            </a:extLst>
+          </p:cNvPr>
+          <p:cNvSpPr>
+            <a:spLocks xmlns:a="http://schemas.openxmlformats.org/drawingml/2006/main" noGrp="1"/>
+          </p:cNvSpPr>
+          <p:nvPr/>
+        </p:nvSpPr>
+        <p:spPr>
+          <a:xfrm xmlns:a="http://schemas.openxmlformats.org/drawingml/2006/main">
+            <a:off x="9334500" y="571500"/>
+            <a:ext cx="2667000" cy="2667000"/>
           </a:xfrm>
           <a:prstGeom xmlns:a="http://schemas.openxmlformats.org/drawingml/2006/main" prst="rect">
             <a:avLst/>
@@ -8541,19 +8541,19 @@
           <p:cNvPr id="5" name="">
             <a:extLst xmlns:a="http://schemas.openxmlformats.org/drawingml/2006/main">
               <a:ext uri="{FF2B5EF4-FFF2-40B4-BE49-F238E27FC236}">
-                <a16:creationId xmlns:a16="http://schemas.microsoft.com/office/drawing/2014/main" id="{A2929D33-F304-4D70-9F13-561B4B2A7988}"/>
-              </a:ext>
-            </a:extLst>
-          </p:cNvPr>
-          <p:cNvSpPr>
-            <a:spLocks xmlns:a="http://schemas.openxmlformats.org/drawingml/2006/main" noGrp="1"/>
-          </p:cNvSpPr>
-          <p:nvPr/>
-        </p:nvSpPr>
-        <p:spPr>
-          <a:xfrm xmlns:a="http://schemas.openxmlformats.org/drawingml/2006/main">
-            <a:off x="9810750" y="285750"/>
-            <a:ext cx="2667000" cy="2667000"/>
+                <a16:creationId xmlns:a16="http://schemas.microsoft.com/office/drawing/2014/main" id="{08E764E2-812F-41EE-A247-6A4F03067B71}"/>
+              </a:ext>
+            </a:extLst>
+          </p:cNvPr>
+          <p:cNvSpPr>
+            <a:spLocks xmlns:a="http://schemas.openxmlformats.org/drawingml/2006/main" noGrp="1"/>
+          </p:cNvSpPr>
+          <p:nvPr/>
+        </p:nvSpPr>
+        <p:spPr>
+          <a:xfrm xmlns:a="http://schemas.openxmlformats.org/drawingml/2006/main">
+            <a:off x="10096500" y="857250"/>
+            <a:ext cx="2000250" cy="2000250"/>
           </a:xfrm>
           <a:prstGeom xmlns:a="http://schemas.openxmlformats.org/drawingml/2006/main" prst="rect">
             <a:avLst/>
@@ -8576,7 +8576,7 @@
           <p:cNvPr id="6" name="">
             <a:extLst xmlns:a="http://schemas.openxmlformats.org/drawingml/2006/main">
               <a:ext uri="{FF2B5EF4-FFF2-40B4-BE49-F238E27FC236}">
-                <a16:creationId xmlns:a16="http://schemas.microsoft.com/office/drawing/2014/main" id="{009DCD3B-8A68-4BC2-A482-BE2A278F6655}"/>
+                <a16:creationId xmlns:a16="http://schemas.microsoft.com/office/drawing/2014/main" id="{4B2C6075-7EA4-49AE-B194-B275DAF14D19}"/>
               </a:ext>
             </a:extLst>
           </p:cNvPr>
@@ -8640,7 +8640,7 @@
           <p:cNvPr id="7" name="">
             <a:extLst xmlns:a="http://schemas.openxmlformats.org/drawingml/2006/main">
               <a:ext uri="{FF2B5EF4-FFF2-40B4-BE49-F238E27FC236}">
-                <a16:creationId xmlns:a16="http://schemas.microsoft.com/office/drawing/2014/main" id="{CEC09147-5389-4F7F-ABFA-BE0E5E149A72}"/>
+                <a16:creationId xmlns:a16="http://schemas.microsoft.com/office/drawing/2014/main" id="{664D6842-5190-4CB3-BEEC-981077728EDF}"/>
               </a:ext>
             </a:extLst>
           </p:cNvPr>
@@ -8704,7 +8704,7 @@
           <p:cNvPr id="8" name="">
             <a:extLst xmlns:a="http://schemas.openxmlformats.org/drawingml/2006/main">
               <a:ext uri="{FF2B5EF4-FFF2-40B4-BE49-F238E27FC236}">
-                <a16:creationId xmlns:a16="http://schemas.microsoft.com/office/drawing/2014/main" id="{71450D23-4247-440A-A637-4EF2C01E9176}"/>
+                <a16:creationId xmlns:a16="http://schemas.microsoft.com/office/drawing/2014/main" id="{41730A17-6AEA-4B49-8C5C-10E6C045C564}"/>
               </a:ext>
             </a:extLst>
           </p:cNvPr>
@@ -8768,7 +8768,7 @@
           <p:cNvPr id="9" name="">
             <a:extLst xmlns:a="http://schemas.openxmlformats.org/drawingml/2006/main">
               <a:ext uri="{FF2B5EF4-FFF2-40B4-BE49-F238E27FC236}">
-                <a16:creationId xmlns:a16="http://schemas.microsoft.com/office/drawing/2014/main" id="{3B849179-FB8D-46E4-916F-83FF4995F90D}"/>
+                <a16:creationId xmlns:a16="http://schemas.microsoft.com/office/drawing/2014/main" id="{6064B253-36DD-4262-AF8B-5250DCF649FF}"/>
               </a:ext>
             </a:extLst>
           </p:cNvPr>
@@ -8801,7 +8801,7 @@
           <p:cNvPr id="10" name="">
             <a:extLst xmlns:a="http://schemas.openxmlformats.org/drawingml/2006/main">
               <a:ext uri="{FF2B5EF4-FFF2-40B4-BE49-F238E27FC236}">
-                <a16:creationId xmlns:a16="http://schemas.microsoft.com/office/drawing/2014/main" id="{AEA4AE43-9D24-4695-A25F-569783C8425F}"/>
+                <a16:creationId xmlns:a16="http://schemas.microsoft.com/office/drawing/2014/main" id="{7D809914-CB8B-4953-8E11-85D0281446C0}"/>
               </a:ext>
             </a:extLst>
           </p:cNvPr>
@@ -8834,7 +8834,7 @@
           <p:cNvPr id="11" name="">
             <a:extLst xmlns:a="http://schemas.openxmlformats.org/drawingml/2006/main">
               <a:ext uri="{FF2B5EF4-FFF2-40B4-BE49-F238E27FC236}">
-                <a16:creationId xmlns:a16="http://schemas.microsoft.com/office/drawing/2014/main" id="{A194E3BB-5EAF-4670-8D50-F248A45B7FF5}"/>
+                <a16:creationId xmlns:a16="http://schemas.microsoft.com/office/drawing/2014/main" id="{FC6C9B0C-82E8-4BD7-BBE5-644E69A50F57}"/>
               </a:ext>
             </a:extLst>
           </p:cNvPr>
@@ -8898,7 +8898,7 @@
           <p:cNvPr id="12" name="">
             <a:extLst xmlns:a="http://schemas.openxmlformats.org/drawingml/2006/main">
               <a:ext uri="{FF2B5EF4-FFF2-40B4-BE49-F238E27FC236}">
-                <a16:creationId xmlns:a16="http://schemas.microsoft.com/office/drawing/2014/main" id="{7F31AB22-BE9C-4E9F-AD54-9B6411EDAF96}"/>
+                <a16:creationId xmlns:a16="http://schemas.microsoft.com/office/drawing/2014/main" id="{9F6D1459-7BBD-4546-A624-F8A376F400E1}"/>
               </a:ext>
             </a:extLst>
           </p:cNvPr>
@@ -8962,7 +8962,7 @@
           <p:cNvPr id="13" name="">
             <a:extLst xmlns:a="http://schemas.openxmlformats.org/drawingml/2006/main">
               <a:ext uri="{FF2B5EF4-FFF2-40B4-BE49-F238E27FC236}">
-                <a16:creationId xmlns:a16="http://schemas.microsoft.com/office/drawing/2014/main" id="{E472A85C-38D4-4E9A-B9EF-48AEE73CC01C}"/>
+                <a16:creationId xmlns:a16="http://schemas.microsoft.com/office/drawing/2014/main" id="{2E5CF675-0A49-401B-ABDE-781A62D55C43}"/>
               </a:ext>
             </a:extLst>
           </p:cNvPr>
@@ -8995,7 +8995,7 @@
           <p:cNvPr id="14" name="">
             <a:extLst xmlns:a="http://schemas.openxmlformats.org/drawingml/2006/main">
               <a:ext uri="{FF2B5EF4-FFF2-40B4-BE49-F238E27FC236}">
-                <a16:creationId xmlns:a16="http://schemas.microsoft.com/office/drawing/2014/main" id="{E0B8B30B-1EA6-46F9-AF14-6983EA819730}"/>
+                <a16:creationId xmlns:a16="http://schemas.microsoft.com/office/drawing/2014/main" id="{567FC35B-1E38-4C0F-8369-09DD325991BC}"/>
               </a:ext>
             </a:extLst>
           </p:cNvPr>
@@ -9028,7 +9028,7 @@
           <p:cNvPr id="15" name="">
             <a:extLst xmlns:a="http://schemas.openxmlformats.org/drawingml/2006/main">
               <a:ext uri="{FF2B5EF4-FFF2-40B4-BE49-F238E27FC236}">
-                <a16:creationId xmlns:a16="http://schemas.microsoft.com/office/drawing/2014/main" id="{2ACB5836-0F68-4EA4-AE42-403B2B36BCDB}"/>
+                <a16:creationId xmlns:a16="http://schemas.microsoft.com/office/drawing/2014/main" id="{D446A9AC-6A70-4364-8CED-7698AC6A237F}"/>
               </a:ext>
             </a:extLst>
           </p:cNvPr>
@@ -9092,7 +9092,7 @@
           <p:cNvPr id="16" name="">
             <a:extLst xmlns:a="http://schemas.openxmlformats.org/drawingml/2006/main">
               <a:ext uri="{FF2B5EF4-FFF2-40B4-BE49-F238E27FC236}">
-                <a16:creationId xmlns:a16="http://schemas.microsoft.com/office/drawing/2014/main" id="{5B6A8C7C-DA7A-4B9F-B831-F43B3D466D95}"/>
+                <a16:creationId xmlns:a16="http://schemas.microsoft.com/office/drawing/2014/main" id="{03A8867E-A481-46F1-8332-A60AFEE006EC}"/>
               </a:ext>
             </a:extLst>
           </p:cNvPr>
@@ -9156,7 +9156,7 @@
           <p:cNvPr id="17" name="">
             <a:extLst xmlns:a="http://schemas.openxmlformats.org/drawingml/2006/main">
               <a:ext uri="{FF2B5EF4-FFF2-40B4-BE49-F238E27FC236}">
-                <a16:creationId xmlns:a16="http://schemas.microsoft.com/office/drawing/2014/main" id="{EA951474-0CB3-48C0-B95B-DC8DC80D6A8A}"/>
+                <a16:creationId xmlns:a16="http://schemas.microsoft.com/office/drawing/2014/main" id="{6DA55AE9-4C04-4131-9433-DEACBFBE49C9}"/>
               </a:ext>
             </a:extLst>
           </p:cNvPr>
@@ -9189,7 +9189,7 @@
           <p:cNvPr id="18" name="">
             <a:extLst xmlns:a="http://schemas.openxmlformats.org/drawingml/2006/main">
               <a:ext uri="{FF2B5EF4-FFF2-40B4-BE49-F238E27FC236}">
-                <a16:creationId xmlns:a16="http://schemas.microsoft.com/office/drawing/2014/main" id="{EF86D766-59FC-4FE6-B206-6EBB5970B604}"/>
+                <a16:creationId xmlns:a16="http://schemas.microsoft.com/office/drawing/2014/main" id="{69FEE86B-78D1-49BC-83E1-CE3E648AEBFC}"/>
               </a:ext>
             </a:extLst>
           </p:cNvPr>
@@ -9222,7 +9222,7 @@
           <p:cNvPr id="19" name="">
             <a:extLst xmlns:a="http://schemas.openxmlformats.org/drawingml/2006/main">
               <a:ext uri="{FF2B5EF4-FFF2-40B4-BE49-F238E27FC236}">
-                <a16:creationId xmlns:a16="http://schemas.microsoft.com/office/drawing/2014/main" id="{CB6A0962-D4CD-414D-AA9D-4047A2C35048}"/>
+                <a16:creationId xmlns:a16="http://schemas.microsoft.com/office/drawing/2014/main" id="{EAC89F13-8DAC-4E70-B2F7-CD2902F3D423}"/>
               </a:ext>
             </a:extLst>
           </p:cNvPr>
@@ -9286,7 +9286,7 @@
           <p:cNvPr id="20" name="">
             <a:extLst xmlns:a="http://schemas.openxmlformats.org/drawingml/2006/main">
               <a:ext uri="{FF2B5EF4-FFF2-40B4-BE49-F238E27FC236}">
-                <a16:creationId xmlns:a16="http://schemas.microsoft.com/office/drawing/2014/main" id="{7E2D0902-690B-4FBA-B343-4DC2175262C2}"/>
+                <a16:creationId xmlns:a16="http://schemas.microsoft.com/office/drawing/2014/main" id="{26B17824-3CBC-47E1-8F6C-A66C92489BC6}"/>
               </a:ext>
             </a:extLst>
           </p:cNvPr>
@@ -9350,7 +9350,7 @@
           <p:cNvPr id="21" name="">
             <a:extLst xmlns:a="http://schemas.openxmlformats.org/drawingml/2006/main">
               <a:ext uri="{FF2B5EF4-FFF2-40B4-BE49-F238E27FC236}">
-                <a16:creationId xmlns:a16="http://schemas.microsoft.com/office/drawing/2014/main" id="{F5A338EF-D6A2-4CD7-BEE8-0FA3BA19248F}"/>
+                <a16:creationId xmlns:a16="http://schemas.microsoft.com/office/drawing/2014/main" id="{DBBBE590-AB98-480E-B721-6639BFF5B554}"/>
               </a:ext>
             </a:extLst>
           </p:cNvPr>
@@ -9383,7 +9383,7 @@
           <p:cNvPr id="22" name="">
             <a:extLst xmlns:a="http://schemas.openxmlformats.org/drawingml/2006/main">
               <a:ext uri="{FF2B5EF4-FFF2-40B4-BE49-F238E27FC236}">
-                <a16:creationId xmlns:a16="http://schemas.microsoft.com/office/drawing/2014/main" id="{E8F14D42-0E09-4376-842E-9F5E7E6F8ED7}"/>
+                <a16:creationId xmlns:a16="http://schemas.microsoft.com/office/drawing/2014/main" id="{D126B0C6-5990-44BC-9E63-4632443D9880}"/>
               </a:ext>
             </a:extLst>
           </p:cNvPr>
@@ -9416,7 +9416,7 @@
           <p:cNvPr id="23" name="">
             <a:extLst xmlns:a="http://schemas.openxmlformats.org/drawingml/2006/main">
               <a:ext uri="{FF2B5EF4-FFF2-40B4-BE49-F238E27FC236}">
-                <a16:creationId xmlns:a16="http://schemas.microsoft.com/office/drawing/2014/main" id="{703F9C4A-1A03-4B2D-A56D-CD87516F6576}"/>
+                <a16:creationId xmlns:a16="http://schemas.microsoft.com/office/drawing/2014/main" id="{A8477E08-FE58-4022-9410-5DFEA0EFC472}"/>
               </a:ext>
             </a:extLst>
           </p:cNvPr>
@@ -9480,7 +9480,7 @@
           <p:cNvPr id="24" name="">
             <a:extLst xmlns:a="http://schemas.openxmlformats.org/drawingml/2006/main">
               <a:ext uri="{FF2B5EF4-FFF2-40B4-BE49-F238E27FC236}">
-                <a16:creationId xmlns:a16="http://schemas.microsoft.com/office/drawing/2014/main" id="{53A68003-1C21-491C-AF1C-2E3BABDE2AD1}"/>
+                <a16:creationId xmlns:a16="http://schemas.microsoft.com/office/drawing/2014/main" id="{C96B3978-7964-42B5-84AC-49F5DC56377B}"/>
               </a:ext>
             </a:extLst>
           </p:cNvPr>
@@ -9544,7 +9544,7 @@
           <p:cNvPr id="25" name="">
             <a:extLst xmlns:a="http://schemas.openxmlformats.org/drawingml/2006/main">
               <a:ext uri="{FF2B5EF4-FFF2-40B4-BE49-F238E27FC236}">
-                <a16:creationId xmlns:a16="http://schemas.microsoft.com/office/drawing/2014/main" id="{320F9458-EE2B-41E3-A2C9-25D2521F17F4}"/>
+                <a16:creationId xmlns:a16="http://schemas.microsoft.com/office/drawing/2014/main" id="{72B38FAF-126F-4301-9E70-199E252E8578}"/>
               </a:ext>
             </a:extLst>
           </p:cNvPr>
@@ -9577,7 +9577,7 @@
           <p:cNvPr id="26" name="">
             <a:extLst xmlns:a="http://schemas.openxmlformats.org/drawingml/2006/main">
               <a:ext uri="{FF2B5EF4-FFF2-40B4-BE49-F238E27FC236}">
-                <a16:creationId xmlns:a16="http://schemas.microsoft.com/office/drawing/2014/main" id="{EFA9D36A-0092-48DB-8337-CF5A080607F2}"/>
+                <a16:creationId xmlns:a16="http://schemas.microsoft.com/office/drawing/2014/main" id="{92300AE9-8432-4E36-AB73-25D5C0CC14A3}"/>
               </a:ext>
             </a:extLst>
           </p:cNvPr>
@@ -9610,7 +9610,7 @@
           <p:cNvPr id="27" name="">
             <a:extLst xmlns:a="http://schemas.openxmlformats.org/drawingml/2006/main">
               <a:ext uri="{FF2B5EF4-FFF2-40B4-BE49-F238E27FC236}">
-                <a16:creationId xmlns:a16="http://schemas.microsoft.com/office/drawing/2014/main" id="{57AD1D9D-EF65-45E7-B9D4-A9B57EE0C3B8}"/>
+                <a16:creationId xmlns:a16="http://schemas.microsoft.com/office/drawing/2014/main" id="{689C4066-4D13-4511-8C9D-E93A195975AA}"/>
               </a:ext>
             </a:extLst>
           </p:cNvPr>
@@ -9674,7 +9674,7 @@
           <p:cNvPr id="28" name="">
             <a:extLst xmlns:a="http://schemas.openxmlformats.org/drawingml/2006/main">
               <a:ext uri="{FF2B5EF4-FFF2-40B4-BE49-F238E27FC236}">
-                <a16:creationId xmlns:a16="http://schemas.microsoft.com/office/drawing/2014/main" id="{8BEAB803-6B07-4B50-BC30-74F481CE68FD}"/>
+                <a16:creationId xmlns:a16="http://schemas.microsoft.com/office/drawing/2014/main" id="{911F7582-9724-48BE-86E3-E66F59A4E09A}"/>
               </a:ext>
             </a:extLst>
           </p:cNvPr>
@@ -9738,7 +9738,7 @@
           <p:cNvPr id="29" name="">
             <a:extLst xmlns:a="http://schemas.openxmlformats.org/drawingml/2006/main">
               <a:ext uri="{FF2B5EF4-FFF2-40B4-BE49-F238E27FC236}">
-                <a16:creationId xmlns:a16="http://schemas.microsoft.com/office/drawing/2014/main" id="{E4693F99-188C-4589-8235-919591B5CAE4}"/>
+                <a16:creationId xmlns:a16="http://schemas.microsoft.com/office/drawing/2014/main" id="{7FF09576-1C66-485C-8BAF-3B655B17CC04}"/>
               </a:ext>
             </a:extLst>
           </p:cNvPr>
@@ -9771,7 +9771,7 @@
           <p:cNvPr id="30" name="">
             <a:extLst xmlns:a="http://schemas.openxmlformats.org/drawingml/2006/main">
               <a:ext uri="{FF2B5EF4-FFF2-40B4-BE49-F238E27FC236}">
-                <a16:creationId xmlns:a16="http://schemas.microsoft.com/office/drawing/2014/main" id="{494631A5-EE16-44B8-A178-1479C8D6A14D}"/>
+                <a16:creationId xmlns:a16="http://schemas.microsoft.com/office/drawing/2014/main" id="{2A0CB398-9E96-486F-B88D-89FB89297324}"/>
               </a:ext>
             </a:extLst>
           </p:cNvPr>
@@ -9804,7 +9804,7 @@
           <p:cNvPr id="31" name="">
             <a:extLst xmlns:a="http://schemas.openxmlformats.org/drawingml/2006/main">
               <a:ext uri="{FF2B5EF4-FFF2-40B4-BE49-F238E27FC236}">
-                <a16:creationId xmlns:a16="http://schemas.microsoft.com/office/drawing/2014/main" id="{99708F93-A70C-4C7D-8468-9FE8E0372F6E}"/>
+                <a16:creationId xmlns:a16="http://schemas.microsoft.com/office/drawing/2014/main" id="{5E884AFF-ECF9-4055-A1D8-7521629325B6}"/>
               </a:ext>
             </a:extLst>
           </p:cNvPr>
@@ -9868,7 +9868,7 @@
           <p:cNvPr id="32" name="">
             <a:extLst xmlns:a="http://schemas.openxmlformats.org/drawingml/2006/main">
               <a:ext uri="{FF2B5EF4-FFF2-40B4-BE49-F238E27FC236}">
-                <a16:creationId xmlns:a16="http://schemas.microsoft.com/office/drawing/2014/main" id="{5051E9E1-43F8-4002-B158-86E019B147CA}"/>
+                <a16:creationId xmlns:a16="http://schemas.microsoft.com/office/drawing/2014/main" id="{65C7ADF7-1087-463F-B310-8A642074AE6C}"/>
               </a:ext>
             </a:extLst>
           </p:cNvPr>
@@ -9932,7 +9932,7 @@
           <p:cNvPr id="33" name="">
             <a:extLst xmlns:a="http://schemas.openxmlformats.org/drawingml/2006/main">
               <a:ext uri="{FF2B5EF4-FFF2-40B4-BE49-F238E27FC236}">
-                <a16:creationId xmlns:a16="http://schemas.microsoft.com/office/drawing/2014/main" id="{93141016-4FE7-488C-8DD5-C7344EAB2B1B}"/>
+                <a16:creationId xmlns:a16="http://schemas.microsoft.com/office/drawing/2014/main" id="{FCD7808D-B1F7-4124-B16C-38EDD2C75BF8}"/>
               </a:ext>
             </a:extLst>
           </p:cNvPr>
@@ -9965,7 +9965,7 @@
           <p:cNvPr id="34" name="">
             <a:extLst xmlns:a="http://schemas.openxmlformats.org/drawingml/2006/main">
               <a:ext uri="{FF2B5EF4-FFF2-40B4-BE49-F238E27FC236}">
-                <a16:creationId xmlns:a16="http://schemas.microsoft.com/office/drawing/2014/main" id="{C364FB2E-3195-4C1D-BD3B-D9C006EA132D}"/>
+                <a16:creationId xmlns:a16="http://schemas.microsoft.com/office/drawing/2014/main" id="{A6638F0F-B0EC-4017-AC3E-618EE505BEF1}"/>
               </a:ext>
             </a:extLst>
           </p:cNvPr>
@@ -9998,7 +9998,7 @@
           <p:cNvPr id="35" name="">
             <a:extLst xmlns:a="http://schemas.openxmlformats.org/drawingml/2006/main">
               <a:ext uri="{FF2B5EF4-FFF2-40B4-BE49-F238E27FC236}">
-                <a16:creationId xmlns:a16="http://schemas.microsoft.com/office/drawing/2014/main" id="{28F64C73-EDB2-48D0-996A-C87FF3FACEFE}"/>
+                <a16:creationId xmlns:a16="http://schemas.microsoft.com/office/drawing/2014/main" id="{25EDAD2A-1299-45D9-B0D8-56D204EF868B}"/>
               </a:ext>
             </a:extLst>
           </p:cNvPr>
@@ -10031,7 +10031,7 @@
           <p:cNvPr id="36" name="">
             <a:extLst xmlns:a="http://schemas.openxmlformats.org/drawingml/2006/main">
               <a:ext uri="{FF2B5EF4-FFF2-40B4-BE49-F238E27FC236}">
-                <a16:creationId xmlns:a16="http://schemas.microsoft.com/office/drawing/2014/main" id="{44A5DEB1-564A-40A1-AE36-EA076EB399B1}"/>
+                <a16:creationId xmlns:a16="http://schemas.microsoft.com/office/drawing/2014/main" id="{8965813C-3BAC-4CAC-8C27-CCCF4AE79F4F}"/>
               </a:ext>
             </a:extLst>
           </p:cNvPr>
@@ -10064,7 +10064,7 @@
           <p:cNvPr id="37" name="">
             <a:extLst xmlns:a="http://schemas.openxmlformats.org/drawingml/2006/main">
               <a:ext uri="{FF2B5EF4-FFF2-40B4-BE49-F238E27FC236}">
-                <a16:creationId xmlns:a16="http://schemas.microsoft.com/office/drawing/2014/main" id="{632AADCE-A1AE-4C02-9B03-91CA64871863}"/>
+                <a16:creationId xmlns:a16="http://schemas.microsoft.com/office/drawing/2014/main" id="{80D531AB-B823-468E-83E3-F51456667A68}"/>
               </a:ext>
             </a:extLst>
           </p:cNvPr>
@@ -10097,7 +10097,7 @@
           <p:cNvPr id="38" name="">
             <a:extLst xmlns:a="http://schemas.openxmlformats.org/drawingml/2006/main">
               <a:ext uri="{FF2B5EF4-FFF2-40B4-BE49-F238E27FC236}">
-                <a16:creationId xmlns:a16="http://schemas.microsoft.com/office/drawing/2014/main" id="{2CADF239-F529-425B-99B1-F3DE3827C52A}"/>
+                <a16:creationId xmlns:a16="http://schemas.microsoft.com/office/drawing/2014/main" id="{EA76CADE-B6C5-40CF-A276-12E1FC55841A}"/>
               </a:ext>
             </a:extLst>
           </p:cNvPr>
@@ -10130,7 +10130,7 @@
           <p:cNvPr id="39" name="">
             <a:extLst xmlns:a="http://schemas.openxmlformats.org/drawingml/2006/main">
               <a:ext uri="{FF2B5EF4-FFF2-40B4-BE49-F238E27FC236}">
-                <a16:creationId xmlns:a16="http://schemas.microsoft.com/office/drawing/2014/main" id="{CC9F5441-7D34-4591-A953-9DA629457C02}"/>
+                <a16:creationId xmlns:a16="http://schemas.microsoft.com/office/drawing/2014/main" id="{9E24BAEB-2147-4EF5-A6C9-F087C39B9D24}"/>
               </a:ext>
             </a:extLst>
           </p:cNvPr>
@@ -10163,7 +10163,7 @@
           <p:cNvPr id="40" name="">
             <a:extLst xmlns:a="http://schemas.openxmlformats.org/drawingml/2006/main">
               <a:ext uri="{FF2B5EF4-FFF2-40B4-BE49-F238E27FC236}">
-                <a16:creationId xmlns:a16="http://schemas.microsoft.com/office/drawing/2014/main" id="{9C691DD7-CE98-485A-A8DA-EA1DFF410461}"/>
+                <a16:creationId xmlns:a16="http://schemas.microsoft.com/office/drawing/2014/main" id="{A491FD25-9CC7-4C87-A87B-760FD5E3CAE5}"/>
               </a:ext>
             </a:extLst>
           </p:cNvPr>
@@ -10196,7 +10196,7 @@
           <p:cNvPr id="41" name="">
             <a:extLst xmlns:a="http://schemas.openxmlformats.org/drawingml/2006/main">
               <a:ext uri="{FF2B5EF4-FFF2-40B4-BE49-F238E27FC236}">
-                <a16:creationId xmlns:a16="http://schemas.microsoft.com/office/drawing/2014/main" id="{BB44B129-7DA2-4C3D-B515-1861A6CF9211}"/>
+                <a16:creationId xmlns:a16="http://schemas.microsoft.com/office/drawing/2014/main" id="{AC0A3D77-1F5D-4994-8253-D926A43EE8D8}"/>
               </a:ext>
             </a:extLst>
           </p:cNvPr>
@@ -10229,7 +10229,7 @@
           <p:cNvPr id="42" name="">
             <a:extLst xmlns:a="http://schemas.openxmlformats.org/drawingml/2006/main">
               <a:ext uri="{FF2B5EF4-FFF2-40B4-BE49-F238E27FC236}">
-                <a16:creationId xmlns:a16="http://schemas.microsoft.com/office/drawing/2014/main" id="{F83ED7DB-2E09-4E15-9060-29EA180F4446}"/>
+                <a16:creationId xmlns:a16="http://schemas.microsoft.com/office/drawing/2014/main" id="{B9AA96ED-1A15-46CE-A702-2969158E4404}"/>
               </a:ext>
             </a:extLst>
           </p:cNvPr>
@@ -10262,7 +10262,7 @@
           <p:cNvPr id="43" name="">
             <a:extLst xmlns:a="http://schemas.openxmlformats.org/drawingml/2006/main">
               <a:ext uri="{FF2B5EF4-FFF2-40B4-BE49-F238E27FC236}">
-                <a16:creationId xmlns:a16="http://schemas.microsoft.com/office/drawing/2014/main" id="{4CF38B87-959C-4FB0-8998-A16B20F745AC}"/>
+                <a16:creationId xmlns:a16="http://schemas.microsoft.com/office/drawing/2014/main" id="{F436F826-B85D-45C4-A0E0-CC83FEA16BC7}"/>
               </a:ext>
             </a:extLst>
           </p:cNvPr>
@@ -10326,7 +10326,7 @@
           <p:cNvPr id="44" name="">
             <a:extLst xmlns:a="http://schemas.openxmlformats.org/drawingml/2006/main">
               <a:ext uri="{FF2B5EF4-FFF2-40B4-BE49-F238E27FC236}">
-                <a16:creationId xmlns:a16="http://schemas.microsoft.com/office/drawing/2014/main" id="{CC870DDA-A758-44D6-A912-216253B5EDCD}"/>
+                <a16:creationId xmlns:a16="http://schemas.microsoft.com/office/drawing/2014/main" id="{5AD770F5-F20D-4DBA-AFF4-D90D9FC8A1B2}"/>
               </a:ext>
             </a:extLst>
           </p:cNvPr>
@@ -10390,7 +10390,7 @@
           <p:cNvPr id="45" name="">
             <a:extLst xmlns:a="http://schemas.openxmlformats.org/drawingml/2006/main">
               <a:ext uri="{FF2B5EF4-FFF2-40B4-BE49-F238E27FC236}">
-                <a16:creationId xmlns:a16="http://schemas.microsoft.com/office/drawing/2014/main" id="{7C5A1D0D-11DF-4B13-9634-E3672E21481B}"/>
+                <a16:creationId xmlns:a16="http://schemas.microsoft.com/office/drawing/2014/main" id="{7FE39821-F127-4C8A-9ABF-E8682AD345E0}"/>
               </a:ext>
             </a:extLst>
           </p:cNvPr>
@@ -10454,7 +10454,7 @@
           <p:cNvPr id="46" name="">
             <a:extLst xmlns:a="http://schemas.openxmlformats.org/drawingml/2006/main">
               <a:ext uri="{FF2B5EF4-FFF2-40B4-BE49-F238E27FC236}">
-                <a16:creationId xmlns:a16="http://schemas.microsoft.com/office/drawing/2014/main" id="{2F4B9028-A5CE-467E-8830-B5CF544BB028}"/>
+                <a16:creationId xmlns:a16="http://schemas.microsoft.com/office/drawing/2014/main" id="{D19ECFAA-E13A-425E-9799-F44D1E144E15}"/>
               </a:ext>
             </a:extLst>
           </p:cNvPr>
@@ -10485,7 +10485,7 @@
     </p:spTree>
     <p:extLst>
       <p:ext uri="{BB962C8B-B14F-4D97-AF65-F5344CB8AC3E}">
-        <p14:creationId xmlns:p14="http://schemas.microsoft.com/office/powerpoint/2010/main" val="27351036"/>
+        <p14:creationId xmlns:p14="http://schemas.microsoft.com/office/powerpoint/2010/main" val="586317507"/>
       </p:ext>
     </p:extLst>
   </p:cSld>
@@ -10509,7 +10509,7 @@
           <p:cNvPr id="1" name="">
             <a:extLst xmlns:a="http://schemas.openxmlformats.org/drawingml/2006/main">
               <a:ext uri="{FF2B5EF4-FFF2-40B4-BE49-F238E27FC236}">
-                <a16:creationId xmlns:a16="http://schemas.microsoft.com/office/drawing/2014/main" id="{6565C352-24FB-487D-ADA1-466F688A205A}"/>
+                <a16:creationId xmlns:a16="http://schemas.microsoft.com/office/drawing/2014/main" id="{862FF906-C83D-4E3F-99AF-FB003D96B165}"/>
               </a:ext>
             </a:extLst>
           </p:cNvPr>
@@ -10542,19 +10542,19 @@
           <p:cNvPr id="2" name="">
             <a:extLst xmlns:a="http://schemas.openxmlformats.org/drawingml/2006/main">
               <a:ext uri="{FF2B5EF4-FFF2-40B4-BE49-F238E27FC236}">
-                <a16:creationId xmlns:a16="http://schemas.microsoft.com/office/drawing/2014/main" id="{0D3EE6F5-AF6B-440D-A351-5E962D614741}"/>
-              </a:ext>
-            </a:extLst>
-          </p:cNvPr>
-          <p:cNvSpPr>
-            <a:spLocks xmlns:a="http://schemas.openxmlformats.org/drawingml/2006/main" noGrp="1"/>
-          </p:cNvSpPr>
-          <p:nvPr/>
-        </p:nvSpPr>
-        <p:spPr>
-          <a:xfrm xmlns:a="http://schemas.openxmlformats.org/drawingml/2006/main">
-            <a:off x="7810500" y="-571500"/>
-            <a:ext cx="4953000" cy="4953000"/>
+                <a16:creationId xmlns:a16="http://schemas.microsoft.com/office/drawing/2014/main" id="{43A7D601-761C-4FE4-84A7-8BCFC9CFEB95}"/>
+              </a:ext>
+            </a:extLst>
+          </p:cNvPr>
+          <p:cNvSpPr>
+            <a:spLocks xmlns:a="http://schemas.openxmlformats.org/drawingml/2006/main" noGrp="1"/>
+          </p:cNvSpPr>
+          <p:nvPr/>
+        </p:nvSpPr>
+        <p:spPr>
+          <a:xfrm xmlns:a="http://schemas.openxmlformats.org/drawingml/2006/main">
+            <a:off x="7810500" y="0"/>
+            <a:ext cx="4000500" cy="4000500"/>
           </a:xfrm>
           <a:prstGeom xmlns:a="http://schemas.openxmlformats.org/drawingml/2006/main" prst="rect">
             <a:avLst/>
@@ -10577,19 +10577,19 @@
           <p:cNvPr id="3" name="">
             <a:extLst xmlns:a="http://schemas.openxmlformats.org/drawingml/2006/main">
               <a:ext uri="{FF2B5EF4-FFF2-40B4-BE49-F238E27FC236}">
-                <a16:creationId xmlns:a16="http://schemas.microsoft.com/office/drawing/2014/main" id="{8E52E707-3BE2-4D5E-8640-428D54939B0F}"/>
-              </a:ext>
-            </a:extLst>
-          </p:cNvPr>
-          <p:cNvSpPr>
-            <a:spLocks xmlns:a="http://schemas.openxmlformats.org/drawingml/2006/main" noGrp="1"/>
-          </p:cNvSpPr>
-          <p:nvPr/>
-        </p:nvSpPr>
-        <p:spPr>
-          <a:xfrm xmlns:a="http://schemas.openxmlformats.org/drawingml/2006/main">
-            <a:off x="8477250" y="-285750"/>
-            <a:ext cx="4191000" cy="4191000"/>
+                <a16:creationId xmlns:a16="http://schemas.microsoft.com/office/drawing/2014/main" id="{FC44DA0E-A4FD-4CF6-8767-0905CCB5A011}"/>
+              </a:ext>
+            </a:extLst>
+          </p:cNvPr>
+          <p:cNvSpPr>
+            <a:spLocks xmlns:a="http://schemas.openxmlformats.org/drawingml/2006/main" noGrp="1"/>
+          </p:cNvSpPr>
+          <p:nvPr/>
+        </p:nvSpPr>
+        <p:spPr>
+          <a:xfrm xmlns:a="http://schemas.openxmlformats.org/drawingml/2006/main">
+            <a:off x="8572500" y="285750"/>
+            <a:ext cx="3333750" cy="3333750"/>
           </a:xfrm>
           <a:prstGeom xmlns:a="http://schemas.openxmlformats.org/drawingml/2006/main" prst="rect">
             <a:avLst/>
@@ -10612,19 +10612,19 @@
           <p:cNvPr id="4" name="">
             <a:extLst xmlns:a="http://schemas.openxmlformats.org/drawingml/2006/main">
               <a:ext uri="{FF2B5EF4-FFF2-40B4-BE49-F238E27FC236}">
-                <a16:creationId xmlns:a16="http://schemas.microsoft.com/office/drawing/2014/main" id="{46B11258-8D60-403D-87F3-EFD11EC19E3C}"/>
-              </a:ext>
-            </a:extLst>
-          </p:cNvPr>
-          <p:cNvSpPr>
-            <a:spLocks xmlns:a="http://schemas.openxmlformats.org/drawingml/2006/main" noGrp="1"/>
-          </p:cNvSpPr>
-          <p:nvPr/>
-        </p:nvSpPr>
-        <p:spPr>
-          <a:xfrm xmlns:a="http://schemas.openxmlformats.org/drawingml/2006/main">
-            <a:off x="9144000" y="0"/>
-            <a:ext cx="3429000" cy="3429000"/>
+                <a16:creationId xmlns:a16="http://schemas.microsoft.com/office/drawing/2014/main" id="{0214D178-14B7-4D07-9241-5A197AC6B4E3}"/>
+              </a:ext>
+            </a:extLst>
+          </p:cNvPr>
+          <p:cNvSpPr>
+            <a:spLocks xmlns:a="http://schemas.openxmlformats.org/drawingml/2006/main" noGrp="1"/>
+          </p:cNvSpPr>
+          <p:nvPr/>
+        </p:nvSpPr>
+        <p:spPr>
+          <a:xfrm xmlns:a="http://schemas.openxmlformats.org/drawingml/2006/main">
+            <a:off x="9334500" y="571500"/>
+            <a:ext cx="2667000" cy="2667000"/>
           </a:xfrm>
           <a:prstGeom xmlns:a="http://schemas.openxmlformats.org/drawingml/2006/main" prst="rect">
             <a:avLst/>
@@ -10647,19 +10647,19 @@
           <p:cNvPr id="5" name="">
             <a:extLst xmlns:a="http://schemas.openxmlformats.org/drawingml/2006/main">
               <a:ext uri="{FF2B5EF4-FFF2-40B4-BE49-F238E27FC236}">
-                <a16:creationId xmlns:a16="http://schemas.microsoft.com/office/drawing/2014/main" id="{3AE615F5-D94D-456E-A5D6-207CAF8E3FE8}"/>
-              </a:ext>
-            </a:extLst>
-          </p:cNvPr>
-          <p:cNvSpPr>
-            <a:spLocks xmlns:a="http://schemas.openxmlformats.org/drawingml/2006/main" noGrp="1"/>
-          </p:cNvSpPr>
-          <p:nvPr/>
-        </p:nvSpPr>
-        <p:spPr>
-          <a:xfrm xmlns:a="http://schemas.openxmlformats.org/drawingml/2006/main">
-            <a:off x="9810750" y="285750"/>
-            <a:ext cx="2667000" cy="2667000"/>
+                <a16:creationId xmlns:a16="http://schemas.microsoft.com/office/drawing/2014/main" id="{D91DF90F-C236-4C8A-B7CC-A2B5ADF07C90}"/>
+              </a:ext>
+            </a:extLst>
+          </p:cNvPr>
+          <p:cNvSpPr>
+            <a:spLocks xmlns:a="http://schemas.openxmlformats.org/drawingml/2006/main" noGrp="1"/>
+          </p:cNvSpPr>
+          <p:nvPr/>
+        </p:nvSpPr>
+        <p:spPr>
+          <a:xfrm xmlns:a="http://schemas.openxmlformats.org/drawingml/2006/main">
+            <a:off x="10096500" y="857250"/>
+            <a:ext cx="2000250" cy="2000250"/>
           </a:xfrm>
           <a:prstGeom xmlns:a="http://schemas.openxmlformats.org/drawingml/2006/main" prst="rect">
             <a:avLst/>
@@ -10682,7 +10682,7 @@
           <p:cNvPr id="6" name="">
             <a:extLst xmlns:a="http://schemas.openxmlformats.org/drawingml/2006/main">
               <a:ext uri="{FF2B5EF4-FFF2-40B4-BE49-F238E27FC236}">
-                <a16:creationId xmlns:a16="http://schemas.microsoft.com/office/drawing/2014/main" id="{DEA4A9D5-E020-4FD3-9E3F-E62C0AB3D3F2}"/>
+                <a16:creationId xmlns:a16="http://schemas.microsoft.com/office/drawing/2014/main" id="{63E86F86-AC07-4948-90F6-C8999C336D7A}"/>
               </a:ext>
             </a:extLst>
           </p:cNvPr>
@@ -10746,7 +10746,7 @@
           <p:cNvPr id="7" name="">
             <a:extLst xmlns:a="http://schemas.openxmlformats.org/drawingml/2006/main">
               <a:ext uri="{FF2B5EF4-FFF2-40B4-BE49-F238E27FC236}">
-                <a16:creationId xmlns:a16="http://schemas.microsoft.com/office/drawing/2014/main" id="{E659D06A-7EB2-4A25-A31C-0A39EA61509C}"/>
+                <a16:creationId xmlns:a16="http://schemas.microsoft.com/office/drawing/2014/main" id="{D31D72D2-A4BF-4371-BF2B-2A3EDAC9ABA5}"/>
               </a:ext>
             </a:extLst>
           </p:cNvPr>
@@ -10810,7 +10810,7 @@
           <p:cNvPr id="8" name="">
             <a:extLst xmlns:a="http://schemas.openxmlformats.org/drawingml/2006/main">
               <a:ext uri="{FF2B5EF4-FFF2-40B4-BE49-F238E27FC236}">
-                <a16:creationId xmlns:a16="http://schemas.microsoft.com/office/drawing/2014/main" id="{3CFEB593-0DAF-46BB-BAE2-E560E55CDFB4}"/>
+                <a16:creationId xmlns:a16="http://schemas.microsoft.com/office/drawing/2014/main" id="{C58901A6-24B3-4272-AE5C-64CE41C3FE46}"/>
               </a:ext>
             </a:extLst>
           </p:cNvPr>
@@ -10874,7 +10874,7 @@
           <p:cNvPr id="9" name="">
             <a:extLst xmlns:a="http://schemas.openxmlformats.org/drawingml/2006/main">
               <a:ext uri="{FF2B5EF4-FFF2-40B4-BE49-F238E27FC236}">
-                <a16:creationId xmlns:a16="http://schemas.microsoft.com/office/drawing/2014/main" id="{89130070-369D-44E1-83EA-B2EDF0664F24}"/>
+                <a16:creationId xmlns:a16="http://schemas.microsoft.com/office/drawing/2014/main" id="{D5D1DAB2-0D79-4647-ADA7-EFC5C9302142}"/>
               </a:ext>
             </a:extLst>
           </p:cNvPr>
@@ -10907,7 +10907,7 @@
           <p:cNvPr id="10" name="">
             <a:extLst xmlns:a="http://schemas.openxmlformats.org/drawingml/2006/main">
               <a:ext uri="{FF2B5EF4-FFF2-40B4-BE49-F238E27FC236}">
-                <a16:creationId xmlns:a16="http://schemas.microsoft.com/office/drawing/2014/main" id="{27D662FA-2763-47A1-8DE1-CD8368D7146C}"/>
+                <a16:creationId xmlns:a16="http://schemas.microsoft.com/office/drawing/2014/main" id="{404CD77E-BA08-41CC-AA0F-582791B76063}"/>
               </a:ext>
             </a:extLst>
           </p:cNvPr>
@@ -10940,7 +10940,7 @@
           <p:cNvPr id="11" name="">
             <a:extLst xmlns:a="http://schemas.openxmlformats.org/drawingml/2006/main">
               <a:ext uri="{FF2B5EF4-FFF2-40B4-BE49-F238E27FC236}">
-                <a16:creationId xmlns:a16="http://schemas.microsoft.com/office/drawing/2014/main" id="{76F2C735-CC50-4153-B709-80B33AA2B81F}"/>
+                <a16:creationId xmlns:a16="http://schemas.microsoft.com/office/drawing/2014/main" id="{B8497AE7-D201-462B-B4A8-56C91723F12F}"/>
               </a:ext>
             </a:extLst>
           </p:cNvPr>
@@ -11004,7 +11004,7 @@
           <p:cNvPr id="12" name="">
             <a:extLst xmlns:a="http://schemas.openxmlformats.org/drawingml/2006/main">
               <a:ext uri="{FF2B5EF4-FFF2-40B4-BE49-F238E27FC236}">
-                <a16:creationId xmlns:a16="http://schemas.microsoft.com/office/drawing/2014/main" id="{EA36C8B9-4738-45C4-A6D2-A376407A299B}"/>
+                <a16:creationId xmlns:a16="http://schemas.microsoft.com/office/drawing/2014/main" id="{EFA6B021-8069-4B54-B37F-E428B4BC01C2}"/>
               </a:ext>
             </a:extLst>
           </p:cNvPr>
@@ -11068,7 +11068,7 @@
           <p:cNvPr id="13" name="">
             <a:extLst xmlns:a="http://schemas.openxmlformats.org/drawingml/2006/main">
               <a:ext uri="{FF2B5EF4-FFF2-40B4-BE49-F238E27FC236}">
-                <a16:creationId xmlns:a16="http://schemas.microsoft.com/office/drawing/2014/main" id="{ADFFE2C2-30D7-44B5-A234-DC3B22A7692C}"/>
+                <a16:creationId xmlns:a16="http://schemas.microsoft.com/office/drawing/2014/main" id="{4B9EA46E-3A9F-48A4-AC62-3EAAD8B1CCF9}"/>
               </a:ext>
             </a:extLst>
           </p:cNvPr>
@@ -11132,7 +11132,7 @@
           <p:cNvPr id="14" name="">
             <a:extLst xmlns:a="http://schemas.openxmlformats.org/drawingml/2006/main">
               <a:ext uri="{FF2B5EF4-FFF2-40B4-BE49-F238E27FC236}">
-                <a16:creationId xmlns:a16="http://schemas.microsoft.com/office/drawing/2014/main" id="{A7BAE77C-7B51-42CF-94F8-AE02E2D442FD}"/>
+                <a16:creationId xmlns:a16="http://schemas.microsoft.com/office/drawing/2014/main" id="{7EF2E091-DE79-44F6-9BA1-0D89678EC885}"/>
               </a:ext>
             </a:extLst>
           </p:cNvPr>
@@ -11165,7 +11165,7 @@
           <p:cNvPr id="15" name="">
             <a:extLst xmlns:a="http://schemas.openxmlformats.org/drawingml/2006/main">
               <a:ext uri="{FF2B5EF4-FFF2-40B4-BE49-F238E27FC236}">
-                <a16:creationId xmlns:a16="http://schemas.microsoft.com/office/drawing/2014/main" id="{FB8734D8-124D-422B-8081-6CDEFEBCF800}"/>
+                <a16:creationId xmlns:a16="http://schemas.microsoft.com/office/drawing/2014/main" id="{BDA29E8A-CA70-4CD8-B74D-FEAAF97626EE}"/>
               </a:ext>
             </a:extLst>
           </p:cNvPr>
@@ -11198,7 +11198,7 @@
           <p:cNvPr id="16" name="">
             <a:extLst xmlns:a="http://schemas.openxmlformats.org/drawingml/2006/main">
               <a:ext uri="{FF2B5EF4-FFF2-40B4-BE49-F238E27FC236}">
-                <a16:creationId xmlns:a16="http://schemas.microsoft.com/office/drawing/2014/main" id="{7BBA9BC1-3DD3-4236-87B1-77A5BDD19DF8}"/>
+                <a16:creationId xmlns:a16="http://schemas.microsoft.com/office/drawing/2014/main" id="{2500FCBF-E5FE-4141-A57D-12BBDC75CA71}"/>
               </a:ext>
             </a:extLst>
           </p:cNvPr>
@@ -11262,7 +11262,7 @@
           <p:cNvPr id="17" name="">
             <a:extLst xmlns:a="http://schemas.openxmlformats.org/drawingml/2006/main">
               <a:ext uri="{FF2B5EF4-FFF2-40B4-BE49-F238E27FC236}">
-                <a16:creationId xmlns:a16="http://schemas.microsoft.com/office/drawing/2014/main" id="{AC163BAE-B6D1-4A5F-8C76-869E3E2FCF46}"/>
+                <a16:creationId xmlns:a16="http://schemas.microsoft.com/office/drawing/2014/main" id="{1A3AE6FF-B955-45B1-9289-4D3A8FC08546}"/>
               </a:ext>
             </a:extLst>
           </p:cNvPr>
@@ -11326,7 +11326,7 @@
           <p:cNvPr id="18" name="">
             <a:extLst xmlns:a="http://schemas.openxmlformats.org/drawingml/2006/main">
               <a:ext uri="{FF2B5EF4-FFF2-40B4-BE49-F238E27FC236}">
-                <a16:creationId xmlns:a16="http://schemas.microsoft.com/office/drawing/2014/main" id="{FE874650-75C2-40E1-926B-AEE0B2CA3026}"/>
+                <a16:creationId xmlns:a16="http://schemas.microsoft.com/office/drawing/2014/main" id="{3DA31461-7C39-4836-A48C-9F8678F93712}"/>
               </a:ext>
             </a:extLst>
           </p:cNvPr>
@@ -11390,7 +11390,7 @@
           <p:cNvPr id="19" name="">
             <a:extLst xmlns:a="http://schemas.openxmlformats.org/drawingml/2006/main">
               <a:ext uri="{FF2B5EF4-FFF2-40B4-BE49-F238E27FC236}">
-                <a16:creationId xmlns:a16="http://schemas.microsoft.com/office/drawing/2014/main" id="{001EC9C3-BAFD-40BF-B012-8C624AE5372E}"/>
+                <a16:creationId xmlns:a16="http://schemas.microsoft.com/office/drawing/2014/main" id="{6D98AEF0-28C6-4E06-9991-BA13994C1DFC}"/>
               </a:ext>
             </a:extLst>
           </p:cNvPr>
@@ -11423,7 +11423,7 @@
           <p:cNvPr id="20" name="">
             <a:extLst xmlns:a="http://schemas.openxmlformats.org/drawingml/2006/main">
               <a:ext uri="{FF2B5EF4-FFF2-40B4-BE49-F238E27FC236}">
-                <a16:creationId xmlns:a16="http://schemas.microsoft.com/office/drawing/2014/main" id="{EFB45833-4688-48AA-BCBD-FC1A749845FA}"/>
+                <a16:creationId xmlns:a16="http://schemas.microsoft.com/office/drawing/2014/main" id="{42256B36-58BB-4786-B36E-7F9B12B1D98E}"/>
               </a:ext>
             </a:extLst>
           </p:cNvPr>
@@ -11456,7 +11456,7 @@
           <p:cNvPr id="21" name="">
             <a:extLst xmlns:a="http://schemas.openxmlformats.org/drawingml/2006/main">
               <a:ext uri="{FF2B5EF4-FFF2-40B4-BE49-F238E27FC236}">
-                <a16:creationId xmlns:a16="http://schemas.microsoft.com/office/drawing/2014/main" id="{D2D96985-9CB4-4C63-812C-735823153F2B}"/>
+                <a16:creationId xmlns:a16="http://schemas.microsoft.com/office/drawing/2014/main" id="{A8D47F5F-921C-49B0-8B83-7D78444F23D9}"/>
               </a:ext>
             </a:extLst>
           </p:cNvPr>
@@ -11520,7 +11520,7 @@
           <p:cNvPr id="22" name="">
             <a:extLst xmlns:a="http://schemas.openxmlformats.org/drawingml/2006/main">
               <a:ext uri="{FF2B5EF4-FFF2-40B4-BE49-F238E27FC236}">
-                <a16:creationId xmlns:a16="http://schemas.microsoft.com/office/drawing/2014/main" id="{4AC31379-6EA2-4060-AFA0-DAE897C31C60}"/>
+                <a16:creationId xmlns:a16="http://schemas.microsoft.com/office/drawing/2014/main" id="{6627FD3F-5D9F-49C0-A794-FD6950CE4CFE}"/>
               </a:ext>
             </a:extLst>
           </p:cNvPr>
@@ -11584,7 +11584,7 @@
           <p:cNvPr id="23" name="">
             <a:extLst xmlns:a="http://schemas.openxmlformats.org/drawingml/2006/main">
               <a:ext uri="{FF2B5EF4-FFF2-40B4-BE49-F238E27FC236}">
-                <a16:creationId xmlns:a16="http://schemas.microsoft.com/office/drawing/2014/main" id="{C8973384-8157-47FF-9983-33AE7FCC8179}"/>
+                <a16:creationId xmlns:a16="http://schemas.microsoft.com/office/drawing/2014/main" id="{15077B85-71D1-4461-AF94-D0E17FE18A3A}"/>
               </a:ext>
             </a:extLst>
           </p:cNvPr>
@@ -11648,7 +11648,7 @@
           <p:cNvPr id="24" name="">
             <a:extLst xmlns:a="http://schemas.openxmlformats.org/drawingml/2006/main">
               <a:ext uri="{FF2B5EF4-FFF2-40B4-BE49-F238E27FC236}">
-                <a16:creationId xmlns:a16="http://schemas.microsoft.com/office/drawing/2014/main" id="{F84BE3A1-650B-4991-977D-F2890F23199E}"/>
+                <a16:creationId xmlns:a16="http://schemas.microsoft.com/office/drawing/2014/main" id="{366F23AE-E6C1-4FF7-9E5D-AE921E84019C}"/>
               </a:ext>
             </a:extLst>
           </p:cNvPr>
@@ -11681,7 +11681,7 @@
           <p:cNvPr id="25" name="">
             <a:extLst xmlns:a="http://schemas.openxmlformats.org/drawingml/2006/main">
               <a:ext uri="{FF2B5EF4-FFF2-40B4-BE49-F238E27FC236}">
-                <a16:creationId xmlns:a16="http://schemas.microsoft.com/office/drawing/2014/main" id="{B30CC04C-1BB3-495C-8003-04B6F04B7800}"/>
+                <a16:creationId xmlns:a16="http://schemas.microsoft.com/office/drawing/2014/main" id="{04132025-39D6-454F-B56F-64D9C32D50D0}"/>
               </a:ext>
             </a:extLst>
           </p:cNvPr>
@@ -11714,7 +11714,7 @@
           <p:cNvPr id="26" name="">
             <a:extLst xmlns:a="http://schemas.openxmlformats.org/drawingml/2006/main">
               <a:ext uri="{FF2B5EF4-FFF2-40B4-BE49-F238E27FC236}">
-                <a16:creationId xmlns:a16="http://schemas.microsoft.com/office/drawing/2014/main" id="{9D6EE75F-D2F2-4BD0-B578-0753F065DCB8}"/>
+                <a16:creationId xmlns:a16="http://schemas.microsoft.com/office/drawing/2014/main" id="{D86CEC13-DA3D-46E1-ACD8-0F8F87A4EC87}"/>
               </a:ext>
             </a:extLst>
           </p:cNvPr>
@@ -11778,7 +11778,7 @@
           <p:cNvPr id="27" name="">
             <a:extLst xmlns:a="http://schemas.openxmlformats.org/drawingml/2006/main">
               <a:ext uri="{FF2B5EF4-FFF2-40B4-BE49-F238E27FC236}">
-                <a16:creationId xmlns:a16="http://schemas.microsoft.com/office/drawing/2014/main" id="{E4AB2995-4DBC-44AB-A217-E33364BE8390}"/>
+                <a16:creationId xmlns:a16="http://schemas.microsoft.com/office/drawing/2014/main" id="{9454CDB7-3EC0-4138-B2B4-E5057475A6D5}"/>
               </a:ext>
             </a:extLst>
           </p:cNvPr>
@@ -11842,7 +11842,7 @@
           <p:cNvPr id="28" name="">
             <a:extLst xmlns:a="http://schemas.openxmlformats.org/drawingml/2006/main">
               <a:ext uri="{FF2B5EF4-FFF2-40B4-BE49-F238E27FC236}">
-                <a16:creationId xmlns:a16="http://schemas.microsoft.com/office/drawing/2014/main" id="{C00C2EF3-3FC1-4824-897A-289C48541DCF}"/>
+                <a16:creationId xmlns:a16="http://schemas.microsoft.com/office/drawing/2014/main" id="{2EE4CB80-6C36-4625-AB16-EC1F47666970}"/>
               </a:ext>
             </a:extLst>
           </p:cNvPr>
@@ -11906,7 +11906,7 @@
           <p:cNvPr id="29" name="">
             <a:extLst xmlns:a="http://schemas.openxmlformats.org/drawingml/2006/main">
               <a:ext uri="{FF2B5EF4-FFF2-40B4-BE49-F238E27FC236}">
-                <a16:creationId xmlns:a16="http://schemas.microsoft.com/office/drawing/2014/main" id="{1F706785-3D7E-423F-8A07-15FF5026E214}"/>
+                <a16:creationId xmlns:a16="http://schemas.microsoft.com/office/drawing/2014/main" id="{EE9A8591-13AC-4810-A5FC-E51E9B175BA4}"/>
               </a:ext>
             </a:extLst>
           </p:cNvPr>
@@ -11939,7 +11939,7 @@
           <p:cNvPr id="30" name="">
             <a:extLst xmlns:a="http://schemas.openxmlformats.org/drawingml/2006/main">
               <a:ext uri="{FF2B5EF4-FFF2-40B4-BE49-F238E27FC236}">
-                <a16:creationId xmlns:a16="http://schemas.microsoft.com/office/drawing/2014/main" id="{FDB894A0-0440-47CD-9EEE-49A3CD6D085D}"/>
+                <a16:creationId xmlns:a16="http://schemas.microsoft.com/office/drawing/2014/main" id="{76431226-378E-48A5-BFFC-C018AB25DE5F}"/>
               </a:ext>
             </a:extLst>
           </p:cNvPr>
@@ -11972,7 +11972,7 @@
           <p:cNvPr id="31" name="">
             <a:extLst xmlns:a="http://schemas.openxmlformats.org/drawingml/2006/main">
               <a:ext uri="{FF2B5EF4-FFF2-40B4-BE49-F238E27FC236}">
-                <a16:creationId xmlns:a16="http://schemas.microsoft.com/office/drawing/2014/main" id="{C1DEBFBC-026F-4386-B8FF-CC87C814F5FB}"/>
+                <a16:creationId xmlns:a16="http://schemas.microsoft.com/office/drawing/2014/main" id="{467122E0-D273-4F82-BFA3-6C6EAFC479E1}"/>
               </a:ext>
             </a:extLst>
           </p:cNvPr>
@@ -12036,7 +12036,7 @@
           <p:cNvPr id="32" name="">
             <a:extLst xmlns:a="http://schemas.openxmlformats.org/drawingml/2006/main">
               <a:ext uri="{FF2B5EF4-FFF2-40B4-BE49-F238E27FC236}">
-                <a16:creationId xmlns:a16="http://schemas.microsoft.com/office/drawing/2014/main" id="{104EBE90-CB8D-4BDC-AE92-749AA58FD434}"/>
+                <a16:creationId xmlns:a16="http://schemas.microsoft.com/office/drawing/2014/main" id="{4944E40C-617C-4839-8F49-3F530F09896E}"/>
               </a:ext>
             </a:extLst>
           </p:cNvPr>
@@ -12100,7 +12100,7 @@
           <p:cNvPr id="33" name="">
             <a:extLst xmlns:a="http://schemas.openxmlformats.org/drawingml/2006/main">
               <a:ext uri="{FF2B5EF4-FFF2-40B4-BE49-F238E27FC236}">
-                <a16:creationId xmlns:a16="http://schemas.microsoft.com/office/drawing/2014/main" id="{76FDC049-2A0F-449B-B21C-C3C3F876D3B0}"/>
+                <a16:creationId xmlns:a16="http://schemas.microsoft.com/office/drawing/2014/main" id="{940C6AB1-AF2C-4A40-BFA0-30109021F5AE}"/>
               </a:ext>
             </a:extLst>
           </p:cNvPr>
@@ -12164,7 +12164,7 @@
           <p:cNvPr id="34" name="">
             <a:extLst xmlns:a="http://schemas.openxmlformats.org/drawingml/2006/main">
               <a:ext uri="{FF2B5EF4-FFF2-40B4-BE49-F238E27FC236}">
-                <a16:creationId xmlns:a16="http://schemas.microsoft.com/office/drawing/2014/main" id="{7690D0D6-6997-497F-BFA6-EAE23533EA5A}"/>
+                <a16:creationId xmlns:a16="http://schemas.microsoft.com/office/drawing/2014/main" id="{62F1509D-9168-455D-BF27-ADD10C343FFB}"/>
               </a:ext>
             </a:extLst>
           </p:cNvPr>
@@ -12228,7 +12228,7 @@
           <p:cNvPr id="35" name="">
             <a:extLst xmlns:a="http://schemas.openxmlformats.org/drawingml/2006/main">
               <a:ext uri="{FF2B5EF4-FFF2-40B4-BE49-F238E27FC236}">
-                <a16:creationId xmlns:a16="http://schemas.microsoft.com/office/drawing/2014/main" id="{E8E38CD6-E376-421E-B48B-0AA50E8CA0CA}"/>
+                <a16:creationId xmlns:a16="http://schemas.microsoft.com/office/drawing/2014/main" id="{DAFE97F0-A78D-411F-B45B-D2D9C5FFC12D}"/>
               </a:ext>
             </a:extLst>
           </p:cNvPr>
@@ -12292,7 +12292,7 @@
           <p:cNvPr id="36" name="">
             <a:extLst xmlns:a="http://schemas.openxmlformats.org/drawingml/2006/main">
               <a:ext uri="{FF2B5EF4-FFF2-40B4-BE49-F238E27FC236}">
-                <a16:creationId xmlns:a16="http://schemas.microsoft.com/office/drawing/2014/main" id="{3C62B6B2-3044-4F12-A23B-F3C3189CC4D8}"/>
+                <a16:creationId xmlns:a16="http://schemas.microsoft.com/office/drawing/2014/main" id="{25AC07E0-1A20-4332-A57B-6F6E4E7C5F9F}"/>
               </a:ext>
             </a:extLst>
           </p:cNvPr>
@@ -12356,7 +12356,7 @@
           <p:cNvPr id="37" name="">
             <a:extLst xmlns:a="http://schemas.openxmlformats.org/drawingml/2006/main">
               <a:ext uri="{FF2B5EF4-FFF2-40B4-BE49-F238E27FC236}">
-                <a16:creationId xmlns:a16="http://schemas.microsoft.com/office/drawing/2014/main" id="{8402F248-F63E-4881-A4F1-3C0405891A32}"/>
+                <a16:creationId xmlns:a16="http://schemas.microsoft.com/office/drawing/2014/main" id="{38B3FDDD-7D90-4D8D-88AB-E811FA085280}"/>
               </a:ext>
             </a:extLst>
           </p:cNvPr>
@@ -12387,7 +12387,7 @@
     </p:spTree>
     <p:extLst>
       <p:ext uri="{BB962C8B-B14F-4D97-AF65-F5344CB8AC3E}">
-        <p14:creationId xmlns:p14="http://schemas.microsoft.com/office/powerpoint/2010/main" val="1969936190"/>
+        <p14:creationId xmlns:p14="http://schemas.microsoft.com/office/powerpoint/2010/main" val="624635592"/>
       </p:ext>
     </p:extLst>
   </p:cSld>
@@ -12411,7 +12411,7 @@
           <p:cNvPr id="1" name="">
             <a:extLst xmlns:a="http://schemas.openxmlformats.org/drawingml/2006/main">
               <a:ext uri="{FF2B5EF4-FFF2-40B4-BE49-F238E27FC236}">
-                <a16:creationId xmlns:a16="http://schemas.microsoft.com/office/drawing/2014/main" id="{E49A0993-1EBA-4EEF-B49F-BC4668B88699}"/>
+                <a16:creationId xmlns:a16="http://schemas.microsoft.com/office/drawing/2014/main" id="{DE0679DC-1588-4D66-AE48-554009616AD8}"/>
               </a:ext>
             </a:extLst>
           </p:cNvPr>
@@ -12444,19 +12444,19 @@
           <p:cNvPr id="2" name="">
             <a:extLst xmlns:a="http://schemas.openxmlformats.org/drawingml/2006/main">
               <a:ext uri="{FF2B5EF4-FFF2-40B4-BE49-F238E27FC236}">
-                <a16:creationId xmlns:a16="http://schemas.microsoft.com/office/drawing/2014/main" id="{4FA79D7B-0D73-45B0-870D-FB2B09F0D22B}"/>
-              </a:ext>
-            </a:extLst>
-          </p:cNvPr>
-          <p:cNvSpPr>
-            <a:spLocks xmlns:a="http://schemas.openxmlformats.org/drawingml/2006/main" noGrp="1"/>
-          </p:cNvSpPr>
-          <p:nvPr/>
-        </p:nvSpPr>
-        <p:spPr>
-          <a:xfrm xmlns:a="http://schemas.openxmlformats.org/drawingml/2006/main">
-            <a:off x="7810500" y="-571500"/>
-            <a:ext cx="4953000" cy="4953000"/>
+                <a16:creationId xmlns:a16="http://schemas.microsoft.com/office/drawing/2014/main" id="{8FC74A30-4BB8-4D7B-A176-FC0165A236B7}"/>
+              </a:ext>
+            </a:extLst>
+          </p:cNvPr>
+          <p:cNvSpPr>
+            <a:spLocks xmlns:a="http://schemas.openxmlformats.org/drawingml/2006/main" noGrp="1"/>
+          </p:cNvSpPr>
+          <p:nvPr/>
+        </p:nvSpPr>
+        <p:spPr>
+          <a:xfrm xmlns:a="http://schemas.openxmlformats.org/drawingml/2006/main">
+            <a:off x="7810500" y="0"/>
+            <a:ext cx="4000500" cy="4000500"/>
           </a:xfrm>
           <a:prstGeom xmlns:a="http://schemas.openxmlformats.org/drawingml/2006/main" prst="rect">
             <a:avLst/>
@@ -12479,19 +12479,19 @@
           <p:cNvPr id="3" name="">
             <a:extLst xmlns:a="http://schemas.openxmlformats.org/drawingml/2006/main">
               <a:ext uri="{FF2B5EF4-FFF2-40B4-BE49-F238E27FC236}">
-                <a16:creationId xmlns:a16="http://schemas.microsoft.com/office/drawing/2014/main" id="{9597365F-D71E-4F39-89D7-4C42B956435B}"/>
-              </a:ext>
-            </a:extLst>
-          </p:cNvPr>
-          <p:cNvSpPr>
-            <a:spLocks xmlns:a="http://schemas.openxmlformats.org/drawingml/2006/main" noGrp="1"/>
-          </p:cNvSpPr>
-          <p:nvPr/>
-        </p:nvSpPr>
-        <p:spPr>
-          <a:xfrm xmlns:a="http://schemas.openxmlformats.org/drawingml/2006/main">
-            <a:off x="8477250" y="-285750"/>
-            <a:ext cx="4191000" cy="4191000"/>
+                <a16:creationId xmlns:a16="http://schemas.microsoft.com/office/drawing/2014/main" id="{D78C804C-3D8B-4E55-9645-38385DADE055}"/>
+              </a:ext>
+            </a:extLst>
+          </p:cNvPr>
+          <p:cNvSpPr>
+            <a:spLocks xmlns:a="http://schemas.openxmlformats.org/drawingml/2006/main" noGrp="1"/>
+          </p:cNvSpPr>
+          <p:nvPr/>
+        </p:nvSpPr>
+        <p:spPr>
+          <a:xfrm xmlns:a="http://schemas.openxmlformats.org/drawingml/2006/main">
+            <a:off x="8572500" y="285750"/>
+            <a:ext cx="3333750" cy="3333750"/>
           </a:xfrm>
           <a:prstGeom xmlns:a="http://schemas.openxmlformats.org/drawingml/2006/main" prst="rect">
             <a:avLst/>
@@ -12514,19 +12514,19 @@
           <p:cNvPr id="4" name="">
             <a:extLst xmlns:a="http://schemas.openxmlformats.org/drawingml/2006/main">
               <a:ext uri="{FF2B5EF4-FFF2-40B4-BE49-F238E27FC236}">
-                <a16:creationId xmlns:a16="http://schemas.microsoft.com/office/drawing/2014/main" id="{5A25BB59-A848-4E8A-B846-5FF3B1DE319A}"/>
-              </a:ext>
-            </a:extLst>
-          </p:cNvPr>
-          <p:cNvSpPr>
-            <a:spLocks xmlns:a="http://schemas.openxmlformats.org/drawingml/2006/main" noGrp="1"/>
-          </p:cNvSpPr>
-          <p:nvPr/>
-        </p:nvSpPr>
-        <p:spPr>
-          <a:xfrm xmlns:a="http://schemas.openxmlformats.org/drawingml/2006/main">
-            <a:off x="9144000" y="0"/>
-            <a:ext cx="3429000" cy="3429000"/>
+                <a16:creationId xmlns:a16="http://schemas.microsoft.com/office/drawing/2014/main" id="{B4C1B7D1-36FC-438E-9FB2-A371B9A933AF}"/>
+              </a:ext>
+            </a:extLst>
+          </p:cNvPr>
+          <p:cNvSpPr>
+            <a:spLocks xmlns:a="http://schemas.openxmlformats.org/drawingml/2006/main" noGrp="1"/>
+          </p:cNvSpPr>
+          <p:nvPr/>
+        </p:nvSpPr>
+        <p:spPr>
+          <a:xfrm xmlns:a="http://schemas.openxmlformats.org/drawingml/2006/main">
+            <a:off x="9334500" y="571500"/>
+            <a:ext cx="2667000" cy="2667000"/>
           </a:xfrm>
           <a:prstGeom xmlns:a="http://schemas.openxmlformats.org/drawingml/2006/main" prst="rect">
             <a:avLst/>
@@ -12549,19 +12549,19 @@
           <p:cNvPr id="5" name="">
             <a:extLst xmlns:a="http://schemas.openxmlformats.org/drawingml/2006/main">
               <a:ext uri="{FF2B5EF4-FFF2-40B4-BE49-F238E27FC236}">
-                <a16:creationId xmlns:a16="http://schemas.microsoft.com/office/drawing/2014/main" id="{4DC73112-B775-4766-9FD4-42182ECE658E}"/>
-              </a:ext>
-            </a:extLst>
-          </p:cNvPr>
-          <p:cNvSpPr>
-            <a:spLocks xmlns:a="http://schemas.openxmlformats.org/drawingml/2006/main" noGrp="1"/>
-          </p:cNvSpPr>
-          <p:nvPr/>
-        </p:nvSpPr>
-        <p:spPr>
-          <a:xfrm xmlns:a="http://schemas.openxmlformats.org/drawingml/2006/main">
-            <a:off x="9810750" y="285750"/>
-            <a:ext cx="2667000" cy="2667000"/>
+                <a16:creationId xmlns:a16="http://schemas.microsoft.com/office/drawing/2014/main" id="{CA720CB2-D071-4763-94C4-E6C976D70A33}"/>
+              </a:ext>
+            </a:extLst>
+          </p:cNvPr>
+          <p:cNvSpPr>
+            <a:spLocks xmlns:a="http://schemas.openxmlformats.org/drawingml/2006/main" noGrp="1"/>
+          </p:cNvSpPr>
+          <p:nvPr/>
+        </p:nvSpPr>
+        <p:spPr>
+          <a:xfrm xmlns:a="http://schemas.openxmlformats.org/drawingml/2006/main">
+            <a:off x="10096500" y="857250"/>
+            <a:ext cx="2000250" cy="2000250"/>
           </a:xfrm>
           <a:prstGeom xmlns:a="http://schemas.openxmlformats.org/drawingml/2006/main" prst="rect">
             <a:avLst/>
@@ -12584,7 +12584,7 @@
           <p:cNvPr id="6" name="">
             <a:extLst xmlns:a="http://schemas.openxmlformats.org/drawingml/2006/main">
               <a:ext uri="{FF2B5EF4-FFF2-40B4-BE49-F238E27FC236}">
-                <a16:creationId xmlns:a16="http://schemas.microsoft.com/office/drawing/2014/main" id="{8400B67E-A9CE-4CDE-86A6-92077A57DBB0}"/>
+                <a16:creationId xmlns:a16="http://schemas.microsoft.com/office/drawing/2014/main" id="{A14830F9-CFBE-4B1D-AA02-59F4B0440D1A}"/>
               </a:ext>
             </a:extLst>
           </p:cNvPr>
@@ -12648,7 +12648,7 @@
           <p:cNvPr id="7" name="">
             <a:extLst xmlns:a="http://schemas.openxmlformats.org/drawingml/2006/main">
               <a:ext uri="{FF2B5EF4-FFF2-40B4-BE49-F238E27FC236}">
-                <a16:creationId xmlns:a16="http://schemas.microsoft.com/office/drawing/2014/main" id="{C16F22F1-B550-4480-A274-AF5EB9562B52}"/>
+                <a16:creationId xmlns:a16="http://schemas.microsoft.com/office/drawing/2014/main" id="{1BFFF3F3-F892-44C2-8074-A42D2C0FA855}"/>
               </a:ext>
             </a:extLst>
           </p:cNvPr>
@@ -12702,7 +12702,7 @@
                 <a:ea typeface="Malgun Gothic"/>
                 <a:cs typeface="Malgun Gothic"/>
               </a:rPr>
-              <a:t>최신 로컬 검증 결과를 README 기준 수치로 사용했습니다</a:t>
+              <a:t>최신 로컬 검증 결과를 공개 자료의 기준으로 사용했습니다</a:t>
             </a:r>
           </a:p>
         </p:txBody>
@@ -12712,7 +12712,7 @@
           <p:cNvPr id="8" name="">
             <a:extLst xmlns:a="http://schemas.openxmlformats.org/drawingml/2006/main">
               <a:ext uri="{FF2B5EF4-FFF2-40B4-BE49-F238E27FC236}">
-                <a16:creationId xmlns:a16="http://schemas.microsoft.com/office/drawing/2014/main" id="{67C56CCB-C322-4780-BF38-29FE767A631F}"/>
+                <a16:creationId xmlns:a16="http://schemas.microsoft.com/office/drawing/2014/main" id="{58D40F89-741D-4B10-B96E-A4B8AC8FA88D}"/>
               </a:ext>
             </a:extLst>
           </p:cNvPr>
@@ -12766,7 +12766,7 @@
                 <a:ea typeface="Malgun Gothic"/>
                 <a:cs typeface="Malgun Gothic"/>
               </a:rPr>
-              <a:t>2026-06-13: 100대, 60초, seed 42 대표 시뮬레이션과 전체 테스트 스위트 기준.</a:t>
+              <a:t>2026-06-18: 100대, 60초, seed 42 대표 실행과 전체 Python 테스트 스위트 기준.</a:t>
             </a:r>
           </a:p>
         </p:txBody>
@@ -12776,7 +12776,7 @@
           <p:cNvPr id="9" name="">
             <a:extLst xmlns:a="http://schemas.openxmlformats.org/drawingml/2006/main">
               <a:ext uri="{FF2B5EF4-FFF2-40B4-BE49-F238E27FC236}">
-                <a16:creationId xmlns:a16="http://schemas.microsoft.com/office/drawing/2014/main" id="{9CDA4DB2-7BA2-4258-ADF1-63A2B6FCCD17}"/>
+                <a16:creationId xmlns:a16="http://schemas.microsoft.com/office/drawing/2014/main" id="{9E1F53F0-FC9A-4A7B-980F-DF77286CE3A6}"/>
               </a:ext>
             </a:extLst>
           </p:cNvPr>
@@ -12809,7 +12809,7 @@
           <p:cNvPr id="10" name="">
             <a:extLst xmlns:a="http://schemas.openxmlformats.org/drawingml/2006/main">
               <a:ext uri="{FF2B5EF4-FFF2-40B4-BE49-F238E27FC236}">
-                <a16:creationId xmlns:a16="http://schemas.microsoft.com/office/drawing/2014/main" id="{E69B579D-3294-4EC6-9A02-66B9A13F5D57}"/>
+                <a16:creationId xmlns:a16="http://schemas.microsoft.com/office/drawing/2014/main" id="{4EB973DC-B7EB-419A-8A27-17358A53163F}"/>
               </a:ext>
             </a:extLst>
           </p:cNvPr>
@@ -12827,11 +12827,11 @@
             <a:avLst/>
           </a:prstGeom>
           <a:solidFill xmlns:a="http://schemas.openxmlformats.org/drawingml/2006/main">
-            <a:srgbClr val="29D398"/>
-          </a:solidFill>
-          <a:ln xmlns:a="http://schemas.openxmlformats.org/drawingml/2006/main" w="0">
-            <a:solidFill>
-              <a:srgbClr val="29D398"/>
+            <a:srgbClr val="EF6461"/>
+          </a:solidFill>
+          <a:ln xmlns:a="http://schemas.openxmlformats.org/drawingml/2006/main" w="0">
+            <a:solidFill>
+              <a:srgbClr val="EF6461"/>
             </a:solidFill>
             <a:prstDash val="solid"/>
           </a:ln>
@@ -12842,7 +12842,7 @@
           <p:cNvPr id="11" name="">
             <a:extLst xmlns:a="http://schemas.openxmlformats.org/drawingml/2006/main">
               <a:ext uri="{FF2B5EF4-FFF2-40B4-BE49-F238E27FC236}">
-                <a16:creationId xmlns:a16="http://schemas.microsoft.com/office/drawing/2014/main" id="{3FD61C06-C86C-414C-BDE6-E3CF3048631A}"/>
+                <a16:creationId xmlns:a16="http://schemas.microsoft.com/office/drawing/2014/main" id="{D23F716A-E7A5-4504-93E1-A78702601405}"/>
               </a:ext>
             </a:extLst>
           </p:cNvPr>
@@ -12880,7 +12880,7 @@
             <a:pPr algn="l">
               <a:defRPr sz="2100" b="1">
                 <a:solidFill>
-                  <a:srgbClr val="29D398"/>
+                  <a:srgbClr val="EF6461"/>
                 </a:solidFill>
                 <a:latin typeface="Malgun Gothic"/>
                 <a:ea typeface="Malgun Gothic"/>
@@ -12890,13 +12890,13 @@
             <a:r>
               <a:rPr sz="2100" b="1">
                 <a:solidFill>
-                  <a:srgbClr val="29D398"/>
+                  <a:srgbClr val="EF6461"/>
                 </a:solidFill>
                 <a:latin typeface="Malgun Gothic"/>
                 <a:ea typeface="Malgun Gothic"/>
                 <a:cs typeface="Malgun Gothic"/>
               </a:rPr>
-              <a:t>0 collisions</a:t>
+              <a:t>45 collisions</a:t>
             </a:r>
           </a:p>
         </p:txBody>
@@ -12906,7 +12906,7 @@
           <p:cNvPr id="12" name="">
             <a:extLst xmlns:a="http://schemas.openxmlformats.org/drawingml/2006/main">
               <a:ext uri="{FF2B5EF4-FFF2-40B4-BE49-F238E27FC236}">
-                <a16:creationId xmlns:a16="http://schemas.microsoft.com/office/drawing/2014/main" id="{13324DDB-3691-4130-A7E1-A89EFC5341BE}"/>
+                <a16:creationId xmlns:a16="http://schemas.microsoft.com/office/drawing/2014/main" id="{B3B93F36-AEC7-49ED-95FF-EAD04E2C9F1E}"/>
               </a:ext>
             </a:extLst>
           </p:cNvPr>
@@ -12918,7 +12918,7 @@
         <p:spPr>
           <a:xfrm xmlns:a="http://schemas.openxmlformats.org/drawingml/2006/main">
             <a:off x="876300" y="2495550"/>
-            <a:ext cx="2000250" cy="209550"/>
+            <a:ext cx="2000250" cy="152400"/>
           </a:xfrm>
           <a:prstGeom xmlns:a="http://schemas.openxmlformats.org/drawingml/2006/main" prst="rect">
             <a:avLst/>
@@ -12970,7 +12970,7 @@
           <p:cNvPr id="13" name="">
             <a:extLst xmlns:a="http://schemas.openxmlformats.org/drawingml/2006/main">
               <a:ext uri="{FF2B5EF4-FFF2-40B4-BE49-F238E27FC236}">
-                <a16:creationId xmlns:a16="http://schemas.microsoft.com/office/drawing/2014/main" id="{437F4848-AF83-4AC2-9C0B-627EA35A5901}"/>
+                <a16:creationId xmlns:a16="http://schemas.microsoft.com/office/drawing/2014/main" id="{D0AEA987-CC45-4476-8409-76B03E86D24E}"/>
               </a:ext>
             </a:extLst>
           </p:cNvPr>
@@ -12982,7 +12982,7 @@
         <p:spPr>
           <a:xfrm xmlns:a="http://schemas.openxmlformats.org/drawingml/2006/main">
             <a:off x="876300" y="2724150"/>
-            <a:ext cx="2000250" cy="171450"/>
+            <a:ext cx="2000250" cy="133350"/>
           </a:xfrm>
           <a:prstGeom xmlns:a="http://schemas.openxmlformats.org/drawingml/2006/main" prst="rect">
             <a:avLst/>
@@ -13024,7 +13024,7 @@
                 <a:ea typeface="Malgun Gothic"/>
                 <a:cs typeface="Malgun Gothic"/>
               </a:rPr>
-              <a:t>near miss 1</a:t>
+              <a:t>near miss 87</a:t>
             </a:r>
           </a:p>
         </p:txBody>
@@ -13034,7 +13034,7 @@
           <p:cNvPr id="14" name="">
             <a:extLst xmlns:a="http://schemas.openxmlformats.org/drawingml/2006/main">
               <a:ext uri="{FF2B5EF4-FFF2-40B4-BE49-F238E27FC236}">
-                <a16:creationId xmlns:a16="http://schemas.microsoft.com/office/drawing/2014/main" id="{E163F10D-C421-427F-97C7-5D8577CD6781}"/>
+                <a16:creationId xmlns:a16="http://schemas.microsoft.com/office/drawing/2014/main" id="{7A67D4A9-AA04-4417-AA58-8F612ECA2EB2}"/>
               </a:ext>
             </a:extLst>
           </p:cNvPr>
@@ -13067,7 +13067,7 @@
           <p:cNvPr id="15" name="">
             <a:extLst xmlns:a="http://schemas.openxmlformats.org/drawingml/2006/main">
               <a:ext uri="{FF2B5EF4-FFF2-40B4-BE49-F238E27FC236}">
-                <a16:creationId xmlns:a16="http://schemas.microsoft.com/office/drawing/2014/main" id="{C87CA180-1A10-4817-931B-42805C0C2BC2}"/>
+                <a16:creationId xmlns:a16="http://schemas.microsoft.com/office/drawing/2014/main" id="{4B9D8996-05E0-4DB1-AB76-7B954CF61E96}"/>
               </a:ext>
             </a:extLst>
           </p:cNvPr>
@@ -13100,7 +13100,7 @@
           <p:cNvPr id="16" name="">
             <a:extLst xmlns:a="http://schemas.openxmlformats.org/drawingml/2006/main">
               <a:ext uri="{FF2B5EF4-FFF2-40B4-BE49-F238E27FC236}">
-                <a16:creationId xmlns:a16="http://schemas.microsoft.com/office/drawing/2014/main" id="{0D1A745C-A0BB-497D-B631-9E8A3CFDC8E9}"/>
+                <a16:creationId xmlns:a16="http://schemas.microsoft.com/office/drawing/2014/main" id="{DF304E3E-C3A8-4545-ABD4-7CE39F12838E}"/>
               </a:ext>
             </a:extLst>
           </p:cNvPr>
@@ -13154,7 +13154,7 @@
                 <a:ea typeface="Malgun Gothic"/>
                 <a:cs typeface="Malgun Gothic"/>
               </a:rPr>
-              <a:t>4,291 pass</a:t>
+              <a:t>5,444 pass</a:t>
             </a:r>
           </a:p>
         </p:txBody>
@@ -13164,7 +13164,7 @@
           <p:cNvPr id="17" name="">
             <a:extLst xmlns:a="http://schemas.openxmlformats.org/drawingml/2006/main">
               <a:ext uri="{FF2B5EF4-FFF2-40B4-BE49-F238E27FC236}">
-                <a16:creationId xmlns:a16="http://schemas.microsoft.com/office/drawing/2014/main" id="{79BAC0F8-1DC8-47FF-AF0F-A0104B8593D2}"/>
+                <a16:creationId xmlns:a16="http://schemas.microsoft.com/office/drawing/2014/main" id="{42B23CA0-791B-45D1-AECD-04286F143770}"/>
               </a:ext>
             </a:extLst>
           </p:cNvPr>
@@ -13176,7 +13176,7 @@
         <p:spPr>
           <a:xfrm xmlns:a="http://schemas.openxmlformats.org/drawingml/2006/main">
             <a:off x="3467100" y="2495550"/>
-            <a:ext cx="2000250" cy="209550"/>
+            <a:ext cx="2000250" cy="152400"/>
           </a:xfrm>
           <a:prstGeom xmlns:a="http://schemas.openxmlformats.org/drawingml/2006/main" prst="rect">
             <a:avLst/>
@@ -13228,7 +13228,7 @@
           <p:cNvPr id="18" name="">
             <a:extLst xmlns:a="http://schemas.openxmlformats.org/drawingml/2006/main">
               <a:ext uri="{FF2B5EF4-FFF2-40B4-BE49-F238E27FC236}">
-                <a16:creationId xmlns:a16="http://schemas.microsoft.com/office/drawing/2014/main" id="{81195941-82C5-4313-946F-E937C898113C}"/>
+                <a16:creationId xmlns:a16="http://schemas.microsoft.com/office/drawing/2014/main" id="{85E29EC7-F2DC-40B3-B70E-24BC8C2E753B}"/>
               </a:ext>
             </a:extLst>
           </p:cNvPr>
@@ -13240,7 +13240,7 @@
         <p:spPr>
           <a:xfrm xmlns:a="http://schemas.openxmlformats.org/drawingml/2006/main">
             <a:off x="3467100" y="2724150"/>
-            <a:ext cx="2000250" cy="171450"/>
+            <a:ext cx="2000250" cy="133350"/>
           </a:xfrm>
           <a:prstGeom xmlns:a="http://schemas.openxmlformats.org/drawingml/2006/main" prst="rect">
             <a:avLst/>
@@ -13292,7 +13292,7 @@
           <p:cNvPr id="19" name="">
             <a:extLst xmlns:a="http://schemas.openxmlformats.org/drawingml/2006/main">
               <a:ext uri="{FF2B5EF4-FFF2-40B4-BE49-F238E27FC236}">
-                <a16:creationId xmlns:a16="http://schemas.microsoft.com/office/drawing/2014/main" id="{DDAE5CE9-C87E-465B-8D82-AA03C5EC8989}"/>
+                <a16:creationId xmlns:a16="http://schemas.microsoft.com/office/drawing/2014/main" id="{34E53E3F-1F6A-4B15-8D67-D51F3521DB18}"/>
               </a:ext>
             </a:extLst>
           </p:cNvPr>
@@ -13325,7 +13325,7 @@
           <p:cNvPr id="20" name="">
             <a:extLst xmlns:a="http://schemas.openxmlformats.org/drawingml/2006/main">
               <a:ext uri="{FF2B5EF4-FFF2-40B4-BE49-F238E27FC236}">
-                <a16:creationId xmlns:a16="http://schemas.microsoft.com/office/drawing/2014/main" id="{ABE201B3-AB75-4CB2-A295-8BDB9C7A16A7}"/>
+                <a16:creationId xmlns:a16="http://schemas.microsoft.com/office/drawing/2014/main" id="{C98BC501-F5BA-43A6-9469-0377A8AF84A5}"/>
               </a:ext>
             </a:extLst>
           </p:cNvPr>
@@ -13358,7 +13358,7 @@
           <p:cNvPr id="21" name="">
             <a:extLst xmlns:a="http://schemas.openxmlformats.org/drawingml/2006/main">
               <a:ext uri="{FF2B5EF4-FFF2-40B4-BE49-F238E27FC236}">
-                <a16:creationId xmlns:a16="http://schemas.microsoft.com/office/drawing/2014/main" id="{3C8317DF-42C4-4782-9F69-00A6F76D6221}"/>
+                <a16:creationId xmlns:a16="http://schemas.microsoft.com/office/drawing/2014/main" id="{B040DB3D-F38D-44E9-9D9F-F4DC0D7EF783}"/>
               </a:ext>
             </a:extLst>
           </p:cNvPr>
@@ -13412,7 +13412,7 @@
                 <a:ea typeface="Malgun Gothic"/>
                 <a:cs typeface="Malgun Gothic"/>
               </a:rPr>
-              <a:t>100%</a:t>
+              <a:t>95.9%</a:t>
             </a:r>
           </a:p>
         </p:txBody>
@@ -13422,7 +13422,7 @@
           <p:cNvPr id="22" name="">
             <a:extLst xmlns:a="http://schemas.openxmlformats.org/drawingml/2006/main">
               <a:ext uri="{FF2B5EF4-FFF2-40B4-BE49-F238E27FC236}">
-                <a16:creationId xmlns:a16="http://schemas.microsoft.com/office/drawing/2014/main" id="{442638DF-B17C-4D77-A586-24C1F0FD095C}"/>
+                <a16:creationId xmlns:a16="http://schemas.microsoft.com/office/drawing/2014/main" id="{AF0067BF-C7BD-4A6C-9B2E-327B529EEDDC}"/>
               </a:ext>
             </a:extLst>
           </p:cNvPr>
@@ -13434,7 +13434,7 @@
         <p:spPr>
           <a:xfrm xmlns:a="http://schemas.openxmlformats.org/drawingml/2006/main">
             <a:off x="6057900" y="2495550"/>
-            <a:ext cx="2000250" cy="209550"/>
+            <a:ext cx="2000250" cy="152400"/>
           </a:xfrm>
           <a:prstGeom xmlns:a="http://schemas.openxmlformats.org/drawingml/2006/main" prst="rect">
             <a:avLst/>
@@ -13486,7 +13486,7 @@
           <p:cNvPr id="23" name="">
             <a:extLst xmlns:a="http://schemas.openxmlformats.org/drawingml/2006/main">
               <a:ext uri="{FF2B5EF4-FFF2-40B4-BE49-F238E27FC236}">
-                <a16:creationId xmlns:a16="http://schemas.microsoft.com/office/drawing/2014/main" id="{B6DF38A5-0F99-4A4E-A970-D23C7E9AEC3C}"/>
+                <a16:creationId xmlns:a16="http://schemas.microsoft.com/office/drawing/2014/main" id="{B43CED8D-9CFB-40A7-BA3F-5E8FF483D410}"/>
               </a:ext>
             </a:extLst>
           </p:cNvPr>
@@ -13498,7 +13498,7 @@
         <p:spPr>
           <a:xfrm xmlns:a="http://schemas.openxmlformats.org/drawingml/2006/main">
             <a:off x="6057900" y="2724150"/>
-            <a:ext cx="2000250" cy="171450"/>
+            <a:ext cx="2000250" cy="133350"/>
           </a:xfrm>
           <a:prstGeom xmlns:a="http://schemas.openxmlformats.org/drawingml/2006/main" prst="rect">
             <a:avLst/>
@@ -13540,7 +13540,7 @@
                 <a:ea typeface="Malgun Gothic"/>
                 <a:cs typeface="Malgun Gothic"/>
               </a:rPr>
-              <a:t>95 total conflicts</a:t>
+              <a:t>1,053 total conflicts</a:t>
             </a:r>
           </a:p>
         </p:txBody>
@@ -13550,7 +13550,7 @@
           <p:cNvPr id="24" name="">
             <a:extLst xmlns:a="http://schemas.openxmlformats.org/drawingml/2006/main">
               <a:ext uri="{FF2B5EF4-FFF2-40B4-BE49-F238E27FC236}">
-                <a16:creationId xmlns:a16="http://schemas.microsoft.com/office/drawing/2014/main" id="{FE96CEFF-D825-4539-BADB-F1D4DDF1732B}"/>
+                <a16:creationId xmlns:a16="http://schemas.microsoft.com/office/drawing/2014/main" id="{85660B76-70A0-45A0-B6AE-CB8A48395904}"/>
               </a:ext>
             </a:extLst>
           </p:cNvPr>
@@ -13583,7 +13583,7 @@
           <p:cNvPr id="25" name="">
             <a:extLst xmlns:a="http://schemas.openxmlformats.org/drawingml/2006/main">
               <a:ext uri="{FF2B5EF4-FFF2-40B4-BE49-F238E27FC236}">
-                <a16:creationId xmlns:a16="http://schemas.microsoft.com/office/drawing/2014/main" id="{4AD93A41-FFE2-4D27-B2B4-3B85BEADD98B}"/>
+                <a16:creationId xmlns:a16="http://schemas.microsoft.com/office/drawing/2014/main" id="{90AD1945-E056-4229-AEC2-968746736A54}"/>
               </a:ext>
             </a:extLst>
           </p:cNvPr>
@@ -13616,7 +13616,7 @@
           <p:cNvPr id="26" name="">
             <a:extLst xmlns:a="http://schemas.openxmlformats.org/drawingml/2006/main">
               <a:ext uri="{FF2B5EF4-FFF2-40B4-BE49-F238E27FC236}">
-                <a16:creationId xmlns:a16="http://schemas.microsoft.com/office/drawing/2014/main" id="{A7E08427-643B-42A4-A79E-449D2FE16671}"/>
+                <a16:creationId xmlns:a16="http://schemas.microsoft.com/office/drawing/2014/main" id="{08BE2F4D-7F06-45DB-8A2A-70F577F76694}"/>
               </a:ext>
             </a:extLst>
           </p:cNvPr>
@@ -13680,7 +13680,7 @@
           <p:cNvPr id="27" name="">
             <a:extLst xmlns:a="http://schemas.openxmlformats.org/drawingml/2006/main">
               <a:ext uri="{FF2B5EF4-FFF2-40B4-BE49-F238E27FC236}">
-                <a16:creationId xmlns:a16="http://schemas.microsoft.com/office/drawing/2014/main" id="{C65F0B7C-838D-4BFC-902B-A7F960B855F7}"/>
+                <a16:creationId xmlns:a16="http://schemas.microsoft.com/office/drawing/2014/main" id="{625C326B-6598-4908-8C62-89B9827FED7D}"/>
               </a:ext>
             </a:extLst>
           </p:cNvPr>
@@ -13692,7 +13692,7 @@
         <p:spPr>
           <a:xfrm xmlns:a="http://schemas.openxmlformats.org/drawingml/2006/main">
             <a:off x="8648700" y="2495550"/>
-            <a:ext cx="2000250" cy="209550"/>
+            <a:ext cx="2000250" cy="152400"/>
           </a:xfrm>
           <a:prstGeom xmlns:a="http://schemas.openxmlformats.org/drawingml/2006/main" prst="rect">
             <a:avLst/>
@@ -13744,7 +13744,7 @@
           <p:cNvPr id="28" name="">
             <a:extLst xmlns:a="http://schemas.openxmlformats.org/drawingml/2006/main">
               <a:ext uri="{FF2B5EF4-FFF2-40B4-BE49-F238E27FC236}">
-                <a16:creationId xmlns:a16="http://schemas.microsoft.com/office/drawing/2014/main" id="{11766713-2336-421B-8003-E5BFAAD8BF36}"/>
+                <a16:creationId xmlns:a16="http://schemas.microsoft.com/office/drawing/2014/main" id="{56EDAF15-FFE2-4840-8EAB-42A922583750}"/>
               </a:ext>
             </a:extLst>
           </p:cNvPr>
@@ -13756,7 +13756,7 @@
         <p:spPr>
           <a:xfrm xmlns:a="http://schemas.openxmlformats.org/drawingml/2006/main">
             <a:off x="8648700" y="2724150"/>
-            <a:ext cx="2000250" cy="171450"/>
+            <a:ext cx="2000250" cy="133350"/>
           </a:xfrm>
           <a:prstGeom xmlns:a="http://schemas.openxmlformats.org/drawingml/2006/main" prst="rect">
             <a:avLst/>
@@ -13798,7 +13798,7 @@
                 <a:ea typeface="Malgun Gothic"/>
                 <a:cs typeface="Malgun Gothic"/>
               </a:rPr>
-              <a:t>12,245 delivered</a:t>
+              <a:t>12,278 delivered</a:t>
             </a:r>
           </a:p>
         </p:txBody>
@@ -13808,7 +13808,7 @@
           <p:cNvPr id="29" name="">
             <a:extLst xmlns:a="http://schemas.openxmlformats.org/drawingml/2006/main">
               <a:ext uri="{FF2B5EF4-FFF2-40B4-BE49-F238E27FC236}">
-                <a16:creationId xmlns:a16="http://schemas.microsoft.com/office/drawing/2014/main" id="{DF0A538B-6EBF-43C8-8378-4799B9027552}"/>
+                <a16:creationId xmlns:a16="http://schemas.microsoft.com/office/drawing/2014/main" id="{494F6A59-CD8F-4B49-BDF2-FB7F7C6CA123}"/>
               </a:ext>
             </a:extLst>
           </p:cNvPr>
@@ -13841,7 +13841,7 @@
           <p:cNvPr id="30" name="">
             <a:extLst xmlns:a="http://schemas.openxmlformats.org/drawingml/2006/main">
               <a:ext uri="{FF2B5EF4-FFF2-40B4-BE49-F238E27FC236}">
-                <a16:creationId xmlns:a16="http://schemas.microsoft.com/office/drawing/2014/main" id="{B37BA56E-CAEC-41FE-AA39-4629EE7A09E3}"/>
+                <a16:creationId xmlns:a16="http://schemas.microsoft.com/office/drawing/2014/main" id="{03468807-27CC-4389-A333-B39BB7CABD8C}"/>
               </a:ext>
             </a:extLst>
           </p:cNvPr>
@@ -13905,7 +13905,7 @@
           <p:cNvPr id="31" name="">
             <a:extLst xmlns:a="http://schemas.openxmlformats.org/drawingml/2006/main">
               <a:ext uri="{FF2B5EF4-FFF2-40B4-BE49-F238E27FC236}">
-                <a16:creationId xmlns:a16="http://schemas.microsoft.com/office/drawing/2014/main" id="{30D6B0DC-90C1-435C-980F-CA9A8DA08826}"/>
+                <a16:creationId xmlns:a16="http://schemas.microsoft.com/office/drawing/2014/main" id="{89799E1D-45EA-4C12-89B8-6060AF4570D2}"/>
               </a:ext>
             </a:extLst>
           </p:cNvPr>
@@ -13938,7 +13938,7 @@
           <p:cNvPr id="32" name="">
             <a:extLst xmlns:a="http://schemas.openxmlformats.org/drawingml/2006/main">
               <a:ext uri="{FF2B5EF4-FFF2-40B4-BE49-F238E27FC236}">
-                <a16:creationId xmlns:a16="http://schemas.microsoft.com/office/drawing/2014/main" id="{A3F9A413-158E-44A7-997C-A3416B8B84E1}"/>
+                <a16:creationId xmlns:a16="http://schemas.microsoft.com/office/drawing/2014/main" id="{D4D258B1-FCA6-4CDA-A8D6-79D31FEE5836}"/>
               </a:ext>
             </a:extLst>
           </p:cNvPr>
@@ -14002,7 +14002,7 @@
           <p:cNvPr id="33" name="">
             <a:extLst xmlns:a="http://schemas.openxmlformats.org/drawingml/2006/main">
               <a:ext uri="{FF2B5EF4-FFF2-40B4-BE49-F238E27FC236}">
-                <a16:creationId xmlns:a16="http://schemas.microsoft.com/office/drawing/2014/main" id="{AD84AC98-C36B-4515-9152-F284FDD4B1E4}"/>
+                <a16:creationId xmlns:a16="http://schemas.microsoft.com/office/drawing/2014/main" id="{4E4E658A-BE1C-483E-AECA-E74769C79C24}"/>
               </a:ext>
             </a:extLst>
           </p:cNvPr>
@@ -14035,7 +14035,7 @@
           <p:cNvPr id="34" name="">
             <a:extLst xmlns:a="http://schemas.openxmlformats.org/drawingml/2006/main">
               <a:ext uri="{FF2B5EF4-FFF2-40B4-BE49-F238E27FC236}">
-                <a16:creationId xmlns:a16="http://schemas.microsoft.com/office/drawing/2014/main" id="{700C8D45-076D-4BC2-95F2-1A852FC5F11A}"/>
+                <a16:creationId xmlns:a16="http://schemas.microsoft.com/office/drawing/2014/main" id="{2D38624A-3F29-4E1C-9C32-05966B308EB6}"/>
               </a:ext>
             </a:extLst>
           </p:cNvPr>
@@ -14099,7 +14099,7 @@
           <p:cNvPr id="35" name="">
             <a:extLst xmlns:a="http://schemas.openxmlformats.org/drawingml/2006/main">
               <a:ext uri="{FF2B5EF4-FFF2-40B4-BE49-F238E27FC236}">
-                <a16:creationId xmlns:a16="http://schemas.microsoft.com/office/drawing/2014/main" id="{DC6B8633-6D91-4985-BD57-5937167B286C}"/>
+                <a16:creationId xmlns:a16="http://schemas.microsoft.com/office/drawing/2014/main" id="{9E69CC76-109E-4C6D-B4CC-C927D2149638}"/>
               </a:ext>
             </a:extLst>
           </p:cNvPr>
@@ -14132,7 +14132,7 @@
           <p:cNvPr id="36" name="">
             <a:extLst xmlns:a="http://schemas.openxmlformats.org/drawingml/2006/main">
               <a:ext uri="{FF2B5EF4-FFF2-40B4-BE49-F238E27FC236}">
-                <a16:creationId xmlns:a16="http://schemas.microsoft.com/office/drawing/2014/main" id="{294365EA-6613-4839-A890-86A51938B104}"/>
+                <a16:creationId xmlns:a16="http://schemas.microsoft.com/office/drawing/2014/main" id="{E4AE8A30-4986-498F-9F5C-A5C834D2BDA8}"/>
               </a:ext>
             </a:extLst>
           </p:cNvPr>
@@ -14196,7 +14196,7 @@
           <p:cNvPr id="37" name="">
             <a:extLst xmlns:a="http://schemas.openxmlformats.org/drawingml/2006/main">
               <a:ext uri="{FF2B5EF4-FFF2-40B4-BE49-F238E27FC236}">
-                <a16:creationId xmlns:a16="http://schemas.microsoft.com/office/drawing/2014/main" id="{00A417A9-A8CC-4420-B7ED-B0BCB680951F}"/>
+                <a16:creationId xmlns:a16="http://schemas.microsoft.com/office/drawing/2014/main" id="{395BE2EA-5137-471F-BB9F-362A31E07D8E}"/>
               </a:ext>
             </a:extLst>
           </p:cNvPr>
@@ -14229,7 +14229,7 @@
           <p:cNvPr id="38" name="">
             <a:extLst xmlns:a="http://schemas.openxmlformats.org/drawingml/2006/main">
               <a:ext uri="{FF2B5EF4-FFF2-40B4-BE49-F238E27FC236}">
-                <a16:creationId xmlns:a16="http://schemas.microsoft.com/office/drawing/2014/main" id="{C02FDC2E-C85E-4903-A6F2-877999112075}"/>
+                <a16:creationId xmlns:a16="http://schemas.microsoft.com/office/drawing/2014/main" id="{3CAFD8E0-C084-4229-BEE2-64F8F067D030}"/>
               </a:ext>
             </a:extLst>
           </p:cNvPr>
@@ -14262,7 +14262,7 @@
           <p:cNvPr id="39" name="">
             <a:extLst xmlns:a="http://schemas.openxmlformats.org/drawingml/2006/main">
               <a:ext uri="{FF2B5EF4-FFF2-40B4-BE49-F238E27FC236}">
-                <a16:creationId xmlns:a16="http://schemas.microsoft.com/office/drawing/2014/main" id="{D6E4E4B2-321B-42CD-9F16-9C494725EDFB}"/>
+                <a16:creationId xmlns:a16="http://schemas.microsoft.com/office/drawing/2014/main" id="{B84A0977-1CB0-4179-9EB9-3E4B13B77270}"/>
               </a:ext>
             </a:extLst>
           </p:cNvPr>
@@ -14326,7 +14326,7 @@
           <p:cNvPr id="40" name="">
             <a:extLst xmlns:a="http://schemas.openxmlformats.org/drawingml/2006/main">
               <a:ext uri="{FF2B5EF4-FFF2-40B4-BE49-F238E27FC236}">
-                <a16:creationId xmlns:a16="http://schemas.microsoft.com/office/drawing/2014/main" id="{57C6DB31-1233-4D9F-8906-15BE580F6D85}"/>
+                <a16:creationId xmlns:a16="http://schemas.microsoft.com/office/drawing/2014/main" id="{C31E31F8-541A-490D-8A62-D09D6686767B}"/>
               </a:ext>
             </a:extLst>
           </p:cNvPr>
@@ -14359,7 +14359,7 @@
           <p:cNvPr id="41" name="">
             <a:extLst xmlns:a="http://schemas.openxmlformats.org/drawingml/2006/main">
               <a:ext uri="{FF2B5EF4-FFF2-40B4-BE49-F238E27FC236}">
-                <a16:creationId xmlns:a16="http://schemas.microsoft.com/office/drawing/2014/main" id="{93A25002-7DBC-4A41-AD0F-C12D7EFCF3BE}"/>
+                <a16:creationId xmlns:a16="http://schemas.microsoft.com/office/drawing/2014/main" id="{A1876D6D-B2DB-4C08-B3D2-2FB8139D9691}"/>
               </a:ext>
             </a:extLst>
           </p:cNvPr>
@@ -14413,7 +14413,7 @@
                 <a:ea typeface="Malgun Gothic"/>
                 <a:cs typeface="Malgun Gothic"/>
               </a:rPr>
-              <a:t>45</a:t>
+              <a:t>178</a:t>
             </a:r>
           </a:p>
         </p:txBody>
@@ -14423,7 +14423,7 @@
           <p:cNvPr id="42" name="">
             <a:extLst xmlns:a="http://schemas.openxmlformats.org/drawingml/2006/main">
               <a:ext uri="{FF2B5EF4-FFF2-40B4-BE49-F238E27FC236}">
-                <a16:creationId xmlns:a16="http://schemas.microsoft.com/office/drawing/2014/main" id="{BE4B44DE-DE5A-404B-BA24-509A35A77F2A}"/>
+                <a16:creationId xmlns:a16="http://schemas.microsoft.com/office/drawing/2014/main" id="{8BF818D7-AB03-4398-A7FF-9FB050C11587}"/>
               </a:ext>
             </a:extLst>
           </p:cNvPr>
@@ -14456,7 +14456,7 @@
           <p:cNvPr id="43" name="">
             <a:extLst xmlns:a="http://schemas.openxmlformats.org/drawingml/2006/main">
               <a:ext uri="{FF2B5EF4-FFF2-40B4-BE49-F238E27FC236}">
-                <a16:creationId xmlns:a16="http://schemas.microsoft.com/office/drawing/2014/main" id="{D1C5AE65-8399-4F23-B1B1-82F7E797DF4D}"/>
+                <a16:creationId xmlns:a16="http://schemas.microsoft.com/office/drawing/2014/main" id="{D0383407-0730-4AAF-85F4-3FB7170435EF}"/>
               </a:ext>
             </a:extLst>
           </p:cNvPr>
@@ -14520,7 +14520,7 @@
           <p:cNvPr id="44" name="">
             <a:extLst xmlns:a="http://schemas.openxmlformats.org/drawingml/2006/main">
               <a:ext uri="{FF2B5EF4-FFF2-40B4-BE49-F238E27FC236}">
-                <a16:creationId xmlns:a16="http://schemas.microsoft.com/office/drawing/2014/main" id="{E7280B90-73A1-4557-99DF-CCF9F0E3C738}"/>
+                <a16:creationId xmlns:a16="http://schemas.microsoft.com/office/drawing/2014/main" id="{8E0B22BB-22BF-4A97-96CA-59EE9C00A02C}"/>
               </a:ext>
             </a:extLst>
           </p:cNvPr>
@@ -14553,7 +14553,7 @@
           <p:cNvPr id="45" name="">
             <a:extLst xmlns:a="http://schemas.openxmlformats.org/drawingml/2006/main">
               <a:ext uri="{FF2B5EF4-FFF2-40B4-BE49-F238E27FC236}">
-                <a16:creationId xmlns:a16="http://schemas.microsoft.com/office/drawing/2014/main" id="{7DD1616F-D05B-4527-B7DF-7106E89033C6}"/>
+                <a16:creationId xmlns:a16="http://schemas.microsoft.com/office/drawing/2014/main" id="{3524D63A-5B1C-481D-86D4-85ECE7635F0E}"/>
               </a:ext>
             </a:extLst>
           </p:cNvPr>
@@ -14607,7 +14607,7 @@
                 <a:ea typeface="Malgun Gothic"/>
                 <a:cs typeface="Malgun Gothic"/>
               </a:rPr>
-              <a:t>66</a:t>
+              <a:t>0</a:t>
             </a:r>
           </a:p>
         </p:txBody>
@@ -14617,7 +14617,7 @@
           <p:cNvPr id="46" name="">
             <a:extLst xmlns:a="http://schemas.openxmlformats.org/drawingml/2006/main">
               <a:ext uri="{FF2B5EF4-FFF2-40B4-BE49-F238E27FC236}">
-                <a16:creationId xmlns:a16="http://schemas.microsoft.com/office/drawing/2014/main" id="{AF21570C-BBB7-479B-920B-1ECEAF4F0F1B}"/>
+                <a16:creationId xmlns:a16="http://schemas.microsoft.com/office/drawing/2014/main" id="{5DCF8779-CDA0-4E8F-A6E1-301CEF9D880C}"/>
               </a:ext>
             </a:extLst>
           </p:cNvPr>
@@ -14650,7 +14650,7 @@
           <p:cNvPr id="47" name="">
             <a:extLst xmlns:a="http://schemas.openxmlformats.org/drawingml/2006/main">
               <a:ext uri="{FF2B5EF4-FFF2-40B4-BE49-F238E27FC236}">
-                <a16:creationId xmlns:a16="http://schemas.microsoft.com/office/drawing/2014/main" id="{1FA850E8-AE3B-407B-87EA-664D834E866E}"/>
+                <a16:creationId xmlns:a16="http://schemas.microsoft.com/office/drawing/2014/main" id="{BFB561A4-F983-46E7-8EEC-18BDB1F1389A}"/>
               </a:ext>
             </a:extLst>
           </p:cNvPr>
@@ -14683,7 +14683,7 @@
           <p:cNvPr id="48" name="">
             <a:extLst xmlns:a="http://schemas.openxmlformats.org/drawingml/2006/main">
               <a:ext uri="{FF2B5EF4-FFF2-40B4-BE49-F238E27FC236}">
-                <a16:creationId xmlns:a16="http://schemas.microsoft.com/office/drawing/2014/main" id="{D625A3E4-77AB-4D7D-909F-723FEBF8ED60}"/>
+                <a16:creationId xmlns:a16="http://schemas.microsoft.com/office/drawing/2014/main" id="{A8985141-9BB3-4985-A0F9-B4724F53F893}"/>
               </a:ext>
             </a:extLst>
           </p:cNvPr>
@@ -14747,7 +14747,7 @@
           <p:cNvPr id="49" name="">
             <a:extLst xmlns:a="http://schemas.openxmlformats.org/drawingml/2006/main">
               <a:ext uri="{FF2B5EF4-FFF2-40B4-BE49-F238E27FC236}">
-                <a16:creationId xmlns:a16="http://schemas.microsoft.com/office/drawing/2014/main" id="{687C180F-F113-47D8-82FB-5556DDEE4509}"/>
+                <a16:creationId xmlns:a16="http://schemas.microsoft.com/office/drawing/2014/main" id="{2B96C1A7-39C1-4ECE-A3E9-30EFF7F1073A}"/>
               </a:ext>
             </a:extLst>
           </p:cNvPr>
@@ -14780,7 +14780,7 @@
           <p:cNvPr id="50" name="">
             <a:extLst xmlns:a="http://schemas.openxmlformats.org/drawingml/2006/main">
               <a:ext uri="{FF2B5EF4-FFF2-40B4-BE49-F238E27FC236}">
-                <a16:creationId xmlns:a16="http://schemas.microsoft.com/office/drawing/2014/main" id="{6FFC64A9-78A5-4A2B-BA68-B1C544713FE6}"/>
+                <a16:creationId xmlns:a16="http://schemas.microsoft.com/office/drawing/2014/main" id="{27F5A31F-4F50-4C15-9E2C-E02827C0AF6E}"/>
               </a:ext>
             </a:extLst>
           </p:cNvPr>
@@ -14834,7 +14834,7 @@
                 <a:ea typeface="Malgun Gothic"/>
                 <a:cs typeface="Malgun Gothic"/>
               </a:rPr>
-              <a:t>9 / 9 success</a:t>
+              <a:t>5 / 5 success</a:t>
             </a:r>
           </a:p>
         </p:txBody>
@@ -14844,7 +14844,7 @@
           <p:cNvPr id="51" name="">
             <a:extLst xmlns:a="http://schemas.openxmlformats.org/drawingml/2006/main">
               <a:ext uri="{FF2B5EF4-FFF2-40B4-BE49-F238E27FC236}">
-                <a16:creationId xmlns:a16="http://schemas.microsoft.com/office/drawing/2014/main" id="{72FB0073-12A0-4141-93E5-2D320B0FB810}"/>
+                <a16:creationId xmlns:a16="http://schemas.microsoft.com/office/drawing/2014/main" id="{47AF3A68-406E-4469-B072-303E24BABBF4}"/>
               </a:ext>
             </a:extLst>
           </p:cNvPr>
@@ -14877,7 +14877,7 @@
           <p:cNvPr id="52" name="">
             <a:extLst xmlns:a="http://schemas.openxmlformats.org/drawingml/2006/main">
               <a:ext uri="{FF2B5EF4-FFF2-40B4-BE49-F238E27FC236}">
-                <a16:creationId xmlns:a16="http://schemas.microsoft.com/office/drawing/2014/main" id="{05F9AF3B-818D-4D55-88A3-52BD3B893924}"/>
+                <a16:creationId xmlns:a16="http://schemas.microsoft.com/office/drawing/2014/main" id="{34F9C6E3-B22E-4FAF-B76B-5E31551F3150}"/>
               </a:ext>
             </a:extLst>
           </p:cNvPr>
@@ -14941,7 +14941,7 @@
           <p:cNvPr id="53" name="">
             <a:extLst xmlns:a="http://schemas.openxmlformats.org/drawingml/2006/main">
               <a:ext uri="{FF2B5EF4-FFF2-40B4-BE49-F238E27FC236}">
-                <a16:creationId xmlns:a16="http://schemas.microsoft.com/office/drawing/2014/main" id="{1986F41D-DBD1-48B0-BBCE-2FFE0582BBA3}"/>
+                <a16:creationId xmlns:a16="http://schemas.microsoft.com/office/drawing/2014/main" id="{90196BF6-782B-4D44-B3A8-159A35EC82CE}"/>
               </a:ext>
             </a:extLst>
           </p:cNvPr>
@@ -14974,7 +14974,7 @@
           <p:cNvPr id="54" name="">
             <a:extLst xmlns:a="http://schemas.openxmlformats.org/drawingml/2006/main">
               <a:ext uri="{FF2B5EF4-FFF2-40B4-BE49-F238E27FC236}">
-                <a16:creationId xmlns:a16="http://schemas.microsoft.com/office/drawing/2014/main" id="{E90B6074-D702-4BE6-8582-ACB6FAA167F1}"/>
+                <a16:creationId xmlns:a16="http://schemas.microsoft.com/office/drawing/2014/main" id="{E69F19B0-A9EB-4F02-AB7E-611EAFD69813}"/>
               </a:ext>
             </a:extLst>
           </p:cNvPr>
@@ -15028,7 +15028,7 @@
                 <a:ea typeface="Malgun Gothic"/>
                 <a:cs typeface="Malgun Gothic"/>
               </a:rPr>
-              <a:t>115</a:t>
+              <a:t>80</a:t>
             </a:r>
           </a:p>
         </p:txBody>
@@ -15038,7 +15038,7 @@
           <p:cNvPr id="55" name="">
             <a:extLst xmlns:a="http://schemas.openxmlformats.org/drawingml/2006/main">
               <a:ext uri="{FF2B5EF4-FFF2-40B4-BE49-F238E27FC236}">
-                <a16:creationId xmlns:a16="http://schemas.microsoft.com/office/drawing/2014/main" id="{99FE7493-8CA8-475C-9E66-2F92CD86BF0C}"/>
+                <a16:creationId xmlns:a16="http://schemas.microsoft.com/office/drawing/2014/main" id="{48E6B9AB-9C3A-4064-A893-035B9ECB358A}"/>
               </a:ext>
             </a:extLst>
           </p:cNvPr>
@@ -15071,7 +15071,7 @@
           <p:cNvPr id="56" name="">
             <a:extLst xmlns:a="http://schemas.openxmlformats.org/drawingml/2006/main">
               <a:ext uri="{FF2B5EF4-FFF2-40B4-BE49-F238E27FC236}">
-                <a16:creationId xmlns:a16="http://schemas.microsoft.com/office/drawing/2014/main" id="{19BDCE53-4EEC-4C65-98E8-B904FE8694E7}"/>
+                <a16:creationId xmlns:a16="http://schemas.microsoft.com/office/drawing/2014/main" id="{26A2741F-660A-4DE3-B72B-8011115BB1D9}"/>
               </a:ext>
             </a:extLst>
           </p:cNvPr>
@@ -15104,7 +15104,7 @@
           <p:cNvPr id="57" name="">
             <a:extLst xmlns:a="http://schemas.openxmlformats.org/drawingml/2006/main">
               <a:ext uri="{FF2B5EF4-FFF2-40B4-BE49-F238E27FC236}">
-                <a16:creationId xmlns:a16="http://schemas.microsoft.com/office/drawing/2014/main" id="{4963AE50-6787-45B6-AA01-AAFAD07EC094}"/>
+                <a16:creationId xmlns:a16="http://schemas.microsoft.com/office/drawing/2014/main" id="{33FB1FF5-13ED-4776-94B8-F6E2FD73C528}"/>
               </a:ext>
             </a:extLst>
           </p:cNvPr>
@@ -15168,7 +15168,7 @@
           <p:cNvPr id="58" name="">
             <a:extLst xmlns:a="http://schemas.openxmlformats.org/drawingml/2006/main">
               <a:ext uri="{FF2B5EF4-FFF2-40B4-BE49-F238E27FC236}">
-                <a16:creationId xmlns:a16="http://schemas.microsoft.com/office/drawing/2014/main" id="{70243FAB-3DE5-4160-9F2D-55C5F01D21FD}"/>
+                <a16:creationId xmlns:a16="http://schemas.microsoft.com/office/drawing/2014/main" id="{0DE5FC06-101A-42BD-9131-0CA378CD047C}"/>
               </a:ext>
             </a:extLst>
           </p:cNvPr>
@@ -15201,7 +15201,7 @@
           <p:cNvPr id="59" name="">
             <a:extLst xmlns:a="http://schemas.openxmlformats.org/drawingml/2006/main">
               <a:ext uri="{FF2B5EF4-FFF2-40B4-BE49-F238E27FC236}">
-                <a16:creationId xmlns:a16="http://schemas.microsoft.com/office/drawing/2014/main" id="{0F911512-A06E-4AD9-96BC-666EE4D3F679}"/>
+                <a16:creationId xmlns:a16="http://schemas.microsoft.com/office/drawing/2014/main" id="{7495E04B-0C87-48DA-98C7-3291AF6CC3BC}"/>
               </a:ext>
             </a:extLst>
           </p:cNvPr>
@@ -15255,7 +15255,7 @@
                 <a:ea typeface="Malgun Gothic"/>
                 <a:cs typeface="Malgun Gothic"/>
               </a:rPr>
-              <a:t>23.429 km</a:t>
+              <a:t>45.841 km</a:t>
             </a:r>
           </a:p>
         </p:txBody>
@@ -15265,7 +15265,7 @@
           <p:cNvPr id="60" name="">
             <a:extLst xmlns:a="http://schemas.openxmlformats.org/drawingml/2006/main">
               <a:ext uri="{FF2B5EF4-FFF2-40B4-BE49-F238E27FC236}">
-                <a16:creationId xmlns:a16="http://schemas.microsoft.com/office/drawing/2014/main" id="{DEB160D0-E690-4D29-9280-0E2522B25F8C}"/>
+                <a16:creationId xmlns:a16="http://schemas.microsoft.com/office/drawing/2014/main" id="{B286DE46-049C-4D4F-B89A-BECE5B01126B}"/>
               </a:ext>
             </a:extLst>
           </p:cNvPr>
@@ -15298,7 +15298,7 @@
           <p:cNvPr id="61" name="">
             <a:extLst xmlns:a="http://schemas.openxmlformats.org/drawingml/2006/main">
               <a:ext uri="{FF2B5EF4-FFF2-40B4-BE49-F238E27FC236}">
-                <a16:creationId xmlns:a16="http://schemas.microsoft.com/office/drawing/2014/main" id="{005CB574-8EFC-4C1B-8C08-EC7E272E0AF5}"/>
+                <a16:creationId xmlns:a16="http://schemas.microsoft.com/office/drawing/2014/main" id="{66C3BE60-D102-4663-B164-11A387B863A7}"/>
               </a:ext>
             </a:extLst>
           </p:cNvPr>
@@ -15362,7 +15362,7 @@
           <p:cNvPr id="62" name="">
             <a:extLst xmlns:a="http://schemas.openxmlformats.org/drawingml/2006/main">
               <a:ext uri="{FF2B5EF4-FFF2-40B4-BE49-F238E27FC236}">
-                <a16:creationId xmlns:a16="http://schemas.microsoft.com/office/drawing/2014/main" id="{A927F729-6F44-4752-B27B-424402F61BD0}"/>
+                <a16:creationId xmlns:a16="http://schemas.microsoft.com/office/drawing/2014/main" id="{6B9245A9-2799-4230-B964-2107CC555591}"/>
               </a:ext>
             </a:extLst>
           </p:cNvPr>
@@ -15395,7 +15395,7 @@
           <p:cNvPr id="63" name="">
             <a:extLst xmlns:a="http://schemas.openxmlformats.org/drawingml/2006/main">
               <a:ext uri="{FF2B5EF4-FFF2-40B4-BE49-F238E27FC236}">
-                <a16:creationId xmlns:a16="http://schemas.microsoft.com/office/drawing/2014/main" id="{4B039A05-0D45-4857-AFC1-A5B77E44676F}"/>
+                <a16:creationId xmlns:a16="http://schemas.microsoft.com/office/drawing/2014/main" id="{2694B9AC-24A4-4E4E-A881-B9C607B28C2A}"/>
               </a:ext>
             </a:extLst>
           </p:cNvPr>
@@ -15449,7 +15449,7 @@
                 <a:ea typeface="Malgun Gothic"/>
                 <a:cs typeface="Malgun Gothic"/>
               </a:rPr>
-              <a:t>2.85 Wh/km</a:t>
+              <a:t>5.08 Wh/km</a:t>
             </a:r>
           </a:p>
         </p:txBody>
@@ -15459,7 +15459,7 @@
           <p:cNvPr id="64" name="">
             <a:extLst xmlns:a="http://schemas.openxmlformats.org/drawingml/2006/main">
               <a:ext uri="{FF2B5EF4-FFF2-40B4-BE49-F238E27FC236}">
-                <a16:creationId xmlns:a16="http://schemas.microsoft.com/office/drawing/2014/main" id="{17600FA0-D6A0-410E-B80B-79E23D54318F}"/>
+                <a16:creationId xmlns:a16="http://schemas.microsoft.com/office/drawing/2014/main" id="{FBE63EC1-92B3-4911-8B89-7320A06C0735}"/>
               </a:ext>
             </a:extLst>
           </p:cNvPr>
@@ -15492,7 +15492,7 @@
           <p:cNvPr id="65" name="">
             <a:extLst xmlns:a="http://schemas.openxmlformats.org/drawingml/2006/main">
               <a:ext uri="{FF2B5EF4-FFF2-40B4-BE49-F238E27FC236}">
-                <a16:creationId xmlns:a16="http://schemas.microsoft.com/office/drawing/2014/main" id="{35FA6821-E79A-43DB-B9D7-8B302DB47F2F}"/>
+                <a16:creationId xmlns:a16="http://schemas.microsoft.com/office/drawing/2014/main" id="{587304E2-7F8B-48FC-9A35-5E620642C44E}"/>
               </a:ext>
             </a:extLst>
           </p:cNvPr>
@@ -15556,7 +15556,71 @@
           <p:cNvPr id="66" name="">
             <a:extLst xmlns:a="http://schemas.openxmlformats.org/drawingml/2006/main">
               <a:ext uri="{FF2B5EF4-FFF2-40B4-BE49-F238E27FC236}">
-                <a16:creationId xmlns:a16="http://schemas.microsoft.com/office/drawing/2014/main" id="{0567550D-713F-411B-B08C-1124B660B30B}"/>
+                <a16:creationId xmlns:a16="http://schemas.microsoft.com/office/drawing/2014/main" id="{78C2D61D-E5EB-4497-9CE5-EC8F10D58857}"/>
+              </a:ext>
+            </a:extLst>
+          </p:cNvPr>
+          <p:cNvSpPr>
+            <a:spLocks xmlns:a="http://schemas.openxmlformats.org/drawingml/2006/main" noGrp="1"/>
+          </p:cNvSpPr>
+          <p:nvPr/>
+        </p:nvSpPr>
+        <p:spPr>
+          <a:xfrm xmlns:a="http://schemas.openxmlformats.org/drawingml/2006/main">
+            <a:off x="6781800" y="5905500"/>
+            <a:ext cx="3810000" cy="209550"/>
+          </a:xfrm>
+          <a:prstGeom xmlns:a="http://schemas.openxmlformats.org/drawingml/2006/main" prst="rect">
+            <a:avLst/>
+          </a:prstGeom>
+          <a:solidFill xmlns:a="http://schemas.openxmlformats.org/drawingml/2006/main">
+            <a:srgbClr val="000000">
+              <a:alpha val="0"/>
+            </a:srgbClr>
+          </a:solidFill>
+          <a:ln xmlns:a="http://schemas.openxmlformats.org/drawingml/2006/main" w="0">
+            <a:solidFill>
+              <a:srgbClr val="000000">
+                <a:alpha val="0"/>
+              </a:srgbClr>
+            </a:solidFill>
+            <a:prstDash val="solid"/>
+          </a:ln>
+        </p:spPr>
+        <p:txBody>
+          <a:bodyPr xmlns:a="http://schemas.openxmlformats.org/drawingml/2006/main" lIns="0" tIns="0" rIns="0" bIns="0" anchor="t"/>
+          <a:lstStyle xmlns:a="http://schemas.openxmlformats.org/drawingml/2006/main"/>
+          <a:p xmlns:a="http://schemas.openxmlformats.org/drawingml/2006/main">
+            <a:pPr algn="r">
+              <a:defRPr sz="975" b="1">
+                <a:solidFill>
+                  <a:srgbClr val="EF6461"/>
+                </a:solidFill>
+                <a:latin typeface="Malgun Gothic"/>
+                <a:ea typeface="Malgun Gothic"/>
+                <a:cs typeface="Malgun Gothic"/>
+              </a:defRPr>
+            </a:pPr>
+            <a:r>
+              <a:rPr sz="975" b="1">
+                <a:solidFill>
+                  <a:srgbClr val="EF6461"/>
+                </a:solidFill>
+                <a:latin typeface="Malgun Gothic"/>
+                <a:ea typeface="Malgun Gothic"/>
+                <a:cs typeface="Malgun Gothic"/>
+              </a:rPr>
+              <a:t>현재 결과는 안전 인증이 아니라 개선 기준선입니다.</a:t>
+            </a:r>
+          </a:p>
+        </p:txBody>
+      </p:sp>
+      <p:sp>
+        <p:nvSpPr>
+          <p:cNvPr id="67" name="">
+            <a:extLst xmlns:a="http://schemas.openxmlformats.org/drawingml/2006/main">
+              <a:ext uri="{FF2B5EF4-FFF2-40B4-BE49-F238E27FC236}">
+                <a16:creationId xmlns:a16="http://schemas.microsoft.com/office/drawing/2014/main" id="{428DD08E-DFCD-4A03-997C-1DE50D88CB65}"/>
               </a:ext>
             </a:extLst>
           </p:cNvPr>
@@ -15617,10 +15681,10 @@
       </p:sp>
       <p:sp>
         <p:nvSpPr>
-          <p:cNvPr id="67" name="">
-            <a:extLst xmlns:a="http://schemas.openxmlformats.org/drawingml/2006/main">
-              <a:ext uri="{FF2B5EF4-FFF2-40B4-BE49-F238E27FC236}">
-                <a16:creationId xmlns:a16="http://schemas.microsoft.com/office/drawing/2014/main" id="{7C601EED-1322-4CEC-AE41-F9B093B305E5}"/>
+          <p:cNvPr id="68" name="">
+            <a:extLst xmlns:a="http://schemas.openxmlformats.org/drawingml/2006/main">
+              <a:ext uri="{FF2B5EF4-FFF2-40B4-BE49-F238E27FC236}">
+                <a16:creationId xmlns:a16="http://schemas.microsoft.com/office/drawing/2014/main" id="{148A1B5C-3F94-47AD-BFDA-F8638E5EF852}"/>
               </a:ext>
             </a:extLst>
           </p:cNvPr>
@@ -15681,10 +15745,10 @@
       </p:sp>
       <p:sp>
         <p:nvSpPr>
-          <p:cNvPr id="68" name="">
-            <a:extLst xmlns:a="http://schemas.openxmlformats.org/drawingml/2006/main">
-              <a:ext uri="{FF2B5EF4-FFF2-40B4-BE49-F238E27FC236}">
-                <a16:creationId xmlns:a16="http://schemas.microsoft.com/office/drawing/2014/main" id="{99F6485F-07E2-4441-ADD6-A75A78EF95AC}"/>
+          <p:cNvPr id="69" name="">
+            <a:extLst xmlns:a="http://schemas.openxmlformats.org/drawingml/2006/main">
+              <a:ext uri="{FF2B5EF4-FFF2-40B4-BE49-F238E27FC236}">
+                <a16:creationId xmlns:a16="http://schemas.microsoft.com/office/drawing/2014/main" id="{EDA5B5F4-9A72-4343-BEFF-84C0EA78A9B1}"/>
               </a:ext>
             </a:extLst>
           </p:cNvPr>
@@ -15715,7 +15779,7 @@
     </p:spTree>
     <p:extLst>
       <p:ext uri="{BB962C8B-B14F-4D97-AF65-F5344CB8AC3E}">
-        <p14:creationId xmlns:p14="http://schemas.microsoft.com/office/powerpoint/2010/main" val="496361170"/>
+        <p14:creationId xmlns:p14="http://schemas.microsoft.com/office/powerpoint/2010/main" val="520047410"/>
       </p:ext>
     </p:extLst>
   </p:cSld>
@@ -15739,7 +15803,7 @@
           <p:cNvPr id="1" name="">
             <a:extLst xmlns:a="http://schemas.openxmlformats.org/drawingml/2006/main">
               <a:ext uri="{FF2B5EF4-FFF2-40B4-BE49-F238E27FC236}">
-                <a16:creationId xmlns:a16="http://schemas.microsoft.com/office/drawing/2014/main" id="{883E066C-F856-4C66-983A-0D367131AB57}"/>
+                <a16:creationId xmlns:a16="http://schemas.microsoft.com/office/drawing/2014/main" id="{82D8AA55-5E3A-49C5-8D81-F7552214E49B}"/>
               </a:ext>
             </a:extLst>
           </p:cNvPr>
@@ -15772,19 +15836,19 @@
           <p:cNvPr id="2" name="">
             <a:extLst xmlns:a="http://schemas.openxmlformats.org/drawingml/2006/main">
               <a:ext uri="{FF2B5EF4-FFF2-40B4-BE49-F238E27FC236}">
-                <a16:creationId xmlns:a16="http://schemas.microsoft.com/office/drawing/2014/main" id="{34EC8ABB-B5B2-4FF7-BC7F-40A55CA070F7}"/>
-              </a:ext>
-            </a:extLst>
-          </p:cNvPr>
-          <p:cNvSpPr>
-            <a:spLocks xmlns:a="http://schemas.openxmlformats.org/drawingml/2006/main" noGrp="1"/>
-          </p:cNvSpPr>
-          <p:nvPr/>
-        </p:nvSpPr>
-        <p:spPr>
-          <a:xfrm xmlns:a="http://schemas.openxmlformats.org/drawingml/2006/main">
-            <a:off x="7810500" y="-571500"/>
-            <a:ext cx="4953000" cy="4953000"/>
+                <a16:creationId xmlns:a16="http://schemas.microsoft.com/office/drawing/2014/main" id="{1DBD4A03-74FD-45BC-9813-8D91A29CAEAB}"/>
+              </a:ext>
+            </a:extLst>
+          </p:cNvPr>
+          <p:cNvSpPr>
+            <a:spLocks xmlns:a="http://schemas.openxmlformats.org/drawingml/2006/main" noGrp="1"/>
+          </p:cNvSpPr>
+          <p:nvPr/>
+        </p:nvSpPr>
+        <p:spPr>
+          <a:xfrm xmlns:a="http://schemas.openxmlformats.org/drawingml/2006/main">
+            <a:off x="7810500" y="0"/>
+            <a:ext cx="4000500" cy="4000500"/>
           </a:xfrm>
           <a:prstGeom xmlns:a="http://schemas.openxmlformats.org/drawingml/2006/main" prst="rect">
             <a:avLst/>
@@ -15807,19 +15871,19 @@
           <p:cNvPr id="3" name="">
             <a:extLst xmlns:a="http://schemas.openxmlformats.org/drawingml/2006/main">
               <a:ext uri="{FF2B5EF4-FFF2-40B4-BE49-F238E27FC236}">
-                <a16:creationId xmlns:a16="http://schemas.microsoft.com/office/drawing/2014/main" id="{C817E322-A719-48DA-8CC4-116C78F41CBE}"/>
-              </a:ext>
-            </a:extLst>
-          </p:cNvPr>
-          <p:cNvSpPr>
-            <a:spLocks xmlns:a="http://schemas.openxmlformats.org/drawingml/2006/main" noGrp="1"/>
-          </p:cNvSpPr>
-          <p:nvPr/>
-        </p:nvSpPr>
-        <p:spPr>
-          <a:xfrm xmlns:a="http://schemas.openxmlformats.org/drawingml/2006/main">
-            <a:off x="8477250" y="-285750"/>
-            <a:ext cx="4191000" cy="4191000"/>
+                <a16:creationId xmlns:a16="http://schemas.microsoft.com/office/drawing/2014/main" id="{C87F3234-706A-4C93-AD55-940F02D0C4F8}"/>
+              </a:ext>
+            </a:extLst>
+          </p:cNvPr>
+          <p:cNvSpPr>
+            <a:spLocks xmlns:a="http://schemas.openxmlformats.org/drawingml/2006/main" noGrp="1"/>
+          </p:cNvSpPr>
+          <p:nvPr/>
+        </p:nvSpPr>
+        <p:spPr>
+          <a:xfrm xmlns:a="http://schemas.openxmlformats.org/drawingml/2006/main">
+            <a:off x="8572500" y="285750"/>
+            <a:ext cx="3333750" cy="3333750"/>
           </a:xfrm>
           <a:prstGeom xmlns:a="http://schemas.openxmlformats.org/drawingml/2006/main" prst="rect">
             <a:avLst/>
@@ -15842,19 +15906,19 @@
           <p:cNvPr id="4" name="">
             <a:extLst xmlns:a="http://schemas.openxmlformats.org/drawingml/2006/main">
               <a:ext uri="{FF2B5EF4-FFF2-40B4-BE49-F238E27FC236}">
-                <a16:creationId xmlns:a16="http://schemas.microsoft.com/office/drawing/2014/main" id="{12AF1C4B-28EF-4F69-983A-67EF1EAD0DA2}"/>
-              </a:ext>
-            </a:extLst>
-          </p:cNvPr>
-          <p:cNvSpPr>
-            <a:spLocks xmlns:a="http://schemas.openxmlformats.org/drawingml/2006/main" noGrp="1"/>
-          </p:cNvSpPr>
-          <p:nvPr/>
-        </p:nvSpPr>
-        <p:spPr>
-          <a:xfrm xmlns:a="http://schemas.openxmlformats.org/drawingml/2006/main">
-            <a:off x="9144000" y="0"/>
-            <a:ext cx="3429000" cy="3429000"/>
+                <a16:creationId xmlns:a16="http://schemas.microsoft.com/office/drawing/2014/main" id="{38ACF272-A471-46E3-818E-6944E12FCA80}"/>
+              </a:ext>
+            </a:extLst>
+          </p:cNvPr>
+          <p:cNvSpPr>
+            <a:spLocks xmlns:a="http://schemas.openxmlformats.org/drawingml/2006/main" noGrp="1"/>
+          </p:cNvSpPr>
+          <p:nvPr/>
+        </p:nvSpPr>
+        <p:spPr>
+          <a:xfrm xmlns:a="http://schemas.openxmlformats.org/drawingml/2006/main">
+            <a:off x="9334500" y="571500"/>
+            <a:ext cx="2667000" cy="2667000"/>
           </a:xfrm>
           <a:prstGeom xmlns:a="http://schemas.openxmlformats.org/drawingml/2006/main" prst="rect">
             <a:avLst/>
@@ -15877,19 +15941,19 @@
           <p:cNvPr id="5" name="">
             <a:extLst xmlns:a="http://schemas.openxmlformats.org/drawingml/2006/main">
               <a:ext uri="{FF2B5EF4-FFF2-40B4-BE49-F238E27FC236}">
-                <a16:creationId xmlns:a16="http://schemas.microsoft.com/office/drawing/2014/main" id="{B742BC63-CB50-4843-A924-A5414E9CD4A6}"/>
-              </a:ext>
-            </a:extLst>
-          </p:cNvPr>
-          <p:cNvSpPr>
-            <a:spLocks xmlns:a="http://schemas.openxmlformats.org/drawingml/2006/main" noGrp="1"/>
-          </p:cNvSpPr>
-          <p:nvPr/>
-        </p:nvSpPr>
-        <p:spPr>
-          <a:xfrm xmlns:a="http://schemas.openxmlformats.org/drawingml/2006/main">
-            <a:off x="9810750" y="285750"/>
-            <a:ext cx="2667000" cy="2667000"/>
+                <a16:creationId xmlns:a16="http://schemas.microsoft.com/office/drawing/2014/main" id="{23BAA9B2-E8CD-4467-B176-402F26899EB9}"/>
+              </a:ext>
+            </a:extLst>
+          </p:cNvPr>
+          <p:cNvSpPr>
+            <a:spLocks xmlns:a="http://schemas.openxmlformats.org/drawingml/2006/main" noGrp="1"/>
+          </p:cNvSpPr>
+          <p:nvPr/>
+        </p:nvSpPr>
+        <p:spPr>
+          <a:xfrm xmlns:a="http://schemas.openxmlformats.org/drawingml/2006/main">
+            <a:off x="10096500" y="857250"/>
+            <a:ext cx="2000250" cy="2000250"/>
           </a:xfrm>
           <a:prstGeom xmlns:a="http://schemas.openxmlformats.org/drawingml/2006/main" prst="rect">
             <a:avLst/>
@@ -15912,7 +15976,7 @@
           <p:cNvPr id="6" name="">
             <a:extLst xmlns:a="http://schemas.openxmlformats.org/drawingml/2006/main">
               <a:ext uri="{FF2B5EF4-FFF2-40B4-BE49-F238E27FC236}">
-                <a16:creationId xmlns:a16="http://schemas.microsoft.com/office/drawing/2014/main" id="{878F94D6-7A9E-4F0E-843E-AF1437CF5393}"/>
+                <a16:creationId xmlns:a16="http://schemas.microsoft.com/office/drawing/2014/main" id="{3F3C20CB-D475-4574-A337-21CD0775CCCF}"/>
               </a:ext>
             </a:extLst>
           </p:cNvPr>
@@ -15976,7 +16040,7 @@
           <p:cNvPr id="7" name="">
             <a:extLst xmlns:a="http://schemas.openxmlformats.org/drawingml/2006/main">
               <a:ext uri="{FF2B5EF4-FFF2-40B4-BE49-F238E27FC236}">
-                <a16:creationId xmlns:a16="http://schemas.microsoft.com/office/drawing/2014/main" id="{49EEE5E2-1391-487F-B673-960C3EF946B4}"/>
+                <a16:creationId xmlns:a16="http://schemas.microsoft.com/office/drawing/2014/main" id="{1B7E87EF-5DD8-434C-88C2-53998FBA61B9}"/>
               </a:ext>
             </a:extLst>
           </p:cNvPr>
@@ -16040,7 +16104,7 @@
           <p:cNvPr id="8" name="">
             <a:extLst xmlns:a="http://schemas.openxmlformats.org/drawingml/2006/main">
               <a:ext uri="{FF2B5EF4-FFF2-40B4-BE49-F238E27FC236}">
-                <a16:creationId xmlns:a16="http://schemas.microsoft.com/office/drawing/2014/main" id="{66C16D2A-AD2C-4494-885F-3CC13D515ABC}"/>
+                <a16:creationId xmlns:a16="http://schemas.microsoft.com/office/drawing/2014/main" id="{52FB5113-0C12-455D-B0C0-D8277FDFB74D}"/>
               </a:ext>
             </a:extLst>
           </p:cNvPr>
@@ -16104,7 +16168,7 @@
           <p:cNvPr id="9" name="">
             <a:extLst xmlns:a="http://schemas.openxmlformats.org/drawingml/2006/main">
               <a:ext uri="{FF2B5EF4-FFF2-40B4-BE49-F238E27FC236}">
-                <a16:creationId xmlns:a16="http://schemas.microsoft.com/office/drawing/2014/main" id="{BD9DCB54-39F8-4CB4-8755-CBB08BDBF66E}"/>
+                <a16:creationId xmlns:a16="http://schemas.microsoft.com/office/drawing/2014/main" id="{E96A4662-7E26-4B44-8059-1CA85727A697}"/>
               </a:ext>
             </a:extLst>
           </p:cNvPr>
@@ -16137,7 +16201,7 @@
           <p:cNvPr id="10" name="">
             <a:extLst xmlns:a="http://schemas.openxmlformats.org/drawingml/2006/main">
               <a:ext uri="{FF2B5EF4-FFF2-40B4-BE49-F238E27FC236}">
-                <a16:creationId xmlns:a16="http://schemas.microsoft.com/office/drawing/2014/main" id="{774F326D-31C3-4DD3-AEBB-00B9F3B04D7E}"/>
+                <a16:creationId xmlns:a16="http://schemas.microsoft.com/office/drawing/2014/main" id="{2B8DB653-435A-4D2E-BD3E-2834ED85A4FC}"/>
               </a:ext>
             </a:extLst>
           </p:cNvPr>
@@ -16170,7 +16234,7 @@
           <p:cNvPr id="11" name="">
             <a:extLst xmlns:a="http://schemas.openxmlformats.org/drawingml/2006/main">
               <a:ext uri="{FF2B5EF4-FFF2-40B4-BE49-F238E27FC236}">
-                <a16:creationId xmlns:a16="http://schemas.microsoft.com/office/drawing/2014/main" id="{C5B74901-EEDC-45E0-A0F8-28F6259F2EA4}"/>
+                <a16:creationId xmlns:a16="http://schemas.microsoft.com/office/drawing/2014/main" id="{EC8775CE-B1E6-4E7F-83FD-6EF8D34CDB92}"/>
               </a:ext>
             </a:extLst>
           </p:cNvPr>
@@ -16234,7 +16298,7 @@
           <p:cNvPr id="12" name="">
             <a:extLst xmlns:a="http://schemas.openxmlformats.org/drawingml/2006/main">
               <a:ext uri="{FF2B5EF4-FFF2-40B4-BE49-F238E27FC236}">
-                <a16:creationId xmlns:a16="http://schemas.microsoft.com/office/drawing/2014/main" id="{8E2F0251-04ED-4314-8C27-AD812CA77F08}"/>
+                <a16:creationId xmlns:a16="http://schemas.microsoft.com/office/drawing/2014/main" id="{5A437476-3B25-468B-BE1F-D0E58A6535F2}"/>
               </a:ext>
             </a:extLst>
           </p:cNvPr>
@@ -16298,7 +16362,7 @@
           <p:cNvPr id="13" name="">
             <a:extLst xmlns:a="http://schemas.openxmlformats.org/drawingml/2006/main">
               <a:ext uri="{FF2B5EF4-FFF2-40B4-BE49-F238E27FC236}">
-                <a16:creationId xmlns:a16="http://schemas.microsoft.com/office/drawing/2014/main" id="{0DA9A81E-79D4-44EB-B8FE-438E33C655B1}"/>
+                <a16:creationId xmlns:a16="http://schemas.microsoft.com/office/drawing/2014/main" id="{4BD41114-4E34-4D6A-BA7E-BFAC514C2C64}"/>
               </a:ext>
             </a:extLst>
           </p:cNvPr>
@@ -16331,7 +16395,7 @@
           <p:cNvPr id="14" name="">
             <a:extLst xmlns:a="http://schemas.openxmlformats.org/drawingml/2006/main">
               <a:ext uri="{FF2B5EF4-FFF2-40B4-BE49-F238E27FC236}">
-                <a16:creationId xmlns:a16="http://schemas.microsoft.com/office/drawing/2014/main" id="{581A47EB-FE07-454A-986A-C3894F10F0FF}"/>
+                <a16:creationId xmlns:a16="http://schemas.microsoft.com/office/drawing/2014/main" id="{0C48717E-409D-4042-96F9-3B56F6BCBC02}"/>
               </a:ext>
             </a:extLst>
           </p:cNvPr>
@@ -16364,7 +16428,7 @@
           <p:cNvPr id="15" name="">
             <a:extLst xmlns:a="http://schemas.openxmlformats.org/drawingml/2006/main">
               <a:ext uri="{FF2B5EF4-FFF2-40B4-BE49-F238E27FC236}">
-                <a16:creationId xmlns:a16="http://schemas.microsoft.com/office/drawing/2014/main" id="{0173084C-BA7F-46DE-B164-41168220EA5E}"/>
+                <a16:creationId xmlns:a16="http://schemas.microsoft.com/office/drawing/2014/main" id="{09269BC1-D681-409A-BB14-07816D0352DB}"/>
               </a:ext>
             </a:extLst>
           </p:cNvPr>
@@ -16428,7 +16492,7 @@
           <p:cNvPr id="16" name="">
             <a:extLst xmlns:a="http://schemas.openxmlformats.org/drawingml/2006/main">
               <a:ext uri="{FF2B5EF4-FFF2-40B4-BE49-F238E27FC236}">
-                <a16:creationId xmlns:a16="http://schemas.microsoft.com/office/drawing/2014/main" id="{F529E5E1-7464-48E4-868C-4F5CD81CDBFD}"/>
+                <a16:creationId xmlns:a16="http://schemas.microsoft.com/office/drawing/2014/main" id="{75BCA76C-E7C6-4041-8975-FC0C34E309B1}"/>
               </a:ext>
             </a:extLst>
           </p:cNvPr>
@@ -16492,7 +16556,7 @@
           <p:cNvPr id="17" name="">
             <a:extLst xmlns:a="http://schemas.openxmlformats.org/drawingml/2006/main">
               <a:ext uri="{FF2B5EF4-FFF2-40B4-BE49-F238E27FC236}">
-                <a16:creationId xmlns:a16="http://schemas.microsoft.com/office/drawing/2014/main" id="{AE349D13-4044-4D60-9169-5ECCCFFF5649}"/>
+                <a16:creationId xmlns:a16="http://schemas.microsoft.com/office/drawing/2014/main" id="{6096269E-722C-422F-9D15-3E10F27158BE}"/>
               </a:ext>
             </a:extLst>
           </p:cNvPr>
@@ -16525,7 +16589,7 @@
           <p:cNvPr id="18" name="">
             <a:extLst xmlns:a="http://schemas.openxmlformats.org/drawingml/2006/main">
               <a:ext uri="{FF2B5EF4-FFF2-40B4-BE49-F238E27FC236}">
-                <a16:creationId xmlns:a16="http://schemas.microsoft.com/office/drawing/2014/main" id="{989291DE-7786-4D8C-9C3A-A6091E17B2E1}"/>
+                <a16:creationId xmlns:a16="http://schemas.microsoft.com/office/drawing/2014/main" id="{65049BE9-70E7-4A04-8CB0-BCE64591CB27}"/>
               </a:ext>
             </a:extLst>
           </p:cNvPr>
@@ -16558,7 +16622,7 @@
           <p:cNvPr id="19" name="">
             <a:extLst xmlns:a="http://schemas.openxmlformats.org/drawingml/2006/main">
               <a:ext uri="{FF2B5EF4-FFF2-40B4-BE49-F238E27FC236}">
-                <a16:creationId xmlns:a16="http://schemas.microsoft.com/office/drawing/2014/main" id="{069D031C-7758-4779-BB67-C3A3355295EA}"/>
+                <a16:creationId xmlns:a16="http://schemas.microsoft.com/office/drawing/2014/main" id="{B3045CEF-CE23-479E-91C7-B7FC53D516A8}"/>
               </a:ext>
             </a:extLst>
           </p:cNvPr>
@@ -16622,7 +16686,7 @@
           <p:cNvPr id="20" name="">
             <a:extLst xmlns:a="http://schemas.openxmlformats.org/drawingml/2006/main">
               <a:ext uri="{FF2B5EF4-FFF2-40B4-BE49-F238E27FC236}">
-                <a16:creationId xmlns:a16="http://schemas.microsoft.com/office/drawing/2014/main" id="{AD5D7772-D4AC-49FA-BBBB-EE2E6EDBC48D}"/>
+                <a16:creationId xmlns:a16="http://schemas.microsoft.com/office/drawing/2014/main" id="{0C10366B-F72E-4680-871A-9E62D83F874E}"/>
               </a:ext>
             </a:extLst>
           </p:cNvPr>
@@ -16686,7 +16750,7 @@
           <p:cNvPr id="21" name="">
             <a:extLst xmlns:a="http://schemas.openxmlformats.org/drawingml/2006/main">
               <a:ext uri="{FF2B5EF4-FFF2-40B4-BE49-F238E27FC236}">
-                <a16:creationId xmlns:a16="http://schemas.microsoft.com/office/drawing/2014/main" id="{89D234FF-C07C-4F19-A0ED-2D8689F28EB5}"/>
+                <a16:creationId xmlns:a16="http://schemas.microsoft.com/office/drawing/2014/main" id="{60A22F38-0F51-4242-9E7E-6BAF40AF081C}"/>
               </a:ext>
             </a:extLst>
           </p:cNvPr>
@@ -16719,7 +16783,7 @@
           <p:cNvPr id="22" name="">
             <a:extLst xmlns:a="http://schemas.openxmlformats.org/drawingml/2006/main">
               <a:ext uri="{FF2B5EF4-FFF2-40B4-BE49-F238E27FC236}">
-                <a16:creationId xmlns:a16="http://schemas.microsoft.com/office/drawing/2014/main" id="{3B4C508D-05C7-49C9-B099-96D567EAC004}"/>
+                <a16:creationId xmlns:a16="http://schemas.microsoft.com/office/drawing/2014/main" id="{E2E76572-797B-4081-96FE-026F155D1998}"/>
               </a:ext>
             </a:extLst>
           </p:cNvPr>
@@ -16752,7 +16816,7 @@
           <p:cNvPr id="23" name="">
             <a:extLst xmlns:a="http://schemas.openxmlformats.org/drawingml/2006/main">
               <a:ext uri="{FF2B5EF4-FFF2-40B4-BE49-F238E27FC236}">
-                <a16:creationId xmlns:a16="http://schemas.microsoft.com/office/drawing/2014/main" id="{FACA9472-74C4-4623-A696-BBCA6079F63E}"/>
+                <a16:creationId xmlns:a16="http://schemas.microsoft.com/office/drawing/2014/main" id="{2266D01F-81D7-4AFB-9559-CC546BC27D33}"/>
               </a:ext>
             </a:extLst>
           </p:cNvPr>
@@ -16816,7 +16880,7 @@
           <p:cNvPr id="24" name="">
             <a:extLst xmlns:a="http://schemas.openxmlformats.org/drawingml/2006/main">
               <a:ext uri="{FF2B5EF4-FFF2-40B4-BE49-F238E27FC236}">
-                <a16:creationId xmlns:a16="http://schemas.microsoft.com/office/drawing/2014/main" id="{51F9ACA1-F45A-45EB-AD6F-26E871EE26FA}"/>
+                <a16:creationId xmlns:a16="http://schemas.microsoft.com/office/drawing/2014/main" id="{48CFF8D1-538A-4A66-81B5-9C7EB983690E}"/>
               </a:ext>
             </a:extLst>
           </p:cNvPr>
@@ -16880,7 +16944,7 @@
           <p:cNvPr id="25" name="">
             <a:extLst xmlns:a="http://schemas.openxmlformats.org/drawingml/2006/main">
               <a:ext uri="{FF2B5EF4-FFF2-40B4-BE49-F238E27FC236}">
-                <a16:creationId xmlns:a16="http://schemas.microsoft.com/office/drawing/2014/main" id="{39BCB4FC-9979-4BA3-BE33-D70B436512CA}"/>
+                <a16:creationId xmlns:a16="http://schemas.microsoft.com/office/drawing/2014/main" id="{3589C177-B30A-407C-A479-924E55FA472E}"/>
               </a:ext>
             </a:extLst>
           </p:cNvPr>
@@ -16944,7 +17008,7 @@
           <p:cNvPr id="26" name="">
             <a:extLst xmlns:a="http://schemas.openxmlformats.org/drawingml/2006/main">
               <a:ext uri="{FF2B5EF4-FFF2-40B4-BE49-F238E27FC236}">
-                <a16:creationId xmlns:a16="http://schemas.microsoft.com/office/drawing/2014/main" id="{A7C1A78E-9E5F-4B7F-A3DE-56D8ACE7310D}"/>
+                <a16:creationId xmlns:a16="http://schemas.microsoft.com/office/drawing/2014/main" id="{84BC0935-823B-4D7A-B00A-28A9F120203C}"/>
               </a:ext>
             </a:extLst>
           </p:cNvPr>
@@ -17008,7 +17072,7 @@
           <p:cNvPr id="27" name="">
             <a:extLst xmlns:a="http://schemas.openxmlformats.org/drawingml/2006/main">
               <a:ext uri="{FF2B5EF4-FFF2-40B4-BE49-F238E27FC236}">
-                <a16:creationId xmlns:a16="http://schemas.microsoft.com/office/drawing/2014/main" id="{5EF75ED9-ACAD-4CA9-9176-FFB62AFD2687}"/>
+                <a16:creationId xmlns:a16="http://schemas.microsoft.com/office/drawing/2014/main" id="{BFDE125B-618B-4595-BFD2-7C80F958B814}"/>
               </a:ext>
             </a:extLst>
           </p:cNvPr>
@@ -17072,7 +17136,7 @@
           <p:cNvPr id="28" name="">
             <a:extLst xmlns:a="http://schemas.openxmlformats.org/drawingml/2006/main">
               <a:ext uri="{FF2B5EF4-FFF2-40B4-BE49-F238E27FC236}">
-                <a16:creationId xmlns:a16="http://schemas.microsoft.com/office/drawing/2014/main" id="{EF74DFDE-BC07-4572-BC74-D3CE7F560718}"/>
+                <a16:creationId xmlns:a16="http://schemas.microsoft.com/office/drawing/2014/main" id="{8C567084-D537-4BDA-AA6C-EA6B7C6F098F}"/>
               </a:ext>
             </a:extLst>
           </p:cNvPr>
@@ -17103,7 +17167,7 @@
     </p:spTree>
     <p:extLst>
       <p:ext uri="{BB962C8B-B14F-4D97-AF65-F5344CB8AC3E}">
-        <p14:creationId xmlns:p14="http://schemas.microsoft.com/office/powerpoint/2010/main" val="641937309"/>
+        <p14:creationId xmlns:p14="http://schemas.microsoft.com/office/powerpoint/2010/main" val="555452469"/>
       </p:ext>
     </p:extLst>
   </p:cSld>
@@ -17127,7 +17191,7 @@
           <p:cNvPr id="1" name="">
             <a:extLst xmlns:a="http://schemas.openxmlformats.org/drawingml/2006/main">
               <a:ext uri="{FF2B5EF4-FFF2-40B4-BE49-F238E27FC236}">
-                <a16:creationId xmlns:a16="http://schemas.microsoft.com/office/drawing/2014/main" id="{237451FD-7C3D-477C-A16A-35A8CEF7E284}"/>
+                <a16:creationId xmlns:a16="http://schemas.microsoft.com/office/drawing/2014/main" id="{29616E83-A611-49DC-9406-6F80353C7B84}"/>
               </a:ext>
             </a:extLst>
           </p:cNvPr>
@@ -17160,19 +17224,19 @@
           <p:cNvPr id="2" name="">
             <a:extLst xmlns:a="http://schemas.openxmlformats.org/drawingml/2006/main">
               <a:ext uri="{FF2B5EF4-FFF2-40B4-BE49-F238E27FC236}">
-                <a16:creationId xmlns:a16="http://schemas.microsoft.com/office/drawing/2014/main" id="{63DCA99E-3633-4280-A22C-CEDFC788C29E}"/>
-              </a:ext>
-            </a:extLst>
-          </p:cNvPr>
-          <p:cNvSpPr>
-            <a:spLocks xmlns:a="http://schemas.openxmlformats.org/drawingml/2006/main" noGrp="1"/>
-          </p:cNvSpPr>
-          <p:nvPr/>
-        </p:nvSpPr>
-        <p:spPr>
-          <a:xfrm xmlns:a="http://schemas.openxmlformats.org/drawingml/2006/main">
-            <a:off x="7810500" y="-571500"/>
-            <a:ext cx="4953000" cy="4953000"/>
+                <a16:creationId xmlns:a16="http://schemas.microsoft.com/office/drawing/2014/main" id="{AAF2C487-0672-463A-A089-F3602DA3DFAD}"/>
+              </a:ext>
+            </a:extLst>
+          </p:cNvPr>
+          <p:cNvSpPr>
+            <a:spLocks xmlns:a="http://schemas.openxmlformats.org/drawingml/2006/main" noGrp="1"/>
+          </p:cNvSpPr>
+          <p:nvPr/>
+        </p:nvSpPr>
+        <p:spPr>
+          <a:xfrm xmlns:a="http://schemas.openxmlformats.org/drawingml/2006/main">
+            <a:off x="7810500" y="0"/>
+            <a:ext cx="4000500" cy="4000500"/>
           </a:xfrm>
           <a:prstGeom xmlns:a="http://schemas.openxmlformats.org/drawingml/2006/main" prst="rect">
             <a:avLst/>
@@ -17195,19 +17259,19 @@
           <p:cNvPr id="3" name="">
             <a:extLst xmlns:a="http://schemas.openxmlformats.org/drawingml/2006/main">
               <a:ext uri="{FF2B5EF4-FFF2-40B4-BE49-F238E27FC236}">
-                <a16:creationId xmlns:a16="http://schemas.microsoft.com/office/drawing/2014/main" id="{914A9797-E8B7-4D08-8AE4-5AC2735C786B}"/>
-              </a:ext>
-            </a:extLst>
-          </p:cNvPr>
-          <p:cNvSpPr>
-            <a:spLocks xmlns:a="http://schemas.openxmlformats.org/drawingml/2006/main" noGrp="1"/>
-          </p:cNvSpPr>
-          <p:nvPr/>
-        </p:nvSpPr>
-        <p:spPr>
-          <a:xfrm xmlns:a="http://schemas.openxmlformats.org/drawingml/2006/main">
-            <a:off x="8477250" y="-285750"/>
-            <a:ext cx="4191000" cy="4191000"/>
+                <a16:creationId xmlns:a16="http://schemas.microsoft.com/office/drawing/2014/main" id="{10690444-C2C7-44E9-978C-75E52AF2DEA6}"/>
+              </a:ext>
+            </a:extLst>
+          </p:cNvPr>
+          <p:cNvSpPr>
+            <a:spLocks xmlns:a="http://schemas.openxmlformats.org/drawingml/2006/main" noGrp="1"/>
+          </p:cNvSpPr>
+          <p:nvPr/>
+        </p:nvSpPr>
+        <p:spPr>
+          <a:xfrm xmlns:a="http://schemas.openxmlformats.org/drawingml/2006/main">
+            <a:off x="8572500" y="285750"/>
+            <a:ext cx="3333750" cy="3333750"/>
           </a:xfrm>
           <a:prstGeom xmlns:a="http://schemas.openxmlformats.org/drawingml/2006/main" prst="rect">
             <a:avLst/>
@@ -17230,19 +17294,19 @@
           <p:cNvPr id="4" name="">
             <a:extLst xmlns:a="http://schemas.openxmlformats.org/drawingml/2006/main">
               <a:ext uri="{FF2B5EF4-FFF2-40B4-BE49-F238E27FC236}">
-                <a16:creationId xmlns:a16="http://schemas.microsoft.com/office/drawing/2014/main" id="{A2179CBA-E6DC-497C-BDA1-B7010FE74E82}"/>
-              </a:ext>
-            </a:extLst>
-          </p:cNvPr>
-          <p:cNvSpPr>
-            <a:spLocks xmlns:a="http://schemas.openxmlformats.org/drawingml/2006/main" noGrp="1"/>
-          </p:cNvSpPr>
-          <p:nvPr/>
-        </p:nvSpPr>
-        <p:spPr>
-          <a:xfrm xmlns:a="http://schemas.openxmlformats.org/drawingml/2006/main">
-            <a:off x="9144000" y="0"/>
-            <a:ext cx="3429000" cy="3429000"/>
+                <a16:creationId xmlns:a16="http://schemas.microsoft.com/office/drawing/2014/main" id="{4CDD7689-20D8-45E2-AF92-CBCA5DD51C1E}"/>
+              </a:ext>
+            </a:extLst>
+          </p:cNvPr>
+          <p:cNvSpPr>
+            <a:spLocks xmlns:a="http://schemas.openxmlformats.org/drawingml/2006/main" noGrp="1"/>
+          </p:cNvSpPr>
+          <p:nvPr/>
+        </p:nvSpPr>
+        <p:spPr>
+          <a:xfrm xmlns:a="http://schemas.openxmlformats.org/drawingml/2006/main">
+            <a:off x="9334500" y="571500"/>
+            <a:ext cx="2667000" cy="2667000"/>
           </a:xfrm>
           <a:prstGeom xmlns:a="http://schemas.openxmlformats.org/drawingml/2006/main" prst="rect">
             <a:avLst/>
@@ -17265,19 +17329,19 @@
           <p:cNvPr id="5" name="">
             <a:extLst xmlns:a="http://schemas.openxmlformats.org/drawingml/2006/main">
               <a:ext uri="{FF2B5EF4-FFF2-40B4-BE49-F238E27FC236}">
-                <a16:creationId xmlns:a16="http://schemas.microsoft.com/office/drawing/2014/main" id="{CFA8C0A6-A46F-4137-B9F5-B0206CF1D4A8}"/>
-              </a:ext>
-            </a:extLst>
-          </p:cNvPr>
-          <p:cNvSpPr>
-            <a:spLocks xmlns:a="http://schemas.openxmlformats.org/drawingml/2006/main" noGrp="1"/>
-          </p:cNvSpPr>
-          <p:nvPr/>
-        </p:nvSpPr>
-        <p:spPr>
-          <a:xfrm xmlns:a="http://schemas.openxmlformats.org/drawingml/2006/main">
-            <a:off x="9810750" y="285750"/>
-            <a:ext cx="2667000" cy="2667000"/>
+                <a16:creationId xmlns:a16="http://schemas.microsoft.com/office/drawing/2014/main" id="{CA369951-A31E-4766-B86B-05EE53A00A2D}"/>
+              </a:ext>
+            </a:extLst>
+          </p:cNvPr>
+          <p:cNvSpPr>
+            <a:spLocks xmlns:a="http://schemas.openxmlformats.org/drawingml/2006/main" noGrp="1"/>
+          </p:cNvSpPr>
+          <p:nvPr/>
+        </p:nvSpPr>
+        <p:spPr>
+          <a:xfrm xmlns:a="http://schemas.openxmlformats.org/drawingml/2006/main">
+            <a:off x="10096500" y="857250"/>
+            <a:ext cx="2000250" cy="2000250"/>
           </a:xfrm>
           <a:prstGeom xmlns:a="http://schemas.openxmlformats.org/drawingml/2006/main" prst="rect">
             <a:avLst/>
@@ -17300,7 +17364,7 @@
           <p:cNvPr id="6" name="">
             <a:extLst xmlns:a="http://schemas.openxmlformats.org/drawingml/2006/main">
               <a:ext uri="{FF2B5EF4-FFF2-40B4-BE49-F238E27FC236}">
-                <a16:creationId xmlns:a16="http://schemas.microsoft.com/office/drawing/2014/main" id="{EC2A8F4A-5BA0-42AD-87A3-2B6BA8C36C2E}"/>
+                <a16:creationId xmlns:a16="http://schemas.microsoft.com/office/drawing/2014/main" id="{E731EFD7-23EE-48E7-9B51-B1BDA7816776}"/>
               </a:ext>
             </a:extLst>
           </p:cNvPr>
@@ -17364,7 +17428,7 @@
           <p:cNvPr id="7" name="">
             <a:extLst xmlns:a="http://schemas.openxmlformats.org/drawingml/2006/main">
               <a:ext uri="{FF2B5EF4-FFF2-40B4-BE49-F238E27FC236}">
-                <a16:creationId xmlns:a16="http://schemas.microsoft.com/office/drawing/2014/main" id="{F3C2C00A-1284-408A-A5D6-AEBF48280C6E}"/>
+                <a16:creationId xmlns:a16="http://schemas.microsoft.com/office/drawing/2014/main" id="{0C453C14-052C-4EC5-9FF5-12BA2D7D06BD}"/>
               </a:ext>
             </a:extLst>
           </p:cNvPr>
@@ -17428,7 +17492,7 @@
           <p:cNvPr id="8" name="">
             <a:extLst xmlns:a="http://schemas.openxmlformats.org/drawingml/2006/main">
               <a:ext uri="{FF2B5EF4-FFF2-40B4-BE49-F238E27FC236}">
-                <a16:creationId xmlns:a16="http://schemas.microsoft.com/office/drawing/2014/main" id="{1DD13CB6-2E5F-4E42-B751-2E26DE7C72E1}"/>
+                <a16:creationId xmlns:a16="http://schemas.microsoft.com/office/drawing/2014/main" id="{497E3F34-F421-4DC8-9137-61C1E82CA07C}"/>
               </a:ext>
             </a:extLst>
           </p:cNvPr>
@@ -17492,7 +17556,7 @@
           <p:cNvPr id="9" name="">
             <a:extLst xmlns:a="http://schemas.openxmlformats.org/drawingml/2006/main">
               <a:ext uri="{FF2B5EF4-FFF2-40B4-BE49-F238E27FC236}">
-                <a16:creationId xmlns:a16="http://schemas.microsoft.com/office/drawing/2014/main" id="{FB0F8569-FEAD-45F0-867F-EDA6F77B4BBC}"/>
+                <a16:creationId xmlns:a16="http://schemas.microsoft.com/office/drawing/2014/main" id="{0AC34847-B373-4D6D-AAAD-7ABD9E608A72}"/>
               </a:ext>
             </a:extLst>
           </p:cNvPr>
@@ -17525,7 +17589,7 @@
           <p:cNvPr id="10" name="">
             <a:extLst xmlns:a="http://schemas.openxmlformats.org/drawingml/2006/main">
               <a:ext uri="{FF2B5EF4-FFF2-40B4-BE49-F238E27FC236}">
-                <a16:creationId xmlns:a16="http://schemas.microsoft.com/office/drawing/2014/main" id="{69C596B1-0700-4B96-9E1A-4960DEA67730}"/>
+                <a16:creationId xmlns:a16="http://schemas.microsoft.com/office/drawing/2014/main" id="{0465B68C-5692-4DCD-9C93-612EC417893A}"/>
               </a:ext>
             </a:extLst>
           </p:cNvPr>
@@ -17558,7 +17622,7 @@
           <p:cNvPr id="11" name="">
             <a:extLst xmlns:a="http://schemas.openxmlformats.org/drawingml/2006/main">
               <a:ext uri="{FF2B5EF4-FFF2-40B4-BE49-F238E27FC236}">
-                <a16:creationId xmlns:a16="http://schemas.microsoft.com/office/drawing/2014/main" id="{B7523AD5-B71D-4EB2-A781-63930DB3D947}"/>
+                <a16:creationId xmlns:a16="http://schemas.microsoft.com/office/drawing/2014/main" id="{AA749927-ACE3-4E82-8DFA-BF40CBCFBE7D}"/>
               </a:ext>
             </a:extLst>
           </p:cNvPr>
@@ -17622,7 +17686,7 @@
           <p:cNvPr id="12" name="">
             <a:extLst xmlns:a="http://schemas.openxmlformats.org/drawingml/2006/main">
               <a:ext uri="{FF2B5EF4-FFF2-40B4-BE49-F238E27FC236}">
-                <a16:creationId xmlns:a16="http://schemas.microsoft.com/office/drawing/2014/main" id="{1E801065-85EE-49EA-A9E9-8AAC9FF71F05}"/>
+                <a16:creationId xmlns:a16="http://schemas.microsoft.com/office/drawing/2014/main" id="{9A102D8B-975E-4457-91BB-1A0E28B30988}"/>
               </a:ext>
             </a:extLst>
           </p:cNvPr>
@@ -17778,7 +17842,7 @@
           <p:cNvPr id="13" name="">
             <a:extLst xmlns:a="http://schemas.openxmlformats.org/drawingml/2006/main">
               <a:ext uri="{FF2B5EF4-FFF2-40B4-BE49-F238E27FC236}">
-                <a16:creationId xmlns:a16="http://schemas.microsoft.com/office/drawing/2014/main" id="{2B3F0593-7A27-4E3F-B4CE-79B3426EFBDA}"/>
+                <a16:creationId xmlns:a16="http://schemas.microsoft.com/office/drawing/2014/main" id="{4B06BA47-02F2-410D-A592-5831EC5925B3}"/>
               </a:ext>
             </a:extLst>
           </p:cNvPr>
@@ -17811,7 +17875,7 @@
           <p:cNvPr id="14" name="">
             <a:extLst xmlns:a="http://schemas.openxmlformats.org/drawingml/2006/main">
               <a:ext uri="{FF2B5EF4-FFF2-40B4-BE49-F238E27FC236}">
-                <a16:creationId xmlns:a16="http://schemas.microsoft.com/office/drawing/2014/main" id="{F09B494C-2D20-4AEF-B26C-3DABC699A8B8}"/>
+                <a16:creationId xmlns:a16="http://schemas.microsoft.com/office/drawing/2014/main" id="{D404CFB8-F1AB-4E6D-B472-27EAD98778DC}"/>
               </a:ext>
             </a:extLst>
           </p:cNvPr>
@@ -17844,7 +17908,7 @@
           <p:cNvPr id="15" name="">
             <a:extLst xmlns:a="http://schemas.openxmlformats.org/drawingml/2006/main">
               <a:ext uri="{FF2B5EF4-FFF2-40B4-BE49-F238E27FC236}">
-                <a16:creationId xmlns:a16="http://schemas.microsoft.com/office/drawing/2014/main" id="{CBE4121C-79DE-46E2-B074-8B71418B9E29}"/>
+                <a16:creationId xmlns:a16="http://schemas.microsoft.com/office/drawing/2014/main" id="{C5ED4727-D48E-4D8D-95EE-7E8CB5410479}"/>
               </a:ext>
             </a:extLst>
           </p:cNvPr>
@@ -17908,7 +17972,7 @@
           <p:cNvPr id="16" name="">
             <a:extLst xmlns:a="http://schemas.openxmlformats.org/drawingml/2006/main">
               <a:ext uri="{FF2B5EF4-FFF2-40B4-BE49-F238E27FC236}">
-                <a16:creationId xmlns:a16="http://schemas.microsoft.com/office/drawing/2014/main" id="{ABC78FB5-87CA-4FD8-8085-394B89D52CDE}"/>
+                <a16:creationId xmlns:a16="http://schemas.microsoft.com/office/drawing/2014/main" id="{0E3E952B-C7B0-4DBD-8AF6-DBAB99564E87}"/>
               </a:ext>
             </a:extLst>
           </p:cNvPr>
@@ -18064,7 +18128,7 @@
           <p:cNvPr id="17" name="">
             <a:extLst xmlns:a="http://schemas.openxmlformats.org/drawingml/2006/main">
               <a:ext uri="{FF2B5EF4-FFF2-40B4-BE49-F238E27FC236}">
-                <a16:creationId xmlns:a16="http://schemas.microsoft.com/office/drawing/2014/main" id="{23EA83C0-911B-4750-8701-0D3B53426F8C}"/>
+                <a16:creationId xmlns:a16="http://schemas.microsoft.com/office/drawing/2014/main" id="{1B224E12-0884-4779-B3AC-8D26685DCC76}"/>
               </a:ext>
             </a:extLst>
           </p:cNvPr>
@@ -18128,7 +18192,7 @@
           <p:cNvPr id="18" name="">
             <a:extLst xmlns:a="http://schemas.openxmlformats.org/drawingml/2006/main">
               <a:ext uri="{FF2B5EF4-FFF2-40B4-BE49-F238E27FC236}">
-                <a16:creationId xmlns:a16="http://schemas.microsoft.com/office/drawing/2014/main" id="{8B52901D-E2B6-4C3E-A1D9-6F1B8F271395}"/>
+                <a16:creationId xmlns:a16="http://schemas.microsoft.com/office/drawing/2014/main" id="{3A9F128E-3385-4919-95D0-0B4F0CEBD80E}"/>
               </a:ext>
             </a:extLst>
           </p:cNvPr>
@@ -18192,7 +18256,7 @@
           <p:cNvPr id="19" name="">
             <a:extLst xmlns:a="http://schemas.openxmlformats.org/drawingml/2006/main">
               <a:ext uri="{FF2B5EF4-FFF2-40B4-BE49-F238E27FC236}">
-                <a16:creationId xmlns:a16="http://schemas.microsoft.com/office/drawing/2014/main" id="{758A328C-F78E-410C-9EB0-30A7E084369E}"/>
+                <a16:creationId xmlns:a16="http://schemas.microsoft.com/office/drawing/2014/main" id="{820E27A6-E79F-40DE-8BC7-544CC780A7DC}"/>
               </a:ext>
             </a:extLst>
           </p:cNvPr>
@@ -18256,7 +18320,7 @@
           <p:cNvPr id="20" name="">
             <a:extLst xmlns:a="http://schemas.openxmlformats.org/drawingml/2006/main">
               <a:ext uri="{FF2B5EF4-FFF2-40B4-BE49-F238E27FC236}">
-                <a16:creationId xmlns:a16="http://schemas.microsoft.com/office/drawing/2014/main" id="{5C2E544D-2485-4886-AD66-A9BCD7560FFD}"/>
+                <a16:creationId xmlns:a16="http://schemas.microsoft.com/office/drawing/2014/main" id="{F27ABEF9-FA35-4A92-A77A-272A7DEC769E}"/>
               </a:ext>
             </a:extLst>
           </p:cNvPr>
@@ -18287,7 +18351,7 @@
     </p:spTree>
     <p:extLst>
       <p:ext uri="{BB962C8B-B14F-4D97-AF65-F5344CB8AC3E}">
-        <p14:creationId xmlns:p14="http://schemas.microsoft.com/office/powerpoint/2010/main" val="2446455"/>
+        <p14:creationId xmlns:p14="http://schemas.microsoft.com/office/powerpoint/2010/main" val="37059195"/>
       </p:ext>
     </p:extLst>
   </p:cSld>
@@ -18311,7 +18375,7 @@
           <p:cNvPr id="1" name="">
             <a:extLst xmlns:a="http://schemas.openxmlformats.org/drawingml/2006/main">
               <a:ext uri="{FF2B5EF4-FFF2-40B4-BE49-F238E27FC236}">
-                <a16:creationId xmlns:a16="http://schemas.microsoft.com/office/drawing/2014/main" id="{87D598FA-2973-4B1F-97BE-8AA025184E2D}"/>
+                <a16:creationId xmlns:a16="http://schemas.microsoft.com/office/drawing/2014/main" id="{A3F2FBF0-7D77-4283-BD46-1B471803AE11}"/>
               </a:ext>
             </a:extLst>
           </p:cNvPr>
@@ -18344,19 +18408,19 @@
           <p:cNvPr id="2" name="">
             <a:extLst xmlns:a="http://schemas.openxmlformats.org/drawingml/2006/main">
               <a:ext uri="{FF2B5EF4-FFF2-40B4-BE49-F238E27FC236}">
-                <a16:creationId xmlns:a16="http://schemas.microsoft.com/office/drawing/2014/main" id="{74D44698-E348-450B-9A52-FF14E0D51780}"/>
-              </a:ext>
-            </a:extLst>
-          </p:cNvPr>
-          <p:cNvSpPr>
-            <a:spLocks xmlns:a="http://schemas.openxmlformats.org/drawingml/2006/main" noGrp="1"/>
-          </p:cNvSpPr>
-          <p:nvPr/>
-        </p:nvSpPr>
-        <p:spPr>
-          <a:xfrm xmlns:a="http://schemas.openxmlformats.org/drawingml/2006/main">
-            <a:off x="7810500" y="-571500"/>
-            <a:ext cx="4953000" cy="4953000"/>
+                <a16:creationId xmlns:a16="http://schemas.microsoft.com/office/drawing/2014/main" id="{A594BC2A-D3EC-4A10-B2AA-26998DE8C526}"/>
+              </a:ext>
+            </a:extLst>
+          </p:cNvPr>
+          <p:cNvSpPr>
+            <a:spLocks xmlns:a="http://schemas.openxmlformats.org/drawingml/2006/main" noGrp="1"/>
+          </p:cNvSpPr>
+          <p:nvPr/>
+        </p:nvSpPr>
+        <p:spPr>
+          <a:xfrm xmlns:a="http://schemas.openxmlformats.org/drawingml/2006/main">
+            <a:off x="7810500" y="0"/>
+            <a:ext cx="4000500" cy="4000500"/>
           </a:xfrm>
           <a:prstGeom xmlns:a="http://schemas.openxmlformats.org/drawingml/2006/main" prst="rect">
             <a:avLst/>
@@ -18379,19 +18443,19 @@
           <p:cNvPr id="3" name="">
             <a:extLst xmlns:a="http://schemas.openxmlformats.org/drawingml/2006/main">
               <a:ext uri="{FF2B5EF4-FFF2-40B4-BE49-F238E27FC236}">
-                <a16:creationId xmlns:a16="http://schemas.microsoft.com/office/drawing/2014/main" id="{7417BF65-16BB-41BF-BF96-2586B75CD764}"/>
-              </a:ext>
-            </a:extLst>
-          </p:cNvPr>
-          <p:cNvSpPr>
-            <a:spLocks xmlns:a="http://schemas.openxmlformats.org/drawingml/2006/main" noGrp="1"/>
-          </p:cNvSpPr>
-          <p:nvPr/>
-        </p:nvSpPr>
-        <p:spPr>
-          <a:xfrm xmlns:a="http://schemas.openxmlformats.org/drawingml/2006/main">
-            <a:off x="8477250" y="-285750"/>
-            <a:ext cx="4191000" cy="4191000"/>
+                <a16:creationId xmlns:a16="http://schemas.microsoft.com/office/drawing/2014/main" id="{15F403EB-CFA4-4077-932A-578DDD515812}"/>
+              </a:ext>
+            </a:extLst>
+          </p:cNvPr>
+          <p:cNvSpPr>
+            <a:spLocks xmlns:a="http://schemas.openxmlformats.org/drawingml/2006/main" noGrp="1"/>
+          </p:cNvSpPr>
+          <p:nvPr/>
+        </p:nvSpPr>
+        <p:spPr>
+          <a:xfrm xmlns:a="http://schemas.openxmlformats.org/drawingml/2006/main">
+            <a:off x="8572500" y="285750"/>
+            <a:ext cx="3333750" cy="3333750"/>
           </a:xfrm>
           <a:prstGeom xmlns:a="http://schemas.openxmlformats.org/drawingml/2006/main" prst="rect">
             <a:avLst/>
@@ -18414,19 +18478,19 @@
           <p:cNvPr id="4" name="">
             <a:extLst xmlns:a="http://schemas.openxmlformats.org/drawingml/2006/main">
               <a:ext uri="{FF2B5EF4-FFF2-40B4-BE49-F238E27FC236}">
-                <a16:creationId xmlns:a16="http://schemas.microsoft.com/office/drawing/2014/main" id="{2A70FA90-EF12-48D9-9855-CF8B85A034AC}"/>
-              </a:ext>
-            </a:extLst>
-          </p:cNvPr>
-          <p:cNvSpPr>
-            <a:spLocks xmlns:a="http://schemas.openxmlformats.org/drawingml/2006/main" noGrp="1"/>
-          </p:cNvSpPr>
-          <p:nvPr/>
-        </p:nvSpPr>
-        <p:spPr>
-          <a:xfrm xmlns:a="http://schemas.openxmlformats.org/drawingml/2006/main">
-            <a:off x="9144000" y="0"/>
-            <a:ext cx="3429000" cy="3429000"/>
+                <a16:creationId xmlns:a16="http://schemas.microsoft.com/office/drawing/2014/main" id="{C5DDC527-93EA-4868-8E5B-5065C51A0B30}"/>
+              </a:ext>
+            </a:extLst>
+          </p:cNvPr>
+          <p:cNvSpPr>
+            <a:spLocks xmlns:a="http://schemas.openxmlformats.org/drawingml/2006/main" noGrp="1"/>
+          </p:cNvSpPr>
+          <p:nvPr/>
+        </p:nvSpPr>
+        <p:spPr>
+          <a:xfrm xmlns:a="http://schemas.openxmlformats.org/drawingml/2006/main">
+            <a:off x="9334500" y="571500"/>
+            <a:ext cx="2667000" cy="2667000"/>
           </a:xfrm>
           <a:prstGeom xmlns:a="http://schemas.openxmlformats.org/drawingml/2006/main" prst="rect">
             <a:avLst/>
@@ -18449,19 +18513,19 @@
           <p:cNvPr id="5" name="">
             <a:extLst xmlns:a="http://schemas.openxmlformats.org/drawingml/2006/main">
               <a:ext uri="{FF2B5EF4-FFF2-40B4-BE49-F238E27FC236}">
-                <a16:creationId xmlns:a16="http://schemas.microsoft.com/office/drawing/2014/main" id="{140A2EF4-5A9D-402E-A33A-72BFBC197662}"/>
-              </a:ext>
-            </a:extLst>
-          </p:cNvPr>
-          <p:cNvSpPr>
-            <a:spLocks xmlns:a="http://schemas.openxmlformats.org/drawingml/2006/main" noGrp="1"/>
-          </p:cNvSpPr>
-          <p:nvPr/>
-        </p:nvSpPr>
-        <p:spPr>
-          <a:xfrm xmlns:a="http://schemas.openxmlformats.org/drawingml/2006/main">
-            <a:off x="9810750" y="285750"/>
-            <a:ext cx="2667000" cy="2667000"/>
+                <a16:creationId xmlns:a16="http://schemas.microsoft.com/office/drawing/2014/main" id="{49DB1ACF-DFBF-4552-A67F-7036BFB844C5}"/>
+              </a:ext>
+            </a:extLst>
+          </p:cNvPr>
+          <p:cNvSpPr>
+            <a:spLocks xmlns:a="http://schemas.openxmlformats.org/drawingml/2006/main" noGrp="1"/>
+          </p:cNvSpPr>
+          <p:nvPr/>
+        </p:nvSpPr>
+        <p:spPr>
+          <a:xfrm xmlns:a="http://schemas.openxmlformats.org/drawingml/2006/main">
+            <a:off x="10096500" y="857250"/>
+            <a:ext cx="2000250" cy="2000250"/>
           </a:xfrm>
           <a:prstGeom xmlns:a="http://schemas.openxmlformats.org/drawingml/2006/main" prst="rect">
             <a:avLst/>
@@ -18484,7 +18548,7 @@
           <p:cNvPr id="6" name="">
             <a:extLst xmlns:a="http://schemas.openxmlformats.org/drawingml/2006/main">
               <a:ext uri="{FF2B5EF4-FFF2-40B4-BE49-F238E27FC236}">
-                <a16:creationId xmlns:a16="http://schemas.microsoft.com/office/drawing/2014/main" id="{F9C228E4-1AD0-4D86-8EC5-3D65905FEBB2}"/>
+                <a16:creationId xmlns:a16="http://schemas.microsoft.com/office/drawing/2014/main" id="{96295C1F-A85F-43C3-BECD-66CE9582C4B2}"/>
               </a:ext>
             </a:extLst>
           </p:cNvPr>
@@ -18548,7 +18612,7 @@
           <p:cNvPr id="7" name="">
             <a:extLst xmlns:a="http://schemas.openxmlformats.org/drawingml/2006/main">
               <a:ext uri="{FF2B5EF4-FFF2-40B4-BE49-F238E27FC236}">
-                <a16:creationId xmlns:a16="http://schemas.microsoft.com/office/drawing/2014/main" id="{5AFFC0F9-696D-460D-B2B8-F254503B9511}"/>
+                <a16:creationId xmlns:a16="http://schemas.microsoft.com/office/drawing/2014/main" id="{5FBABC4C-B6F4-4003-8185-882B72615B87}"/>
               </a:ext>
             </a:extLst>
           </p:cNvPr>
@@ -18612,7 +18676,7 @@
           <p:cNvPr id="8" name="">
             <a:extLst xmlns:a="http://schemas.openxmlformats.org/drawingml/2006/main">
               <a:ext uri="{FF2B5EF4-FFF2-40B4-BE49-F238E27FC236}">
-                <a16:creationId xmlns:a16="http://schemas.microsoft.com/office/drawing/2014/main" id="{01AB3AEF-A729-480C-958E-E0E6D88BBA7B}"/>
+                <a16:creationId xmlns:a16="http://schemas.microsoft.com/office/drawing/2014/main" id="{090E731D-F31A-4AAC-B953-CE93A48CAF94}"/>
               </a:ext>
             </a:extLst>
           </p:cNvPr>
@@ -18676,7 +18740,7 @@
           <p:cNvPr id="9" name="">
             <a:extLst xmlns:a="http://schemas.openxmlformats.org/drawingml/2006/main">
               <a:ext uri="{FF2B5EF4-FFF2-40B4-BE49-F238E27FC236}">
-                <a16:creationId xmlns:a16="http://schemas.microsoft.com/office/drawing/2014/main" id="{A1E4C9CA-3B53-4E2D-BFA3-7AF02A2B5B13}"/>
+                <a16:creationId xmlns:a16="http://schemas.microsoft.com/office/drawing/2014/main" id="{C3FD38F8-30F5-4B08-A117-B7D5BA143686}"/>
               </a:ext>
             </a:extLst>
           </p:cNvPr>
@@ -18709,7 +18773,7 @@
           <p:cNvPr id="10" name="">
             <a:extLst xmlns:a="http://schemas.openxmlformats.org/drawingml/2006/main">
               <a:ext uri="{FF2B5EF4-FFF2-40B4-BE49-F238E27FC236}">
-                <a16:creationId xmlns:a16="http://schemas.microsoft.com/office/drawing/2014/main" id="{7AD102DC-51D5-48D1-9481-976E7F37478B}"/>
+                <a16:creationId xmlns:a16="http://schemas.microsoft.com/office/drawing/2014/main" id="{74E293CD-9A6C-4380-9E38-7196362CF1CB}"/>
               </a:ext>
             </a:extLst>
           </p:cNvPr>
@@ -18742,7 +18806,7 @@
           <p:cNvPr id="11" name="">
             <a:extLst xmlns:a="http://schemas.openxmlformats.org/drawingml/2006/main">
               <a:ext uri="{FF2B5EF4-FFF2-40B4-BE49-F238E27FC236}">
-                <a16:creationId xmlns:a16="http://schemas.microsoft.com/office/drawing/2014/main" id="{7B3D36DB-9B10-4303-B41B-D71E2DD7CA08}"/>
+                <a16:creationId xmlns:a16="http://schemas.microsoft.com/office/drawing/2014/main" id="{9507D547-BD72-4544-AD19-AF10019797F4}"/>
               </a:ext>
             </a:extLst>
           </p:cNvPr>
@@ -18806,7 +18870,7 @@
           <p:cNvPr id="12" name="">
             <a:extLst xmlns:a="http://schemas.openxmlformats.org/drawingml/2006/main">
               <a:ext uri="{FF2B5EF4-FFF2-40B4-BE49-F238E27FC236}">
-                <a16:creationId xmlns:a16="http://schemas.microsoft.com/office/drawing/2014/main" id="{C99871FC-0DDA-44EC-A760-84150215F9F6}"/>
+                <a16:creationId xmlns:a16="http://schemas.microsoft.com/office/drawing/2014/main" id="{AE2773BE-7F87-44E0-99B4-54ACCB536C0F}"/>
               </a:ext>
             </a:extLst>
           </p:cNvPr>
@@ -18883,7 +18947,7 @@
                 <a:ea typeface="Malgun Gothic"/>
                 <a:cs typeface="Malgun Gothic"/>
               </a:rPr>
-              <a:t>• 충돌 0건, near miss 1건</a:t>
+              <a:t>• 충돌 45건, 해결률 95.9%</a:t>
             </a:r>
           </a:p>
           <a:p xmlns:a="http://schemas.openxmlformats.org/drawingml/2006/main">
@@ -18906,7 +18970,7 @@
                 <a:ea typeface="Malgun Gothic"/>
                 <a:cs typeface="Malgun Gothic"/>
               </a:rPr>
-              <a:t>• 전체 테스트 4,291건 통과</a:t>
+              <a:t>• Python 테스트 5,444건 통과</a:t>
             </a:r>
           </a:p>
           <a:p xmlns:a="http://schemas.openxmlformats.org/drawingml/2006/main">
@@ -18962,7 +19026,7 @@
           <p:cNvPr id="13" name="">
             <a:extLst xmlns:a="http://schemas.openxmlformats.org/drawingml/2006/main">
               <a:ext uri="{FF2B5EF4-FFF2-40B4-BE49-F238E27FC236}">
-                <a16:creationId xmlns:a16="http://schemas.microsoft.com/office/drawing/2014/main" id="{28E39B71-71C8-42E7-A056-0EF0E38E1BEA}"/>
+                <a16:creationId xmlns:a16="http://schemas.microsoft.com/office/drawing/2014/main" id="{44CA9D3A-4A8C-4AC8-98DF-4D67ED6065DB}"/>
               </a:ext>
             </a:extLst>
           </p:cNvPr>
@@ -18995,7 +19059,7 @@
           <p:cNvPr id="14" name="">
             <a:extLst xmlns:a="http://schemas.openxmlformats.org/drawingml/2006/main">
               <a:ext uri="{FF2B5EF4-FFF2-40B4-BE49-F238E27FC236}">
-                <a16:creationId xmlns:a16="http://schemas.microsoft.com/office/drawing/2014/main" id="{F30979D8-472B-4776-9D0D-C59129C7A277}"/>
+                <a16:creationId xmlns:a16="http://schemas.microsoft.com/office/drawing/2014/main" id="{D5C87868-88DA-41A2-B6CF-8C3C3DA2B1E7}"/>
               </a:ext>
             </a:extLst>
           </p:cNvPr>
@@ -19028,7 +19092,7 @@
           <p:cNvPr id="15" name="">
             <a:extLst xmlns:a="http://schemas.openxmlformats.org/drawingml/2006/main">
               <a:ext uri="{FF2B5EF4-FFF2-40B4-BE49-F238E27FC236}">
-                <a16:creationId xmlns:a16="http://schemas.microsoft.com/office/drawing/2014/main" id="{F4D9A5A4-9C90-41D1-8FB7-835212BF7DF0}"/>
+                <a16:creationId xmlns:a16="http://schemas.microsoft.com/office/drawing/2014/main" id="{FD1C4B61-A0ED-4AD9-A871-6ACA6B6312BE}"/>
               </a:ext>
             </a:extLst>
           </p:cNvPr>
@@ -19092,7 +19156,7 @@
           <p:cNvPr id="16" name="">
             <a:extLst xmlns:a="http://schemas.openxmlformats.org/drawingml/2006/main">
               <a:ext uri="{FF2B5EF4-FFF2-40B4-BE49-F238E27FC236}">
-                <a16:creationId xmlns:a16="http://schemas.microsoft.com/office/drawing/2014/main" id="{AA85121D-1EFD-4648-BB8A-6A3D898664C1}"/>
+                <a16:creationId xmlns:a16="http://schemas.microsoft.com/office/drawing/2014/main" id="{A9453469-1E5C-4761-8331-896D9B365337}"/>
               </a:ext>
             </a:extLst>
           </p:cNvPr>
@@ -19248,7 +19312,7 @@
           <p:cNvPr id="17" name="">
             <a:extLst xmlns:a="http://schemas.openxmlformats.org/drawingml/2006/main">
               <a:ext uri="{FF2B5EF4-FFF2-40B4-BE49-F238E27FC236}">
-                <a16:creationId xmlns:a16="http://schemas.microsoft.com/office/drawing/2014/main" id="{94829D84-A623-4EF7-8806-535469E23F17}"/>
+                <a16:creationId xmlns:a16="http://schemas.microsoft.com/office/drawing/2014/main" id="{B7D02FA8-7DFF-4DF8-A134-8610CF763821}"/>
               </a:ext>
             </a:extLst>
           </p:cNvPr>
@@ -19302,7 +19366,7 @@
                 <a:ea typeface="Malgun Gothic"/>
                 <a:cs typeface="Malgun Gothic"/>
               </a:rPr>
-              <a:t>이 구분은 프로젝트를 더 신뢰할 수 있게 만듭니다. 이미 검증한 범위를 명확히 하고, 다음 단계는 검증 계획으로 제시합니다.</a:t>
+              <a:t>현재 대표 실행에는 충돌이 남아 있습니다. 이를 숨기지 않고 개선 기준선으로 공개하며, 실제 운용 전 안전 검증 계획을 분리합니다.</a:t>
             </a:r>
           </a:p>
         </p:txBody>
@@ -19312,7 +19376,7 @@
           <p:cNvPr id="18" name="">
             <a:extLst xmlns:a="http://schemas.openxmlformats.org/drawingml/2006/main">
               <a:ext uri="{FF2B5EF4-FFF2-40B4-BE49-F238E27FC236}">
-                <a16:creationId xmlns:a16="http://schemas.microsoft.com/office/drawing/2014/main" id="{076CAFC4-8DFC-4D0B-9115-E8F0E457175C}"/>
+                <a16:creationId xmlns:a16="http://schemas.microsoft.com/office/drawing/2014/main" id="{6C7A4E02-3F29-4CA6-BE98-A581F38D7F2F}"/>
               </a:ext>
             </a:extLst>
           </p:cNvPr>
@@ -19376,7 +19440,7 @@
           <p:cNvPr id="19" name="">
             <a:extLst xmlns:a="http://schemas.openxmlformats.org/drawingml/2006/main">
               <a:ext uri="{FF2B5EF4-FFF2-40B4-BE49-F238E27FC236}">
-                <a16:creationId xmlns:a16="http://schemas.microsoft.com/office/drawing/2014/main" id="{C34CE4E8-025F-4AF5-9C7F-130F27C49983}"/>
+                <a16:creationId xmlns:a16="http://schemas.microsoft.com/office/drawing/2014/main" id="{A45587E4-90A4-4463-99A6-BF119D0C14A6}"/>
               </a:ext>
             </a:extLst>
           </p:cNvPr>
@@ -19440,7 +19504,7 @@
           <p:cNvPr id="20" name="">
             <a:extLst xmlns:a="http://schemas.openxmlformats.org/drawingml/2006/main">
               <a:ext uri="{FF2B5EF4-FFF2-40B4-BE49-F238E27FC236}">
-                <a16:creationId xmlns:a16="http://schemas.microsoft.com/office/drawing/2014/main" id="{73DFE690-C00B-4B0B-A8D4-992186D0C79E}"/>
+                <a16:creationId xmlns:a16="http://schemas.microsoft.com/office/drawing/2014/main" id="{5E6A1D2E-E812-48FF-80D3-D1B780DB381D}"/>
               </a:ext>
             </a:extLst>
           </p:cNvPr>
@@ -19471,7 +19535,7 @@
     </p:spTree>
     <p:extLst>
       <p:ext uri="{BB962C8B-B14F-4D97-AF65-F5344CB8AC3E}">
-        <p14:creationId xmlns:p14="http://schemas.microsoft.com/office/powerpoint/2010/main" val="1354268397"/>
+        <p14:creationId xmlns:p14="http://schemas.microsoft.com/office/powerpoint/2010/main" val="34139202"/>
       </p:ext>
     </p:extLst>
   </p:cSld>

--- a/docs/presentation/SDACS_Public_Project_Overview_2026.pptx
+++ b/docs/presentation/SDACS_Public_Project_Overview_2026.pptx
@@ -1683,6 +1683,10 @@
             <a:prstDash val="solid"/>
           </a:ln>
         </p:spPr>
+        <p:txBody xmlns:a="http://schemas.openxmlformats.org/drawingml/2006/main">
+          <a:bodyPr wrap="square"/>
+          <a:p/>
+        </p:txBody>
       </p:sp>
       <p:sp>
         <p:nvSpPr>
@@ -1718,6 +1722,10 @@
             <a:prstDash val="solid"/>
           </a:ln>
         </p:spPr>
+        <p:txBody xmlns:a="http://schemas.openxmlformats.org/drawingml/2006/main">
+          <a:bodyPr wrap="square"/>
+          <a:p/>
+        </p:txBody>
       </p:sp>
       <p:sp>
         <p:nvSpPr>
@@ -1753,6 +1761,10 @@
             <a:prstDash val="solid"/>
           </a:ln>
         </p:spPr>
+        <p:txBody xmlns:a="http://schemas.openxmlformats.org/drawingml/2006/main">
+          <a:bodyPr wrap="square"/>
+          <a:p/>
+        </p:txBody>
       </p:sp>
       <p:sp>
         <p:nvSpPr>
@@ -1788,6 +1800,10 @@
             <a:prstDash val="solid"/>
           </a:ln>
         </p:spPr>
+        <p:txBody xmlns:a="http://schemas.openxmlformats.org/drawingml/2006/main">
+          <a:bodyPr wrap="square"/>
+          <a:p/>
+        </p:txBody>
       </p:sp>
       <p:sp>
         <p:nvSpPr>
@@ -1823,6 +1839,10 @@
             <a:prstDash val="solid"/>
           </a:ln>
         </p:spPr>
+        <p:txBody xmlns:a="http://schemas.openxmlformats.org/drawingml/2006/main">
+          <a:bodyPr wrap="square"/>
+          <a:p/>
+        </p:txBody>
       </p:sp>
       <p:sp>
         <p:nvSpPr>
@@ -1856,6 +1876,10 @@
             <a:prstDash val="solid"/>
           </a:ln>
         </p:spPr>
+        <p:txBody xmlns:a="http://schemas.openxmlformats.org/drawingml/2006/main">
+          <a:bodyPr wrap="square"/>
+          <a:p/>
+        </p:txBody>
       </p:sp>
       <p:sp>
         <p:nvSpPr>
@@ -2145,6 +2169,10 @@
             <a:prstDash val="solid"/>
           </a:ln>
         </p:spPr>
+        <p:txBody xmlns:a="http://schemas.openxmlformats.org/drawingml/2006/main">
+          <a:bodyPr/>
+          <a:p/>
+        </p:txBody>
       </p:sp>
       <p:sp>
         <p:nvSpPr>
@@ -2178,6 +2206,10 @@
             <a:prstDash val="solid"/>
           </a:ln>
         </p:spPr>
+        <p:txBody xmlns:a="http://schemas.openxmlformats.org/drawingml/2006/main">
+          <a:bodyPr/>
+          <a:p/>
+        </p:txBody>
       </p:sp>
       <p:sp>
         <p:nvSpPr>
@@ -2275,6 +2307,10 @@
             <a:prstDash val="solid"/>
           </a:ln>
         </p:spPr>
+        <p:txBody xmlns:a="http://schemas.openxmlformats.org/drawingml/2006/main">
+          <a:bodyPr/>
+          <a:p/>
+        </p:txBody>
       </p:sp>
       <p:sp>
         <p:nvSpPr>
@@ -2372,6 +2408,10 @@
             <a:prstDash val="solid"/>
           </a:ln>
         </p:spPr>
+        <p:txBody xmlns:a="http://schemas.openxmlformats.org/drawingml/2006/main">
+          <a:bodyPr/>
+          <a:p/>
+        </p:txBody>
       </p:sp>
       <p:sp>
         <p:nvSpPr>
@@ -2469,6 +2509,10 @@
             <a:prstDash val="solid"/>
           </a:ln>
         </p:spPr>
+        <p:txBody xmlns:a="http://schemas.openxmlformats.org/drawingml/2006/main">
+          <a:bodyPr wrap="square"/>
+          <a:p/>
+        </p:txBody>
       </p:sp>
       <p:sp>
         <p:nvSpPr>
@@ -2502,6 +2546,10 @@
             <a:prstDash val="solid"/>
           </a:ln>
         </p:spPr>
+        <p:txBody xmlns:a="http://schemas.openxmlformats.org/drawingml/2006/main">
+          <a:bodyPr wrap="square"/>
+          <a:p/>
+        </p:txBody>
       </p:sp>
       <p:sp>
         <p:nvSpPr>
@@ -2727,6 +2775,10 @@
             <a:prstDash val="solid"/>
           </a:ln>
         </p:spPr>
+        <p:txBody xmlns:a="http://schemas.openxmlformats.org/drawingml/2006/main">
+          <a:bodyPr wrap="square"/>
+          <a:p/>
+        </p:txBody>
       </p:sp>
       <p:sp>
         <p:nvSpPr>
@@ -2760,6 +2812,10 @@
             <a:prstDash val="solid"/>
           </a:ln>
         </p:spPr>
+        <p:txBody xmlns:a="http://schemas.openxmlformats.org/drawingml/2006/main">
+          <a:bodyPr wrap="square"/>
+          <a:p/>
+        </p:txBody>
       </p:sp>
       <p:sp>
         <p:nvSpPr>
@@ -2985,6 +3041,10 @@
             <a:prstDash val="solid"/>
           </a:ln>
         </p:spPr>
+        <p:txBody xmlns:a="http://schemas.openxmlformats.org/drawingml/2006/main">
+          <a:bodyPr wrap="square"/>
+          <a:p/>
+        </p:txBody>
       </p:sp>
       <p:sp>
         <p:nvSpPr>
@@ -3018,6 +3078,10 @@
             <a:prstDash val="solid"/>
           </a:ln>
         </p:spPr>
+        <p:txBody xmlns:a="http://schemas.openxmlformats.org/drawingml/2006/main">
+          <a:bodyPr wrap="square"/>
+          <a:p/>
+        </p:txBody>
       </p:sp>
       <p:sp>
         <p:nvSpPr>
@@ -3243,6 +3307,10 @@
             <a:prstDash val="solid"/>
           </a:ln>
         </p:spPr>
+        <p:txBody xmlns:a="http://schemas.openxmlformats.org/drawingml/2006/main">
+          <a:bodyPr wrap="square"/>
+          <a:p/>
+        </p:txBody>
       </p:sp>
       <p:sp>
         <p:nvSpPr>
@@ -3276,6 +3344,10 @@
             <a:prstDash val="solid"/>
           </a:ln>
         </p:spPr>
+        <p:txBody xmlns:a="http://schemas.openxmlformats.org/drawingml/2006/main">
+          <a:bodyPr wrap="square"/>
+          <a:p/>
+        </p:txBody>
       </p:sp>
       <p:sp>
         <p:nvSpPr>
@@ -3506,7 +3578,7 @@
           </a:ln>
         </p:spPr>
         <p:txBody>
-          <a:bodyPr xmlns:a="http://schemas.openxmlformats.org/drawingml/2006/main" lIns="0" tIns="0" rIns="0" bIns="0" anchor="t"/>
+          <a:bodyPr xmlns:a="http://schemas.openxmlformats.org/drawingml/2006/main" lIns="0" tIns="0" rIns="0" bIns="0" anchor="t" wrap="square"/>
           <a:lstStyle xmlns:a="http://schemas.openxmlformats.org/drawingml/2006/main"/>
           <a:p xmlns:a="http://schemas.openxmlformats.org/drawingml/2006/main">
             <a:pPr algn="l">
@@ -3651,6 +3723,10 @@
             <a:prstDash val="solid"/>
           </a:ln>
         </p:spPr>
+        <p:txBody xmlns:a="http://schemas.openxmlformats.org/drawingml/2006/main">
+          <a:bodyPr wrap="square"/>
+          <a:p/>
+        </p:txBody>
       </p:sp>
       <p:sp>
         <p:nvSpPr>
@@ -3686,6 +3762,10 @@
             <a:prstDash val="solid"/>
           </a:ln>
         </p:spPr>
+        <p:txBody xmlns:a="http://schemas.openxmlformats.org/drawingml/2006/main">
+          <a:bodyPr wrap="square"/>
+          <a:p/>
+        </p:txBody>
       </p:sp>
       <p:sp>
         <p:nvSpPr>
@@ -3721,6 +3801,10 @@
             <a:prstDash val="solid"/>
           </a:ln>
         </p:spPr>
+        <p:txBody xmlns:a="http://schemas.openxmlformats.org/drawingml/2006/main">
+          <a:bodyPr wrap="square"/>
+          <a:p/>
+        </p:txBody>
       </p:sp>
       <p:sp>
         <p:nvSpPr>
@@ -3756,6 +3840,10 @@
             <a:prstDash val="solid"/>
           </a:ln>
         </p:spPr>
+        <p:txBody xmlns:a="http://schemas.openxmlformats.org/drawingml/2006/main">
+          <a:bodyPr wrap="square"/>
+          <a:p/>
+        </p:txBody>
       </p:sp>
       <p:sp>
         <p:nvSpPr>
@@ -3791,6 +3879,10 @@
             <a:prstDash val="solid"/>
           </a:ln>
         </p:spPr>
+        <p:txBody xmlns:a="http://schemas.openxmlformats.org/drawingml/2006/main">
+          <a:bodyPr wrap="square"/>
+          <a:p/>
+        </p:txBody>
       </p:sp>
       <p:sp>
         <p:nvSpPr>
@@ -3952,6 +4044,10 @@
             <a:prstDash val="solid"/>
           </a:ln>
         </p:spPr>
+        <p:txBody xmlns:a="http://schemas.openxmlformats.org/drawingml/2006/main">
+          <a:bodyPr/>
+          <a:p/>
+        </p:txBody>
       </p:sp>
       <p:sp>
         <p:nvSpPr>
@@ -3985,6 +4081,10 @@
             <a:prstDash val="solid"/>
           </a:ln>
         </p:spPr>
+        <p:txBody xmlns:a="http://schemas.openxmlformats.org/drawingml/2006/main">
+          <a:bodyPr/>
+          <a:p/>
+        </p:txBody>
       </p:sp>
       <p:sp>
         <p:nvSpPr>
@@ -4210,6 +4310,10 @@
             <a:prstDash val="solid"/>
           </a:ln>
         </p:spPr>
+        <p:txBody xmlns:a="http://schemas.openxmlformats.org/drawingml/2006/main">
+          <a:bodyPr/>
+          <a:p/>
+        </p:txBody>
       </p:sp>
       <p:sp>
         <p:nvSpPr>
@@ -4243,6 +4347,10 @@
             <a:prstDash val="solid"/>
           </a:ln>
         </p:spPr>
+        <p:txBody xmlns:a="http://schemas.openxmlformats.org/drawingml/2006/main">
+          <a:bodyPr/>
+          <a:p/>
+        </p:txBody>
       </p:sp>
       <p:sp>
         <p:nvSpPr>
@@ -4468,6 +4576,10 @@
             <a:prstDash val="solid"/>
           </a:ln>
         </p:spPr>
+        <p:txBody xmlns:a="http://schemas.openxmlformats.org/drawingml/2006/main">
+          <a:bodyPr/>
+          <a:p/>
+        </p:txBody>
       </p:sp>
       <p:sp>
         <p:nvSpPr>
@@ -4501,6 +4613,10 @@
             <a:prstDash val="solid"/>
           </a:ln>
         </p:spPr>
+        <p:txBody xmlns:a="http://schemas.openxmlformats.org/drawingml/2006/main">
+          <a:bodyPr/>
+          <a:p/>
+        </p:txBody>
       </p:sp>
       <p:sp>
         <p:nvSpPr>
@@ -4726,6 +4842,10 @@
             <a:prstDash val="solid"/>
           </a:ln>
         </p:spPr>
+        <p:txBody xmlns:a="http://schemas.openxmlformats.org/drawingml/2006/main">
+          <a:bodyPr/>
+          <a:p/>
+        </p:txBody>
       </p:sp>
       <p:sp>
         <p:nvSpPr>
@@ -4759,6 +4879,10 @@
             <a:prstDash val="solid"/>
           </a:ln>
         </p:spPr>
+        <p:txBody xmlns:a="http://schemas.openxmlformats.org/drawingml/2006/main">
+          <a:bodyPr/>
+          <a:p/>
+        </p:txBody>
       </p:sp>
       <p:sp>
         <p:nvSpPr>
@@ -5134,6 +5258,10 @@
             <a:prstDash val="solid"/>
           </a:ln>
         </p:spPr>
+        <p:txBody xmlns:a="http://schemas.openxmlformats.org/drawingml/2006/main">
+          <a:bodyPr wrap="square"/>
+          <a:p/>
+        </p:txBody>
       </p:sp>
       <p:sp>
         <p:nvSpPr>
@@ -5169,6 +5297,10 @@
             <a:prstDash val="solid"/>
           </a:ln>
         </p:spPr>
+        <p:txBody xmlns:a="http://schemas.openxmlformats.org/drawingml/2006/main">
+          <a:bodyPr wrap="square"/>
+          <a:p/>
+        </p:txBody>
       </p:sp>
       <p:sp>
         <p:nvSpPr>
@@ -5204,6 +5336,10 @@
             <a:prstDash val="solid"/>
           </a:ln>
         </p:spPr>
+        <p:txBody xmlns:a="http://schemas.openxmlformats.org/drawingml/2006/main">
+          <a:bodyPr wrap="square"/>
+          <a:p/>
+        </p:txBody>
       </p:sp>
       <p:sp>
         <p:nvSpPr>
@@ -5239,6 +5375,10 @@
             <a:prstDash val="solid"/>
           </a:ln>
         </p:spPr>
+        <p:txBody xmlns:a="http://schemas.openxmlformats.org/drawingml/2006/main">
+          <a:bodyPr wrap="square"/>
+          <a:p/>
+        </p:txBody>
       </p:sp>
       <p:sp>
         <p:nvSpPr>
@@ -5274,6 +5414,10 @@
             <a:prstDash val="solid"/>
           </a:ln>
         </p:spPr>
+        <p:txBody xmlns:a="http://schemas.openxmlformats.org/drawingml/2006/main">
+          <a:bodyPr wrap="square"/>
+          <a:p/>
+        </p:txBody>
       </p:sp>
       <p:sp>
         <p:nvSpPr>
@@ -5376,7 +5520,7 @@
           </a:ln>
         </p:spPr>
         <p:txBody>
-          <a:bodyPr xmlns:a="http://schemas.openxmlformats.org/drawingml/2006/main" lIns="0" tIns="0" rIns="0" bIns="0" anchor="t"/>
+          <a:bodyPr xmlns:a="http://schemas.openxmlformats.org/drawingml/2006/main" lIns="0" tIns="0" rIns="0" bIns="0" anchor="t" wrap="square"/>
           <a:lstStyle xmlns:a="http://schemas.openxmlformats.org/drawingml/2006/main"/>
           <a:p xmlns:a="http://schemas.openxmlformats.org/drawingml/2006/main">
             <a:pPr algn="l">
@@ -5499,6 +5643,10 @@
             <a:prstDash val="solid"/>
           </a:ln>
         </p:spPr>
+        <p:txBody xmlns:a="http://schemas.openxmlformats.org/drawingml/2006/main">
+          <a:bodyPr wrap="square"/>
+          <a:p/>
+        </p:txBody>
       </p:sp>
       <p:sp>
         <p:nvSpPr>
@@ -5532,6 +5680,10 @@
             <a:prstDash val="solid"/>
           </a:ln>
         </p:spPr>
+        <p:txBody xmlns:a="http://schemas.openxmlformats.org/drawingml/2006/main">
+          <a:bodyPr wrap="square"/>
+          <a:p/>
+        </p:txBody>
       </p:sp>
       <p:sp>
         <p:nvSpPr>
@@ -5698,7 +5850,7 @@
           </a:ln>
         </p:spPr>
         <p:txBody>
-          <a:bodyPr xmlns:a="http://schemas.openxmlformats.org/drawingml/2006/main" lIns="0" tIns="0" rIns="0" bIns="0" anchor="t"/>
+          <a:bodyPr xmlns:a="http://schemas.openxmlformats.org/drawingml/2006/main" lIns="0" tIns="0" rIns="0" bIns="0" anchor="t" wrap="square"/>
           <a:lstStyle xmlns:a="http://schemas.openxmlformats.org/drawingml/2006/main"/>
           <a:p xmlns:a="http://schemas.openxmlformats.org/drawingml/2006/main">
             <a:pPr algn="l">
@@ -5757,6 +5909,10 @@
             <a:prstDash val="solid"/>
           </a:ln>
         </p:spPr>
+        <p:txBody xmlns:a="http://schemas.openxmlformats.org/drawingml/2006/main">
+          <a:bodyPr wrap="square"/>
+          <a:p/>
+        </p:txBody>
       </p:sp>
       <p:sp>
         <p:nvSpPr>
@@ -5790,6 +5946,10 @@
             <a:prstDash val="solid"/>
           </a:ln>
         </p:spPr>
+        <p:txBody xmlns:a="http://schemas.openxmlformats.org/drawingml/2006/main">
+          <a:bodyPr wrap="square"/>
+          <a:p/>
+        </p:txBody>
       </p:sp>
       <p:sp>
         <p:nvSpPr>
@@ -5956,7 +6116,7 @@
           </a:ln>
         </p:spPr>
         <p:txBody>
-          <a:bodyPr xmlns:a="http://schemas.openxmlformats.org/drawingml/2006/main" lIns="0" tIns="0" rIns="0" bIns="0" anchor="t"/>
+          <a:bodyPr xmlns:a="http://schemas.openxmlformats.org/drawingml/2006/main" lIns="0" tIns="0" rIns="0" bIns="0" anchor="t" wrap="square"/>
           <a:lstStyle xmlns:a="http://schemas.openxmlformats.org/drawingml/2006/main"/>
           <a:p xmlns:a="http://schemas.openxmlformats.org/drawingml/2006/main">
             <a:pPr algn="l">
@@ -6015,6 +6175,10 @@
             <a:prstDash val="solid"/>
           </a:ln>
         </p:spPr>
+        <p:txBody xmlns:a="http://schemas.openxmlformats.org/drawingml/2006/main">
+          <a:bodyPr wrap="square"/>
+          <a:p/>
+        </p:txBody>
       </p:sp>
       <p:sp>
         <p:nvSpPr>
@@ -6048,6 +6212,10 @@
             <a:prstDash val="solid"/>
           </a:ln>
         </p:spPr>
+        <p:txBody xmlns:a="http://schemas.openxmlformats.org/drawingml/2006/main">
+          <a:bodyPr wrap="square"/>
+          <a:p/>
+        </p:txBody>
       </p:sp>
       <p:sp>
         <p:nvSpPr>
@@ -6214,7 +6382,7 @@
           </a:ln>
         </p:spPr>
         <p:txBody>
-          <a:bodyPr xmlns:a="http://schemas.openxmlformats.org/drawingml/2006/main" lIns="0" tIns="0" rIns="0" bIns="0" anchor="t"/>
+          <a:bodyPr xmlns:a="http://schemas.openxmlformats.org/drawingml/2006/main" lIns="0" tIns="0" rIns="0" bIns="0" anchor="t" wrap="square"/>
           <a:lstStyle xmlns:a="http://schemas.openxmlformats.org/drawingml/2006/main"/>
           <a:p xmlns:a="http://schemas.openxmlformats.org/drawingml/2006/main">
             <a:pPr algn="l">
@@ -6529,6 +6697,10 @@
             <a:prstDash val="solid"/>
           </a:ln>
         </p:spPr>
+        <p:txBody xmlns:a="http://schemas.openxmlformats.org/drawingml/2006/main">
+          <a:bodyPr/>
+          <a:p/>
+        </p:txBody>
       </p:sp>
     </p:spTree>
     <p:extLst>
@@ -6584,6 +6756,10 @@
             <a:prstDash val="solid"/>
           </a:ln>
         </p:spPr>
+        <p:txBody xmlns:a="http://schemas.openxmlformats.org/drawingml/2006/main">
+          <a:bodyPr wrap="square"/>
+          <a:p/>
+        </p:txBody>
       </p:sp>
       <p:sp>
         <p:nvSpPr>
@@ -6619,6 +6795,10 @@
             <a:prstDash val="solid"/>
           </a:ln>
         </p:spPr>
+        <p:txBody xmlns:a="http://schemas.openxmlformats.org/drawingml/2006/main">
+          <a:bodyPr wrap="square"/>
+          <a:p/>
+        </p:txBody>
       </p:sp>
       <p:sp>
         <p:nvSpPr>
@@ -6654,6 +6834,10 @@
             <a:prstDash val="solid"/>
           </a:ln>
         </p:spPr>
+        <p:txBody xmlns:a="http://schemas.openxmlformats.org/drawingml/2006/main">
+          <a:bodyPr wrap="square"/>
+          <a:p/>
+        </p:txBody>
       </p:sp>
       <p:sp>
         <p:nvSpPr>
@@ -6689,6 +6873,10 @@
             <a:prstDash val="solid"/>
           </a:ln>
         </p:spPr>
+        <p:txBody xmlns:a="http://schemas.openxmlformats.org/drawingml/2006/main">
+          <a:bodyPr wrap="square"/>
+          <a:p/>
+        </p:txBody>
       </p:sp>
       <p:sp>
         <p:nvSpPr>
@@ -6724,6 +6912,10 @@
             <a:prstDash val="solid"/>
           </a:ln>
         </p:spPr>
+        <p:txBody xmlns:a="http://schemas.openxmlformats.org/drawingml/2006/main">
+          <a:bodyPr wrap="square"/>
+          <a:p/>
+        </p:txBody>
       </p:sp>
       <p:sp>
         <p:nvSpPr>
@@ -6826,7 +7018,7 @@
           </a:ln>
         </p:spPr>
         <p:txBody>
-          <a:bodyPr xmlns:a="http://schemas.openxmlformats.org/drawingml/2006/main" lIns="0" tIns="0" rIns="0" bIns="0" anchor="t"/>
+          <a:bodyPr xmlns:a="http://schemas.openxmlformats.org/drawingml/2006/main" lIns="0" tIns="0" rIns="0" bIns="0" anchor="t" wrap="square"/>
           <a:lstStyle xmlns:a="http://schemas.openxmlformats.org/drawingml/2006/main"/>
           <a:p xmlns:a="http://schemas.openxmlformats.org/drawingml/2006/main">
             <a:pPr algn="l">
@@ -6949,6 +7141,10 @@
             <a:prstDash val="solid"/>
           </a:ln>
         </p:spPr>
+        <p:txBody xmlns:a="http://schemas.openxmlformats.org/drawingml/2006/main">
+          <a:bodyPr wrap="square"/>
+          <a:p/>
+        </p:txBody>
       </p:sp>
       <p:sp>
         <p:nvSpPr>
@@ -6982,6 +7178,10 @@
             <a:prstDash val="solid"/>
           </a:ln>
         </p:spPr>
+        <p:txBody xmlns:a="http://schemas.openxmlformats.org/drawingml/2006/main">
+          <a:bodyPr wrap="square"/>
+          <a:p/>
+        </p:txBody>
       </p:sp>
       <p:sp>
         <p:nvSpPr>
@@ -7084,7 +7284,7 @@
           </a:ln>
         </p:spPr>
         <p:txBody>
-          <a:bodyPr xmlns:a="http://schemas.openxmlformats.org/drawingml/2006/main" lIns="0" tIns="0" rIns="0" bIns="0" anchor="t"/>
+          <a:bodyPr xmlns:a="http://schemas.openxmlformats.org/drawingml/2006/main" lIns="0" tIns="0" rIns="0" bIns="0" anchor="t" wrap="square"/>
           <a:lstStyle xmlns:a="http://schemas.openxmlformats.org/drawingml/2006/main"/>
           <a:p xmlns:a="http://schemas.openxmlformats.org/drawingml/2006/main">
             <a:pPr algn="l">
@@ -7098,7 +7298,7 @@
               </a:defRPr>
             </a:pPr>
             <a:r>
-              <a:rPr sz="900" b="0">
+              <a:rPr sz="1100" b="0">
                 <a:solidFill>
                   <a:srgbClr val="D8E3EC"/>
                 </a:solidFill>
@@ -7143,6 +7343,10 @@
             <a:prstDash val="solid"/>
           </a:ln>
         </p:spPr>
+        <p:txBody xmlns:a="http://schemas.openxmlformats.org/drawingml/2006/main">
+          <a:bodyPr/>
+          <a:p/>
+        </p:txBody>
       </p:sp>
       <p:sp>
         <p:nvSpPr>
@@ -7176,6 +7380,10 @@
             <a:prstDash val="solid"/>
           </a:ln>
         </p:spPr>
+        <p:txBody xmlns:a="http://schemas.openxmlformats.org/drawingml/2006/main">
+          <a:bodyPr/>
+          <a:p/>
+        </p:txBody>
       </p:sp>
       <p:sp>
         <p:nvSpPr>
@@ -7209,6 +7417,10 @@
             <a:prstDash val="solid"/>
           </a:ln>
         </p:spPr>
+        <p:txBody xmlns:a="http://schemas.openxmlformats.org/drawingml/2006/main">
+          <a:bodyPr wrap="square"/>
+          <a:p/>
+        </p:txBody>
       </p:sp>
       <p:sp>
         <p:nvSpPr>
@@ -7242,6 +7454,10 @@
             <a:prstDash val="solid"/>
           </a:ln>
         </p:spPr>
+        <p:txBody xmlns:a="http://schemas.openxmlformats.org/drawingml/2006/main">
+          <a:bodyPr wrap="square"/>
+          <a:p/>
+        </p:txBody>
       </p:sp>
       <p:sp>
         <p:nvSpPr>
@@ -7344,7 +7560,7 @@
           </a:ln>
         </p:spPr>
         <p:txBody>
-          <a:bodyPr xmlns:a="http://schemas.openxmlformats.org/drawingml/2006/main" lIns="0" tIns="0" rIns="0" bIns="0" anchor="t"/>
+          <a:bodyPr xmlns:a="http://schemas.openxmlformats.org/drawingml/2006/main" lIns="0" tIns="0" rIns="0" bIns="0" anchor="t" wrap="square"/>
           <a:lstStyle xmlns:a="http://schemas.openxmlformats.org/drawingml/2006/main"/>
           <a:p xmlns:a="http://schemas.openxmlformats.org/drawingml/2006/main">
             <a:pPr algn="l">
@@ -7358,7 +7574,7 @@
               </a:defRPr>
             </a:pPr>
             <a:r>
-              <a:rPr sz="900" b="0">
+              <a:rPr sz="1100" b="0">
                 <a:solidFill>
                   <a:srgbClr val="D8E3EC"/>
                 </a:solidFill>
@@ -7403,6 +7619,10 @@
             <a:prstDash val="solid"/>
           </a:ln>
         </p:spPr>
+        <p:txBody xmlns:a="http://schemas.openxmlformats.org/drawingml/2006/main">
+          <a:bodyPr/>
+          <a:p/>
+        </p:txBody>
       </p:sp>
       <p:sp>
         <p:nvSpPr>
@@ -7436,6 +7656,10 @@
             <a:prstDash val="solid"/>
           </a:ln>
         </p:spPr>
+        <p:txBody xmlns:a="http://schemas.openxmlformats.org/drawingml/2006/main">
+          <a:bodyPr/>
+          <a:p/>
+        </p:txBody>
       </p:sp>
       <p:sp>
         <p:nvSpPr>
@@ -7469,6 +7693,10 @@
             <a:prstDash val="solid"/>
           </a:ln>
         </p:spPr>
+        <p:txBody xmlns:a="http://schemas.openxmlformats.org/drawingml/2006/main">
+          <a:bodyPr wrap="square"/>
+          <a:p/>
+        </p:txBody>
       </p:sp>
       <p:sp>
         <p:nvSpPr>
@@ -7502,6 +7730,10 @@
             <a:prstDash val="solid"/>
           </a:ln>
         </p:spPr>
+        <p:txBody xmlns:a="http://schemas.openxmlformats.org/drawingml/2006/main">
+          <a:bodyPr wrap="square"/>
+          <a:p/>
+        </p:txBody>
       </p:sp>
       <p:sp>
         <p:nvSpPr>
@@ -7604,7 +7836,7 @@
           </a:ln>
         </p:spPr>
         <p:txBody>
-          <a:bodyPr xmlns:a="http://schemas.openxmlformats.org/drawingml/2006/main" lIns="0" tIns="0" rIns="0" bIns="0" anchor="t"/>
+          <a:bodyPr xmlns:a="http://schemas.openxmlformats.org/drawingml/2006/main" lIns="0" tIns="0" rIns="0" bIns="0" anchor="t" wrap="square"/>
           <a:lstStyle xmlns:a="http://schemas.openxmlformats.org/drawingml/2006/main"/>
           <a:p xmlns:a="http://schemas.openxmlformats.org/drawingml/2006/main">
             <a:pPr algn="l">
@@ -7618,7 +7850,7 @@
               </a:defRPr>
             </a:pPr>
             <a:r>
-              <a:rPr sz="900" b="0">
+              <a:rPr sz="1100" b="0">
                 <a:solidFill>
                   <a:srgbClr val="D8E3EC"/>
                 </a:solidFill>
@@ -7663,6 +7895,10 @@
             <a:prstDash val="solid"/>
           </a:ln>
         </p:spPr>
+        <p:txBody xmlns:a="http://schemas.openxmlformats.org/drawingml/2006/main">
+          <a:bodyPr/>
+          <a:p/>
+        </p:txBody>
       </p:sp>
       <p:sp>
         <p:nvSpPr>
@@ -7696,6 +7932,10 @@
             <a:prstDash val="solid"/>
           </a:ln>
         </p:spPr>
+        <p:txBody xmlns:a="http://schemas.openxmlformats.org/drawingml/2006/main">
+          <a:bodyPr/>
+          <a:p/>
+        </p:txBody>
       </p:sp>
       <p:sp>
         <p:nvSpPr>
@@ -7729,6 +7969,10 @@
             <a:prstDash val="solid"/>
           </a:ln>
         </p:spPr>
+        <p:txBody xmlns:a="http://schemas.openxmlformats.org/drawingml/2006/main">
+          <a:bodyPr wrap="square"/>
+          <a:p/>
+        </p:txBody>
       </p:sp>
       <p:sp>
         <p:nvSpPr>
@@ -7762,6 +8006,10 @@
             <a:prstDash val="solid"/>
           </a:ln>
         </p:spPr>
+        <p:txBody xmlns:a="http://schemas.openxmlformats.org/drawingml/2006/main">
+          <a:bodyPr wrap="square"/>
+          <a:p/>
+        </p:txBody>
       </p:sp>
       <p:sp>
         <p:nvSpPr>
@@ -7864,7 +8112,7 @@
           </a:ln>
         </p:spPr>
         <p:txBody>
-          <a:bodyPr xmlns:a="http://schemas.openxmlformats.org/drawingml/2006/main" lIns="0" tIns="0" rIns="0" bIns="0" anchor="t"/>
+          <a:bodyPr xmlns:a="http://schemas.openxmlformats.org/drawingml/2006/main" lIns="0" tIns="0" rIns="0" bIns="0" anchor="t" wrap="square"/>
           <a:lstStyle xmlns:a="http://schemas.openxmlformats.org/drawingml/2006/main"/>
           <a:p xmlns:a="http://schemas.openxmlformats.org/drawingml/2006/main">
             <a:pPr algn="l">
@@ -7878,7 +8126,7 @@
               </a:defRPr>
             </a:pPr>
             <a:r>
-              <a:rPr sz="900" b="0">
+              <a:rPr sz="1100" b="0">
                 <a:solidFill>
                   <a:srgbClr val="D8E3EC"/>
                 </a:solidFill>
@@ -7923,6 +8171,10 @@
             <a:prstDash val="solid"/>
           </a:ln>
         </p:spPr>
+        <p:txBody xmlns:a="http://schemas.openxmlformats.org/drawingml/2006/main">
+          <a:bodyPr/>
+          <a:p/>
+        </p:txBody>
       </p:sp>
       <p:sp>
         <p:nvSpPr>
@@ -7956,6 +8208,10 @@
             <a:prstDash val="solid"/>
           </a:ln>
         </p:spPr>
+        <p:txBody xmlns:a="http://schemas.openxmlformats.org/drawingml/2006/main">
+          <a:bodyPr/>
+          <a:p/>
+        </p:txBody>
       </p:sp>
       <p:sp>
         <p:nvSpPr>
@@ -7989,6 +8245,10 @@
             <a:prstDash val="solid"/>
           </a:ln>
         </p:spPr>
+        <p:txBody xmlns:a="http://schemas.openxmlformats.org/drawingml/2006/main">
+          <a:bodyPr wrap="square"/>
+          <a:p/>
+        </p:txBody>
       </p:sp>
       <p:sp>
         <p:nvSpPr>
@@ -8022,6 +8282,10 @@
             <a:prstDash val="solid"/>
           </a:ln>
         </p:spPr>
+        <p:txBody xmlns:a="http://schemas.openxmlformats.org/drawingml/2006/main">
+          <a:bodyPr wrap="square"/>
+          <a:p/>
+        </p:txBody>
       </p:sp>
       <p:sp>
         <p:nvSpPr>
@@ -8124,7 +8388,7 @@
           </a:ln>
         </p:spPr>
         <p:txBody>
-          <a:bodyPr xmlns:a="http://schemas.openxmlformats.org/drawingml/2006/main" lIns="0" tIns="0" rIns="0" bIns="0" anchor="t"/>
+          <a:bodyPr xmlns:a="http://schemas.openxmlformats.org/drawingml/2006/main" lIns="0" tIns="0" rIns="0" bIns="0" anchor="t" wrap="square"/>
           <a:lstStyle xmlns:a="http://schemas.openxmlformats.org/drawingml/2006/main"/>
           <a:p xmlns:a="http://schemas.openxmlformats.org/drawingml/2006/main">
             <a:pPr algn="l">
@@ -8138,7 +8402,7 @@
               </a:defRPr>
             </a:pPr>
             <a:r>
-              <a:rPr sz="900" b="0">
+              <a:rPr sz="1100" b="0">
                 <a:solidFill>
                   <a:srgbClr val="D8E3EC"/>
                 </a:solidFill>
@@ -8375,6 +8639,10 @@
             <a:prstDash val="solid"/>
           </a:ln>
         </p:spPr>
+        <p:txBody xmlns:a="http://schemas.openxmlformats.org/drawingml/2006/main">
+          <a:bodyPr/>
+          <a:p/>
+        </p:txBody>
       </p:sp>
     </p:spTree>
     <p:extLst>
@@ -8430,6 +8698,10 @@
             <a:prstDash val="solid"/>
           </a:ln>
         </p:spPr>
+        <p:txBody xmlns:a="http://schemas.openxmlformats.org/drawingml/2006/main">
+          <a:bodyPr wrap="square"/>
+          <a:p/>
+        </p:txBody>
       </p:sp>
       <p:sp>
         <p:nvSpPr>
@@ -8465,6 +8737,10 @@
             <a:prstDash val="solid"/>
           </a:ln>
         </p:spPr>
+        <p:txBody xmlns:a="http://schemas.openxmlformats.org/drawingml/2006/main">
+          <a:bodyPr wrap="square"/>
+          <a:p/>
+        </p:txBody>
       </p:sp>
       <p:sp>
         <p:nvSpPr>
@@ -8500,6 +8776,10 @@
             <a:prstDash val="solid"/>
           </a:ln>
         </p:spPr>
+        <p:txBody xmlns:a="http://schemas.openxmlformats.org/drawingml/2006/main">
+          <a:bodyPr wrap="square"/>
+          <a:p/>
+        </p:txBody>
       </p:sp>
       <p:sp>
         <p:nvSpPr>
@@ -8535,6 +8815,10 @@
             <a:prstDash val="solid"/>
           </a:ln>
         </p:spPr>
+        <p:txBody xmlns:a="http://schemas.openxmlformats.org/drawingml/2006/main">
+          <a:bodyPr wrap="square"/>
+          <a:p/>
+        </p:txBody>
       </p:sp>
       <p:sp>
         <p:nvSpPr>
@@ -8570,6 +8854,10 @@
             <a:prstDash val="solid"/>
           </a:ln>
         </p:spPr>
+        <p:txBody xmlns:a="http://schemas.openxmlformats.org/drawingml/2006/main">
+          <a:bodyPr wrap="square"/>
+          <a:p/>
+        </p:txBody>
       </p:sp>
       <p:sp>
         <p:nvSpPr>
@@ -8672,7 +8960,7 @@
           </a:ln>
         </p:spPr>
         <p:txBody>
-          <a:bodyPr xmlns:a="http://schemas.openxmlformats.org/drawingml/2006/main" lIns="0" tIns="0" rIns="0" bIns="0" anchor="t"/>
+          <a:bodyPr xmlns:a="http://schemas.openxmlformats.org/drawingml/2006/main" lIns="0" tIns="0" rIns="0" bIns="0" anchor="t" wrap="square"/>
           <a:lstStyle xmlns:a="http://schemas.openxmlformats.org/drawingml/2006/main"/>
           <a:p xmlns:a="http://schemas.openxmlformats.org/drawingml/2006/main">
             <a:pPr algn="l">
@@ -8795,6 +9083,10 @@
             <a:prstDash val="solid"/>
           </a:ln>
         </p:spPr>
+        <p:txBody xmlns:a="http://schemas.openxmlformats.org/drawingml/2006/main">
+          <a:bodyPr wrap="square"/>
+          <a:p/>
+        </p:txBody>
       </p:sp>
       <p:sp>
         <p:nvSpPr>
@@ -8828,6 +9120,10 @@
             <a:prstDash val="solid"/>
           </a:ln>
         </p:spPr>
+        <p:txBody xmlns:a="http://schemas.openxmlformats.org/drawingml/2006/main">
+          <a:bodyPr wrap="square"/>
+          <a:p/>
+        </p:txBody>
       </p:sp>
       <p:sp>
         <p:nvSpPr>
@@ -8989,6 +9285,10 @@
             <a:prstDash val="solid"/>
           </a:ln>
         </p:spPr>
+        <p:txBody xmlns:a="http://schemas.openxmlformats.org/drawingml/2006/main">
+          <a:bodyPr wrap="square"/>
+          <a:p/>
+        </p:txBody>
       </p:sp>
       <p:sp>
         <p:nvSpPr>
@@ -9022,6 +9322,10 @@
             <a:prstDash val="solid"/>
           </a:ln>
         </p:spPr>
+        <p:txBody xmlns:a="http://schemas.openxmlformats.org/drawingml/2006/main">
+          <a:bodyPr wrap="square"/>
+          <a:p/>
+        </p:txBody>
       </p:sp>
       <p:sp>
         <p:nvSpPr>
@@ -9183,6 +9487,10 @@
             <a:prstDash val="solid"/>
           </a:ln>
         </p:spPr>
+        <p:txBody xmlns:a="http://schemas.openxmlformats.org/drawingml/2006/main">
+          <a:bodyPr wrap="square"/>
+          <a:p/>
+        </p:txBody>
       </p:sp>
       <p:sp>
         <p:nvSpPr>
@@ -9216,6 +9524,10 @@
             <a:prstDash val="solid"/>
           </a:ln>
         </p:spPr>
+        <p:txBody xmlns:a="http://schemas.openxmlformats.org/drawingml/2006/main">
+          <a:bodyPr wrap="square"/>
+          <a:p/>
+        </p:txBody>
       </p:sp>
       <p:sp>
         <p:nvSpPr>
@@ -9377,6 +9689,10 @@
             <a:prstDash val="solid"/>
           </a:ln>
         </p:spPr>
+        <p:txBody xmlns:a="http://schemas.openxmlformats.org/drawingml/2006/main">
+          <a:bodyPr wrap="square"/>
+          <a:p/>
+        </p:txBody>
       </p:sp>
       <p:sp>
         <p:nvSpPr>
@@ -9410,6 +9726,10 @@
             <a:prstDash val="solid"/>
           </a:ln>
         </p:spPr>
+        <p:txBody xmlns:a="http://schemas.openxmlformats.org/drawingml/2006/main">
+          <a:bodyPr wrap="square"/>
+          <a:p/>
+        </p:txBody>
       </p:sp>
       <p:sp>
         <p:nvSpPr>
@@ -9571,6 +9891,10 @@
             <a:prstDash val="solid"/>
           </a:ln>
         </p:spPr>
+        <p:txBody xmlns:a="http://schemas.openxmlformats.org/drawingml/2006/main">
+          <a:bodyPr wrap="square"/>
+          <a:p/>
+        </p:txBody>
       </p:sp>
       <p:sp>
         <p:nvSpPr>
@@ -9604,6 +9928,10 @@
             <a:prstDash val="solid"/>
           </a:ln>
         </p:spPr>
+        <p:txBody xmlns:a="http://schemas.openxmlformats.org/drawingml/2006/main">
+          <a:bodyPr wrap="square"/>
+          <a:p/>
+        </p:txBody>
       </p:sp>
       <p:sp>
         <p:nvSpPr>
@@ -9765,6 +10093,10 @@
             <a:prstDash val="solid"/>
           </a:ln>
         </p:spPr>
+        <p:txBody xmlns:a="http://schemas.openxmlformats.org/drawingml/2006/main">
+          <a:bodyPr wrap="square"/>
+          <a:p/>
+        </p:txBody>
       </p:sp>
       <p:sp>
         <p:nvSpPr>
@@ -9798,6 +10130,10 @@
             <a:prstDash val="solid"/>
           </a:ln>
         </p:spPr>
+        <p:txBody xmlns:a="http://schemas.openxmlformats.org/drawingml/2006/main">
+          <a:bodyPr wrap="square"/>
+          <a:p/>
+        </p:txBody>
       </p:sp>
       <p:sp>
         <p:nvSpPr>
@@ -9959,6 +10295,10 @@
             <a:prstDash val="solid"/>
           </a:ln>
         </p:spPr>
+        <p:txBody xmlns:a="http://schemas.openxmlformats.org/drawingml/2006/main">
+          <a:bodyPr/>
+          <a:p/>
+        </p:txBody>
       </p:sp>
       <p:sp>
         <p:nvSpPr>
@@ -9992,6 +10332,10 @@
             <a:prstDash val="solid"/>
           </a:ln>
         </p:spPr>
+        <p:txBody xmlns:a="http://schemas.openxmlformats.org/drawingml/2006/main">
+          <a:bodyPr/>
+          <a:p/>
+        </p:txBody>
       </p:sp>
       <p:sp>
         <p:nvSpPr>
@@ -10025,6 +10369,10 @@
             <a:prstDash val="solid"/>
           </a:ln>
         </p:spPr>
+        <p:txBody xmlns:a="http://schemas.openxmlformats.org/drawingml/2006/main">
+          <a:bodyPr/>
+          <a:p/>
+        </p:txBody>
       </p:sp>
       <p:sp>
         <p:nvSpPr>
@@ -10058,6 +10406,10 @@
             <a:prstDash val="solid"/>
           </a:ln>
         </p:spPr>
+        <p:txBody xmlns:a="http://schemas.openxmlformats.org/drawingml/2006/main">
+          <a:bodyPr/>
+          <a:p/>
+        </p:txBody>
       </p:sp>
       <p:sp>
         <p:nvSpPr>
@@ -10091,6 +10443,10 @@
             <a:prstDash val="solid"/>
           </a:ln>
         </p:spPr>
+        <p:txBody xmlns:a="http://schemas.openxmlformats.org/drawingml/2006/main">
+          <a:bodyPr/>
+          <a:p/>
+        </p:txBody>
       </p:sp>
       <p:sp>
         <p:nvSpPr>
@@ -10124,6 +10480,10 @@
             <a:prstDash val="solid"/>
           </a:ln>
         </p:spPr>
+        <p:txBody xmlns:a="http://schemas.openxmlformats.org/drawingml/2006/main">
+          <a:bodyPr/>
+          <a:p/>
+        </p:txBody>
       </p:sp>
       <p:sp>
         <p:nvSpPr>
@@ -10157,6 +10517,10 @@
             <a:prstDash val="solid"/>
           </a:ln>
         </p:spPr>
+        <p:txBody xmlns:a="http://schemas.openxmlformats.org/drawingml/2006/main">
+          <a:bodyPr/>
+          <a:p/>
+        </p:txBody>
       </p:sp>
       <p:sp>
         <p:nvSpPr>
@@ -10190,6 +10554,10 @@
             <a:prstDash val="solid"/>
           </a:ln>
         </p:spPr>
+        <p:txBody xmlns:a="http://schemas.openxmlformats.org/drawingml/2006/main">
+          <a:bodyPr/>
+          <a:p/>
+        </p:txBody>
       </p:sp>
       <p:sp>
         <p:nvSpPr>
@@ -10223,6 +10591,10 @@
             <a:prstDash val="solid"/>
           </a:ln>
         </p:spPr>
+        <p:txBody xmlns:a="http://schemas.openxmlformats.org/drawingml/2006/main">
+          <a:bodyPr/>
+          <a:p/>
+        </p:txBody>
       </p:sp>
       <p:sp>
         <p:nvSpPr>
@@ -10256,6 +10628,10 @@
             <a:prstDash val="solid"/>
           </a:ln>
         </p:spPr>
+        <p:txBody xmlns:a="http://schemas.openxmlformats.org/drawingml/2006/main">
+          <a:bodyPr/>
+          <a:p/>
+        </p:txBody>
       </p:sp>
       <p:sp>
         <p:nvSpPr>
@@ -10481,6 +10857,10 @@
             <a:prstDash val="solid"/>
           </a:ln>
         </p:spPr>
+        <p:txBody xmlns:a="http://schemas.openxmlformats.org/drawingml/2006/main">
+          <a:bodyPr/>
+          <a:p/>
+        </p:txBody>
       </p:sp>
     </p:spTree>
     <p:extLst>
@@ -10536,6 +10916,10 @@
             <a:prstDash val="solid"/>
           </a:ln>
         </p:spPr>
+        <p:txBody xmlns:a="http://schemas.openxmlformats.org/drawingml/2006/main">
+          <a:bodyPr wrap="square"/>
+          <a:p/>
+        </p:txBody>
       </p:sp>
       <p:sp>
         <p:nvSpPr>
@@ -10571,6 +10955,10 @@
             <a:prstDash val="solid"/>
           </a:ln>
         </p:spPr>
+        <p:txBody xmlns:a="http://schemas.openxmlformats.org/drawingml/2006/main">
+          <a:bodyPr wrap="square"/>
+          <a:p/>
+        </p:txBody>
       </p:sp>
       <p:sp>
         <p:nvSpPr>
@@ -10606,6 +10994,10 @@
             <a:prstDash val="solid"/>
           </a:ln>
         </p:spPr>
+        <p:txBody xmlns:a="http://schemas.openxmlformats.org/drawingml/2006/main">
+          <a:bodyPr wrap="square"/>
+          <a:p/>
+        </p:txBody>
       </p:sp>
       <p:sp>
         <p:nvSpPr>
@@ -10641,6 +11033,10 @@
             <a:prstDash val="solid"/>
           </a:ln>
         </p:spPr>
+        <p:txBody xmlns:a="http://schemas.openxmlformats.org/drawingml/2006/main">
+          <a:bodyPr wrap="square"/>
+          <a:p/>
+        </p:txBody>
       </p:sp>
       <p:sp>
         <p:nvSpPr>
@@ -10676,6 +11072,10 @@
             <a:prstDash val="solid"/>
           </a:ln>
         </p:spPr>
+        <p:txBody xmlns:a="http://schemas.openxmlformats.org/drawingml/2006/main">
+          <a:bodyPr wrap="square"/>
+          <a:p/>
+        </p:txBody>
       </p:sp>
       <p:sp>
         <p:nvSpPr>
@@ -10778,7 +11178,7 @@
           </a:ln>
         </p:spPr>
         <p:txBody>
-          <a:bodyPr xmlns:a="http://schemas.openxmlformats.org/drawingml/2006/main" lIns="0" tIns="0" rIns="0" bIns="0" anchor="t"/>
+          <a:bodyPr xmlns:a="http://schemas.openxmlformats.org/drawingml/2006/main" lIns="0" tIns="0" rIns="0" bIns="0" anchor="t" wrap="square"/>
           <a:lstStyle xmlns:a="http://schemas.openxmlformats.org/drawingml/2006/main"/>
           <a:p xmlns:a="http://schemas.openxmlformats.org/drawingml/2006/main">
             <a:pPr algn="l">
@@ -10901,6 +11301,10 @@
             <a:prstDash val="solid"/>
           </a:ln>
         </p:spPr>
+        <p:txBody xmlns:a="http://schemas.openxmlformats.org/drawingml/2006/main">
+          <a:bodyPr/>
+          <a:p/>
+        </p:txBody>
       </p:sp>
       <p:sp>
         <p:nvSpPr>
@@ -10934,6 +11338,10 @@
             <a:prstDash val="solid"/>
           </a:ln>
         </p:spPr>
+        <p:txBody xmlns:a="http://schemas.openxmlformats.org/drawingml/2006/main">
+          <a:bodyPr/>
+          <a:p/>
+        </p:txBody>
       </p:sp>
       <p:sp>
         <p:nvSpPr>
@@ -11159,6 +11567,10 @@
             <a:prstDash val="solid"/>
           </a:ln>
         </p:spPr>
+        <p:txBody xmlns:a="http://schemas.openxmlformats.org/drawingml/2006/main">
+          <a:bodyPr/>
+          <a:p/>
+        </p:txBody>
       </p:sp>
       <p:sp>
         <p:nvSpPr>
@@ -11192,6 +11604,10 @@
             <a:prstDash val="solid"/>
           </a:ln>
         </p:spPr>
+        <p:txBody xmlns:a="http://schemas.openxmlformats.org/drawingml/2006/main">
+          <a:bodyPr/>
+          <a:p/>
+        </p:txBody>
       </p:sp>
       <p:sp>
         <p:nvSpPr>
@@ -11417,6 +11833,10 @@
             <a:prstDash val="solid"/>
           </a:ln>
         </p:spPr>
+        <p:txBody xmlns:a="http://schemas.openxmlformats.org/drawingml/2006/main">
+          <a:bodyPr/>
+          <a:p/>
+        </p:txBody>
       </p:sp>
       <p:sp>
         <p:nvSpPr>
@@ -11450,6 +11870,10 @@
             <a:prstDash val="solid"/>
           </a:ln>
         </p:spPr>
+        <p:txBody xmlns:a="http://schemas.openxmlformats.org/drawingml/2006/main">
+          <a:bodyPr/>
+          <a:p/>
+        </p:txBody>
       </p:sp>
       <p:sp>
         <p:nvSpPr>
@@ -11675,6 +12099,10 @@
             <a:prstDash val="solid"/>
           </a:ln>
         </p:spPr>
+        <p:txBody xmlns:a="http://schemas.openxmlformats.org/drawingml/2006/main">
+          <a:bodyPr/>
+          <a:p/>
+        </p:txBody>
       </p:sp>
       <p:sp>
         <p:nvSpPr>
@@ -11708,6 +12136,10 @@
             <a:prstDash val="solid"/>
           </a:ln>
         </p:spPr>
+        <p:txBody xmlns:a="http://schemas.openxmlformats.org/drawingml/2006/main">
+          <a:bodyPr/>
+          <a:p/>
+        </p:txBody>
       </p:sp>
       <p:sp>
         <p:nvSpPr>
@@ -11933,6 +12365,10 @@
             <a:prstDash val="solid"/>
           </a:ln>
         </p:spPr>
+        <p:txBody xmlns:a="http://schemas.openxmlformats.org/drawingml/2006/main">
+          <a:bodyPr/>
+          <a:p/>
+        </p:txBody>
       </p:sp>
       <p:sp>
         <p:nvSpPr>
@@ -11966,6 +12402,10 @@
             <a:prstDash val="solid"/>
           </a:ln>
         </p:spPr>
+        <p:txBody xmlns:a="http://schemas.openxmlformats.org/drawingml/2006/main">
+          <a:bodyPr/>
+          <a:p/>
+        </p:txBody>
       </p:sp>
       <p:sp>
         <p:nvSpPr>
@@ -12383,6 +12823,10 @@
             <a:prstDash val="solid"/>
           </a:ln>
         </p:spPr>
+        <p:txBody xmlns:a="http://schemas.openxmlformats.org/drawingml/2006/main">
+          <a:bodyPr/>
+          <a:p/>
+        </p:txBody>
       </p:sp>
     </p:spTree>
     <p:extLst>
@@ -12438,6 +12882,10 @@
             <a:prstDash val="solid"/>
           </a:ln>
         </p:spPr>
+        <p:txBody xmlns:a="http://schemas.openxmlformats.org/drawingml/2006/main">
+          <a:bodyPr wrap="square"/>
+          <a:p/>
+        </p:txBody>
       </p:sp>
       <p:sp>
         <p:nvSpPr>
@@ -12473,6 +12921,10 @@
             <a:prstDash val="solid"/>
           </a:ln>
         </p:spPr>
+        <p:txBody xmlns:a="http://schemas.openxmlformats.org/drawingml/2006/main">
+          <a:bodyPr wrap="square"/>
+          <a:p/>
+        </p:txBody>
       </p:sp>
       <p:sp>
         <p:nvSpPr>
@@ -12508,6 +12960,10 @@
             <a:prstDash val="solid"/>
           </a:ln>
         </p:spPr>
+        <p:txBody xmlns:a="http://schemas.openxmlformats.org/drawingml/2006/main">
+          <a:bodyPr wrap="square"/>
+          <a:p/>
+        </p:txBody>
       </p:sp>
       <p:sp>
         <p:nvSpPr>
@@ -12543,6 +12999,10 @@
             <a:prstDash val="solid"/>
           </a:ln>
         </p:spPr>
+        <p:txBody xmlns:a="http://schemas.openxmlformats.org/drawingml/2006/main">
+          <a:bodyPr wrap="square"/>
+          <a:p/>
+        </p:txBody>
       </p:sp>
       <p:sp>
         <p:nvSpPr>
@@ -12578,6 +13038,10 @@
             <a:prstDash val="solid"/>
           </a:ln>
         </p:spPr>
+        <p:txBody xmlns:a="http://schemas.openxmlformats.org/drawingml/2006/main">
+          <a:bodyPr wrap="square"/>
+          <a:p/>
+        </p:txBody>
       </p:sp>
       <p:sp>
         <p:nvSpPr>
@@ -12680,7 +13144,7 @@
           </a:ln>
         </p:spPr>
         <p:txBody>
-          <a:bodyPr xmlns:a="http://schemas.openxmlformats.org/drawingml/2006/main" lIns="0" tIns="0" rIns="0" bIns="0" anchor="t"/>
+          <a:bodyPr xmlns:a="http://schemas.openxmlformats.org/drawingml/2006/main" lIns="0" tIns="0" rIns="0" bIns="0" anchor="t" wrap="square"/>
           <a:lstStyle xmlns:a="http://schemas.openxmlformats.org/drawingml/2006/main"/>
           <a:p xmlns:a="http://schemas.openxmlformats.org/drawingml/2006/main">
             <a:pPr algn="l">
@@ -12803,6 +13267,10 @@
             <a:prstDash val="solid"/>
           </a:ln>
         </p:spPr>
+        <p:txBody xmlns:a="http://schemas.openxmlformats.org/drawingml/2006/main">
+          <a:bodyPr wrap="square"/>
+          <a:p/>
+        </p:txBody>
       </p:sp>
       <p:sp>
         <p:nvSpPr>
@@ -12836,6 +13304,10 @@
             <a:prstDash val="solid"/>
           </a:ln>
         </p:spPr>
+        <p:txBody xmlns:a="http://schemas.openxmlformats.org/drawingml/2006/main">
+          <a:bodyPr wrap="square"/>
+          <a:p/>
+        </p:txBody>
       </p:sp>
       <p:sp>
         <p:nvSpPr>
@@ -13061,6 +13533,10 @@
             <a:prstDash val="solid"/>
           </a:ln>
         </p:spPr>
+        <p:txBody xmlns:a="http://schemas.openxmlformats.org/drawingml/2006/main">
+          <a:bodyPr wrap="square"/>
+          <a:p/>
+        </p:txBody>
       </p:sp>
       <p:sp>
         <p:nvSpPr>
@@ -13094,6 +13570,10 @@
             <a:prstDash val="solid"/>
           </a:ln>
         </p:spPr>
+        <p:txBody xmlns:a="http://schemas.openxmlformats.org/drawingml/2006/main">
+          <a:bodyPr wrap="square"/>
+          <a:p/>
+        </p:txBody>
       </p:sp>
       <p:sp>
         <p:nvSpPr>
@@ -13319,6 +13799,10 @@
             <a:prstDash val="solid"/>
           </a:ln>
         </p:spPr>
+        <p:txBody xmlns:a="http://schemas.openxmlformats.org/drawingml/2006/main">
+          <a:bodyPr wrap="square"/>
+          <a:p/>
+        </p:txBody>
       </p:sp>
       <p:sp>
         <p:nvSpPr>
@@ -13352,6 +13836,10 @@
             <a:prstDash val="solid"/>
           </a:ln>
         </p:spPr>
+        <p:txBody xmlns:a="http://schemas.openxmlformats.org/drawingml/2006/main">
+          <a:bodyPr wrap="square"/>
+          <a:p/>
+        </p:txBody>
       </p:sp>
       <p:sp>
         <p:nvSpPr>
@@ -13577,6 +14065,10 @@
             <a:prstDash val="solid"/>
           </a:ln>
         </p:spPr>
+        <p:txBody xmlns:a="http://schemas.openxmlformats.org/drawingml/2006/main">
+          <a:bodyPr wrap="square"/>
+          <a:p/>
+        </p:txBody>
       </p:sp>
       <p:sp>
         <p:nvSpPr>
@@ -13610,6 +14102,10 @@
             <a:prstDash val="solid"/>
           </a:ln>
         </p:spPr>
+        <p:txBody xmlns:a="http://schemas.openxmlformats.org/drawingml/2006/main">
+          <a:bodyPr wrap="square"/>
+          <a:p/>
+        </p:txBody>
       </p:sp>
       <p:sp>
         <p:nvSpPr>
@@ -13835,6 +14331,10 @@
             <a:prstDash val="solid"/>
           </a:ln>
         </p:spPr>
+        <p:txBody xmlns:a="http://schemas.openxmlformats.org/drawingml/2006/main">
+          <a:bodyPr/>
+          <a:p/>
+        </p:txBody>
       </p:sp>
       <p:sp>
         <p:nvSpPr>
@@ -13932,6 +14432,10 @@
             <a:prstDash val="solid"/>
           </a:ln>
         </p:spPr>
+        <p:txBody xmlns:a="http://schemas.openxmlformats.org/drawingml/2006/main">
+          <a:bodyPr/>
+          <a:p/>
+        </p:txBody>
       </p:sp>
       <p:sp>
         <p:nvSpPr>
@@ -14029,6 +14533,10 @@
             <a:prstDash val="solid"/>
           </a:ln>
         </p:spPr>
+        <p:txBody xmlns:a="http://schemas.openxmlformats.org/drawingml/2006/main">
+          <a:bodyPr/>
+          <a:p/>
+        </p:txBody>
       </p:sp>
       <p:sp>
         <p:nvSpPr>
@@ -14126,6 +14634,10 @@
             <a:prstDash val="solid"/>
           </a:ln>
         </p:spPr>
+        <p:txBody xmlns:a="http://schemas.openxmlformats.org/drawingml/2006/main">
+          <a:bodyPr/>
+          <a:p/>
+        </p:txBody>
       </p:sp>
       <p:sp>
         <p:nvSpPr>
@@ -14223,6 +14735,10 @@
             <a:prstDash val="solid"/>
           </a:ln>
         </p:spPr>
+        <p:txBody xmlns:a="http://schemas.openxmlformats.org/drawingml/2006/main">
+          <a:bodyPr/>
+          <a:p/>
+        </p:txBody>
       </p:sp>
       <p:sp>
         <p:nvSpPr>
@@ -14256,6 +14772,10 @@
             <a:prstDash val="solid"/>
           </a:ln>
         </p:spPr>
+        <p:txBody xmlns:a="http://schemas.openxmlformats.org/drawingml/2006/main">
+          <a:bodyPr/>
+          <a:p/>
+        </p:txBody>
       </p:sp>
       <p:sp>
         <p:nvSpPr>
@@ -14353,6 +14873,10 @@
             <a:prstDash val="solid"/>
           </a:ln>
         </p:spPr>
+        <p:txBody xmlns:a="http://schemas.openxmlformats.org/drawingml/2006/main">
+          <a:bodyPr/>
+          <a:p/>
+        </p:txBody>
       </p:sp>
       <p:sp>
         <p:nvSpPr>
@@ -14450,6 +14974,10 @@
             <a:prstDash val="solid"/>
           </a:ln>
         </p:spPr>
+        <p:txBody xmlns:a="http://schemas.openxmlformats.org/drawingml/2006/main">
+          <a:bodyPr/>
+          <a:p/>
+        </p:txBody>
       </p:sp>
       <p:sp>
         <p:nvSpPr>
@@ -14547,6 +15075,10 @@
             <a:prstDash val="solid"/>
           </a:ln>
         </p:spPr>
+        <p:txBody xmlns:a="http://schemas.openxmlformats.org/drawingml/2006/main">
+          <a:bodyPr/>
+          <a:p/>
+        </p:txBody>
       </p:sp>
       <p:sp>
         <p:nvSpPr>
@@ -14644,6 +15176,10 @@
             <a:prstDash val="solid"/>
           </a:ln>
         </p:spPr>
+        <p:txBody xmlns:a="http://schemas.openxmlformats.org/drawingml/2006/main">
+          <a:bodyPr/>
+          <a:p/>
+        </p:txBody>
       </p:sp>
       <p:sp>
         <p:nvSpPr>
@@ -14677,6 +15213,10 @@
             <a:prstDash val="solid"/>
           </a:ln>
         </p:spPr>
+        <p:txBody xmlns:a="http://schemas.openxmlformats.org/drawingml/2006/main">
+          <a:bodyPr/>
+          <a:p/>
+        </p:txBody>
       </p:sp>
       <p:sp>
         <p:nvSpPr>
@@ -14774,6 +15314,10 @@
             <a:prstDash val="solid"/>
           </a:ln>
         </p:spPr>
+        <p:txBody xmlns:a="http://schemas.openxmlformats.org/drawingml/2006/main">
+          <a:bodyPr/>
+          <a:p/>
+        </p:txBody>
       </p:sp>
       <p:sp>
         <p:nvSpPr>
@@ -14871,6 +15415,10 @@
             <a:prstDash val="solid"/>
           </a:ln>
         </p:spPr>
+        <p:txBody xmlns:a="http://schemas.openxmlformats.org/drawingml/2006/main">
+          <a:bodyPr/>
+          <a:p/>
+        </p:txBody>
       </p:sp>
       <p:sp>
         <p:nvSpPr>
@@ -14968,6 +15516,10 @@
             <a:prstDash val="solid"/>
           </a:ln>
         </p:spPr>
+        <p:txBody xmlns:a="http://schemas.openxmlformats.org/drawingml/2006/main">
+          <a:bodyPr/>
+          <a:p/>
+        </p:txBody>
       </p:sp>
       <p:sp>
         <p:nvSpPr>
@@ -15065,6 +15617,10 @@
             <a:prstDash val="solid"/>
           </a:ln>
         </p:spPr>
+        <p:txBody xmlns:a="http://schemas.openxmlformats.org/drawingml/2006/main">
+          <a:bodyPr/>
+          <a:p/>
+        </p:txBody>
       </p:sp>
       <p:sp>
         <p:nvSpPr>
@@ -15098,6 +15654,10 @@
             <a:prstDash val="solid"/>
           </a:ln>
         </p:spPr>
+        <p:txBody xmlns:a="http://schemas.openxmlformats.org/drawingml/2006/main">
+          <a:bodyPr/>
+          <a:p/>
+        </p:txBody>
       </p:sp>
       <p:sp>
         <p:nvSpPr>
@@ -15195,6 +15755,10 @@
             <a:prstDash val="solid"/>
           </a:ln>
         </p:spPr>
+        <p:txBody xmlns:a="http://schemas.openxmlformats.org/drawingml/2006/main">
+          <a:bodyPr/>
+          <a:p/>
+        </p:txBody>
       </p:sp>
       <p:sp>
         <p:nvSpPr>
@@ -15292,6 +15856,10 @@
             <a:prstDash val="solid"/>
           </a:ln>
         </p:spPr>
+        <p:txBody xmlns:a="http://schemas.openxmlformats.org/drawingml/2006/main">
+          <a:bodyPr/>
+          <a:p/>
+        </p:txBody>
       </p:sp>
       <p:sp>
         <p:nvSpPr>
@@ -15389,6 +15957,10 @@
             <a:prstDash val="solid"/>
           </a:ln>
         </p:spPr>
+        <p:txBody xmlns:a="http://schemas.openxmlformats.org/drawingml/2006/main">
+          <a:bodyPr/>
+          <a:p/>
+        </p:txBody>
       </p:sp>
       <p:sp>
         <p:nvSpPr>
@@ -15486,6 +16058,10 @@
             <a:prstDash val="solid"/>
           </a:ln>
         </p:spPr>
+        <p:txBody xmlns:a="http://schemas.openxmlformats.org/drawingml/2006/main">
+          <a:bodyPr/>
+          <a:p/>
+        </p:txBody>
       </p:sp>
       <p:sp>
         <p:nvSpPr>
@@ -15775,6 +16351,10 @@
             <a:prstDash val="solid"/>
           </a:ln>
         </p:spPr>
+        <p:txBody xmlns:a="http://schemas.openxmlformats.org/drawingml/2006/main">
+          <a:bodyPr/>
+          <a:p/>
+        </p:txBody>
       </p:sp>
     </p:spTree>
     <p:extLst>
@@ -15830,6 +16410,10 @@
             <a:prstDash val="solid"/>
           </a:ln>
         </p:spPr>
+        <p:txBody xmlns:a="http://schemas.openxmlformats.org/drawingml/2006/main">
+          <a:bodyPr wrap="square"/>
+          <a:p/>
+        </p:txBody>
       </p:sp>
       <p:sp>
         <p:nvSpPr>
@@ -15865,6 +16449,10 @@
             <a:prstDash val="solid"/>
           </a:ln>
         </p:spPr>
+        <p:txBody xmlns:a="http://schemas.openxmlformats.org/drawingml/2006/main">
+          <a:bodyPr wrap="square"/>
+          <a:p/>
+        </p:txBody>
       </p:sp>
       <p:sp>
         <p:nvSpPr>
@@ -15900,6 +16488,10 @@
             <a:prstDash val="solid"/>
           </a:ln>
         </p:spPr>
+        <p:txBody xmlns:a="http://schemas.openxmlformats.org/drawingml/2006/main">
+          <a:bodyPr wrap="square"/>
+          <a:p/>
+        </p:txBody>
       </p:sp>
       <p:sp>
         <p:nvSpPr>
@@ -15935,6 +16527,10 @@
             <a:prstDash val="solid"/>
           </a:ln>
         </p:spPr>
+        <p:txBody xmlns:a="http://schemas.openxmlformats.org/drawingml/2006/main">
+          <a:bodyPr wrap="square"/>
+          <a:p/>
+        </p:txBody>
       </p:sp>
       <p:sp>
         <p:nvSpPr>
@@ -15970,6 +16566,10 @@
             <a:prstDash val="solid"/>
           </a:ln>
         </p:spPr>
+        <p:txBody xmlns:a="http://schemas.openxmlformats.org/drawingml/2006/main">
+          <a:bodyPr wrap="square"/>
+          <a:p/>
+        </p:txBody>
       </p:sp>
       <p:sp>
         <p:nvSpPr>
@@ -16072,7 +16672,7 @@
           </a:ln>
         </p:spPr>
         <p:txBody>
-          <a:bodyPr xmlns:a="http://schemas.openxmlformats.org/drawingml/2006/main" lIns="0" tIns="0" rIns="0" bIns="0" anchor="t"/>
+          <a:bodyPr xmlns:a="http://schemas.openxmlformats.org/drawingml/2006/main" lIns="0" tIns="0" rIns="0" bIns="0" anchor="t" wrap="square"/>
           <a:lstStyle xmlns:a="http://schemas.openxmlformats.org/drawingml/2006/main"/>
           <a:p xmlns:a="http://schemas.openxmlformats.org/drawingml/2006/main">
             <a:pPr algn="l">
@@ -16195,6 +16795,10 @@
             <a:prstDash val="solid"/>
           </a:ln>
         </p:spPr>
+        <p:txBody xmlns:a="http://schemas.openxmlformats.org/drawingml/2006/main">
+          <a:bodyPr wrap="square"/>
+          <a:p/>
+        </p:txBody>
       </p:sp>
       <p:sp>
         <p:nvSpPr>
@@ -16228,6 +16832,10 @@
             <a:prstDash val="solid"/>
           </a:ln>
         </p:spPr>
+        <p:txBody xmlns:a="http://schemas.openxmlformats.org/drawingml/2006/main">
+          <a:bodyPr wrap="square"/>
+          <a:p/>
+        </p:txBody>
       </p:sp>
       <p:sp>
         <p:nvSpPr>
@@ -16389,6 +16997,10 @@
             <a:prstDash val="solid"/>
           </a:ln>
         </p:spPr>
+        <p:txBody xmlns:a="http://schemas.openxmlformats.org/drawingml/2006/main">
+          <a:bodyPr wrap="square"/>
+          <a:p/>
+        </p:txBody>
       </p:sp>
       <p:sp>
         <p:nvSpPr>
@@ -16422,6 +17034,10 @@
             <a:prstDash val="solid"/>
           </a:ln>
         </p:spPr>
+        <p:txBody xmlns:a="http://schemas.openxmlformats.org/drawingml/2006/main">
+          <a:bodyPr wrap="square"/>
+          <a:p/>
+        </p:txBody>
       </p:sp>
       <p:sp>
         <p:nvSpPr>
@@ -16583,6 +17199,10 @@
             <a:prstDash val="solid"/>
           </a:ln>
         </p:spPr>
+        <p:txBody xmlns:a="http://schemas.openxmlformats.org/drawingml/2006/main">
+          <a:bodyPr wrap="square"/>
+          <a:p/>
+        </p:txBody>
       </p:sp>
       <p:sp>
         <p:nvSpPr>
@@ -16616,6 +17236,10 @@
             <a:prstDash val="solid"/>
           </a:ln>
         </p:spPr>
+        <p:txBody xmlns:a="http://schemas.openxmlformats.org/drawingml/2006/main">
+          <a:bodyPr wrap="square"/>
+          <a:p/>
+        </p:txBody>
       </p:sp>
       <p:sp>
         <p:nvSpPr>
@@ -16777,6 +17401,10 @@
             <a:prstDash val="solid"/>
           </a:ln>
         </p:spPr>
+        <p:txBody xmlns:a="http://schemas.openxmlformats.org/drawingml/2006/main">
+          <a:bodyPr wrap="square"/>
+          <a:p/>
+        </p:txBody>
       </p:sp>
       <p:sp>
         <p:nvSpPr>
@@ -16810,6 +17438,10 @@
             <a:prstDash val="solid"/>
           </a:ln>
         </p:spPr>
+        <p:txBody xmlns:a="http://schemas.openxmlformats.org/drawingml/2006/main">
+          <a:bodyPr wrap="square"/>
+          <a:p/>
+        </p:txBody>
       </p:sp>
       <p:sp>
         <p:nvSpPr>
@@ -17163,6 +17795,10 @@
             <a:prstDash val="solid"/>
           </a:ln>
         </p:spPr>
+        <p:txBody xmlns:a="http://schemas.openxmlformats.org/drawingml/2006/main">
+          <a:bodyPr/>
+          <a:p/>
+        </p:txBody>
       </p:sp>
     </p:spTree>
     <p:extLst>
@@ -17218,6 +17854,10 @@
             <a:prstDash val="solid"/>
           </a:ln>
         </p:spPr>
+        <p:txBody xmlns:a="http://schemas.openxmlformats.org/drawingml/2006/main">
+          <a:bodyPr wrap="square"/>
+          <a:p/>
+        </p:txBody>
       </p:sp>
       <p:sp>
         <p:nvSpPr>
@@ -17253,6 +17893,10 @@
             <a:prstDash val="solid"/>
           </a:ln>
         </p:spPr>
+        <p:txBody xmlns:a="http://schemas.openxmlformats.org/drawingml/2006/main">
+          <a:bodyPr wrap="square"/>
+          <a:p/>
+        </p:txBody>
       </p:sp>
       <p:sp>
         <p:nvSpPr>
@@ -17288,6 +17932,10 @@
             <a:prstDash val="solid"/>
           </a:ln>
         </p:spPr>
+        <p:txBody xmlns:a="http://schemas.openxmlformats.org/drawingml/2006/main">
+          <a:bodyPr wrap="square"/>
+          <a:p/>
+        </p:txBody>
       </p:sp>
       <p:sp>
         <p:nvSpPr>
@@ -17323,6 +17971,10 @@
             <a:prstDash val="solid"/>
           </a:ln>
         </p:spPr>
+        <p:txBody xmlns:a="http://schemas.openxmlformats.org/drawingml/2006/main">
+          <a:bodyPr wrap="square"/>
+          <a:p/>
+        </p:txBody>
       </p:sp>
       <p:sp>
         <p:nvSpPr>
@@ -17358,6 +18010,10 @@
             <a:prstDash val="solid"/>
           </a:ln>
         </p:spPr>
+        <p:txBody xmlns:a="http://schemas.openxmlformats.org/drawingml/2006/main">
+          <a:bodyPr wrap="square"/>
+          <a:p/>
+        </p:txBody>
       </p:sp>
       <p:sp>
         <p:nvSpPr>
@@ -17460,7 +18116,7 @@
           </a:ln>
         </p:spPr>
         <p:txBody>
-          <a:bodyPr xmlns:a="http://schemas.openxmlformats.org/drawingml/2006/main" lIns="0" tIns="0" rIns="0" bIns="0" anchor="t"/>
+          <a:bodyPr xmlns:a="http://schemas.openxmlformats.org/drawingml/2006/main" lIns="0" tIns="0" rIns="0" bIns="0" anchor="t" wrap="square"/>
           <a:lstStyle xmlns:a="http://schemas.openxmlformats.org/drawingml/2006/main"/>
           <a:p xmlns:a="http://schemas.openxmlformats.org/drawingml/2006/main">
             <a:pPr algn="l">
@@ -17583,6 +18239,10 @@
             <a:prstDash val="solid"/>
           </a:ln>
         </p:spPr>
+        <p:txBody xmlns:a="http://schemas.openxmlformats.org/drawingml/2006/main">
+          <a:bodyPr wrap="square"/>
+          <a:p/>
+        </p:txBody>
       </p:sp>
       <p:sp>
         <p:nvSpPr>
@@ -17616,6 +18276,10 @@
             <a:prstDash val="solid"/>
           </a:ln>
         </p:spPr>
+        <p:txBody xmlns:a="http://schemas.openxmlformats.org/drawingml/2006/main">
+          <a:bodyPr wrap="square"/>
+          <a:p/>
+        </p:txBody>
       </p:sp>
       <p:sp>
         <p:nvSpPr>
@@ -17718,7 +18382,7 @@
           </a:ln>
         </p:spPr>
         <p:txBody>
-          <a:bodyPr xmlns:a="http://schemas.openxmlformats.org/drawingml/2006/main" lIns="0" tIns="0" rIns="0" bIns="0" anchor="t"/>
+          <a:bodyPr xmlns:a="http://schemas.openxmlformats.org/drawingml/2006/main" lIns="0" tIns="0" rIns="0" bIns="0" anchor="t" wrap="square"/>
           <a:lstStyle xmlns:a="http://schemas.openxmlformats.org/drawingml/2006/main"/>
           <a:p xmlns:a="http://schemas.openxmlformats.org/drawingml/2006/main">
             <a:pPr algn="l">
@@ -17869,6 +18533,10 @@
             <a:prstDash val="solid"/>
           </a:ln>
         </p:spPr>
+        <p:txBody xmlns:a="http://schemas.openxmlformats.org/drawingml/2006/main">
+          <a:bodyPr wrap="square"/>
+          <a:p/>
+        </p:txBody>
       </p:sp>
       <p:sp>
         <p:nvSpPr>
@@ -17902,6 +18570,10 @@
             <a:prstDash val="solid"/>
           </a:ln>
         </p:spPr>
+        <p:txBody xmlns:a="http://schemas.openxmlformats.org/drawingml/2006/main">
+          <a:bodyPr wrap="square"/>
+          <a:p/>
+        </p:txBody>
       </p:sp>
       <p:sp>
         <p:nvSpPr>
@@ -18004,7 +18676,7 @@
           </a:ln>
         </p:spPr>
         <p:txBody>
-          <a:bodyPr xmlns:a="http://schemas.openxmlformats.org/drawingml/2006/main" lIns="0" tIns="0" rIns="0" bIns="0" anchor="t"/>
+          <a:bodyPr xmlns:a="http://schemas.openxmlformats.org/drawingml/2006/main" lIns="0" tIns="0" rIns="0" bIns="0" anchor="t" wrap="square"/>
           <a:lstStyle xmlns:a="http://schemas.openxmlformats.org/drawingml/2006/main"/>
           <a:p xmlns:a="http://schemas.openxmlformats.org/drawingml/2006/main">
             <a:pPr algn="l">
@@ -18347,6 +19019,10 @@
             <a:prstDash val="solid"/>
           </a:ln>
         </p:spPr>
+        <p:txBody xmlns:a="http://schemas.openxmlformats.org/drawingml/2006/main">
+          <a:bodyPr/>
+          <a:p/>
+        </p:txBody>
       </p:sp>
     </p:spTree>
     <p:extLst>
@@ -18402,6 +19078,10 @@
             <a:prstDash val="solid"/>
           </a:ln>
         </p:spPr>
+        <p:txBody xmlns:a="http://schemas.openxmlformats.org/drawingml/2006/main">
+          <a:bodyPr wrap="square"/>
+          <a:p/>
+        </p:txBody>
       </p:sp>
       <p:sp>
         <p:nvSpPr>
@@ -18437,6 +19117,10 @@
             <a:prstDash val="solid"/>
           </a:ln>
         </p:spPr>
+        <p:txBody xmlns:a="http://schemas.openxmlformats.org/drawingml/2006/main">
+          <a:bodyPr wrap="square"/>
+          <a:p/>
+        </p:txBody>
       </p:sp>
       <p:sp>
         <p:nvSpPr>
@@ -18472,6 +19156,10 @@
             <a:prstDash val="solid"/>
           </a:ln>
         </p:spPr>
+        <p:txBody xmlns:a="http://schemas.openxmlformats.org/drawingml/2006/main">
+          <a:bodyPr wrap="square"/>
+          <a:p/>
+        </p:txBody>
       </p:sp>
       <p:sp>
         <p:nvSpPr>
@@ -18507,6 +19195,10 @@
             <a:prstDash val="solid"/>
           </a:ln>
         </p:spPr>
+        <p:txBody xmlns:a="http://schemas.openxmlformats.org/drawingml/2006/main">
+          <a:bodyPr wrap="square"/>
+          <a:p/>
+        </p:txBody>
       </p:sp>
       <p:sp>
         <p:nvSpPr>
@@ -18542,6 +19234,10 @@
             <a:prstDash val="solid"/>
           </a:ln>
         </p:spPr>
+        <p:txBody xmlns:a="http://schemas.openxmlformats.org/drawingml/2006/main">
+          <a:bodyPr wrap="square"/>
+          <a:p/>
+        </p:txBody>
       </p:sp>
       <p:sp>
         <p:nvSpPr>
@@ -18644,7 +19340,7 @@
           </a:ln>
         </p:spPr>
         <p:txBody>
-          <a:bodyPr xmlns:a="http://schemas.openxmlformats.org/drawingml/2006/main" lIns="0" tIns="0" rIns="0" bIns="0" anchor="t"/>
+          <a:bodyPr xmlns:a="http://schemas.openxmlformats.org/drawingml/2006/main" lIns="0" tIns="0" rIns="0" bIns="0" anchor="t" wrap="square"/>
           <a:lstStyle xmlns:a="http://schemas.openxmlformats.org/drawingml/2006/main"/>
           <a:p xmlns:a="http://schemas.openxmlformats.org/drawingml/2006/main">
             <a:pPr algn="l">
@@ -18767,6 +19463,10 @@
             <a:prstDash val="solid"/>
           </a:ln>
         </p:spPr>
+        <p:txBody xmlns:a="http://schemas.openxmlformats.org/drawingml/2006/main">
+          <a:bodyPr wrap="square"/>
+          <a:p/>
+        </p:txBody>
       </p:sp>
       <p:sp>
         <p:nvSpPr>
@@ -18800,6 +19500,10 @@
             <a:prstDash val="solid"/>
           </a:ln>
         </p:spPr>
+        <p:txBody xmlns:a="http://schemas.openxmlformats.org/drawingml/2006/main">
+          <a:bodyPr wrap="square"/>
+          <a:p/>
+        </p:txBody>
       </p:sp>
       <p:sp>
         <p:nvSpPr>
@@ -18902,7 +19606,7 @@
           </a:ln>
         </p:spPr>
         <p:txBody>
-          <a:bodyPr xmlns:a="http://schemas.openxmlformats.org/drawingml/2006/main" lIns="0" tIns="0" rIns="0" bIns="0" anchor="t"/>
+          <a:bodyPr xmlns:a="http://schemas.openxmlformats.org/drawingml/2006/main" lIns="0" tIns="0" rIns="0" bIns="0" anchor="t" wrap="square"/>
           <a:lstStyle xmlns:a="http://schemas.openxmlformats.org/drawingml/2006/main"/>
           <a:p xmlns:a="http://schemas.openxmlformats.org/drawingml/2006/main">
             <a:pPr algn="l">
@@ -19053,6 +19757,10 @@
             <a:prstDash val="solid"/>
           </a:ln>
         </p:spPr>
+        <p:txBody xmlns:a="http://schemas.openxmlformats.org/drawingml/2006/main">
+          <a:bodyPr wrap="square"/>
+          <a:p/>
+        </p:txBody>
       </p:sp>
       <p:sp>
         <p:nvSpPr>
@@ -19086,6 +19794,10 @@
             <a:prstDash val="solid"/>
           </a:ln>
         </p:spPr>
+        <p:txBody xmlns:a="http://schemas.openxmlformats.org/drawingml/2006/main">
+          <a:bodyPr wrap="square"/>
+          <a:p/>
+        </p:txBody>
       </p:sp>
       <p:sp>
         <p:nvSpPr>
@@ -19188,7 +19900,7 @@
           </a:ln>
         </p:spPr>
         <p:txBody>
-          <a:bodyPr xmlns:a="http://schemas.openxmlformats.org/drawingml/2006/main" lIns="0" tIns="0" rIns="0" bIns="0" anchor="t"/>
+          <a:bodyPr xmlns:a="http://schemas.openxmlformats.org/drawingml/2006/main" lIns="0" tIns="0" rIns="0" bIns="0" anchor="t" wrap="square"/>
           <a:lstStyle xmlns:a="http://schemas.openxmlformats.org/drawingml/2006/main"/>
           <a:p xmlns:a="http://schemas.openxmlformats.org/drawingml/2006/main">
             <a:pPr algn="l">
@@ -19531,6 +20243,10 @@
             <a:prstDash val="solid"/>
           </a:ln>
         </p:spPr>
+        <p:txBody xmlns:a="http://schemas.openxmlformats.org/drawingml/2006/main">
+          <a:bodyPr/>
+          <a:p/>
+        </p:txBody>
       </p:sp>
     </p:spTree>
     <p:extLst>
